--- a/docs/slides/Modulo 4/dia_2.pptx
+++ b/docs/slides/Modulo 4/dia_2.pptx
@@ -325,7 +325,7 @@
           <a:p>
             <a:fld id="{5BCAD085-E8A6-8845-BD4E-CB4CCA059FC4}" type="datetimeFigureOut">
               <a:rPr lang="en-US" smtClean="0"/>
-              <a:t>4/13/2026</a:t>
+              <a:t>4/16/2026</a:t>
             </a:fld>
             <a:endParaRPr lang="en-US"/>
           </a:p>
@@ -493,7 +493,7 @@
           <a:p>
             <a:fld id="{5BCAD085-E8A6-8845-BD4E-CB4CCA059FC4}" type="datetimeFigureOut">
               <a:rPr lang="en-US" smtClean="0"/>
-              <a:t>4/13/2026</a:t>
+              <a:t>4/16/2026</a:t>
             </a:fld>
             <a:endParaRPr lang="en-US"/>
           </a:p>
@@ -671,7 +671,7 @@
           <a:p>
             <a:fld id="{5BCAD085-E8A6-8845-BD4E-CB4CCA059FC4}" type="datetimeFigureOut">
               <a:rPr lang="en-US" smtClean="0"/>
-              <a:t>4/13/2026</a:t>
+              <a:t>4/16/2026</a:t>
             </a:fld>
             <a:endParaRPr lang="en-US"/>
           </a:p>
@@ -839,7 +839,7 @@
           <a:p>
             <a:fld id="{5BCAD085-E8A6-8845-BD4E-CB4CCA059FC4}" type="datetimeFigureOut">
               <a:rPr lang="en-US" smtClean="0"/>
-              <a:t>4/13/2026</a:t>
+              <a:t>4/16/2026</a:t>
             </a:fld>
             <a:endParaRPr lang="en-US"/>
           </a:p>
@@ -1084,7 +1084,7 @@
           <a:p>
             <a:fld id="{5BCAD085-E8A6-8845-BD4E-CB4CCA059FC4}" type="datetimeFigureOut">
               <a:rPr lang="en-US" smtClean="0"/>
-              <a:t>4/13/2026</a:t>
+              <a:t>4/16/2026</a:t>
             </a:fld>
             <a:endParaRPr lang="en-US"/>
           </a:p>
@@ -1369,7 +1369,7 @@
           <a:p>
             <a:fld id="{5BCAD085-E8A6-8845-BD4E-CB4CCA059FC4}" type="datetimeFigureOut">
               <a:rPr lang="en-US" smtClean="0"/>
-              <a:t>4/13/2026</a:t>
+              <a:t>4/16/2026</a:t>
             </a:fld>
             <a:endParaRPr lang="en-US"/>
           </a:p>
@@ -1788,7 +1788,7 @@
           <a:p>
             <a:fld id="{5BCAD085-E8A6-8845-BD4E-CB4CCA059FC4}" type="datetimeFigureOut">
               <a:rPr lang="en-US" smtClean="0"/>
-              <a:t>4/13/2026</a:t>
+              <a:t>4/16/2026</a:t>
             </a:fld>
             <a:endParaRPr lang="en-US"/>
           </a:p>
@@ -1905,7 +1905,7 @@
           <a:p>
             <a:fld id="{5BCAD085-E8A6-8845-BD4E-CB4CCA059FC4}" type="datetimeFigureOut">
               <a:rPr lang="en-US" smtClean="0"/>
-              <a:t>4/13/2026</a:t>
+              <a:t>4/16/2026</a:t>
             </a:fld>
             <a:endParaRPr lang="en-US"/>
           </a:p>
@@ -2000,7 +2000,7 @@
           <a:p>
             <a:fld id="{5BCAD085-E8A6-8845-BD4E-CB4CCA059FC4}" type="datetimeFigureOut">
               <a:rPr lang="en-US" smtClean="0"/>
-              <a:t>4/13/2026</a:t>
+              <a:t>4/16/2026</a:t>
             </a:fld>
             <a:endParaRPr lang="en-US"/>
           </a:p>
@@ -2275,7 +2275,7 @@
           <a:p>
             <a:fld id="{5BCAD085-E8A6-8845-BD4E-CB4CCA059FC4}" type="datetimeFigureOut">
               <a:rPr lang="en-US" smtClean="0"/>
-              <a:t>4/13/2026</a:t>
+              <a:t>4/16/2026</a:t>
             </a:fld>
             <a:endParaRPr lang="en-US"/>
           </a:p>
@@ -2527,7 +2527,7 @@
           <a:p>
             <a:fld id="{5BCAD085-E8A6-8845-BD4E-CB4CCA059FC4}" type="datetimeFigureOut">
               <a:rPr lang="en-US" smtClean="0"/>
-              <a:t>4/13/2026</a:t>
+              <a:t>4/16/2026</a:t>
             </a:fld>
             <a:endParaRPr lang="en-US"/>
           </a:p>
@@ -2738,7 +2738,7 @@
           <a:p>
             <a:fld id="{5BCAD085-E8A6-8845-BD4E-CB4CCA059FC4}" type="datetimeFigureOut">
               <a:rPr lang="en-US" smtClean="0"/>
-              <a:t>4/13/2026</a:t>
+              <a:t>4/16/2026</a:t>
             </a:fld>
             <a:endParaRPr lang="en-US"/>
           </a:p>
@@ -7501,94 +7501,916 @@
           <a:bodyPr wrap="square"/>
           <a:lstStyle/>
           <a:p>
-            <a:br/>
-            <a:r>
-              <a:t>// Delete: borrado logico (cambiar status) vs fisico (DelState)</a:t>
-            </a:r>
-            <a:br/>
-            <a:r>
-              <a:t>func (s *SmartContract) DeactivateProperty(ctx contractapi.TransactionContextInterface,</a:t>
-            </a:r>
-            <a:br/>
-            <a:r>
+            <a:br>
+              <a:rPr sz="1200" dirty="0">
+                <a:solidFill>
+                  <a:schemeClr val="bg1"/>
+                </a:solidFill>
+              </a:rPr>
+            </a:br>
+            <a:r>
+              <a:rPr sz="1200" dirty="0">
+                <a:solidFill>
+                  <a:schemeClr val="bg1"/>
+                </a:solidFill>
+              </a:rPr>
+              <a:t>// Delete: </a:t>
+            </a:r>
+            <a:r>
+              <a:rPr sz="1200" dirty="0" err="1">
+                <a:solidFill>
+                  <a:schemeClr val="bg1"/>
+                </a:solidFill>
+              </a:rPr>
+              <a:t>borrado</a:t>
+            </a:r>
+            <a:r>
+              <a:rPr sz="1200" dirty="0">
+                <a:solidFill>
+                  <a:schemeClr val="bg1"/>
+                </a:solidFill>
+              </a:rPr>
+              <a:t> </a:t>
+            </a:r>
+            <a:r>
+              <a:rPr sz="1200" dirty="0" err="1">
+                <a:solidFill>
+                  <a:schemeClr val="bg1"/>
+                </a:solidFill>
+              </a:rPr>
+              <a:t>logico</a:t>
+            </a:r>
+            <a:r>
+              <a:rPr sz="1200" dirty="0">
+                <a:solidFill>
+                  <a:schemeClr val="bg1"/>
+                </a:solidFill>
+              </a:rPr>
+              <a:t> (</a:t>
+            </a:r>
+            <a:r>
+              <a:rPr sz="1200" dirty="0" err="1">
+                <a:solidFill>
+                  <a:schemeClr val="bg1"/>
+                </a:solidFill>
+              </a:rPr>
+              <a:t>cambiar</a:t>
+            </a:r>
+            <a:r>
+              <a:rPr sz="1200" dirty="0">
+                <a:solidFill>
+                  <a:schemeClr val="bg1"/>
+                </a:solidFill>
+              </a:rPr>
+              <a:t> status) vs </a:t>
+            </a:r>
+            <a:r>
+              <a:rPr sz="1200" dirty="0" err="1">
+                <a:solidFill>
+                  <a:schemeClr val="bg1"/>
+                </a:solidFill>
+              </a:rPr>
+              <a:t>fisico</a:t>
+            </a:r>
+            <a:r>
+              <a:rPr sz="1200" dirty="0">
+                <a:solidFill>
+                  <a:schemeClr val="bg1"/>
+                </a:solidFill>
+              </a:rPr>
+              <a:t> (</a:t>
+            </a:r>
+            <a:r>
+              <a:rPr sz="1200" dirty="0" err="1">
+                <a:solidFill>
+                  <a:schemeClr val="bg1"/>
+                </a:solidFill>
+              </a:rPr>
+              <a:t>DelState</a:t>
+            </a:r>
+            <a:r>
+              <a:rPr sz="1200" dirty="0">
+                <a:solidFill>
+                  <a:schemeClr val="bg1"/>
+                </a:solidFill>
+              </a:rPr>
+              <a:t>)</a:t>
+            </a:r>
+            <a:br>
+              <a:rPr sz="1200" dirty="0">
+                <a:solidFill>
+                  <a:schemeClr val="bg1"/>
+                </a:solidFill>
+              </a:rPr>
+            </a:br>
+            <a:r>
+              <a:rPr sz="1200" dirty="0" err="1">
+                <a:solidFill>
+                  <a:schemeClr val="bg1"/>
+                </a:solidFill>
+              </a:rPr>
+              <a:t>func</a:t>
+            </a:r>
+            <a:r>
+              <a:rPr sz="1200" dirty="0">
+                <a:solidFill>
+                  <a:schemeClr val="bg1"/>
+                </a:solidFill>
+              </a:rPr>
+              <a:t> (s *</a:t>
+            </a:r>
+            <a:r>
+              <a:rPr sz="1200" dirty="0" err="1">
+                <a:solidFill>
+                  <a:schemeClr val="bg1"/>
+                </a:solidFill>
+              </a:rPr>
+              <a:t>SmartContract</a:t>
+            </a:r>
+            <a:r>
+              <a:rPr sz="1200" dirty="0">
+                <a:solidFill>
+                  <a:schemeClr val="bg1"/>
+                </a:solidFill>
+              </a:rPr>
+              <a:t>) </a:t>
+            </a:r>
+            <a:r>
+              <a:rPr sz="1200" dirty="0" err="1">
+                <a:solidFill>
+                  <a:schemeClr val="bg1"/>
+                </a:solidFill>
+              </a:rPr>
+              <a:t>DeactivateProperty</a:t>
+            </a:r>
+            <a:r>
+              <a:rPr sz="1200" dirty="0">
+                <a:solidFill>
+                  <a:schemeClr val="bg1"/>
+                </a:solidFill>
+              </a:rPr>
+              <a:t>(</a:t>
+            </a:r>
+            <a:r>
+              <a:rPr sz="1200" dirty="0" err="1">
+                <a:solidFill>
+                  <a:schemeClr val="bg1"/>
+                </a:solidFill>
+              </a:rPr>
+              <a:t>ctx</a:t>
+            </a:r>
+            <a:r>
+              <a:rPr sz="1200" dirty="0">
+                <a:solidFill>
+                  <a:schemeClr val="bg1"/>
+                </a:solidFill>
+              </a:rPr>
+              <a:t> </a:t>
+            </a:r>
+            <a:r>
+              <a:rPr sz="1200" dirty="0" err="1">
+                <a:solidFill>
+                  <a:schemeClr val="bg1"/>
+                </a:solidFill>
+              </a:rPr>
+              <a:t>contractapi.TransactionContextInterface</a:t>
+            </a:r>
+            <a:r>
+              <a:rPr sz="1200" dirty="0">
+                <a:solidFill>
+                  <a:schemeClr val="bg1"/>
+                </a:solidFill>
+              </a:rPr>
+              <a:t>,</a:t>
+            </a:r>
+            <a:br>
+              <a:rPr sz="1200" dirty="0">
+                <a:solidFill>
+                  <a:schemeClr val="bg1"/>
+                </a:solidFill>
+              </a:rPr>
+            </a:br>
+            <a:r>
+              <a:rPr sz="1200" dirty="0">
+                <a:solidFill>
+                  <a:schemeClr val="bg1"/>
+                </a:solidFill>
+              </a:rPr>
               <a:t>    id string) error {</a:t>
             </a:r>
-            <a:br/>
-            <a:r>
-              <a:t>    property, err := s.ReadProperty(ctx, id)</a:t>
-            </a:r>
-            <a:br/>
-            <a:r>
+            <a:br>
+              <a:rPr sz="1200" dirty="0">
+                <a:solidFill>
+                  <a:schemeClr val="bg1"/>
+                </a:solidFill>
+              </a:rPr>
+            </a:br>
+            <a:r>
+              <a:rPr sz="1200" dirty="0">
+                <a:solidFill>
+                  <a:schemeClr val="bg1"/>
+                </a:solidFill>
+              </a:rPr>
+              <a:t>    property, err := </a:t>
+            </a:r>
+            <a:r>
+              <a:rPr sz="1200" dirty="0" err="1">
+                <a:solidFill>
+                  <a:schemeClr val="bg1"/>
+                </a:solidFill>
+              </a:rPr>
+              <a:t>s.ReadProperty</a:t>
+            </a:r>
+            <a:r>
+              <a:rPr sz="1200" dirty="0">
+                <a:solidFill>
+                  <a:schemeClr val="bg1"/>
+                </a:solidFill>
+              </a:rPr>
+              <a:t>(</a:t>
+            </a:r>
+            <a:r>
+              <a:rPr sz="1200" dirty="0" err="1">
+                <a:solidFill>
+                  <a:schemeClr val="bg1"/>
+                </a:solidFill>
+              </a:rPr>
+              <a:t>ctx</a:t>
+            </a:r>
+            <a:r>
+              <a:rPr sz="1200" dirty="0">
+                <a:solidFill>
+                  <a:schemeClr val="bg1"/>
+                </a:solidFill>
+              </a:rPr>
+              <a:t>, id)</a:t>
+            </a:r>
+            <a:br>
+              <a:rPr sz="1200" dirty="0">
+                <a:solidFill>
+                  <a:schemeClr val="bg1"/>
+                </a:solidFill>
+              </a:rPr>
+            </a:br>
+            <a:r>
+              <a:rPr sz="1200" dirty="0">
+                <a:solidFill>
+                  <a:schemeClr val="bg1"/>
+                </a:solidFill>
+              </a:rPr>
               <a:t>    if err != nil {</a:t>
             </a:r>
-            <a:br/>
-            <a:r>
+            <a:br>
+              <a:rPr sz="1200" dirty="0">
+                <a:solidFill>
+                  <a:schemeClr val="bg1"/>
+                </a:solidFill>
+              </a:rPr>
+            </a:br>
+            <a:r>
+              <a:rPr sz="1200" dirty="0">
+                <a:solidFill>
+                  <a:schemeClr val="bg1"/>
+                </a:solidFill>
+              </a:rPr>
               <a:t>        return err</a:t>
             </a:r>
-            <a:br/>
-            <a:r>
+            <a:br>
+              <a:rPr sz="1200" dirty="0">
+                <a:solidFill>
+                  <a:schemeClr val="bg1"/>
+                </a:solidFill>
+              </a:rPr>
+            </a:br>
+            <a:r>
+              <a:rPr sz="1200" dirty="0">
+                <a:solidFill>
+                  <a:schemeClr val="bg1"/>
+                </a:solidFill>
+              </a:rPr>
               <a:t>    }</a:t>
             </a:r>
-            <a:br/>
-            <a:r>
-              <a:t>    property.Status = "inactive"  // borrado logico: mantiene historial</a:t>
-            </a:r>
-            <a:br/>
-            <a:r>
-              <a:t>    propertyJSON, _ := json.Marshal(property)</a:t>
-            </a:r>
-            <a:br/>
-            <a:r>
-              <a:t>    return ctx.GetStub().PutState(id, propertyJSON)</a:t>
-            </a:r>
-            <a:br/>
-            <a:r>
+            <a:br>
+              <a:rPr sz="1200" dirty="0">
+                <a:solidFill>
+                  <a:schemeClr val="bg1"/>
+                </a:solidFill>
+              </a:rPr>
+            </a:br>
+            <a:r>
+              <a:rPr sz="1200" dirty="0">
+                <a:solidFill>
+                  <a:schemeClr val="bg1"/>
+                </a:solidFill>
+              </a:rPr>
+              <a:t>    </a:t>
+            </a:r>
+            <a:r>
+              <a:rPr sz="1200" dirty="0" err="1">
+                <a:solidFill>
+                  <a:schemeClr val="bg1"/>
+                </a:solidFill>
+              </a:rPr>
+              <a:t>property.Status</a:t>
+            </a:r>
+            <a:r>
+              <a:rPr sz="1200" dirty="0">
+                <a:solidFill>
+                  <a:schemeClr val="bg1"/>
+                </a:solidFill>
+              </a:rPr>
+              <a:t> = "inactive"  // </a:t>
+            </a:r>
+            <a:r>
+              <a:rPr sz="1200" dirty="0" err="1">
+                <a:solidFill>
+                  <a:schemeClr val="bg1"/>
+                </a:solidFill>
+              </a:rPr>
+              <a:t>borrado</a:t>
+            </a:r>
+            <a:r>
+              <a:rPr sz="1200" dirty="0">
+                <a:solidFill>
+                  <a:schemeClr val="bg1"/>
+                </a:solidFill>
+              </a:rPr>
+              <a:t> </a:t>
+            </a:r>
+            <a:r>
+              <a:rPr sz="1200" dirty="0" err="1">
+                <a:solidFill>
+                  <a:schemeClr val="bg1"/>
+                </a:solidFill>
+              </a:rPr>
+              <a:t>logico</a:t>
+            </a:r>
+            <a:r>
+              <a:rPr sz="1200" dirty="0">
+                <a:solidFill>
+                  <a:schemeClr val="bg1"/>
+                </a:solidFill>
+              </a:rPr>
+              <a:t>: </a:t>
+            </a:r>
+            <a:r>
+              <a:rPr sz="1200" dirty="0" err="1">
+                <a:solidFill>
+                  <a:schemeClr val="bg1"/>
+                </a:solidFill>
+              </a:rPr>
+              <a:t>mantiene</a:t>
+            </a:r>
+            <a:r>
+              <a:rPr sz="1200" dirty="0">
+                <a:solidFill>
+                  <a:schemeClr val="bg1"/>
+                </a:solidFill>
+              </a:rPr>
+              <a:t> </a:t>
+            </a:r>
+            <a:r>
+              <a:rPr sz="1200" dirty="0" err="1">
+                <a:solidFill>
+                  <a:schemeClr val="bg1"/>
+                </a:solidFill>
+              </a:rPr>
+              <a:t>historial</a:t>
+            </a:r>
+            <a:br>
+              <a:rPr sz="1200" dirty="0">
+                <a:solidFill>
+                  <a:schemeClr val="bg1"/>
+                </a:solidFill>
+              </a:rPr>
+            </a:br>
+            <a:r>
+              <a:rPr sz="1200" dirty="0">
+                <a:solidFill>
+                  <a:schemeClr val="bg1"/>
+                </a:solidFill>
+              </a:rPr>
+              <a:t>    </a:t>
+            </a:r>
+            <a:r>
+              <a:rPr sz="1200" dirty="0" err="1">
+                <a:solidFill>
+                  <a:schemeClr val="bg1"/>
+                </a:solidFill>
+              </a:rPr>
+              <a:t>propertyJSON</a:t>
+            </a:r>
+            <a:r>
+              <a:rPr sz="1200" dirty="0">
+                <a:solidFill>
+                  <a:schemeClr val="bg1"/>
+                </a:solidFill>
+              </a:rPr>
+              <a:t>, _ := </a:t>
+            </a:r>
+            <a:r>
+              <a:rPr sz="1200" dirty="0" err="1">
+                <a:solidFill>
+                  <a:schemeClr val="bg1"/>
+                </a:solidFill>
+              </a:rPr>
+              <a:t>json.Marshal</a:t>
+            </a:r>
+            <a:r>
+              <a:rPr sz="1200" dirty="0">
+                <a:solidFill>
+                  <a:schemeClr val="bg1"/>
+                </a:solidFill>
+              </a:rPr>
+              <a:t>(property)</a:t>
+            </a:r>
+            <a:br>
+              <a:rPr sz="1200" dirty="0">
+                <a:solidFill>
+                  <a:schemeClr val="bg1"/>
+                </a:solidFill>
+              </a:rPr>
+            </a:br>
+            <a:r>
+              <a:rPr sz="1200" dirty="0">
+                <a:solidFill>
+                  <a:schemeClr val="bg1"/>
+                </a:solidFill>
+              </a:rPr>
+              <a:t>    return </a:t>
+            </a:r>
+            <a:r>
+              <a:rPr sz="1200" dirty="0" err="1">
+                <a:solidFill>
+                  <a:schemeClr val="bg1"/>
+                </a:solidFill>
+              </a:rPr>
+              <a:t>ctx.GetStub</a:t>
+            </a:r>
+            <a:r>
+              <a:rPr sz="1200" dirty="0">
+                <a:solidFill>
+                  <a:schemeClr val="bg1"/>
+                </a:solidFill>
+              </a:rPr>
+              <a:t>().</a:t>
+            </a:r>
+            <a:r>
+              <a:rPr sz="1200" dirty="0" err="1">
+                <a:solidFill>
+                  <a:schemeClr val="bg1"/>
+                </a:solidFill>
+              </a:rPr>
+              <a:t>PutState</a:t>
+            </a:r>
+            <a:r>
+              <a:rPr sz="1200" dirty="0">
+                <a:solidFill>
+                  <a:schemeClr val="bg1"/>
+                </a:solidFill>
+              </a:rPr>
+              <a:t>(id, </a:t>
+            </a:r>
+            <a:r>
+              <a:rPr sz="1200" dirty="0" err="1">
+                <a:solidFill>
+                  <a:schemeClr val="bg1"/>
+                </a:solidFill>
+              </a:rPr>
+              <a:t>propertyJSON</a:t>
+            </a:r>
+            <a:r>
+              <a:rPr sz="1200" dirty="0">
+                <a:solidFill>
+                  <a:schemeClr val="bg1"/>
+                </a:solidFill>
+              </a:rPr>
+              <a:t>)</a:t>
+            </a:r>
+            <a:br>
+              <a:rPr sz="1200" dirty="0">
+                <a:solidFill>
+                  <a:schemeClr val="bg1"/>
+                </a:solidFill>
+              </a:rPr>
+            </a:br>
+            <a:r>
+              <a:rPr sz="1200" dirty="0">
+                <a:solidFill>
+                  <a:schemeClr val="bg1"/>
+                </a:solidFill>
+              </a:rPr>
               <a:t>}</a:t>
             </a:r>
-            <a:br/>
-            <a:br/>
-            <a:r>
-              <a:t>// GetAll con paginacion</a:t>
-            </a:r>
-            <a:br/>
-            <a:r>
-              <a:t>func (s *SmartContract) GetAllProperties(ctx contractapi.TransactionContextInterface,</a:t>
-            </a:r>
-            <a:br/>
-            <a:r>
-              <a:t>    pageSize int32, bookmark string) (*PaginatedResult, error) {</a:t>
-            </a:r>
-            <a:br/>
-            <a:br/>
-            <a:r>
-              <a:t>    iterator, metadata, err := ctx.GetStub().</a:t>
-            </a:r>
-            <a:br/>
-            <a:r>
-              <a:t>        GetStateByRangeWithPagination("", "", pageSize, bookmark)</a:t>
-            </a:r>
-            <a:br/>
-            <a:r>
+            <a:br>
+              <a:rPr sz="1200" dirty="0">
+                <a:solidFill>
+                  <a:schemeClr val="bg1"/>
+                </a:solidFill>
+              </a:rPr>
+            </a:br>
+            <a:br>
+              <a:rPr sz="1200" dirty="0">
+                <a:solidFill>
+                  <a:schemeClr val="bg1"/>
+                </a:solidFill>
+              </a:rPr>
+            </a:br>
+            <a:r>
+              <a:rPr sz="1200" dirty="0">
+                <a:solidFill>
+                  <a:schemeClr val="bg1"/>
+                </a:solidFill>
+              </a:rPr>
+              <a:t>// </a:t>
+            </a:r>
+            <a:r>
+              <a:rPr sz="1200" dirty="0" err="1">
+                <a:solidFill>
+                  <a:schemeClr val="bg1"/>
+                </a:solidFill>
+              </a:rPr>
+              <a:t>GetAll</a:t>
+            </a:r>
+            <a:r>
+              <a:rPr sz="1200" dirty="0">
+                <a:solidFill>
+                  <a:schemeClr val="bg1"/>
+                </a:solidFill>
+              </a:rPr>
+              <a:t> con </a:t>
+            </a:r>
+            <a:r>
+              <a:rPr sz="1200" dirty="0" err="1">
+                <a:solidFill>
+                  <a:schemeClr val="bg1"/>
+                </a:solidFill>
+              </a:rPr>
+              <a:t>paginacion</a:t>
+            </a:r>
+            <a:br>
+              <a:rPr sz="1200" dirty="0">
+                <a:solidFill>
+                  <a:schemeClr val="bg1"/>
+                </a:solidFill>
+              </a:rPr>
+            </a:br>
+            <a:r>
+              <a:rPr sz="1200" dirty="0" err="1">
+                <a:solidFill>
+                  <a:schemeClr val="bg1"/>
+                </a:solidFill>
+              </a:rPr>
+              <a:t>func</a:t>
+            </a:r>
+            <a:r>
+              <a:rPr sz="1200" dirty="0">
+                <a:solidFill>
+                  <a:schemeClr val="bg1"/>
+                </a:solidFill>
+              </a:rPr>
+              <a:t> (s *</a:t>
+            </a:r>
+            <a:r>
+              <a:rPr sz="1200" dirty="0" err="1">
+                <a:solidFill>
+                  <a:schemeClr val="bg1"/>
+                </a:solidFill>
+              </a:rPr>
+              <a:t>SmartContract</a:t>
+            </a:r>
+            <a:r>
+              <a:rPr sz="1200" dirty="0">
+                <a:solidFill>
+                  <a:schemeClr val="bg1"/>
+                </a:solidFill>
+              </a:rPr>
+              <a:t>) </a:t>
+            </a:r>
+            <a:r>
+              <a:rPr sz="1200" dirty="0" err="1">
+                <a:solidFill>
+                  <a:schemeClr val="bg1"/>
+                </a:solidFill>
+              </a:rPr>
+              <a:t>GetAllProperties</a:t>
+            </a:r>
+            <a:r>
+              <a:rPr sz="1200" dirty="0">
+                <a:solidFill>
+                  <a:schemeClr val="bg1"/>
+                </a:solidFill>
+              </a:rPr>
+              <a:t>(</a:t>
+            </a:r>
+            <a:r>
+              <a:rPr sz="1200" dirty="0" err="1">
+                <a:solidFill>
+                  <a:schemeClr val="bg1"/>
+                </a:solidFill>
+              </a:rPr>
+              <a:t>ctx</a:t>
+            </a:r>
+            <a:r>
+              <a:rPr sz="1200" dirty="0">
+                <a:solidFill>
+                  <a:schemeClr val="bg1"/>
+                </a:solidFill>
+              </a:rPr>
+              <a:t> </a:t>
+            </a:r>
+            <a:r>
+              <a:rPr sz="1200" dirty="0" err="1">
+                <a:solidFill>
+                  <a:schemeClr val="bg1"/>
+                </a:solidFill>
+              </a:rPr>
+              <a:t>contractapi.TransactionContextInterface</a:t>
+            </a:r>
+            <a:r>
+              <a:rPr sz="1200" dirty="0">
+                <a:solidFill>
+                  <a:schemeClr val="bg1"/>
+                </a:solidFill>
+              </a:rPr>
+              <a:t>,</a:t>
+            </a:r>
+            <a:br>
+              <a:rPr sz="1200" dirty="0">
+                <a:solidFill>
+                  <a:schemeClr val="bg1"/>
+                </a:solidFill>
+              </a:rPr>
+            </a:br>
+            <a:r>
+              <a:rPr sz="1200" dirty="0">
+                <a:solidFill>
+                  <a:schemeClr val="bg1"/>
+                </a:solidFill>
+              </a:rPr>
+              <a:t>    </a:t>
+            </a:r>
+            <a:r>
+              <a:rPr sz="1200" dirty="0" err="1">
+                <a:solidFill>
+                  <a:schemeClr val="bg1"/>
+                </a:solidFill>
+              </a:rPr>
+              <a:t>pageSize</a:t>
+            </a:r>
+            <a:r>
+              <a:rPr sz="1200" dirty="0">
+                <a:solidFill>
+                  <a:schemeClr val="bg1"/>
+                </a:solidFill>
+              </a:rPr>
+              <a:t> int32, bookmark string) (*</a:t>
+            </a:r>
+            <a:r>
+              <a:rPr sz="1200" dirty="0" err="1">
+                <a:solidFill>
+                  <a:schemeClr val="bg1"/>
+                </a:solidFill>
+              </a:rPr>
+              <a:t>PaginatedResult</a:t>
+            </a:r>
+            <a:r>
+              <a:rPr sz="1200" dirty="0">
+                <a:solidFill>
+                  <a:schemeClr val="bg1"/>
+                </a:solidFill>
+              </a:rPr>
+              <a:t>, error) {</a:t>
+            </a:r>
+            <a:br>
+              <a:rPr sz="1200" dirty="0">
+                <a:solidFill>
+                  <a:schemeClr val="bg1"/>
+                </a:solidFill>
+              </a:rPr>
+            </a:br>
+            <a:br>
+              <a:rPr sz="1200" dirty="0">
+                <a:solidFill>
+                  <a:schemeClr val="bg1"/>
+                </a:solidFill>
+              </a:rPr>
+            </a:br>
+            <a:r>
+              <a:rPr sz="1200" dirty="0">
+                <a:solidFill>
+                  <a:schemeClr val="bg1"/>
+                </a:solidFill>
+              </a:rPr>
+              <a:t>    iterator, metadata, err := </a:t>
+            </a:r>
+            <a:r>
+              <a:rPr sz="1200" dirty="0" err="1">
+                <a:solidFill>
+                  <a:schemeClr val="bg1"/>
+                </a:solidFill>
+              </a:rPr>
+              <a:t>ctx.GetStub</a:t>
+            </a:r>
+            <a:r>
+              <a:rPr sz="1200" dirty="0">
+                <a:solidFill>
+                  <a:schemeClr val="bg1"/>
+                </a:solidFill>
+              </a:rPr>
+              <a:t>().</a:t>
+            </a:r>
+            <a:br>
+              <a:rPr sz="1200" dirty="0">
+                <a:solidFill>
+                  <a:schemeClr val="bg1"/>
+                </a:solidFill>
+              </a:rPr>
+            </a:br>
+            <a:r>
+              <a:rPr sz="1200" dirty="0">
+                <a:solidFill>
+                  <a:schemeClr val="bg1"/>
+                </a:solidFill>
+              </a:rPr>
+              <a:t>        GetStateByRangeWithPagination("", "", </a:t>
+            </a:r>
+            <a:r>
+              <a:rPr sz="1200" dirty="0" err="1">
+                <a:solidFill>
+                  <a:schemeClr val="bg1"/>
+                </a:solidFill>
+              </a:rPr>
+              <a:t>pageSize</a:t>
+            </a:r>
+            <a:r>
+              <a:rPr sz="1200" dirty="0">
+                <a:solidFill>
+                  <a:schemeClr val="bg1"/>
+                </a:solidFill>
+              </a:rPr>
+              <a:t>, bookmark)</a:t>
+            </a:r>
+            <a:br>
+              <a:rPr sz="1200" dirty="0">
+                <a:solidFill>
+                  <a:schemeClr val="bg1"/>
+                </a:solidFill>
+              </a:rPr>
+            </a:br>
+            <a:r>
+              <a:rPr sz="1200" dirty="0">
+                <a:solidFill>
+                  <a:schemeClr val="bg1"/>
+                </a:solidFill>
+              </a:rPr>
               <a:t>    if err != nil {</a:t>
             </a:r>
-            <a:br/>
-            <a:r>
+            <a:br>
+              <a:rPr sz="1200" dirty="0">
+                <a:solidFill>
+                  <a:schemeClr val="bg1"/>
+                </a:solidFill>
+              </a:rPr>
+            </a:br>
+            <a:r>
+              <a:rPr sz="1200" dirty="0">
+                <a:solidFill>
+                  <a:schemeClr val="bg1"/>
+                </a:solidFill>
+              </a:rPr>
               <a:t>        return nil, err</a:t>
             </a:r>
-            <a:br/>
-            <a:r>
+            <a:br>
+              <a:rPr sz="1200" dirty="0">
+                <a:solidFill>
+                  <a:schemeClr val="bg1"/>
+                </a:solidFill>
+              </a:rPr>
+            </a:br>
+            <a:r>
+              <a:rPr sz="1200" dirty="0">
+                <a:solidFill>
+                  <a:schemeClr val="bg1"/>
+                </a:solidFill>
+              </a:rPr>
               <a:t>    }</a:t>
             </a:r>
-            <a:br/>
-            <a:r>
-              <a:t>    defer iterator.Close()</a:t>
-            </a:r>
-            <a:br/>
-            <a:r>
-              <a:t>    // ... iterar y construir resultado con metadata.Bookmark</a:t>
-            </a:r>
-            <a:br/>
-            <a:r>
+            <a:br>
+              <a:rPr sz="1200" dirty="0">
+                <a:solidFill>
+                  <a:schemeClr val="bg1"/>
+                </a:solidFill>
+              </a:rPr>
+            </a:br>
+            <a:r>
+              <a:rPr sz="1200" dirty="0">
+                <a:solidFill>
+                  <a:schemeClr val="bg1"/>
+                </a:solidFill>
+              </a:rPr>
+              <a:t>    defer </a:t>
+            </a:r>
+            <a:r>
+              <a:rPr sz="1200" dirty="0" err="1">
+                <a:solidFill>
+                  <a:schemeClr val="bg1"/>
+                </a:solidFill>
+              </a:rPr>
+              <a:t>iterator.Close</a:t>
+            </a:r>
+            <a:r>
+              <a:rPr sz="1200" dirty="0">
+                <a:solidFill>
+                  <a:schemeClr val="bg1"/>
+                </a:solidFill>
+              </a:rPr>
+              <a:t>()</a:t>
+            </a:r>
+            <a:br>
+              <a:rPr sz="1200" dirty="0">
+                <a:solidFill>
+                  <a:schemeClr val="bg1"/>
+                </a:solidFill>
+              </a:rPr>
+            </a:br>
+            <a:r>
+              <a:rPr sz="1200" dirty="0">
+                <a:solidFill>
+                  <a:schemeClr val="bg1"/>
+                </a:solidFill>
+              </a:rPr>
+              <a:t>    // ... </a:t>
+            </a:r>
+            <a:r>
+              <a:rPr sz="1200" dirty="0" err="1">
+                <a:solidFill>
+                  <a:schemeClr val="bg1"/>
+                </a:solidFill>
+              </a:rPr>
+              <a:t>iterar</a:t>
+            </a:r>
+            <a:r>
+              <a:rPr sz="1200" dirty="0">
+                <a:solidFill>
+                  <a:schemeClr val="bg1"/>
+                </a:solidFill>
+              </a:rPr>
+              <a:t> y </a:t>
+            </a:r>
+            <a:r>
+              <a:rPr sz="1200" dirty="0" err="1">
+                <a:solidFill>
+                  <a:schemeClr val="bg1"/>
+                </a:solidFill>
+              </a:rPr>
+              <a:t>construir</a:t>
+            </a:r>
+            <a:r>
+              <a:rPr sz="1200" dirty="0">
+                <a:solidFill>
+                  <a:schemeClr val="bg1"/>
+                </a:solidFill>
+              </a:rPr>
+              <a:t> </a:t>
+            </a:r>
+            <a:r>
+              <a:rPr sz="1200" dirty="0" err="1">
+                <a:solidFill>
+                  <a:schemeClr val="bg1"/>
+                </a:solidFill>
+              </a:rPr>
+              <a:t>resultado</a:t>
+            </a:r>
+            <a:r>
+              <a:rPr sz="1200" dirty="0">
+                <a:solidFill>
+                  <a:schemeClr val="bg1"/>
+                </a:solidFill>
+              </a:rPr>
+              <a:t> con </a:t>
+            </a:r>
+            <a:r>
+              <a:rPr sz="1200" dirty="0" err="1">
+                <a:solidFill>
+                  <a:schemeClr val="bg1"/>
+                </a:solidFill>
+              </a:rPr>
+              <a:t>metadata.Bookmark</a:t>
+            </a:r>
+            <a:br>
+              <a:rPr sz="1200" dirty="0">
+                <a:solidFill>
+                  <a:schemeClr val="bg1"/>
+                </a:solidFill>
+              </a:rPr>
+            </a:br>
+            <a:r>
+              <a:rPr sz="1200" dirty="0">
+                <a:solidFill>
+                  <a:schemeClr val="bg1"/>
+                </a:solidFill>
+              </a:rPr>
               <a:t>}</a:t>
             </a:r>
           </a:p>
@@ -7892,69 +8714,419 @@
               </a:defRPr>
             </a:pPr>
             <a:r>
-              <a:t>Genera un chaincode de Hyperledger Fabric en [Go/Node.js]</a:t>
-            </a:r>
-            <a:br/>
-            <a:r>
-              <a:t>para un sistema de Registro de Propiedad con las siguientes</a:t>
-            </a:r>
-            <a:br/>
-            <a:r>
-              <a:t>especificaciones:</a:t>
-            </a:r>
-            <a:br/>
-            <a:br/>
-            <a:r>
-              <a:t>- Struct/modelo: Property con campos id, address, owner,</a:t>
-            </a:r>
-            <a:br/>
-            <a:r>
-              <a:t>  ownerName, area (int), propertyType (apartment|house|land),</a:t>
-            </a:r>
-            <a:br/>
-            <a:r>
-              <a:t>  status (active|transferring|blocked), appraisalValue (int)</a:t>
-            </a:r>
-            <a:br/>
-            <a:r>
-              <a:t>- Incluye campo docType="property" para queries CouchDB</a:t>
-            </a:r>
-            <a:br/>
-            <a:r>
-              <a:t>- Operaciones CRUD: Create, Read, Update, Delete (logico),</a:t>
-            </a:r>
-            <a:br/>
-            <a:r>
-              <a:t>  GetAll con paginacion</a:t>
-            </a:r>
-            <a:br/>
-            <a:r>
-              <a:t>- Validaciones: verificar existencia, permisos por MSPID</a:t>
-            </a:r>
-            <a:br/>
-            <a:r>
-              <a:t>- Rich query: buscar por propertyType y rango de valor</a:t>
-            </a:r>
-            <a:br/>
-            <a:r>
-              <a:t>- Usa la Contract API oficial de Fabric</a:t>
-            </a:r>
-            <a:br/>
-            <a:r>
-              <a:t>- Incluye eventos para Create y Transfer</a:t>
-            </a:r>
-            <a:br/>
-            <a:r>
-              <a:t>- Anade comentarios explicativos en espanol</a:t>
-            </a:r>
-            <a:br/>
-            <a:br/>
-            <a:r>
-              <a:t>Contexto: es para un curso de formacion, debe ser claro</a:t>
-            </a:r>
-            <a:br/>
-            <a:r>
-              <a:t>y didactico. Usa Fabric 2.5.x.</a:t>
+              <a:rPr sz="1200" dirty="0"/>
+              <a:t>Genera un </a:t>
+            </a:r>
+            <a:r>
+              <a:rPr sz="1200" dirty="0" err="1"/>
+              <a:t>chaincode</a:t>
+            </a:r>
+            <a:r>
+              <a:rPr sz="1200" dirty="0"/>
+              <a:t> de Hyperledger Fabric </a:t>
+            </a:r>
+            <a:r>
+              <a:rPr sz="1200" dirty="0" err="1"/>
+              <a:t>en</a:t>
+            </a:r>
+            <a:r>
+              <a:rPr sz="1200" dirty="0"/>
+              <a:t> [Go/Node.js]</a:t>
+            </a:r>
+            <a:br>
+              <a:rPr sz="1200" dirty="0"/>
+            </a:br>
+            <a:r>
+              <a:rPr sz="1200" dirty="0"/>
+              <a:t>para un </a:t>
+            </a:r>
+            <a:r>
+              <a:rPr sz="1200" dirty="0" err="1"/>
+              <a:t>sistema</a:t>
+            </a:r>
+            <a:r>
+              <a:rPr sz="1200" dirty="0"/>
+              <a:t> de Registro de </a:t>
+            </a:r>
+            <a:r>
+              <a:rPr sz="1200" dirty="0" err="1"/>
+              <a:t>Propiedad</a:t>
+            </a:r>
+            <a:r>
+              <a:rPr sz="1200" dirty="0"/>
+              <a:t> con las </a:t>
+            </a:r>
+            <a:r>
+              <a:rPr sz="1200" dirty="0" err="1"/>
+              <a:t>siguientes</a:t>
+            </a:r>
+            <a:br>
+              <a:rPr sz="1200" dirty="0"/>
+            </a:br>
+            <a:r>
+              <a:rPr sz="1200" dirty="0" err="1"/>
+              <a:t>especificaciones</a:t>
+            </a:r>
+            <a:r>
+              <a:rPr sz="1200" dirty="0"/>
+              <a:t>:</a:t>
+            </a:r>
+            <a:br>
+              <a:rPr sz="1200" dirty="0"/>
+            </a:br>
+            <a:br>
+              <a:rPr sz="1200" dirty="0"/>
+            </a:br>
+            <a:r>
+              <a:rPr sz="1200" dirty="0"/>
+              <a:t>- Struct/</a:t>
+            </a:r>
+            <a:r>
+              <a:rPr sz="1200" dirty="0" err="1"/>
+              <a:t>modelo</a:t>
+            </a:r>
+            <a:r>
+              <a:rPr sz="1200" dirty="0"/>
+              <a:t>: Property con campos id, address, owner,</a:t>
+            </a:r>
+            <a:br>
+              <a:rPr sz="1200" dirty="0"/>
+            </a:br>
+            <a:r>
+              <a:rPr sz="1200" dirty="0"/>
+              <a:t>  </a:t>
+            </a:r>
+            <a:r>
+              <a:rPr sz="1200" dirty="0" err="1"/>
+              <a:t>ownerName</a:t>
+            </a:r>
+            <a:r>
+              <a:rPr sz="1200" dirty="0"/>
+              <a:t>, area (int), </a:t>
+            </a:r>
+            <a:r>
+              <a:rPr sz="1200" dirty="0" err="1"/>
+              <a:t>propertyType</a:t>
+            </a:r>
+            <a:r>
+              <a:rPr sz="1200" dirty="0"/>
+              <a:t> (</a:t>
+            </a:r>
+            <a:r>
+              <a:rPr sz="1200" dirty="0" err="1"/>
+              <a:t>apartment|house|land</a:t>
+            </a:r>
+            <a:r>
+              <a:rPr sz="1200" dirty="0"/>
+              <a:t>),</a:t>
+            </a:r>
+            <a:br>
+              <a:rPr sz="1200" dirty="0"/>
+            </a:br>
+            <a:r>
+              <a:rPr sz="1200" dirty="0"/>
+              <a:t>  status (</a:t>
+            </a:r>
+            <a:r>
+              <a:rPr sz="1200" dirty="0" err="1"/>
+              <a:t>active|transferring|blocked</a:t>
+            </a:r>
+            <a:r>
+              <a:rPr sz="1200" dirty="0"/>
+              <a:t>), </a:t>
+            </a:r>
+            <a:r>
+              <a:rPr sz="1200" dirty="0" err="1"/>
+              <a:t>appraisalValue</a:t>
+            </a:r>
+            <a:r>
+              <a:rPr sz="1200" dirty="0"/>
+              <a:t> (int)</a:t>
+            </a:r>
+            <a:br>
+              <a:rPr sz="1200" dirty="0"/>
+            </a:br>
+            <a:r>
+              <a:rPr sz="1200" dirty="0"/>
+              <a:t>- </a:t>
+            </a:r>
+            <a:r>
+              <a:rPr sz="1200" dirty="0" err="1"/>
+              <a:t>Incluye</a:t>
+            </a:r>
+            <a:r>
+              <a:rPr sz="1200" dirty="0"/>
+              <a:t> campo </a:t>
+            </a:r>
+            <a:r>
+              <a:rPr sz="1200" dirty="0" err="1"/>
+              <a:t>docType</a:t>
+            </a:r>
+            <a:r>
+              <a:rPr sz="1200" dirty="0"/>
+              <a:t>="property" para queries CouchDB</a:t>
+            </a:r>
+            <a:br>
+              <a:rPr sz="1200" dirty="0"/>
+            </a:br>
+            <a:r>
+              <a:rPr sz="1200" dirty="0"/>
+              <a:t>- </a:t>
+            </a:r>
+            <a:r>
+              <a:rPr sz="1200" dirty="0" err="1"/>
+              <a:t>Operaciones</a:t>
+            </a:r>
+            <a:r>
+              <a:rPr sz="1200" dirty="0"/>
+              <a:t> CRUD: Create, Read, Update, Delete (</a:t>
+            </a:r>
+            <a:r>
+              <a:rPr sz="1200" dirty="0" err="1"/>
+              <a:t>logico</a:t>
+            </a:r>
+            <a:r>
+              <a:rPr sz="1200" dirty="0"/>
+              <a:t>),</a:t>
+            </a:r>
+            <a:br>
+              <a:rPr sz="1200" dirty="0"/>
+            </a:br>
+            <a:r>
+              <a:rPr sz="1200" dirty="0"/>
+              <a:t>  </a:t>
+            </a:r>
+            <a:r>
+              <a:rPr sz="1200" dirty="0" err="1"/>
+              <a:t>GetAll</a:t>
+            </a:r>
+            <a:r>
+              <a:rPr sz="1200" dirty="0"/>
+              <a:t> con </a:t>
+            </a:r>
+            <a:r>
+              <a:rPr sz="1200" dirty="0" err="1"/>
+              <a:t>paginacion</a:t>
+            </a:r>
+            <a:br>
+              <a:rPr sz="1200" dirty="0"/>
+            </a:br>
+            <a:r>
+              <a:rPr sz="1200" dirty="0"/>
+              <a:t>- </a:t>
+            </a:r>
+            <a:r>
+              <a:rPr sz="1200" dirty="0" err="1"/>
+              <a:t>Validaciones</a:t>
+            </a:r>
+            <a:r>
+              <a:rPr sz="1200" dirty="0"/>
+              <a:t>: </a:t>
+            </a:r>
+            <a:r>
+              <a:rPr sz="1200" dirty="0" err="1"/>
+              <a:t>verificar</a:t>
+            </a:r>
+            <a:r>
+              <a:rPr sz="1200" dirty="0"/>
+              <a:t> </a:t>
+            </a:r>
+            <a:r>
+              <a:rPr sz="1200" dirty="0" err="1"/>
+              <a:t>existencia</a:t>
+            </a:r>
+            <a:r>
+              <a:rPr sz="1200" dirty="0"/>
+              <a:t>, </a:t>
+            </a:r>
+            <a:r>
+              <a:rPr sz="1200" dirty="0" err="1"/>
+              <a:t>permisos</a:t>
+            </a:r>
+            <a:r>
+              <a:rPr sz="1200" dirty="0"/>
+              <a:t> </a:t>
+            </a:r>
+            <a:r>
+              <a:rPr sz="1200" dirty="0" err="1"/>
+              <a:t>por</a:t>
+            </a:r>
+            <a:r>
+              <a:rPr sz="1200" dirty="0"/>
+              <a:t> MSPID</a:t>
+            </a:r>
+            <a:br>
+              <a:rPr sz="1200" dirty="0"/>
+            </a:br>
+            <a:r>
+              <a:rPr sz="1200" dirty="0"/>
+              <a:t>- Rich query: </a:t>
+            </a:r>
+            <a:r>
+              <a:rPr sz="1200" dirty="0" err="1"/>
+              <a:t>buscar</a:t>
+            </a:r>
+            <a:r>
+              <a:rPr sz="1200" dirty="0"/>
+              <a:t> </a:t>
+            </a:r>
+            <a:r>
+              <a:rPr sz="1200" dirty="0" err="1"/>
+              <a:t>por</a:t>
+            </a:r>
+            <a:r>
+              <a:rPr sz="1200" dirty="0"/>
+              <a:t> </a:t>
+            </a:r>
+            <a:r>
+              <a:rPr sz="1200" dirty="0" err="1"/>
+              <a:t>propertyType</a:t>
+            </a:r>
+            <a:r>
+              <a:rPr sz="1200" dirty="0"/>
+              <a:t> y </a:t>
+            </a:r>
+            <a:r>
+              <a:rPr sz="1200" dirty="0" err="1"/>
+              <a:t>rango</a:t>
+            </a:r>
+            <a:r>
+              <a:rPr sz="1200" dirty="0"/>
+              <a:t> de valor</a:t>
+            </a:r>
+            <a:br>
+              <a:rPr sz="1200" dirty="0"/>
+            </a:br>
+            <a:r>
+              <a:rPr sz="1200" dirty="0"/>
+              <a:t>- Usa la Contract API </a:t>
+            </a:r>
+            <a:r>
+              <a:rPr sz="1200" dirty="0" err="1"/>
+              <a:t>oficial</a:t>
+            </a:r>
+            <a:r>
+              <a:rPr sz="1200" dirty="0"/>
+              <a:t> de Fabric</a:t>
+            </a:r>
+            <a:br>
+              <a:rPr sz="1200" dirty="0"/>
+            </a:br>
+            <a:r>
+              <a:rPr sz="1200" dirty="0"/>
+              <a:t>- </a:t>
+            </a:r>
+            <a:r>
+              <a:rPr sz="1200" dirty="0" err="1"/>
+              <a:t>Incluye</a:t>
+            </a:r>
+            <a:r>
+              <a:rPr sz="1200" dirty="0"/>
+              <a:t> </a:t>
+            </a:r>
+            <a:r>
+              <a:rPr sz="1200" dirty="0" err="1"/>
+              <a:t>eventos</a:t>
+            </a:r>
+            <a:r>
+              <a:rPr sz="1200" dirty="0"/>
+              <a:t> para Create y Transfer</a:t>
+            </a:r>
+            <a:br>
+              <a:rPr sz="1200" dirty="0"/>
+            </a:br>
+            <a:r>
+              <a:rPr sz="1200" dirty="0"/>
+              <a:t>- </a:t>
+            </a:r>
+            <a:r>
+              <a:rPr sz="1200" dirty="0" err="1"/>
+              <a:t>Anade</a:t>
+            </a:r>
+            <a:r>
+              <a:rPr sz="1200" dirty="0"/>
+              <a:t> </a:t>
+            </a:r>
+            <a:r>
+              <a:rPr sz="1200" dirty="0" err="1"/>
+              <a:t>comentarios</a:t>
+            </a:r>
+            <a:r>
+              <a:rPr sz="1200" dirty="0"/>
+              <a:t> </a:t>
+            </a:r>
+            <a:r>
+              <a:rPr sz="1200" dirty="0" err="1"/>
+              <a:t>explicativos</a:t>
+            </a:r>
+            <a:r>
+              <a:rPr sz="1200" dirty="0"/>
+              <a:t> </a:t>
+            </a:r>
+            <a:r>
+              <a:rPr sz="1200" dirty="0" err="1"/>
+              <a:t>en</a:t>
+            </a:r>
+            <a:r>
+              <a:rPr sz="1200" dirty="0"/>
+              <a:t> </a:t>
+            </a:r>
+            <a:r>
+              <a:rPr sz="1200" dirty="0" err="1"/>
+              <a:t>espanol</a:t>
+            </a:r>
+            <a:br>
+              <a:rPr sz="1200" dirty="0"/>
+            </a:br>
+            <a:br>
+              <a:rPr sz="1200" dirty="0"/>
+            </a:br>
+            <a:r>
+              <a:rPr sz="1200" dirty="0" err="1"/>
+              <a:t>Contexto</a:t>
+            </a:r>
+            <a:r>
+              <a:rPr sz="1200" dirty="0"/>
+              <a:t>: es para un </a:t>
+            </a:r>
+            <a:r>
+              <a:rPr sz="1200" dirty="0" err="1"/>
+              <a:t>curso</a:t>
+            </a:r>
+            <a:r>
+              <a:rPr sz="1200" dirty="0"/>
+              <a:t> de </a:t>
+            </a:r>
+            <a:r>
+              <a:rPr sz="1200" dirty="0" err="1"/>
+              <a:t>formacion</a:t>
+            </a:r>
+            <a:r>
+              <a:rPr sz="1200" dirty="0"/>
+              <a:t>, </a:t>
+            </a:r>
+            <a:r>
+              <a:rPr sz="1200" dirty="0" err="1"/>
+              <a:t>debe</a:t>
+            </a:r>
+            <a:r>
+              <a:rPr sz="1200" dirty="0"/>
+              <a:t> ser claro</a:t>
+            </a:r>
+            <a:br>
+              <a:rPr sz="1200" dirty="0"/>
+            </a:br>
+            <a:r>
+              <a:rPr sz="1200" dirty="0"/>
+              <a:t>y </a:t>
+            </a:r>
+            <a:r>
+              <a:rPr sz="1200" dirty="0" err="1"/>
+              <a:t>didactico</a:t>
+            </a:r>
+            <a:r>
+              <a:rPr sz="1200" dirty="0"/>
+              <a:t>. Usa Fabric 2.5.x.</a:t>
             </a:r>
           </a:p>
         </p:txBody>

--- a/docs/slides/Modulo 4/dia_2.pptx
+++ b/docs/slides/Modulo 4/dia_2.pptx
@@ -325,7 +325,7 @@
           <a:p>
             <a:fld id="{5BCAD085-E8A6-8845-BD4E-CB4CCA059FC4}" type="datetimeFigureOut">
               <a:rPr lang="en-US" smtClean="0"/>
-              <a:t>4/16/2026</a:t>
+              <a:t>4/22/2026</a:t>
             </a:fld>
             <a:endParaRPr lang="en-US"/>
           </a:p>
@@ -493,7 +493,7 @@
           <a:p>
             <a:fld id="{5BCAD085-E8A6-8845-BD4E-CB4CCA059FC4}" type="datetimeFigureOut">
               <a:rPr lang="en-US" smtClean="0"/>
-              <a:t>4/16/2026</a:t>
+              <a:t>4/22/2026</a:t>
             </a:fld>
             <a:endParaRPr lang="en-US"/>
           </a:p>
@@ -671,7 +671,7 @@
           <a:p>
             <a:fld id="{5BCAD085-E8A6-8845-BD4E-CB4CCA059FC4}" type="datetimeFigureOut">
               <a:rPr lang="en-US" smtClean="0"/>
-              <a:t>4/16/2026</a:t>
+              <a:t>4/22/2026</a:t>
             </a:fld>
             <a:endParaRPr lang="en-US"/>
           </a:p>
@@ -839,7 +839,7 @@
           <a:p>
             <a:fld id="{5BCAD085-E8A6-8845-BD4E-CB4CCA059FC4}" type="datetimeFigureOut">
               <a:rPr lang="en-US" smtClean="0"/>
-              <a:t>4/16/2026</a:t>
+              <a:t>4/22/2026</a:t>
             </a:fld>
             <a:endParaRPr lang="en-US"/>
           </a:p>
@@ -1084,7 +1084,7 @@
           <a:p>
             <a:fld id="{5BCAD085-E8A6-8845-BD4E-CB4CCA059FC4}" type="datetimeFigureOut">
               <a:rPr lang="en-US" smtClean="0"/>
-              <a:t>4/16/2026</a:t>
+              <a:t>4/22/2026</a:t>
             </a:fld>
             <a:endParaRPr lang="en-US"/>
           </a:p>
@@ -1369,7 +1369,7 @@
           <a:p>
             <a:fld id="{5BCAD085-E8A6-8845-BD4E-CB4CCA059FC4}" type="datetimeFigureOut">
               <a:rPr lang="en-US" smtClean="0"/>
-              <a:t>4/16/2026</a:t>
+              <a:t>4/22/2026</a:t>
             </a:fld>
             <a:endParaRPr lang="en-US"/>
           </a:p>
@@ -1788,7 +1788,7 @@
           <a:p>
             <a:fld id="{5BCAD085-E8A6-8845-BD4E-CB4CCA059FC4}" type="datetimeFigureOut">
               <a:rPr lang="en-US" smtClean="0"/>
-              <a:t>4/16/2026</a:t>
+              <a:t>4/22/2026</a:t>
             </a:fld>
             <a:endParaRPr lang="en-US"/>
           </a:p>
@@ -1905,7 +1905,7 @@
           <a:p>
             <a:fld id="{5BCAD085-E8A6-8845-BD4E-CB4CCA059FC4}" type="datetimeFigureOut">
               <a:rPr lang="en-US" smtClean="0"/>
-              <a:t>4/16/2026</a:t>
+              <a:t>4/22/2026</a:t>
             </a:fld>
             <a:endParaRPr lang="en-US"/>
           </a:p>
@@ -2000,7 +2000,7 @@
           <a:p>
             <a:fld id="{5BCAD085-E8A6-8845-BD4E-CB4CCA059FC4}" type="datetimeFigureOut">
               <a:rPr lang="en-US" smtClean="0"/>
-              <a:t>4/16/2026</a:t>
+              <a:t>4/22/2026</a:t>
             </a:fld>
             <a:endParaRPr lang="en-US"/>
           </a:p>
@@ -2275,7 +2275,7 @@
           <a:p>
             <a:fld id="{5BCAD085-E8A6-8845-BD4E-CB4CCA059FC4}" type="datetimeFigureOut">
               <a:rPr lang="en-US" smtClean="0"/>
-              <a:t>4/16/2026</a:t>
+              <a:t>4/22/2026</a:t>
             </a:fld>
             <a:endParaRPr lang="en-US"/>
           </a:p>
@@ -2527,7 +2527,7 @@
           <a:p>
             <a:fld id="{5BCAD085-E8A6-8845-BD4E-CB4CCA059FC4}" type="datetimeFigureOut">
               <a:rPr lang="en-US" smtClean="0"/>
-              <a:t>4/16/2026</a:t>
+              <a:t>4/22/2026</a:t>
             </a:fld>
             <a:endParaRPr lang="en-US"/>
           </a:p>
@@ -2738,7 +2738,7 @@
           <a:p>
             <a:fld id="{5BCAD085-E8A6-8845-BD4E-CB4CCA059FC4}" type="datetimeFigureOut">
               <a:rPr lang="en-US" smtClean="0"/>
-              <a:t>4/16/2026</a:t>
+              <a:t>4/22/2026</a:t>
             </a:fld>
             <a:endParaRPr lang="en-US"/>
           </a:p>
@@ -3541,7 +3541,7 @@
         <p:spPr>
           <a:xfrm>
             <a:off x="731520" y="1417320"/>
-            <a:ext cx="10698480" cy="4754880"/>
+            <a:ext cx="6739797" cy="4754880"/>
           </a:xfrm>
           <a:prstGeom prst="rect">
             <a:avLst/>
@@ -3552,90 +3552,999 @@
           <a:bodyPr wrap="square"/>
           <a:lstStyle/>
           <a:p>
-            <a:br/>
-            <a:r>
-              <a:t>// Crear una clave compuesta para un activo</a:t>
-            </a:r>
-            <a:br/>
-            <a:r>
-              <a:t>func (s *SmartContract) CreateAsset(ctx contractapi.TransactionContextInterface,</a:t>
-            </a:r>
-            <a:br/>
-            <a:r>
-              <a:t>    owner string, assetType string, id string, value int) error {</a:t>
-            </a:r>
-            <a:br/>
-            <a:br/>
-            <a:r>
-              <a:t>    // Clave compuesta: permite buscar por owner o por type</a:t>
-            </a:r>
-            <a:br/>
-            <a:r>
-              <a:t>    key, err := ctx.GetStub().CreateCompositeKey("asset",</a:t>
-            </a:r>
-            <a:br/>
-            <a:r>
-              <a:t>        []string{owner, assetType, id})</a:t>
-            </a:r>
-            <a:br/>
-            <a:r>
+            <a:br>
+              <a:rPr sz="1600" dirty="0">
+                <a:solidFill>
+                  <a:schemeClr val="bg1"/>
+                </a:solidFill>
+              </a:rPr>
+            </a:br>
+            <a:r>
+              <a:rPr sz="1600" dirty="0">
+                <a:solidFill>
+                  <a:schemeClr val="bg1"/>
+                </a:solidFill>
+              </a:rPr>
+              <a:t>// Crear </a:t>
+            </a:r>
+            <a:r>
+              <a:rPr sz="1600" dirty="0" err="1">
+                <a:solidFill>
+                  <a:schemeClr val="bg1"/>
+                </a:solidFill>
+              </a:rPr>
+              <a:t>una</a:t>
+            </a:r>
+            <a:r>
+              <a:rPr sz="1600" dirty="0">
+                <a:solidFill>
+                  <a:schemeClr val="bg1"/>
+                </a:solidFill>
+              </a:rPr>
+              <a:t> clave </a:t>
+            </a:r>
+            <a:r>
+              <a:rPr sz="1600" dirty="0" err="1">
+                <a:solidFill>
+                  <a:schemeClr val="bg1"/>
+                </a:solidFill>
+              </a:rPr>
+              <a:t>compuesta</a:t>
+            </a:r>
+            <a:r>
+              <a:rPr sz="1600" dirty="0">
+                <a:solidFill>
+                  <a:schemeClr val="bg1"/>
+                </a:solidFill>
+              </a:rPr>
+              <a:t> para un </a:t>
+            </a:r>
+            <a:r>
+              <a:rPr sz="1600" dirty="0" err="1">
+                <a:solidFill>
+                  <a:schemeClr val="bg1"/>
+                </a:solidFill>
+              </a:rPr>
+              <a:t>activo</a:t>
+            </a:r>
+            <a:br>
+              <a:rPr sz="1600" dirty="0">
+                <a:solidFill>
+                  <a:schemeClr val="bg1"/>
+                </a:solidFill>
+              </a:rPr>
+            </a:br>
+            <a:r>
+              <a:rPr sz="1600" dirty="0" err="1">
+                <a:solidFill>
+                  <a:schemeClr val="bg1"/>
+                </a:solidFill>
+              </a:rPr>
+              <a:t>func</a:t>
+            </a:r>
+            <a:r>
+              <a:rPr sz="1600" dirty="0">
+                <a:solidFill>
+                  <a:schemeClr val="bg1"/>
+                </a:solidFill>
+              </a:rPr>
+              <a:t> (s *</a:t>
+            </a:r>
+            <a:r>
+              <a:rPr sz="1600" dirty="0" err="1">
+                <a:solidFill>
+                  <a:schemeClr val="bg1"/>
+                </a:solidFill>
+              </a:rPr>
+              <a:t>SmartContract</a:t>
+            </a:r>
+            <a:r>
+              <a:rPr sz="1600" dirty="0">
+                <a:solidFill>
+                  <a:schemeClr val="bg1"/>
+                </a:solidFill>
+              </a:rPr>
+              <a:t>) </a:t>
+            </a:r>
+            <a:r>
+              <a:rPr sz="1600" dirty="0" err="1">
+                <a:solidFill>
+                  <a:schemeClr val="bg1"/>
+                </a:solidFill>
+              </a:rPr>
+              <a:t>CreateAsset</a:t>
+            </a:r>
+            <a:r>
+              <a:rPr sz="1600" dirty="0">
+                <a:solidFill>
+                  <a:schemeClr val="bg1"/>
+                </a:solidFill>
+              </a:rPr>
+              <a:t>(</a:t>
+            </a:r>
+            <a:r>
+              <a:rPr sz="1600" dirty="0" err="1">
+                <a:solidFill>
+                  <a:schemeClr val="bg1"/>
+                </a:solidFill>
+              </a:rPr>
+              <a:t>ctx</a:t>
+            </a:r>
+            <a:r>
+              <a:rPr sz="1600" dirty="0">
+                <a:solidFill>
+                  <a:schemeClr val="bg1"/>
+                </a:solidFill>
+              </a:rPr>
+              <a:t> </a:t>
+            </a:r>
+            <a:r>
+              <a:rPr sz="1600" dirty="0" err="1">
+                <a:solidFill>
+                  <a:schemeClr val="bg1"/>
+                </a:solidFill>
+              </a:rPr>
+              <a:t>contractapi.TransactionContextInterface</a:t>
+            </a:r>
+            <a:r>
+              <a:rPr sz="1600" dirty="0">
+                <a:solidFill>
+                  <a:schemeClr val="bg1"/>
+                </a:solidFill>
+              </a:rPr>
+              <a:t>,</a:t>
+            </a:r>
+            <a:br>
+              <a:rPr sz="1600" dirty="0">
+                <a:solidFill>
+                  <a:schemeClr val="bg1"/>
+                </a:solidFill>
+              </a:rPr>
+            </a:br>
+            <a:r>
+              <a:rPr sz="1600" dirty="0">
+                <a:solidFill>
+                  <a:schemeClr val="bg1"/>
+                </a:solidFill>
+              </a:rPr>
+              <a:t>    owner string, </a:t>
+            </a:r>
+            <a:r>
+              <a:rPr sz="1600" dirty="0" err="1">
+                <a:solidFill>
+                  <a:schemeClr val="bg1"/>
+                </a:solidFill>
+              </a:rPr>
+              <a:t>assetType</a:t>
+            </a:r>
+            <a:r>
+              <a:rPr sz="1600" dirty="0">
+                <a:solidFill>
+                  <a:schemeClr val="bg1"/>
+                </a:solidFill>
+              </a:rPr>
+              <a:t> string, id string, value int) error {</a:t>
+            </a:r>
+            <a:br>
+              <a:rPr sz="1600" dirty="0">
+                <a:solidFill>
+                  <a:schemeClr val="bg1"/>
+                </a:solidFill>
+              </a:rPr>
+            </a:br>
+            <a:br>
+              <a:rPr sz="1600" dirty="0">
+                <a:solidFill>
+                  <a:schemeClr val="bg1"/>
+                </a:solidFill>
+              </a:rPr>
+            </a:br>
+            <a:r>
+              <a:rPr sz="1600" dirty="0">
+                <a:solidFill>
+                  <a:schemeClr val="bg1"/>
+                </a:solidFill>
+              </a:rPr>
+              <a:t>    // Clave </a:t>
+            </a:r>
+            <a:r>
+              <a:rPr sz="1600" dirty="0" err="1">
+                <a:solidFill>
+                  <a:schemeClr val="bg1"/>
+                </a:solidFill>
+              </a:rPr>
+              <a:t>compuesta</a:t>
+            </a:r>
+            <a:r>
+              <a:rPr sz="1600" dirty="0">
+                <a:solidFill>
+                  <a:schemeClr val="bg1"/>
+                </a:solidFill>
+              </a:rPr>
+              <a:t>: </a:t>
+            </a:r>
+            <a:r>
+              <a:rPr sz="1600" dirty="0" err="1">
+                <a:solidFill>
+                  <a:schemeClr val="bg1"/>
+                </a:solidFill>
+              </a:rPr>
+              <a:t>permite</a:t>
+            </a:r>
+            <a:r>
+              <a:rPr sz="1600" dirty="0">
+                <a:solidFill>
+                  <a:schemeClr val="bg1"/>
+                </a:solidFill>
+              </a:rPr>
+              <a:t> </a:t>
+            </a:r>
+            <a:r>
+              <a:rPr sz="1600" dirty="0" err="1">
+                <a:solidFill>
+                  <a:schemeClr val="bg1"/>
+                </a:solidFill>
+              </a:rPr>
+              <a:t>buscar</a:t>
+            </a:r>
+            <a:r>
+              <a:rPr sz="1600" dirty="0">
+                <a:solidFill>
+                  <a:schemeClr val="bg1"/>
+                </a:solidFill>
+              </a:rPr>
+              <a:t> </a:t>
+            </a:r>
+            <a:r>
+              <a:rPr sz="1600" dirty="0" err="1">
+                <a:solidFill>
+                  <a:schemeClr val="bg1"/>
+                </a:solidFill>
+              </a:rPr>
+              <a:t>por</a:t>
+            </a:r>
+            <a:r>
+              <a:rPr sz="1600" dirty="0">
+                <a:solidFill>
+                  <a:schemeClr val="bg1"/>
+                </a:solidFill>
+              </a:rPr>
+              <a:t> owner o </a:t>
+            </a:r>
+            <a:r>
+              <a:rPr sz="1600" dirty="0" err="1">
+                <a:solidFill>
+                  <a:schemeClr val="bg1"/>
+                </a:solidFill>
+              </a:rPr>
+              <a:t>por</a:t>
+            </a:r>
+            <a:r>
+              <a:rPr sz="1600" dirty="0">
+                <a:solidFill>
+                  <a:schemeClr val="bg1"/>
+                </a:solidFill>
+              </a:rPr>
+              <a:t> type</a:t>
+            </a:r>
+            <a:br>
+              <a:rPr sz="1600" dirty="0">
+                <a:solidFill>
+                  <a:schemeClr val="bg1"/>
+                </a:solidFill>
+              </a:rPr>
+            </a:br>
+            <a:r>
+              <a:rPr sz="1600" dirty="0">
+                <a:solidFill>
+                  <a:schemeClr val="bg1"/>
+                </a:solidFill>
+              </a:rPr>
+              <a:t>    key, err := </a:t>
+            </a:r>
+            <a:r>
+              <a:rPr sz="1600" dirty="0" err="1">
+                <a:solidFill>
+                  <a:schemeClr val="bg1"/>
+                </a:solidFill>
+              </a:rPr>
+              <a:t>ctx.GetStub</a:t>
+            </a:r>
+            <a:r>
+              <a:rPr sz="1600" dirty="0">
+                <a:solidFill>
+                  <a:schemeClr val="bg1"/>
+                </a:solidFill>
+              </a:rPr>
+              <a:t>().</a:t>
+            </a:r>
+            <a:r>
+              <a:rPr sz="1600" dirty="0" err="1">
+                <a:solidFill>
+                  <a:schemeClr val="bg1"/>
+                </a:solidFill>
+              </a:rPr>
+              <a:t>CreateCompositeKey</a:t>
+            </a:r>
+            <a:r>
+              <a:rPr sz="1600" dirty="0">
+                <a:solidFill>
+                  <a:schemeClr val="bg1"/>
+                </a:solidFill>
+              </a:rPr>
+              <a:t>("asset",</a:t>
+            </a:r>
+            <a:br>
+              <a:rPr sz="1600" dirty="0">
+                <a:solidFill>
+                  <a:schemeClr val="bg1"/>
+                </a:solidFill>
+              </a:rPr>
+            </a:br>
+            <a:r>
+              <a:rPr sz="1600" dirty="0">
+                <a:solidFill>
+                  <a:schemeClr val="bg1"/>
+                </a:solidFill>
+              </a:rPr>
+              <a:t>        []string{owner, </a:t>
+            </a:r>
+            <a:r>
+              <a:rPr sz="1600" dirty="0" err="1">
+                <a:solidFill>
+                  <a:schemeClr val="bg1"/>
+                </a:solidFill>
+              </a:rPr>
+              <a:t>assetType</a:t>
+            </a:r>
+            <a:r>
+              <a:rPr sz="1600" dirty="0">
+                <a:solidFill>
+                  <a:schemeClr val="bg1"/>
+                </a:solidFill>
+              </a:rPr>
+              <a:t>, id})</a:t>
+            </a:r>
+            <a:br>
+              <a:rPr sz="1600" dirty="0">
+                <a:solidFill>
+                  <a:schemeClr val="bg1"/>
+                </a:solidFill>
+              </a:rPr>
+            </a:br>
+            <a:r>
+              <a:rPr sz="1600" dirty="0">
+                <a:solidFill>
+                  <a:schemeClr val="bg1"/>
+                </a:solidFill>
+              </a:rPr>
               <a:t>    if err != nil {</a:t>
             </a:r>
-            <a:br/>
-            <a:r>
+            <a:br>
+              <a:rPr sz="1600" dirty="0">
+                <a:solidFill>
+                  <a:schemeClr val="bg1"/>
+                </a:solidFill>
+              </a:rPr>
+            </a:br>
+            <a:r>
+              <a:rPr sz="1600" dirty="0">
+                <a:solidFill>
+                  <a:schemeClr val="bg1"/>
+                </a:solidFill>
+              </a:rPr>
               <a:t>        return err</a:t>
             </a:r>
-            <a:br/>
-            <a:r>
+            <a:br>
+              <a:rPr sz="1600" dirty="0">
+                <a:solidFill>
+                  <a:schemeClr val="bg1"/>
+                </a:solidFill>
+              </a:rPr>
+            </a:br>
+            <a:r>
+              <a:rPr sz="1600" dirty="0">
+                <a:solidFill>
+                  <a:schemeClr val="bg1"/>
+                </a:solidFill>
+              </a:rPr>
               <a:t>    }</a:t>
             </a:r>
-            <a:br/>
-            <a:br/>
-            <a:r>
-              <a:t>    asset := Asset{ID: id, Owner: owner, Type: assetType, Value: value}</a:t>
-            </a:r>
-            <a:br/>
-            <a:r>
-              <a:t>    assetJSON, _ := json.Marshal(asset)</a:t>
-            </a:r>
-            <a:br/>
-            <a:r>
-              <a:t>    return ctx.GetStub().PutState(key, assetJSON)</a:t>
-            </a:r>
-            <a:br/>
-            <a:r>
+            <a:br>
+              <a:rPr sz="1600" dirty="0">
+                <a:solidFill>
+                  <a:schemeClr val="bg1"/>
+                </a:solidFill>
+              </a:rPr>
+            </a:br>
+            <a:br>
+              <a:rPr sz="1600" dirty="0">
+                <a:solidFill>
+                  <a:schemeClr val="bg1"/>
+                </a:solidFill>
+              </a:rPr>
+            </a:br>
+            <a:r>
+              <a:rPr sz="1600" dirty="0">
+                <a:solidFill>
+                  <a:schemeClr val="bg1"/>
+                </a:solidFill>
+              </a:rPr>
+              <a:t>    asset := Asset{ID: id, Owner: owner, Type: </a:t>
+            </a:r>
+            <a:r>
+              <a:rPr sz="1600" dirty="0" err="1">
+                <a:solidFill>
+                  <a:schemeClr val="bg1"/>
+                </a:solidFill>
+              </a:rPr>
+              <a:t>assetType</a:t>
+            </a:r>
+            <a:r>
+              <a:rPr sz="1600" dirty="0">
+                <a:solidFill>
+                  <a:schemeClr val="bg1"/>
+                </a:solidFill>
+              </a:rPr>
+              <a:t>, Value: value}</a:t>
+            </a:r>
+            <a:br>
+              <a:rPr sz="1600" dirty="0">
+                <a:solidFill>
+                  <a:schemeClr val="bg1"/>
+                </a:solidFill>
+              </a:rPr>
+            </a:br>
+            <a:r>
+              <a:rPr sz="1600" dirty="0">
+                <a:solidFill>
+                  <a:schemeClr val="bg1"/>
+                </a:solidFill>
+              </a:rPr>
+              <a:t>    </a:t>
+            </a:r>
+            <a:r>
+              <a:rPr sz="1600" dirty="0" err="1">
+                <a:solidFill>
+                  <a:schemeClr val="bg1"/>
+                </a:solidFill>
+              </a:rPr>
+              <a:t>assetJSON</a:t>
+            </a:r>
+            <a:r>
+              <a:rPr sz="1600" dirty="0">
+                <a:solidFill>
+                  <a:schemeClr val="bg1"/>
+                </a:solidFill>
+              </a:rPr>
+              <a:t>, _ := </a:t>
+            </a:r>
+            <a:r>
+              <a:rPr sz="1600" dirty="0" err="1">
+                <a:solidFill>
+                  <a:schemeClr val="bg1"/>
+                </a:solidFill>
+              </a:rPr>
+              <a:t>json.Marshal</a:t>
+            </a:r>
+            <a:r>
+              <a:rPr sz="1600" dirty="0">
+                <a:solidFill>
+                  <a:schemeClr val="bg1"/>
+                </a:solidFill>
+              </a:rPr>
+              <a:t>(asset)</a:t>
+            </a:r>
+            <a:br>
+              <a:rPr sz="1600" dirty="0">
+                <a:solidFill>
+                  <a:schemeClr val="bg1"/>
+                </a:solidFill>
+              </a:rPr>
+            </a:br>
+            <a:r>
+              <a:rPr sz="1600" dirty="0">
+                <a:solidFill>
+                  <a:schemeClr val="bg1"/>
+                </a:solidFill>
+              </a:rPr>
+              <a:t>    return </a:t>
+            </a:r>
+            <a:r>
+              <a:rPr sz="1600" dirty="0" err="1">
+                <a:solidFill>
+                  <a:schemeClr val="bg1"/>
+                </a:solidFill>
+              </a:rPr>
+              <a:t>ctx.GetStub</a:t>
+            </a:r>
+            <a:r>
+              <a:rPr sz="1600" dirty="0">
+                <a:solidFill>
+                  <a:schemeClr val="bg1"/>
+                </a:solidFill>
+              </a:rPr>
+              <a:t>().</a:t>
+            </a:r>
+            <a:r>
+              <a:rPr sz="1600" dirty="0" err="1">
+                <a:solidFill>
+                  <a:schemeClr val="bg1"/>
+                </a:solidFill>
+              </a:rPr>
+              <a:t>PutState</a:t>
+            </a:r>
+            <a:r>
+              <a:rPr sz="1600" dirty="0">
+                <a:solidFill>
+                  <a:schemeClr val="bg1"/>
+                </a:solidFill>
+              </a:rPr>
+              <a:t>(key, </a:t>
+            </a:r>
+            <a:r>
+              <a:rPr sz="1600" dirty="0" err="1">
+                <a:solidFill>
+                  <a:schemeClr val="bg1"/>
+                </a:solidFill>
+              </a:rPr>
+              <a:t>assetJSON</a:t>
+            </a:r>
+            <a:r>
+              <a:rPr sz="1600" dirty="0">
+                <a:solidFill>
+                  <a:schemeClr val="bg1"/>
+                </a:solidFill>
+              </a:rPr>
+              <a:t>)</a:t>
+            </a:r>
+            <a:br>
+              <a:rPr sz="1600" dirty="0">
+                <a:solidFill>
+                  <a:schemeClr val="bg1"/>
+                </a:solidFill>
+              </a:rPr>
+            </a:br>
+            <a:r>
+              <a:rPr sz="1600" dirty="0">
+                <a:solidFill>
+                  <a:schemeClr val="bg1"/>
+                </a:solidFill>
+              </a:rPr>
               <a:t>}</a:t>
             </a:r>
-            <a:br/>
-            <a:br/>
-            <a:r>
+            <a:br>
+              <a:rPr sz="1600" dirty="0">
+                <a:solidFill>
+                  <a:schemeClr val="bg1"/>
+                </a:solidFill>
+              </a:rPr>
+            </a:br>
+            <a:br>
+              <a:rPr sz="1600" dirty="0">
+                <a:solidFill>
+                  <a:schemeClr val="bg1"/>
+                </a:solidFill>
+              </a:rPr>
+            </a:br>
+            <a:endParaRPr sz="1600" dirty="0">
+              <a:solidFill>
+                <a:schemeClr val="bg1"/>
+              </a:solidFill>
+            </a:endParaRPr>
+          </a:p>
+        </p:txBody>
+      </p:sp>
+      <p:sp>
+        <p:nvSpPr>
+          <p:cNvPr id="9" name="CuadroTexto 8">
+            <a:extLst>
+              <a:ext uri="{FF2B5EF4-FFF2-40B4-BE49-F238E27FC236}">
+                <a16:creationId xmlns:a16="http://schemas.microsoft.com/office/drawing/2014/main" id="{8E0D73F4-1AB6-CF31-3B46-D29ED4149C90}"/>
+              </a:ext>
+            </a:extLst>
+          </p:cNvPr>
+          <p:cNvSpPr txBox="1"/>
+          <p:nvPr/>
+        </p:nvSpPr>
+        <p:spPr>
+          <a:xfrm>
+            <a:off x="6774645" y="1847088"/>
+            <a:ext cx="4697451" cy="2554545"/>
+          </a:xfrm>
+          <a:prstGeom prst="rect">
+            <a:avLst/>
+          </a:prstGeom>
+          <a:noFill/>
+        </p:spPr>
+        <p:txBody>
+          <a:bodyPr wrap="square">
+            <a:spAutoFit/>
+          </a:bodyPr>
+          <a:lstStyle/>
+          <a:p>
+            <a:r>
+              <a:rPr lang="es-ES" sz="1600" dirty="0">
+                <a:solidFill>
+                  <a:schemeClr val="bg1"/>
+                </a:solidFill>
+              </a:rPr>
               <a:t>// Buscar todos los activos de un propietario</a:t>
             </a:r>
-            <a:br/>
-            <a:r>
-              <a:t>func (s *SmartContract) GetAssetsByOwner(ctx contractapi.TransactionContextInterface,</a:t>
-            </a:r>
-            <a:br/>
-            <a:r>
-              <a:t>    owner string) ([]*Asset, error) {</a:t>
-            </a:r>
-            <a:br/>
-            <a:br/>
-            <a:r>
-              <a:t>    iterator, err := ctx.GetStub().GetStateByPartialCompositeKey("asset",</a:t>
-            </a:r>
-            <a:br/>
-            <a:r>
-              <a:t>        []string{owner})</a:t>
-            </a:r>
-            <a:br/>
-            <a:r>
+            <a:br>
+              <a:rPr lang="es-ES" sz="1600" dirty="0">
+                <a:solidFill>
+                  <a:schemeClr val="bg1"/>
+                </a:solidFill>
+              </a:rPr>
+            </a:br>
+            <a:r>
+              <a:rPr lang="es-ES" sz="1600" dirty="0" err="1">
+                <a:solidFill>
+                  <a:schemeClr val="bg1"/>
+                </a:solidFill>
+              </a:rPr>
+              <a:t>func</a:t>
+            </a:r>
+            <a:r>
+              <a:rPr lang="es-ES" sz="1600" dirty="0">
+                <a:solidFill>
+                  <a:schemeClr val="bg1"/>
+                </a:solidFill>
+              </a:rPr>
+              <a:t> (s *</a:t>
+            </a:r>
+            <a:r>
+              <a:rPr lang="es-ES" sz="1600" dirty="0" err="1">
+                <a:solidFill>
+                  <a:schemeClr val="bg1"/>
+                </a:solidFill>
+              </a:rPr>
+              <a:t>SmartContract</a:t>
+            </a:r>
+            <a:r>
+              <a:rPr lang="es-ES" sz="1600" dirty="0">
+                <a:solidFill>
+                  <a:schemeClr val="bg1"/>
+                </a:solidFill>
+              </a:rPr>
+              <a:t>) </a:t>
+            </a:r>
+            <a:r>
+              <a:rPr lang="es-ES" sz="1600" dirty="0" err="1">
+                <a:solidFill>
+                  <a:schemeClr val="bg1"/>
+                </a:solidFill>
+              </a:rPr>
+              <a:t>GetAssetsByOwner</a:t>
+            </a:r>
+            <a:r>
+              <a:rPr lang="es-ES" sz="1600" dirty="0">
+                <a:solidFill>
+                  <a:schemeClr val="bg1"/>
+                </a:solidFill>
+              </a:rPr>
+              <a:t>(</a:t>
+            </a:r>
+            <a:r>
+              <a:rPr lang="es-ES" sz="1600" dirty="0" err="1">
+                <a:solidFill>
+                  <a:schemeClr val="bg1"/>
+                </a:solidFill>
+              </a:rPr>
+              <a:t>ctx</a:t>
+            </a:r>
+            <a:r>
+              <a:rPr lang="es-ES" sz="1600" dirty="0">
+                <a:solidFill>
+                  <a:schemeClr val="bg1"/>
+                </a:solidFill>
+              </a:rPr>
+              <a:t> </a:t>
+            </a:r>
+            <a:r>
+              <a:rPr lang="es-ES" sz="1600" dirty="0" err="1">
+                <a:solidFill>
+                  <a:schemeClr val="bg1"/>
+                </a:solidFill>
+              </a:rPr>
+              <a:t>contractapi.TransactionContextInterface</a:t>
+            </a:r>
+            <a:r>
+              <a:rPr lang="es-ES" sz="1600" dirty="0">
+                <a:solidFill>
+                  <a:schemeClr val="bg1"/>
+                </a:solidFill>
+              </a:rPr>
+              <a:t>,</a:t>
+            </a:r>
+            <a:br>
+              <a:rPr lang="es-ES" sz="1600" dirty="0">
+                <a:solidFill>
+                  <a:schemeClr val="bg1"/>
+                </a:solidFill>
+              </a:rPr>
+            </a:br>
+            <a:r>
+              <a:rPr lang="es-ES" sz="1600" dirty="0">
+                <a:solidFill>
+                  <a:schemeClr val="bg1"/>
+                </a:solidFill>
+              </a:rPr>
+              <a:t>    </a:t>
+            </a:r>
+            <a:r>
+              <a:rPr lang="es-ES" sz="1600" dirty="0" err="1">
+                <a:solidFill>
+                  <a:schemeClr val="bg1"/>
+                </a:solidFill>
+              </a:rPr>
+              <a:t>owner</a:t>
+            </a:r>
+            <a:r>
+              <a:rPr lang="es-ES" sz="1600" dirty="0">
+                <a:solidFill>
+                  <a:schemeClr val="bg1"/>
+                </a:solidFill>
+              </a:rPr>
+              <a:t> </a:t>
+            </a:r>
+            <a:r>
+              <a:rPr lang="es-ES" sz="1600" dirty="0" err="1">
+                <a:solidFill>
+                  <a:schemeClr val="bg1"/>
+                </a:solidFill>
+              </a:rPr>
+              <a:t>string</a:t>
+            </a:r>
+            <a:r>
+              <a:rPr lang="es-ES" sz="1600" dirty="0">
+                <a:solidFill>
+                  <a:schemeClr val="bg1"/>
+                </a:solidFill>
+              </a:rPr>
+              <a:t>) ([]*</a:t>
+            </a:r>
+            <a:r>
+              <a:rPr lang="es-ES" sz="1600" dirty="0" err="1">
+                <a:solidFill>
+                  <a:schemeClr val="bg1"/>
+                </a:solidFill>
+              </a:rPr>
+              <a:t>Asset</a:t>
+            </a:r>
+            <a:r>
+              <a:rPr lang="es-ES" sz="1600" dirty="0">
+                <a:solidFill>
+                  <a:schemeClr val="bg1"/>
+                </a:solidFill>
+              </a:rPr>
+              <a:t>, error) {</a:t>
+            </a:r>
+            <a:br>
+              <a:rPr lang="es-ES" sz="1600" dirty="0">
+                <a:solidFill>
+                  <a:schemeClr val="bg1"/>
+                </a:solidFill>
+              </a:rPr>
+            </a:br>
+            <a:br>
+              <a:rPr lang="es-ES" sz="1600" dirty="0">
+                <a:solidFill>
+                  <a:schemeClr val="bg1"/>
+                </a:solidFill>
+              </a:rPr>
+            </a:br>
+            <a:r>
+              <a:rPr lang="es-ES" sz="1600" dirty="0">
+                <a:solidFill>
+                  <a:schemeClr val="bg1"/>
+                </a:solidFill>
+              </a:rPr>
+              <a:t>    </a:t>
+            </a:r>
+            <a:r>
+              <a:rPr lang="es-ES" sz="1600" dirty="0" err="1">
+                <a:solidFill>
+                  <a:schemeClr val="bg1"/>
+                </a:solidFill>
+              </a:rPr>
+              <a:t>iterator</a:t>
+            </a:r>
+            <a:r>
+              <a:rPr lang="es-ES" sz="1600" dirty="0">
+                <a:solidFill>
+                  <a:schemeClr val="bg1"/>
+                </a:solidFill>
+              </a:rPr>
+              <a:t>, </a:t>
+            </a:r>
+            <a:r>
+              <a:rPr lang="es-ES" sz="1600" dirty="0" err="1">
+                <a:solidFill>
+                  <a:schemeClr val="bg1"/>
+                </a:solidFill>
+              </a:rPr>
+              <a:t>err</a:t>
+            </a:r>
+            <a:r>
+              <a:rPr lang="es-ES" sz="1600" dirty="0">
+                <a:solidFill>
+                  <a:schemeClr val="bg1"/>
+                </a:solidFill>
+              </a:rPr>
+              <a:t> := </a:t>
+            </a:r>
+            <a:r>
+              <a:rPr lang="es-ES" sz="1600" dirty="0" err="1">
+                <a:solidFill>
+                  <a:schemeClr val="bg1"/>
+                </a:solidFill>
+              </a:rPr>
+              <a:t>ctx.GetStub</a:t>
+            </a:r>
+            <a:r>
+              <a:rPr lang="es-ES" sz="1600" dirty="0">
+                <a:solidFill>
+                  <a:schemeClr val="bg1"/>
+                </a:solidFill>
+              </a:rPr>
+              <a:t>().</a:t>
+            </a:r>
+            <a:r>
+              <a:rPr lang="es-ES" sz="1600" dirty="0" err="1">
+                <a:solidFill>
+                  <a:schemeClr val="bg1"/>
+                </a:solidFill>
+              </a:rPr>
+              <a:t>GetStateByPartialCompositeKey</a:t>
+            </a:r>
+            <a:r>
+              <a:rPr lang="es-ES" sz="1600" dirty="0">
+                <a:solidFill>
+                  <a:schemeClr val="bg1"/>
+                </a:solidFill>
+              </a:rPr>
+              <a:t>("</a:t>
+            </a:r>
+            <a:r>
+              <a:rPr lang="es-ES" sz="1600" dirty="0" err="1">
+                <a:solidFill>
+                  <a:schemeClr val="bg1"/>
+                </a:solidFill>
+              </a:rPr>
+              <a:t>asset</a:t>
+            </a:r>
+            <a:r>
+              <a:rPr lang="es-ES" sz="1600" dirty="0">
+                <a:solidFill>
+                  <a:schemeClr val="bg1"/>
+                </a:solidFill>
+              </a:rPr>
+              <a:t>",</a:t>
+            </a:r>
+            <a:br>
+              <a:rPr lang="es-ES" sz="1600" dirty="0">
+                <a:solidFill>
+                  <a:schemeClr val="bg1"/>
+                </a:solidFill>
+              </a:rPr>
+            </a:br>
+            <a:r>
+              <a:rPr lang="es-ES" sz="1600" dirty="0">
+                <a:solidFill>
+                  <a:schemeClr val="bg1"/>
+                </a:solidFill>
+              </a:rPr>
+              <a:t>        []</a:t>
+            </a:r>
+            <a:r>
+              <a:rPr lang="es-ES" sz="1600" dirty="0" err="1">
+                <a:solidFill>
+                  <a:schemeClr val="bg1"/>
+                </a:solidFill>
+              </a:rPr>
+              <a:t>string</a:t>
+            </a:r>
+            <a:r>
+              <a:rPr lang="es-ES" sz="1600" dirty="0">
+                <a:solidFill>
+                  <a:schemeClr val="bg1"/>
+                </a:solidFill>
+              </a:rPr>
+              <a:t>{</a:t>
+            </a:r>
+            <a:r>
+              <a:rPr lang="es-ES" sz="1600" dirty="0" err="1">
+                <a:solidFill>
+                  <a:schemeClr val="bg1"/>
+                </a:solidFill>
+              </a:rPr>
+              <a:t>owner</a:t>
+            </a:r>
+            <a:r>
+              <a:rPr lang="es-ES" sz="1600" dirty="0">
+                <a:solidFill>
+                  <a:schemeClr val="bg1"/>
+                </a:solidFill>
+              </a:rPr>
+              <a:t>})</a:t>
+            </a:r>
+            <a:br>
+              <a:rPr lang="es-ES" sz="1600" dirty="0">
+                <a:solidFill>
+                  <a:schemeClr val="bg1"/>
+                </a:solidFill>
+              </a:rPr>
+            </a:br>
+            <a:r>
+              <a:rPr lang="es-ES" sz="1600" dirty="0">
+                <a:solidFill>
+                  <a:schemeClr val="bg1"/>
+                </a:solidFill>
+              </a:rPr>
               <a:t>    // ... iterar sobre resultados</a:t>
             </a:r>
-            <a:br/>
-            <a:r>
+            <a:br>
+              <a:rPr lang="es-ES" sz="1600" dirty="0">
+                <a:solidFill>
+                  <a:schemeClr val="bg1"/>
+                </a:solidFill>
+              </a:rPr>
+            </a:br>
+            <a:r>
+              <a:rPr lang="es-ES" sz="1600" dirty="0">
+                <a:solidFill>
+                  <a:schemeClr val="bg1"/>
+                </a:solidFill>
+              </a:rPr>
               <a:t>}</a:t>
             </a:r>
+            <a:endParaRPr lang="es-ES" sz="1600" dirty="0"/>
+          </a:p>
+        </p:txBody>
+      </p:sp>
+      <p:sp>
+        <p:nvSpPr>
+          <p:cNvPr id="10" name="Rectángulo 9">
+            <a:extLst>
+              <a:ext uri="{FF2B5EF4-FFF2-40B4-BE49-F238E27FC236}">
+                <a16:creationId xmlns:a16="http://schemas.microsoft.com/office/drawing/2014/main" id="{A39A7099-A5C0-B10B-736B-C1A866F298C7}"/>
+              </a:ext>
+            </a:extLst>
+          </p:cNvPr>
+          <p:cNvSpPr/>
+          <p:nvPr/>
+        </p:nvSpPr>
+        <p:spPr>
+          <a:xfrm>
+            <a:off x="6622708" y="1234440"/>
+            <a:ext cx="45719" cy="5120640"/>
+          </a:xfrm>
+          <a:prstGeom prst="rect">
+            <a:avLst/>
+          </a:prstGeom>
+        </p:spPr>
+        <p:style>
+          <a:lnRef idx="1">
+            <a:schemeClr val="accent1"/>
+          </a:lnRef>
+          <a:fillRef idx="3">
+            <a:schemeClr val="accent1"/>
+          </a:fillRef>
+          <a:effectRef idx="2">
+            <a:schemeClr val="accent1"/>
+          </a:effectRef>
+          <a:fontRef idx="minor">
+            <a:schemeClr val="lt1"/>
+          </a:fontRef>
+        </p:style>
+        <p:txBody>
+          <a:bodyPr rtlCol="0" anchor="ctr"/>
+          <a:lstStyle/>
+          <a:p>
+            <a:pPr algn="ctr"/>
+            <a:endParaRPr lang="es-ES"/>
           </a:p>
         </p:txBody>
       </p:sp>
@@ -4582,7 +5491,11 @@
           <a:lstStyle/>
           <a:p>
             <a:pPr algn="ctr"/>
-            <a:endParaRPr/>
+            <a:endParaRPr>
+              <a:solidFill>
+                <a:schemeClr val="bg1"/>
+              </a:solidFill>
+            </a:endParaRPr>
           </a:p>
         </p:txBody>
       </p:sp>
@@ -4606,66 +5519,869 @@
           <a:bodyPr wrap="square"/>
           <a:lstStyle/>
           <a:p>
-            <a:br/>
-            <a:r>
-              <a:t>// Propiedad inmobiliaria</a:t>
-            </a:r>
-            <a:br/>
-            <a:r>
+            <a:br>
+              <a:rPr dirty="0">
+                <a:solidFill>
+                  <a:schemeClr val="bg1"/>
+                </a:solidFill>
+              </a:rPr>
+            </a:br>
+            <a:r>
+              <a:rPr dirty="0">
+                <a:solidFill>
+                  <a:schemeClr val="bg1"/>
+                </a:solidFill>
+              </a:rPr>
+              <a:t>// </a:t>
+            </a:r>
+            <a:r>
+              <a:rPr dirty="0" err="1">
+                <a:solidFill>
+                  <a:schemeClr val="bg1"/>
+                </a:solidFill>
+              </a:rPr>
+              <a:t>Propiedad</a:t>
+            </a:r>
+            <a:r>
+              <a:rPr dirty="0">
+                <a:solidFill>
+                  <a:schemeClr val="bg1"/>
+                </a:solidFill>
+              </a:rPr>
+              <a:t> </a:t>
+            </a:r>
+            <a:r>
+              <a:rPr dirty="0" err="1">
+                <a:solidFill>
+                  <a:schemeClr val="bg1"/>
+                </a:solidFill>
+              </a:rPr>
+              <a:t>inmobiliaria</a:t>
+            </a:r>
+            <a:br>
+              <a:rPr dirty="0">
+                <a:solidFill>
+                  <a:schemeClr val="bg1"/>
+                </a:solidFill>
+              </a:rPr>
+            </a:br>
+            <a:r>
+              <a:rPr dirty="0">
+                <a:solidFill>
+                  <a:schemeClr val="bg1"/>
+                </a:solidFill>
+              </a:rPr>
               <a:t>type Property struct {</a:t>
             </a:r>
-            <a:br/>
-            <a:r>
-              <a:t>    DocType       string `json:"docType"`       // siempre "property"</a:t>
-            </a:r>
-            <a:br/>
-            <a:r>
-              <a:t>    ID            string `json:"id"`            // referencia catastral</a:t>
-            </a:r>
-            <a:br/>
-            <a:r>
-              <a:t>    Address       string `json:"address"`       // direccion fisica</a:t>
-            </a:r>
-            <a:br/>
-            <a:r>
-              <a:t>    Owner         string `json:"owner"`         // ID del propietario (MSP)</a:t>
-            </a:r>
-            <a:br/>
-            <a:r>
-              <a:t>    OwnerName     string `json:"ownerName"`     // nombre del propietario</a:t>
-            </a:r>
-            <a:br/>
-            <a:r>
-              <a:t>    Area          int    `json:"area"`          // metros cuadrados</a:t>
-            </a:r>
-            <a:br/>
-            <a:r>
-              <a:t>    PropertyType  string `json:"propertyType"`  // "apartment"|"house"|"land"</a:t>
-            </a:r>
-            <a:br/>
-            <a:r>
-              <a:t>    Status        string `json:"status"`        // "active"|"transferring"|"blocked"</a:t>
-            </a:r>
-            <a:br/>
-            <a:r>
-              <a:t>    RegisteredAt  string `json:"registeredAt"`  // fecha de registro</a:t>
-            </a:r>
-            <a:br/>
-            <a:r>
-              <a:t>    AppraisalValue int   `json:"appraisalValue"` // valor de tasacion (euros)</a:t>
-            </a:r>
-            <a:br/>
-            <a:r>
+            <a:br>
+              <a:rPr dirty="0">
+                <a:solidFill>
+                  <a:schemeClr val="bg1"/>
+                </a:solidFill>
+              </a:rPr>
+            </a:br>
+            <a:r>
+              <a:rPr dirty="0">
+                <a:solidFill>
+                  <a:schemeClr val="bg1"/>
+                </a:solidFill>
+              </a:rPr>
+              <a:t>    </a:t>
+            </a:r>
+            <a:r>
+              <a:rPr dirty="0" err="1">
+                <a:solidFill>
+                  <a:schemeClr val="bg1"/>
+                </a:solidFill>
+              </a:rPr>
+              <a:t>DocType</a:t>
+            </a:r>
+            <a:r>
+              <a:rPr dirty="0">
+                <a:solidFill>
+                  <a:schemeClr val="bg1"/>
+                </a:solidFill>
+              </a:rPr>
+              <a:t>       string `</a:t>
+            </a:r>
+            <a:r>
+              <a:rPr dirty="0" err="1">
+                <a:solidFill>
+                  <a:schemeClr val="bg1"/>
+                </a:solidFill>
+              </a:rPr>
+              <a:t>json</a:t>
+            </a:r>
+            <a:r>
+              <a:rPr dirty="0">
+                <a:solidFill>
+                  <a:schemeClr val="bg1"/>
+                </a:solidFill>
+              </a:rPr>
+              <a:t>:"</a:t>
+            </a:r>
+            <a:r>
+              <a:rPr dirty="0" err="1">
+                <a:solidFill>
+                  <a:schemeClr val="bg1"/>
+                </a:solidFill>
+              </a:rPr>
+              <a:t>docType</a:t>
+            </a:r>
+            <a:r>
+              <a:rPr dirty="0">
+                <a:solidFill>
+                  <a:schemeClr val="bg1"/>
+                </a:solidFill>
+              </a:rPr>
+              <a:t>"`       // </a:t>
+            </a:r>
+            <a:r>
+              <a:rPr dirty="0" err="1">
+                <a:solidFill>
+                  <a:schemeClr val="bg1"/>
+                </a:solidFill>
+              </a:rPr>
+              <a:t>siempre</a:t>
+            </a:r>
+            <a:r>
+              <a:rPr dirty="0">
+                <a:solidFill>
+                  <a:schemeClr val="bg1"/>
+                </a:solidFill>
+              </a:rPr>
+              <a:t> "property"</a:t>
+            </a:r>
+            <a:br>
+              <a:rPr dirty="0">
+                <a:solidFill>
+                  <a:schemeClr val="bg1"/>
+                </a:solidFill>
+              </a:rPr>
+            </a:br>
+            <a:r>
+              <a:rPr dirty="0">
+                <a:solidFill>
+                  <a:schemeClr val="bg1"/>
+                </a:solidFill>
+              </a:rPr>
+              <a:t>    ID            string `</a:t>
+            </a:r>
+            <a:r>
+              <a:rPr dirty="0" err="1">
+                <a:solidFill>
+                  <a:schemeClr val="bg1"/>
+                </a:solidFill>
+              </a:rPr>
+              <a:t>json</a:t>
+            </a:r>
+            <a:r>
+              <a:rPr dirty="0">
+                <a:solidFill>
+                  <a:schemeClr val="bg1"/>
+                </a:solidFill>
+              </a:rPr>
+              <a:t>:"id"`            // </a:t>
+            </a:r>
+            <a:r>
+              <a:rPr dirty="0" err="1">
+                <a:solidFill>
+                  <a:schemeClr val="bg1"/>
+                </a:solidFill>
+              </a:rPr>
+              <a:t>referencia</a:t>
+            </a:r>
+            <a:r>
+              <a:rPr dirty="0">
+                <a:solidFill>
+                  <a:schemeClr val="bg1"/>
+                </a:solidFill>
+              </a:rPr>
+              <a:t> </a:t>
+            </a:r>
+            <a:r>
+              <a:rPr dirty="0" err="1">
+                <a:solidFill>
+                  <a:schemeClr val="bg1"/>
+                </a:solidFill>
+              </a:rPr>
+              <a:t>catastral</a:t>
+            </a:r>
+            <a:br>
+              <a:rPr dirty="0">
+                <a:solidFill>
+                  <a:schemeClr val="bg1"/>
+                </a:solidFill>
+              </a:rPr>
+            </a:br>
+            <a:r>
+              <a:rPr dirty="0">
+                <a:solidFill>
+                  <a:schemeClr val="bg1"/>
+                </a:solidFill>
+              </a:rPr>
+              <a:t>    Address       string `</a:t>
+            </a:r>
+            <a:r>
+              <a:rPr dirty="0" err="1">
+                <a:solidFill>
+                  <a:schemeClr val="bg1"/>
+                </a:solidFill>
+              </a:rPr>
+              <a:t>json</a:t>
+            </a:r>
+            <a:r>
+              <a:rPr dirty="0">
+                <a:solidFill>
+                  <a:schemeClr val="bg1"/>
+                </a:solidFill>
+              </a:rPr>
+              <a:t>:"address"`       // </a:t>
+            </a:r>
+            <a:r>
+              <a:rPr dirty="0" err="1">
+                <a:solidFill>
+                  <a:schemeClr val="bg1"/>
+                </a:solidFill>
+              </a:rPr>
+              <a:t>direccion</a:t>
+            </a:r>
+            <a:r>
+              <a:rPr dirty="0">
+                <a:solidFill>
+                  <a:schemeClr val="bg1"/>
+                </a:solidFill>
+              </a:rPr>
+              <a:t> </a:t>
+            </a:r>
+            <a:r>
+              <a:rPr dirty="0" err="1">
+                <a:solidFill>
+                  <a:schemeClr val="bg1"/>
+                </a:solidFill>
+              </a:rPr>
+              <a:t>fisica</a:t>
+            </a:r>
+            <a:br>
+              <a:rPr dirty="0">
+                <a:solidFill>
+                  <a:schemeClr val="bg1"/>
+                </a:solidFill>
+              </a:rPr>
+            </a:br>
+            <a:r>
+              <a:rPr dirty="0">
+                <a:solidFill>
+                  <a:schemeClr val="bg1"/>
+                </a:solidFill>
+              </a:rPr>
+              <a:t>    Owner         string `</a:t>
+            </a:r>
+            <a:r>
+              <a:rPr dirty="0" err="1">
+                <a:solidFill>
+                  <a:schemeClr val="bg1"/>
+                </a:solidFill>
+              </a:rPr>
+              <a:t>json</a:t>
+            </a:r>
+            <a:r>
+              <a:rPr dirty="0">
+                <a:solidFill>
+                  <a:schemeClr val="bg1"/>
+                </a:solidFill>
+              </a:rPr>
+              <a:t>:"owner"`         // ID del </a:t>
+            </a:r>
+            <a:r>
+              <a:rPr dirty="0" err="1">
+                <a:solidFill>
+                  <a:schemeClr val="bg1"/>
+                </a:solidFill>
+              </a:rPr>
+              <a:t>propietario</a:t>
+            </a:r>
+            <a:r>
+              <a:rPr dirty="0">
+                <a:solidFill>
+                  <a:schemeClr val="bg1"/>
+                </a:solidFill>
+              </a:rPr>
+              <a:t> (MSP)</a:t>
+            </a:r>
+            <a:br>
+              <a:rPr dirty="0">
+                <a:solidFill>
+                  <a:schemeClr val="bg1"/>
+                </a:solidFill>
+              </a:rPr>
+            </a:br>
+            <a:r>
+              <a:rPr dirty="0">
+                <a:solidFill>
+                  <a:schemeClr val="bg1"/>
+                </a:solidFill>
+              </a:rPr>
+              <a:t>    </a:t>
+            </a:r>
+            <a:r>
+              <a:rPr dirty="0" err="1">
+                <a:solidFill>
+                  <a:schemeClr val="bg1"/>
+                </a:solidFill>
+              </a:rPr>
+              <a:t>OwnerName</a:t>
+            </a:r>
+            <a:r>
+              <a:rPr dirty="0">
+                <a:solidFill>
+                  <a:schemeClr val="bg1"/>
+                </a:solidFill>
+              </a:rPr>
+              <a:t>     string `</a:t>
+            </a:r>
+            <a:r>
+              <a:rPr dirty="0" err="1">
+                <a:solidFill>
+                  <a:schemeClr val="bg1"/>
+                </a:solidFill>
+              </a:rPr>
+              <a:t>json</a:t>
+            </a:r>
+            <a:r>
+              <a:rPr dirty="0">
+                <a:solidFill>
+                  <a:schemeClr val="bg1"/>
+                </a:solidFill>
+              </a:rPr>
+              <a:t>:"</a:t>
+            </a:r>
+            <a:r>
+              <a:rPr dirty="0" err="1">
+                <a:solidFill>
+                  <a:schemeClr val="bg1"/>
+                </a:solidFill>
+              </a:rPr>
+              <a:t>ownerName</a:t>
+            </a:r>
+            <a:r>
+              <a:rPr dirty="0">
+                <a:solidFill>
+                  <a:schemeClr val="bg1"/>
+                </a:solidFill>
+              </a:rPr>
+              <a:t>"`     // </a:t>
+            </a:r>
+            <a:r>
+              <a:rPr dirty="0" err="1">
+                <a:solidFill>
+                  <a:schemeClr val="bg1"/>
+                </a:solidFill>
+              </a:rPr>
+              <a:t>nombre</a:t>
+            </a:r>
+            <a:r>
+              <a:rPr dirty="0">
+                <a:solidFill>
+                  <a:schemeClr val="bg1"/>
+                </a:solidFill>
+              </a:rPr>
+              <a:t> del </a:t>
+            </a:r>
+            <a:r>
+              <a:rPr dirty="0" err="1">
+                <a:solidFill>
+                  <a:schemeClr val="bg1"/>
+                </a:solidFill>
+              </a:rPr>
+              <a:t>propietario</a:t>
+            </a:r>
+            <a:br>
+              <a:rPr dirty="0">
+                <a:solidFill>
+                  <a:schemeClr val="bg1"/>
+                </a:solidFill>
+              </a:rPr>
+            </a:br>
+            <a:r>
+              <a:rPr dirty="0">
+                <a:solidFill>
+                  <a:schemeClr val="bg1"/>
+                </a:solidFill>
+              </a:rPr>
+              <a:t>    Area          int    `</a:t>
+            </a:r>
+            <a:r>
+              <a:rPr dirty="0" err="1">
+                <a:solidFill>
+                  <a:schemeClr val="bg1"/>
+                </a:solidFill>
+              </a:rPr>
+              <a:t>json</a:t>
+            </a:r>
+            <a:r>
+              <a:rPr dirty="0">
+                <a:solidFill>
+                  <a:schemeClr val="bg1"/>
+                </a:solidFill>
+              </a:rPr>
+              <a:t>:"area"`          // metros </a:t>
+            </a:r>
+            <a:r>
+              <a:rPr dirty="0" err="1">
+                <a:solidFill>
+                  <a:schemeClr val="bg1"/>
+                </a:solidFill>
+              </a:rPr>
+              <a:t>cuadrados</a:t>
+            </a:r>
+            <a:br>
+              <a:rPr dirty="0">
+                <a:solidFill>
+                  <a:schemeClr val="bg1"/>
+                </a:solidFill>
+              </a:rPr>
+            </a:br>
+            <a:r>
+              <a:rPr dirty="0">
+                <a:solidFill>
+                  <a:schemeClr val="bg1"/>
+                </a:solidFill>
+              </a:rPr>
+              <a:t>    </a:t>
+            </a:r>
+            <a:r>
+              <a:rPr dirty="0" err="1">
+                <a:solidFill>
+                  <a:schemeClr val="bg1"/>
+                </a:solidFill>
+              </a:rPr>
+              <a:t>PropertyType</a:t>
+            </a:r>
+            <a:r>
+              <a:rPr dirty="0">
+                <a:solidFill>
+                  <a:schemeClr val="bg1"/>
+                </a:solidFill>
+              </a:rPr>
+              <a:t>  string `</a:t>
+            </a:r>
+            <a:r>
+              <a:rPr dirty="0" err="1">
+                <a:solidFill>
+                  <a:schemeClr val="bg1"/>
+                </a:solidFill>
+              </a:rPr>
+              <a:t>json</a:t>
+            </a:r>
+            <a:r>
+              <a:rPr dirty="0">
+                <a:solidFill>
+                  <a:schemeClr val="bg1"/>
+                </a:solidFill>
+              </a:rPr>
+              <a:t>:"</a:t>
+            </a:r>
+            <a:r>
+              <a:rPr dirty="0" err="1">
+                <a:solidFill>
+                  <a:schemeClr val="bg1"/>
+                </a:solidFill>
+              </a:rPr>
+              <a:t>propertyType</a:t>
+            </a:r>
+            <a:r>
+              <a:rPr dirty="0">
+                <a:solidFill>
+                  <a:schemeClr val="bg1"/>
+                </a:solidFill>
+              </a:rPr>
+              <a:t>"`  // "</a:t>
+            </a:r>
+            <a:r>
+              <a:rPr dirty="0" err="1">
+                <a:solidFill>
+                  <a:schemeClr val="bg1"/>
+                </a:solidFill>
+              </a:rPr>
+              <a:t>apartment"|"house"|"land</a:t>
+            </a:r>
+            <a:r>
+              <a:rPr dirty="0">
+                <a:solidFill>
+                  <a:schemeClr val="bg1"/>
+                </a:solidFill>
+              </a:rPr>
+              <a:t>"</a:t>
+            </a:r>
+            <a:br>
+              <a:rPr dirty="0">
+                <a:solidFill>
+                  <a:schemeClr val="bg1"/>
+                </a:solidFill>
+              </a:rPr>
+            </a:br>
+            <a:r>
+              <a:rPr dirty="0">
+                <a:solidFill>
+                  <a:schemeClr val="bg1"/>
+                </a:solidFill>
+              </a:rPr>
+              <a:t>    Status        string `</a:t>
+            </a:r>
+            <a:r>
+              <a:rPr dirty="0" err="1">
+                <a:solidFill>
+                  <a:schemeClr val="bg1"/>
+                </a:solidFill>
+              </a:rPr>
+              <a:t>json</a:t>
+            </a:r>
+            <a:r>
+              <a:rPr dirty="0">
+                <a:solidFill>
+                  <a:schemeClr val="bg1"/>
+                </a:solidFill>
+              </a:rPr>
+              <a:t>:"status"`        // "</a:t>
+            </a:r>
+            <a:r>
+              <a:rPr dirty="0" err="1">
+                <a:solidFill>
+                  <a:schemeClr val="bg1"/>
+                </a:solidFill>
+              </a:rPr>
+              <a:t>active"|"transferring"|"blocked</a:t>
+            </a:r>
+            <a:r>
+              <a:rPr dirty="0">
+                <a:solidFill>
+                  <a:schemeClr val="bg1"/>
+                </a:solidFill>
+              </a:rPr>
+              <a:t>"</a:t>
+            </a:r>
+            <a:br>
+              <a:rPr dirty="0">
+                <a:solidFill>
+                  <a:schemeClr val="bg1"/>
+                </a:solidFill>
+              </a:rPr>
+            </a:br>
+            <a:r>
+              <a:rPr dirty="0">
+                <a:solidFill>
+                  <a:schemeClr val="bg1"/>
+                </a:solidFill>
+              </a:rPr>
+              <a:t>    </a:t>
+            </a:r>
+            <a:r>
+              <a:rPr dirty="0" err="1">
+                <a:solidFill>
+                  <a:schemeClr val="bg1"/>
+                </a:solidFill>
+              </a:rPr>
+              <a:t>RegisteredAt</a:t>
+            </a:r>
+            <a:r>
+              <a:rPr dirty="0">
+                <a:solidFill>
+                  <a:schemeClr val="bg1"/>
+                </a:solidFill>
+              </a:rPr>
+              <a:t>  string `</a:t>
+            </a:r>
+            <a:r>
+              <a:rPr dirty="0" err="1">
+                <a:solidFill>
+                  <a:schemeClr val="bg1"/>
+                </a:solidFill>
+              </a:rPr>
+              <a:t>json</a:t>
+            </a:r>
+            <a:r>
+              <a:rPr dirty="0">
+                <a:solidFill>
+                  <a:schemeClr val="bg1"/>
+                </a:solidFill>
+              </a:rPr>
+              <a:t>:"</a:t>
+            </a:r>
+            <a:r>
+              <a:rPr dirty="0" err="1">
+                <a:solidFill>
+                  <a:schemeClr val="bg1"/>
+                </a:solidFill>
+              </a:rPr>
+              <a:t>registeredAt</a:t>
+            </a:r>
+            <a:r>
+              <a:rPr dirty="0">
+                <a:solidFill>
+                  <a:schemeClr val="bg1"/>
+                </a:solidFill>
+              </a:rPr>
+              <a:t>"`  // </a:t>
+            </a:r>
+            <a:r>
+              <a:rPr dirty="0" err="1">
+                <a:solidFill>
+                  <a:schemeClr val="bg1"/>
+                </a:solidFill>
+              </a:rPr>
+              <a:t>fecha</a:t>
+            </a:r>
+            <a:r>
+              <a:rPr dirty="0">
+                <a:solidFill>
+                  <a:schemeClr val="bg1"/>
+                </a:solidFill>
+              </a:rPr>
+              <a:t> de </a:t>
+            </a:r>
+            <a:r>
+              <a:rPr dirty="0" err="1">
+                <a:solidFill>
+                  <a:schemeClr val="bg1"/>
+                </a:solidFill>
+              </a:rPr>
+              <a:t>registro</a:t>
+            </a:r>
+            <a:br>
+              <a:rPr dirty="0">
+                <a:solidFill>
+                  <a:schemeClr val="bg1"/>
+                </a:solidFill>
+              </a:rPr>
+            </a:br>
+            <a:r>
+              <a:rPr dirty="0">
+                <a:solidFill>
+                  <a:schemeClr val="bg1"/>
+                </a:solidFill>
+              </a:rPr>
+              <a:t>    </a:t>
+            </a:r>
+            <a:r>
+              <a:rPr dirty="0" err="1">
+                <a:solidFill>
+                  <a:schemeClr val="bg1"/>
+                </a:solidFill>
+              </a:rPr>
+              <a:t>AppraisalValue</a:t>
+            </a:r>
+            <a:r>
+              <a:rPr dirty="0">
+                <a:solidFill>
+                  <a:schemeClr val="bg1"/>
+                </a:solidFill>
+              </a:rPr>
+              <a:t> int   `</a:t>
+            </a:r>
+            <a:r>
+              <a:rPr dirty="0" err="1">
+                <a:solidFill>
+                  <a:schemeClr val="bg1"/>
+                </a:solidFill>
+              </a:rPr>
+              <a:t>json</a:t>
+            </a:r>
+            <a:r>
+              <a:rPr dirty="0">
+                <a:solidFill>
+                  <a:schemeClr val="bg1"/>
+                </a:solidFill>
+              </a:rPr>
+              <a:t>:"</a:t>
+            </a:r>
+            <a:r>
+              <a:rPr dirty="0" err="1">
+                <a:solidFill>
+                  <a:schemeClr val="bg1"/>
+                </a:solidFill>
+              </a:rPr>
+              <a:t>appraisalValue</a:t>
+            </a:r>
+            <a:r>
+              <a:rPr dirty="0">
+                <a:solidFill>
+                  <a:schemeClr val="bg1"/>
+                </a:solidFill>
+              </a:rPr>
+              <a:t>"` // valor de </a:t>
+            </a:r>
+            <a:r>
+              <a:rPr dirty="0" err="1">
+                <a:solidFill>
+                  <a:schemeClr val="bg1"/>
+                </a:solidFill>
+              </a:rPr>
+              <a:t>tasacion</a:t>
+            </a:r>
+            <a:r>
+              <a:rPr dirty="0">
+                <a:solidFill>
+                  <a:schemeClr val="bg1"/>
+                </a:solidFill>
+              </a:rPr>
+              <a:t> (euros)</a:t>
+            </a:r>
+            <a:br>
+              <a:rPr dirty="0">
+                <a:solidFill>
+                  <a:schemeClr val="bg1"/>
+                </a:solidFill>
+              </a:rPr>
+            </a:br>
+            <a:r>
+              <a:rPr dirty="0">
+                <a:solidFill>
+                  <a:schemeClr val="bg1"/>
+                </a:solidFill>
+              </a:rPr>
               <a:t>}</a:t>
             </a:r>
-            <a:br/>
-            <a:br/>
-            <a:r>
-              <a:t>// Key design: "property" + comunidad + municipio + referencia_catastral</a:t>
-            </a:r>
-            <a:br/>
-            <a:r>
-              <a:t>// Permite buscar por comunidad, por municipio, o por referencia exacta</a:t>
+            <a:br>
+              <a:rPr dirty="0">
+                <a:solidFill>
+                  <a:schemeClr val="bg1"/>
+                </a:solidFill>
+              </a:rPr>
+            </a:br>
+            <a:br>
+              <a:rPr dirty="0">
+                <a:solidFill>
+                  <a:schemeClr val="bg1"/>
+                </a:solidFill>
+              </a:rPr>
+            </a:br>
+            <a:r>
+              <a:rPr dirty="0">
+                <a:solidFill>
+                  <a:schemeClr val="bg1"/>
+                </a:solidFill>
+              </a:rPr>
+              <a:t>// Key design: "property" + comunidad + municipio + </a:t>
+            </a:r>
+            <a:r>
+              <a:rPr dirty="0" err="1">
+                <a:solidFill>
+                  <a:schemeClr val="bg1"/>
+                </a:solidFill>
+              </a:rPr>
+              <a:t>referencia_catastral</a:t>
+            </a:r>
+            <a:br>
+              <a:rPr dirty="0">
+                <a:solidFill>
+                  <a:schemeClr val="bg1"/>
+                </a:solidFill>
+              </a:rPr>
+            </a:br>
+            <a:r>
+              <a:rPr dirty="0">
+                <a:solidFill>
+                  <a:schemeClr val="bg1"/>
+                </a:solidFill>
+              </a:rPr>
+              <a:t>// </a:t>
+            </a:r>
+            <a:r>
+              <a:rPr dirty="0" err="1">
+                <a:solidFill>
+                  <a:schemeClr val="bg1"/>
+                </a:solidFill>
+              </a:rPr>
+              <a:t>Permite</a:t>
+            </a:r>
+            <a:r>
+              <a:rPr dirty="0">
+                <a:solidFill>
+                  <a:schemeClr val="bg1"/>
+                </a:solidFill>
+              </a:rPr>
+              <a:t> </a:t>
+            </a:r>
+            <a:r>
+              <a:rPr dirty="0" err="1">
+                <a:solidFill>
+                  <a:schemeClr val="bg1"/>
+                </a:solidFill>
+              </a:rPr>
+              <a:t>buscar</a:t>
+            </a:r>
+            <a:r>
+              <a:rPr dirty="0">
+                <a:solidFill>
+                  <a:schemeClr val="bg1"/>
+                </a:solidFill>
+              </a:rPr>
+              <a:t> </a:t>
+            </a:r>
+            <a:r>
+              <a:rPr dirty="0" err="1">
+                <a:solidFill>
+                  <a:schemeClr val="bg1"/>
+                </a:solidFill>
+              </a:rPr>
+              <a:t>por</a:t>
+            </a:r>
+            <a:r>
+              <a:rPr dirty="0">
+                <a:solidFill>
+                  <a:schemeClr val="bg1"/>
+                </a:solidFill>
+              </a:rPr>
+              <a:t> comunidad, </a:t>
+            </a:r>
+            <a:r>
+              <a:rPr dirty="0" err="1">
+                <a:solidFill>
+                  <a:schemeClr val="bg1"/>
+                </a:solidFill>
+              </a:rPr>
+              <a:t>por</a:t>
+            </a:r>
+            <a:r>
+              <a:rPr dirty="0">
+                <a:solidFill>
+                  <a:schemeClr val="bg1"/>
+                </a:solidFill>
+              </a:rPr>
+              <a:t> municipio, o </a:t>
+            </a:r>
+            <a:r>
+              <a:rPr dirty="0" err="1">
+                <a:solidFill>
+                  <a:schemeClr val="bg1"/>
+                </a:solidFill>
+              </a:rPr>
+              <a:t>por</a:t>
+            </a:r>
+            <a:r>
+              <a:rPr dirty="0">
+                <a:solidFill>
+                  <a:schemeClr val="bg1"/>
+                </a:solidFill>
+              </a:rPr>
+              <a:t> </a:t>
+            </a:r>
+            <a:r>
+              <a:rPr dirty="0" err="1">
+                <a:solidFill>
+                  <a:schemeClr val="bg1"/>
+                </a:solidFill>
+              </a:rPr>
+              <a:t>referencia</a:t>
+            </a:r>
+            <a:r>
+              <a:rPr dirty="0">
+                <a:solidFill>
+                  <a:schemeClr val="bg1"/>
+                </a:solidFill>
+              </a:rPr>
+              <a:t> exacta</a:t>
             </a:r>
           </a:p>
         </p:txBody>
@@ -5478,87 +7194,801 @@
           <a:bodyPr wrap="square"/>
           <a:lstStyle/>
           <a:p>
-            <a:br/>
-            <a:r>
-              <a:t>// Buscar propiedades por tipo y rango de valor</a:t>
-            </a:r>
-            <a:br/>
-            <a:r>
-              <a:t>func (s *SmartContract) QueryProperties(ctx contractapi.TransactionContextInterface,</a:t>
-            </a:r>
-            <a:br/>
-            <a:r>
-              <a:t>    propertyType string, minValue int) ([]*Property, error) {</a:t>
-            </a:r>
-            <a:br/>
-            <a:br/>
-            <a:r>
-              <a:t>    // Mango query (sintaxis CouchDB)</a:t>
-            </a:r>
-            <a:br/>
-            <a:r>
-              <a:t>    queryString := fmt.Sprintf(</a:t>
-            </a:r>
-            <a:br/>
-            <a:r>
+            <a:r>
+              <a:rPr sz="1600" dirty="0">
+                <a:solidFill>
+                  <a:schemeClr val="bg1"/>
+                </a:solidFill>
+              </a:rPr>
+              <a:t>// </a:t>
+            </a:r>
+            <a:r>
+              <a:rPr sz="1600" dirty="0" err="1">
+                <a:solidFill>
+                  <a:schemeClr val="bg1"/>
+                </a:solidFill>
+              </a:rPr>
+              <a:t>Buscar</a:t>
+            </a:r>
+            <a:r>
+              <a:rPr sz="1600" dirty="0">
+                <a:solidFill>
+                  <a:schemeClr val="bg1"/>
+                </a:solidFill>
+              </a:rPr>
+              <a:t> </a:t>
+            </a:r>
+            <a:r>
+              <a:rPr sz="1600" dirty="0" err="1">
+                <a:solidFill>
+                  <a:schemeClr val="bg1"/>
+                </a:solidFill>
+              </a:rPr>
+              <a:t>propiedades</a:t>
+            </a:r>
+            <a:r>
+              <a:rPr sz="1600" dirty="0">
+                <a:solidFill>
+                  <a:schemeClr val="bg1"/>
+                </a:solidFill>
+              </a:rPr>
+              <a:t> </a:t>
+            </a:r>
+            <a:r>
+              <a:rPr sz="1600" dirty="0" err="1">
+                <a:solidFill>
+                  <a:schemeClr val="bg1"/>
+                </a:solidFill>
+              </a:rPr>
+              <a:t>por</a:t>
+            </a:r>
+            <a:r>
+              <a:rPr sz="1600" dirty="0">
+                <a:solidFill>
+                  <a:schemeClr val="bg1"/>
+                </a:solidFill>
+              </a:rPr>
+              <a:t> </a:t>
+            </a:r>
+            <a:r>
+              <a:rPr sz="1600" dirty="0" err="1">
+                <a:solidFill>
+                  <a:schemeClr val="bg1"/>
+                </a:solidFill>
+              </a:rPr>
+              <a:t>tipo</a:t>
+            </a:r>
+            <a:r>
+              <a:rPr sz="1600" dirty="0">
+                <a:solidFill>
+                  <a:schemeClr val="bg1"/>
+                </a:solidFill>
+              </a:rPr>
+              <a:t> y </a:t>
+            </a:r>
+            <a:r>
+              <a:rPr sz="1600" dirty="0" err="1">
+                <a:solidFill>
+                  <a:schemeClr val="bg1"/>
+                </a:solidFill>
+              </a:rPr>
+              <a:t>rango</a:t>
+            </a:r>
+            <a:r>
+              <a:rPr sz="1600" dirty="0">
+                <a:solidFill>
+                  <a:schemeClr val="bg1"/>
+                </a:solidFill>
+              </a:rPr>
+              <a:t> de valor</a:t>
+            </a:r>
+            <a:br>
+              <a:rPr sz="1600" dirty="0">
+                <a:solidFill>
+                  <a:schemeClr val="bg1"/>
+                </a:solidFill>
+              </a:rPr>
+            </a:br>
+            <a:r>
+              <a:rPr sz="1600" dirty="0" err="1">
+                <a:solidFill>
+                  <a:schemeClr val="bg1"/>
+                </a:solidFill>
+              </a:rPr>
+              <a:t>func</a:t>
+            </a:r>
+            <a:r>
+              <a:rPr sz="1600" dirty="0">
+                <a:solidFill>
+                  <a:schemeClr val="bg1"/>
+                </a:solidFill>
+              </a:rPr>
+              <a:t> (s *</a:t>
+            </a:r>
+            <a:r>
+              <a:rPr sz="1600" dirty="0" err="1">
+                <a:solidFill>
+                  <a:schemeClr val="bg1"/>
+                </a:solidFill>
+              </a:rPr>
+              <a:t>SmartContract</a:t>
+            </a:r>
+            <a:r>
+              <a:rPr sz="1600" dirty="0">
+                <a:solidFill>
+                  <a:schemeClr val="bg1"/>
+                </a:solidFill>
+              </a:rPr>
+              <a:t>) </a:t>
+            </a:r>
+            <a:r>
+              <a:rPr sz="1600" dirty="0" err="1">
+                <a:solidFill>
+                  <a:schemeClr val="bg1"/>
+                </a:solidFill>
+              </a:rPr>
+              <a:t>QueryProperties</a:t>
+            </a:r>
+            <a:r>
+              <a:rPr sz="1600" dirty="0">
+                <a:solidFill>
+                  <a:schemeClr val="bg1"/>
+                </a:solidFill>
+              </a:rPr>
+              <a:t>(</a:t>
+            </a:r>
+            <a:r>
+              <a:rPr sz="1600" dirty="0" err="1">
+                <a:solidFill>
+                  <a:schemeClr val="bg1"/>
+                </a:solidFill>
+              </a:rPr>
+              <a:t>ctx</a:t>
+            </a:r>
+            <a:r>
+              <a:rPr sz="1600" dirty="0">
+                <a:solidFill>
+                  <a:schemeClr val="bg1"/>
+                </a:solidFill>
+              </a:rPr>
+              <a:t> </a:t>
+            </a:r>
+            <a:r>
+              <a:rPr sz="1600" dirty="0" err="1">
+                <a:solidFill>
+                  <a:schemeClr val="bg1"/>
+                </a:solidFill>
+              </a:rPr>
+              <a:t>contractapi.TransactionContextInterface</a:t>
+            </a:r>
+            <a:r>
+              <a:rPr sz="1600" dirty="0">
+                <a:solidFill>
+                  <a:schemeClr val="bg1"/>
+                </a:solidFill>
+              </a:rPr>
+              <a:t>,</a:t>
+            </a:r>
+            <a:br>
+              <a:rPr sz="1600" dirty="0">
+                <a:solidFill>
+                  <a:schemeClr val="bg1"/>
+                </a:solidFill>
+              </a:rPr>
+            </a:br>
+            <a:r>
+              <a:rPr sz="1600" dirty="0">
+                <a:solidFill>
+                  <a:schemeClr val="bg1"/>
+                </a:solidFill>
+              </a:rPr>
+              <a:t>    </a:t>
+            </a:r>
+            <a:r>
+              <a:rPr sz="1600" dirty="0" err="1">
+                <a:solidFill>
+                  <a:schemeClr val="bg1"/>
+                </a:solidFill>
+              </a:rPr>
+              <a:t>propertyType</a:t>
+            </a:r>
+            <a:r>
+              <a:rPr sz="1600" dirty="0">
+                <a:solidFill>
+                  <a:schemeClr val="bg1"/>
+                </a:solidFill>
+              </a:rPr>
+              <a:t> string, </a:t>
+            </a:r>
+            <a:r>
+              <a:rPr sz="1600" dirty="0" err="1">
+                <a:solidFill>
+                  <a:schemeClr val="bg1"/>
+                </a:solidFill>
+              </a:rPr>
+              <a:t>minValue</a:t>
+            </a:r>
+            <a:r>
+              <a:rPr sz="1600" dirty="0">
+                <a:solidFill>
+                  <a:schemeClr val="bg1"/>
+                </a:solidFill>
+              </a:rPr>
+              <a:t> int) ([]*Property, error) {</a:t>
+            </a:r>
+            <a:br>
+              <a:rPr sz="1600" dirty="0">
+                <a:solidFill>
+                  <a:schemeClr val="bg1"/>
+                </a:solidFill>
+              </a:rPr>
+            </a:br>
+            <a:r>
+              <a:rPr sz="1600" dirty="0">
+                <a:solidFill>
+                  <a:schemeClr val="bg1"/>
+                </a:solidFill>
+              </a:rPr>
+              <a:t>    // Mango query (</a:t>
+            </a:r>
+            <a:r>
+              <a:rPr sz="1600" dirty="0" err="1">
+                <a:solidFill>
+                  <a:schemeClr val="bg1"/>
+                </a:solidFill>
+              </a:rPr>
+              <a:t>sintaxis</a:t>
+            </a:r>
+            <a:r>
+              <a:rPr sz="1600" dirty="0">
+                <a:solidFill>
+                  <a:schemeClr val="bg1"/>
+                </a:solidFill>
+              </a:rPr>
+              <a:t> CouchDB)</a:t>
+            </a:r>
+            <a:br>
+              <a:rPr sz="1600" dirty="0">
+                <a:solidFill>
+                  <a:schemeClr val="bg1"/>
+                </a:solidFill>
+              </a:rPr>
+            </a:br>
+            <a:r>
+              <a:rPr sz="1600" dirty="0">
+                <a:solidFill>
+                  <a:schemeClr val="bg1"/>
+                </a:solidFill>
+              </a:rPr>
+              <a:t>    </a:t>
+            </a:r>
+            <a:r>
+              <a:rPr sz="1600" dirty="0" err="1">
+                <a:solidFill>
+                  <a:schemeClr val="bg1"/>
+                </a:solidFill>
+              </a:rPr>
+              <a:t>queryString</a:t>
+            </a:r>
+            <a:r>
+              <a:rPr sz="1600" dirty="0">
+                <a:solidFill>
+                  <a:schemeClr val="bg1"/>
+                </a:solidFill>
+              </a:rPr>
+              <a:t> := </a:t>
+            </a:r>
+            <a:r>
+              <a:rPr sz="1600" dirty="0" err="1">
+                <a:solidFill>
+                  <a:schemeClr val="bg1"/>
+                </a:solidFill>
+              </a:rPr>
+              <a:t>fmt.Sprintf</a:t>
+            </a:r>
+            <a:r>
+              <a:rPr sz="1600" dirty="0">
+                <a:solidFill>
+                  <a:schemeClr val="bg1"/>
+                </a:solidFill>
+              </a:rPr>
+              <a:t>(</a:t>
+            </a:r>
+            <a:br>
+              <a:rPr sz="1600" dirty="0">
+                <a:solidFill>
+                  <a:schemeClr val="bg1"/>
+                </a:solidFill>
+              </a:rPr>
+            </a:br>
+            <a:r>
+              <a:rPr sz="1600" dirty="0">
+                <a:solidFill>
+                  <a:schemeClr val="bg1"/>
+                </a:solidFill>
+              </a:rPr>
               <a:t>        `{"selector":{</a:t>
             </a:r>
-            <a:br/>
-            <a:r>
-              <a:t>            "docType": "property",</a:t>
-            </a:r>
-            <a:br/>
-            <a:r>
-              <a:t>            "propertyType": "%s",</a:t>
-            </a:r>
-            <a:br/>
-            <a:r>
-              <a:t>            "appraisalValue": {"$gte": %d}</a:t>
-            </a:r>
-            <a:br/>
-            <a:r>
+            <a:br>
+              <a:rPr sz="1600" dirty="0">
+                <a:solidFill>
+                  <a:schemeClr val="bg1"/>
+                </a:solidFill>
+              </a:rPr>
+            </a:br>
+            <a:r>
+              <a:rPr sz="1600" dirty="0">
+                <a:solidFill>
+                  <a:schemeClr val="bg1"/>
+                </a:solidFill>
+              </a:rPr>
+              <a:t>            "</a:t>
+            </a:r>
+            <a:r>
+              <a:rPr sz="1600" dirty="0" err="1">
+                <a:solidFill>
+                  <a:schemeClr val="bg1"/>
+                </a:solidFill>
+              </a:rPr>
+              <a:t>docType</a:t>
+            </a:r>
+            <a:r>
+              <a:rPr sz="1600" dirty="0">
+                <a:solidFill>
+                  <a:schemeClr val="bg1"/>
+                </a:solidFill>
+              </a:rPr>
+              <a:t>": "property",</a:t>
+            </a:r>
+            <a:br>
+              <a:rPr sz="1600" dirty="0">
+                <a:solidFill>
+                  <a:schemeClr val="bg1"/>
+                </a:solidFill>
+              </a:rPr>
+            </a:br>
+            <a:r>
+              <a:rPr sz="1600" dirty="0">
+                <a:solidFill>
+                  <a:schemeClr val="bg1"/>
+                </a:solidFill>
+              </a:rPr>
+              <a:t>            "</a:t>
+            </a:r>
+            <a:r>
+              <a:rPr sz="1600" dirty="0" err="1">
+                <a:solidFill>
+                  <a:schemeClr val="bg1"/>
+                </a:solidFill>
+              </a:rPr>
+              <a:t>propertyType</a:t>
+            </a:r>
+            <a:r>
+              <a:rPr sz="1600" dirty="0">
+                <a:solidFill>
+                  <a:schemeClr val="bg1"/>
+                </a:solidFill>
+              </a:rPr>
+              <a:t>": "%s",</a:t>
+            </a:r>
+            <a:br>
+              <a:rPr sz="1600" dirty="0">
+                <a:solidFill>
+                  <a:schemeClr val="bg1"/>
+                </a:solidFill>
+              </a:rPr>
+            </a:br>
+            <a:r>
+              <a:rPr sz="1600" dirty="0">
+                <a:solidFill>
+                  <a:schemeClr val="bg1"/>
+                </a:solidFill>
+              </a:rPr>
+              <a:t>            "</a:t>
+            </a:r>
+            <a:r>
+              <a:rPr sz="1600" dirty="0" err="1">
+                <a:solidFill>
+                  <a:schemeClr val="bg1"/>
+                </a:solidFill>
+              </a:rPr>
+              <a:t>appraisalValue</a:t>
+            </a:r>
+            <a:r>
+              <a:rPr sz="1600" dirty="0">
+                <a:solidFill>
+                  <a:schemeClr val="bg1"/>
+                </a:solidFill>
+              </a:rPr>
+              <a:t>": {"$</a:t>
+            </a:r>
+            <a:r>
+              <a:rPr sz="1600" dirty="0" err="1">
+                <a:solidFill>
+                  <a:schemeClr val="bg1"/>
+                </a:solidFill>
+              </a:rPr>
+              <a:t>gte</a:t>
+            </a:r>
+            <a:r>
+              <a:rPr sz="1600" dirty="0">
+                <a:solidFill>
+                  <a:schemeClr val="bg1"/>
+                </a:solidFill>
+              </a:rPr>
+              <a:t>": %d}</a:t>
+            </a:r>
+            <a:br>
+              <a:rPr sz="1600" dirty="0">
+                <a:solidFill>
+                  <a:schemeClr val="bg1"/>
+                </a:solidFill>
+              </a:rPr>
+            </a:br>
+            <a:r>
+              <a:rPr sz="1600" dirty="0">
+                <a:solidFill>
+                  <a:schemeClr val="bg1"/>
+                </a:solidFill>
+              </a:rPr>
               <a:t>        },</a:t>
             </a:r>
-            <a:br/>
-            <a:r>
-              <a:t>        "sort": [{"appraisalValue": "desc"}],</a:t>
-            </a:r>
-            <a:br/>
-            <a:r>
-              <a:t>        "use_index": "indexPropertyType"}`,</a:t>
-            </a:r>
-            <a:br/>
-            <a:r>
-              <a:t>        propertyType, minValue)</a:t>
-            </a:r>
-            <a:br/>
-            <a:br/>
-            <a:r>
-              <a:t>    resultsIterator, err := ctx.GetStub().GetQueryResult(queryString)</a:t>
-            </a:r>
-            <a:br/>
-            <a:r>
+            <a:br>
+              <a:rPr sz="1600" dirty="0">
+                <a:solidFill>
+                  <a:schemeClr val="bg1"/>
+                </a:solidFill>
+              </a:rPr>
+            </a:br>
+            <a:r>
+              <a:rPr sz="1600" dirty="0">
+                <a:solidFill>
+                  <a:schemeClr val="bg1"/>
+                </a:solidFill>
+              </a:rPr>
+              <a:t>        "sort": [{"</a:t>
+            </a:r>
+            <a:r>
+              <a:rPr sz="1600" dirty="0" err="1">
+                <a:solidFill>
+                  <a:schemeClr val="bg1"/>
+                </a:solidFill>
+              </a:rPr>
+              <a:t>appraisalValue</a:t>
+            </a:r>
+            <a:r>
+              <a:rPr sz="1600" dirty="0">
+                <a:solidFill>
+                  <a:schemeClr val="bg1"/>
+                </a:solidFill>
+              </a:rPr>
+              <a:t>": "desc"}],</a:t>
+            </a:r>
+            <a:br>
+              <a:rPr sz="1600" dirty="0">
+                <a:solidFill>
+                  <a:schemeClr val="bg1"/>
+                </a:solidFill>
+              </a:rPr>
+            </a:br>
+            <a:r>
+              <a:rPr sz="1600" dirty="0">
+                <a:solidFill>
+                  <a:schemeClr val="bg1"/>
+                </a:solidFill>
+              </a:rPr>
+              <a:t>        "</a:t>
+            </a:r>
+            <a:r>
+              <a:rPr sz="1600" dirty="0" err="1">
+                <a:solidFill>
+                  <a:schemeClr val="bg1"/>
+                </a:solidFill>
+              </a:rPr>
+              <a:t>use_index</a:t>
+            </a:r>
+            <a:r>
+              <a:rPr sz="1600" dirty="0">
+                <a:solidFill>
+                  <a:schemeClr val="bg1"/>
+                </a:solidFill>
+              </a:rPr>
+              <a:t>": "</a:t>
+            </a:r>
+            <a:r>
+              <a:rPr sz="1600" dirty="0" err="1">
+                <a:solidFill>
+                  <a:schemeClr val="bg1"/>
+                </a:solidFill>
+              </a:rPr>
+              <a:t>indexPropertyType</a:t>
+            </a:r>
+            <a:r>
+              <a:rPr sz="1600" dirty="0">
+                <a:solidFill>
+                  <a:schemeClr val="bg1"/>
+                </a:solidFill>
+              </a:rPr>
+              <a:t>"}`,</a:t>
+            </a:r>
+            <a:br>
+              <a:rPr sz="1600" dirty="0">
+                <a:solidFill>
+                  <a:schemeClr val="bg1"/>
+                </a:solidFill>
+              </a:rPr>
+            </a:br>
+            <a:r>
+              <a:rPr sz="1600" dirty="0">
+                <a:solidFill>
+                  <a:schemeClr val="bg1"/>
+                </a:solidFill>
+              </a:rPr>
+              <a:t>        </a:t>
+            </a:r>
+            <a:r>
+              <a:rPr sz="1600" dirty="0" err="1">
+                <a:solidFill>
+                  <a:schemeClr val="bg1"/>
+                </a:solidFill>
+              </a:rPr>
+              <a:t>propertyType</a:t>
+            </a:r>
+            <a:r>
+              <a:rPr sz="1600" dirty="0">
+                <a:solidFill>
+                  <a:schemeClr val="bg1"/>
+                </a:solidFill>
+              </a:rPr>
+              <a:t>, </a:t>
+            </a:r>
+            <a:r>
+              <a:rPr sz="1600" dirty="0" err="1">
+                <a:solidFill>
+                  <a:schemeClr val="bg1"/>
+                </a:solidFill>
+              </a:rPr>
+              <a:t>minValue</a:t>
+            </a:r>
+            <a:r>
+              <a:rPr sz="1600" dirty="0">
+                <a:solidFill>
+                  <a:schemeClr val="bg1"/>
+                </a:solidFill>
+              </a:rPr>
+              <a:t>)</a:t>
+            </a:r>
+            <a:br>
+              <a:rPr sz="1600" dirty="0">
+                <a:solidFill>
+                  <a:schemeClr val="bg1"/>
+                </a:solidFill>
+              </a:rPr>
+            </a:br>
+            <a:r>
+              <a:rPr sz="1600" dirty="0">
+                <a:solidFill>
+                  <a:schemeClr val="bg1"/>
+                </a:solidFill>
+              </a:rPr>
+              <a:t>    </a:t>
+            </a:r>
+            <a:r>
+              <a:rPr sz="1600" dirty="0" err="1">
+                <a:solidFill>
+                  <a:schemeClr val="bg1"/>
+                </a:solidFill>
+              </a:rPr>
+              <a:t>resultsIterator</a:t>
+            </a:r>
+            <a:r>
+              <a:rPr sz="1600" dirty="0">
+                <a:solidFill>
+                  <a:schemeClr val="bg1"/>
+                </a:solidFill>
+              </a:rPr>
+              <a:t>, err := </a:t>
+            </a:r>
+            <a:r>
+              <a:rPr sz="1600" dirty="0" err="1">
+                <a:solidFill>
+                  <a:schemeClr val="bg1"/>
+                </a:solidFill>
+              </a:rPr>
+              <a:t>ctx.GetStub</a:t>
+            </a:r>
+            <a:r>
+              <a:rPr sz="1600" dirty="0">
+                <a:solidFill>
+                  <a:schemeClr val="bg1"/>
+                </a:solidFill>
+              </a:rPr>
+              <a:t>().</a:t>
+            </a:r>
+            <a:r>
+              <a:rPr sz="1600" dirty="0" err="1">
+                <a:solidFill>
+                  <a:schemeClr val="bg1"/>
+                </a:solidFill>
+              </a:rPr>
+              <a:t>GetQueryResult</a:t>
+            </a:r>
+            <a:r>
+              <a:rPr sz="1600" dirty="0">
+                <a:solidFill>
+                  <a:schemeClr val="bg1"/>
+                </a:solidFill>
+              </a:rPr>
+              <a:t>(</a:t>
+            </a:r>
+            <a:r>
+              <a:rPr sz="1600" dirty="0" err="1">
+                <a:solidFill>
+                  <a:schemeClr val="bg1"/>
+                </a:solidFill>
+              </a:rPr>
+              <a:t>queryString</a:t>
+            </a:r>
+            <a:r>
+              <a:rPr sz="1600" dirty="0">
+                <a:solidFill>
+                  <a:schemeClr val="bg1"/>
+                </a:solidFill>
+              </a:rPr>
+              <a:t>)</a:t>
+            </a:r>
+            <a:br>
+              <a:rPr sz="1600" dirty="0">
+                <a:solidFill>
+                  <a:schemeClr val="bg1"/>
+                </a:solidFill>
+              </a:rPr>
+            </a:br>
+            <a:r>
+              <a:rPr sz="1600" dirty="0">
+                <a:solidFill>
+                  <a:schemeClr val="bg1"/>
+                </a:solidFill>
+              </a:rPr>
               <a:t>    if err != nil {</a:t>
             </a:r>
-            <a:br/>
-            <a:r>
+            <a:br>
+              <a:rPr sz="1600" dirty="0">
+                <a:solidFill>
+                  <a:schemeClr val="bg1"/>
+                </a:solidFill>
+              </a:rPr>
+            </a:br>
+            <a:r>
+              <a:rPr sz="1600" dirty="0">
+                <a:solidFill>
+                  <a:schemeClr val="bg1"/>
+                </a:solidFill>
+              </a:rPr>
               <a:t>        return nil, err</a:t>
             </a:r>
-            <a:br/>
-            <a:r>
+            <a:br>
+              <a:rPr sz="1600" dirty="0">
+                <a:solidFill>
+                  <a:schemeClr val="bg1"/>
+                </a:solidFill>
+              </a:rPr>
+            </a:br>
+            <a:r>
+              <a:rPr sz="1600" dirty="0">
+                <a:solidFill>
+                  <a:schemeClr val="bg1"/>
+                </a:solidFill>
+              </a:rPr>
               <a:t>    }</a:t>
             </a:r>
-            <a:br/>
-            <a:r>
-              <a:t>    defer resultsIterator.Close()</a:t>
-            </a:r>
-            <a:br/>
-            <a:br/>
-            <a:r>
-              <a:t>    // Iterar y deserializar resultados...</a:t>
-            </a:r>
-            <a:br/>
-            <a:r>
+            <a:br>
+              <a:rPr sz="1600" dirty="0">
+                <a:solidFill>
+                  <a:schemeClr val="bg1"/>
+                </a:solidFill>
+              </a:rPr>
+            </a:br>
+            <a:r>
+              <a:rPr sz="1600" dirty="0">
+                <a:solidFill>
+                  <a:schemeClr val="bg1"/>
+                </a:solidFill>
+              </a:rPr>
+              <a:t>    defer </a:t>
+            </a:r>
+            <a:r>
+              <a:rPr sz="1600" dirty="0" err="1">
+                <a:solidFill>
+                  <a:schemeClr val="bg1"/>
+                </a:solidFill>
+              </a:rPr>
+              <a:t>resultsIterator.Close</a:t>
+            </a:r>
+            <a:r>
+              <a:rPr sz="1600" dirty="0">
+                <a:solidFill>
+                  <a:schemeClr val="bg1"/>
+                </a:solidFill>
+              </a:rPr>
+              <a:t>()</a:t>
+            </a:r>
+            <a:br>
+              <a:rPr sz="1600" dirty="0">
+                <a:solidFill>
+                  <a:schemeClr val="bg1"/>
+                </a:solidFill>
+              </a:rPr>
+            </a:br>
+            <a:r>
+              <a:rPr sz="1600" dirty="0">
+                <a:solidFill>
+                  <a:schemeClr val="bg1"/>
+                </a:solidFill>
+              </a:rPr>
+              <a:t>    // </a:t>
+            </a:r>
+            <a:r>
+              <a:rPr sz="1600" dirty="0" err="1">
+                <a:solidFill>
+                  <a:schemeClr val="bg1"/>
+                </a:solidFill>
+              </a:rPr>
+              <a:t>Iterar</a:t>
+            </a:r>
+            <a:r>
+              <a:rPr sz="1600" dirty="0">
+                <a:solidFill>
+                  <a:schemeClr val="bg1"/>
+                </a:solidFill>
+              </a:rPr>
+              <a:t> y </a:t>
+            </a:r>
+            <a:r>
+              <a:rPr sz="1600" dirty="0" err="1">
+                <a:solidFill>
+                  <a:schemeClr val="bg1"/>
+                </a:solidFill>
+              </a:rPr>
+              <a:t>deserializar</a:t>
+            </a:r>
+            <a:r>
+              <a:rPr sz="1600" dirty="0">
+                <a:solidFill>
+                  <a:schemeClr val="bg1"/>
+                </a:solidFill>
+              </a:rPr>
+              <a:t> </a:t>
+            </a:r>
+            <a:r>
+              <a:rPr sz="1600" dirty="0" err="1">
+                <a:solidFill>
+                  <a:schemeClr val="bg1"/>
+                </a:solidFill>
+              </a:rPr>
+              <a:t>resultados</a:t>
+            </a:r>
+            <a:r>
+              <a:rPr sz="1600" dirty="0">
+                <a:solidFill>
+                  <a:schemeClr val="bg1"/>
+                </a:solidFill>
+              </a:rPr>
+              <a:t>...</a:t>
+            </a:r>
+            <a:br>
+              <a:rPr sz="1600" dirty="0">
+                <a:solidFill>
+                  <a:schemeClr val="bg1"/>
+                </a:solidFill>
+              </a:rPr>
+            </a:br>
+            <a:r>
+              <a:rPr sz="1600" dirty="0">
+                <a:solidFill>
+                  <a:schemeClr val="bg1"/>
+                </a:solidFill>
+              </a:rPr>
               <a:t>}</a:t>
             </a:r>
           </a:p>
@@ -6144,7 +8574,7 @@
         <p:spPr>
           <a:xfrm>
             <a:off x="731520" y="1600200"/>
-            <a:ext cx="10698480" cy="4754880"/>
+            <a:ext cx="6304900" cy="4754880"/>
           </a:xfrm>
           <a:prstGeom prst="rect">
             <a:avLst/>
@@ -6155,105 +8585,996 @@
           <a:bodyPr wrap="square"/>
           <a:lstStyle/>
           <a:p>
-            <a:br/>
-            <a:r>
-              <a:t>func (s *SmartContract) CreateProperty(ctx contractapi.TransactionContextInterface,</a:t>
-            </a:r>
-            <a:br/>
-            <a:r>
+            <a:br>
+              <a:rPr sz="1600" dirty="0">
+                <a:solidFill>
+                  <a:schemeClr val="bg1"/>
+                </a:solidFill>
+              </a:rPr>
+            </a:br>
+            <a:r>
+              <a:rPr sz="1600" dirty="0" err="1">
+                <a:solidFill>
+                  <a:schemeClr val="bg1"/>
+                </a:solidFill>
+              </a:rPr>
+              <a:t>func</a:t>
+            </a:r>
+            <a:r>
+              <a:rPr sz="1600" dirty="0">
+                <a:solidFill>
+                  <a:schemeClr val="bg1"/>
+                </a:solidFill>
+              </a:rPr>
+              <a:t> (s *</a:t>
+            </a:r>
+            <a:r>
+              <a:rPr sz="1600" dirty="0" err="1">
+                <a:solidFill>
+                  <a:schemeClr val="bg1"/>
+                </a:solidFill>
+              </a:rPr>
+              <a:t>SmartContract</a:t>
+            </a:r>
+            <a:r>
+              <a:rPr sz="1600" dirty="0">
+                <a:solidFill>
+                  <a:schemeClr val="bg1"/>
+                </a:solidFill>
+              </a:rPr>
+              <a:t>) </a:t>
+            </a:r>
+            <a:r>
+              <a:rPr sz="1600" dirty="0" err="1">
+                <a:solidFill>
+                  <a:schemeClr val="bg1"/>
+                </a:solidFill>
+              </a:rPr>
+              <a:t>CreateProperty</a:t>
+            </a:r>
+            <a:r>
+              <a:rPr sz="1600" dirty="0">
+                <a:solidFill>
+                  <a:schemeClr val="bg1"/>
+                </a:solidFill>
+              </a:rPr>
+              <a:t>(</a:t>
+            </a:r>
+            <a:r>
+              <a:rPr sz="1600" dirty="0" err="1">
+                <a:solidFill>
+                  <a:schemeClr val="bg1"/>
+                </a:solidFill>
+              </a:rPr>
+              <a:t>ctx</a:t>
+            </a:r>
+            <a:r>
+              <a:rPr sz="1600" dirty="0">
+                <a:solidFill>
+                  <a:schemeClr val="bg1"/>
+                </a:solidFill>
+              </a:rPr>
+              <a:t> </a:t>
+            </a:r>
+            <a:r>
+              <a:rPr sz="1600" dirty="0" err="1">
+                <a:solidFill>
+                  <a:schemeClr val="bg1"/>
+                </a:solidFill>
+              </a:rPr>
+              <a:t>contractapi.TransactionContextInterface</a:t>
+            </a:r>
+            <a:r>
+              <a:rPr sz="1600" dirty="0">
+                <a:solidFill>
+                  <a:schemeClr val="bg1"/>
+                </a:solidFill>
+              </a:rPr>
+              <a:t>,</a:t>
+            </a:r>
+            <a:br>
+              <a:rPr sz="1600" dirty="0">
+                <a:solidFill>
+                  <a:schemeClr val="bg1"/>
+                </a:solidFill>
+              </a:rPr>
+            </a:br>
+            <a:r>
+              <a:rPr sz="1600" dirty="0">
+                <a:solidFill>
+                  <a:schemeClr val="bg1"/>
+                </a:solidFill>
+              </a:rPr>
               <a:t>    id string, address string, owner string, area int,</a:t>
             </a:r>
-            <a:br/>
-            <a:r>
-              <a:t>    propType string, value int) error {</a:t>
-            </a:r>
-            <a:br/>
-            <a:br/>
-            <a:r>
-              <a:t>    // Verificar que no existe</a:t>
-            </a:r>
-            <a:br/>
-            <a:r>
-              <a:t>    existing, err := ctx.GetStub().GetState(id)</a:t>
-            </a:r>
-            <a:br/>
-            <a:r>
+            <a:br>
+              <a:rPr sz="1600" dirty="0">
+                <a:solidFill>
+                  <a:schemeClr val="bg1"/>
+                </a:solidFill>
+              </a:rPr>
+            </a:br>
+            <a:r>
+              <a:rPr sz="1600" dirty="0">
+                <a:solidFill>
+                  <a:schemeClr val="bg1"/>
+                </a:solidFill>
+              </a:rPr>
+              <a:t>    </a:t>
+            </a:r>
+            <a:r>
+              <a:rPr sz="1600" dirty="0" err="1">
+                <a:solidFill>
+                  <a:schemeClr val="bg1"/>
+                </a:solidFill>
+              </a:rPr>
+              <a:t>propType</a:t>
+            </a:r>
+            <a:r>
+              <a:rPr sz="1600" dirty="0">
+                <a:solidFill>
+                  <a:schemeClr val="bg1"/>
+                </a:solidFill>
+              </a:rPr>
+              <a:t> string, value int) error {</a:t>
+            </a:r>
+            <a:br>
+              <a:rPr sz="1600" dirty="0">
+                <a:solidFill>
+                  <a:schemeClr val="bg1"/>
+                </a:solidFill>
+              </a:rPr>
+            </a:br>
+            <a:br>
+              <a:rPr sz="1600" dirty="0">
+                <a:solidFill>
+                  <a:schemeClr val="bg1"/>
+                </a:solidFill>
+              </a:rPr>
+            </a:br>
+            <a:r>
+              <a:rPr sz="1600" dirty="0">
+                <a:solidFill>
+                  <a:schemeClr val="bg1"/>
+                </a:solidFill>
+              </a:rPr>
+              <a:t>    // </a:t>
+            </a:r>
+            <a:r>
+              <a:rPr sz="1600" dirty="0" err="1">
+                <a:solidFill>
+                  <a:schemeClr val="bg1"/>
+                </a:solidFill>
+              </a:rPr>
+              <a:t>Verificar</a:t>
+            </a:r>
+            <a:r>
+              <a:rPr sz="1600" dirty="0">
+                <a:solidFill>
+                  <a:schemeClr val="bg1"/>
+                </a:solidFill>
+              </a:rPr>
+              <a:t> </a:t>
+            </a:r>
+            <a:r>
+              <a:rPr sz="1600" dirty="0" err="1">
+                <a:solidFill>
+                  <a:schemeClr val="bg1"/>
+                </a:solidFill>
+              </a:rPr>
+              <a:t>que</a:t>
+            </a:r>
+            <a:r>
+              <a:rPr sz="1600" dirty="0">
+                <a:solidFill>
+                  <a:schemeClr val="bg1"/>
+                </a:solidFill>
+              </a:rPr>
+              <a:t> no </a:t>
+            </a:r>
+            <a:r>
+              <a:rPr sz="1600" dirty="0" err="1">
+                <a:solidFill>
+                  <a:schemeClr val="bg1"/>
+                </a:solidFill>
+              </a:rPr>
+              <a:t>existe</a:t>
+            </a:r>
+            <a:br>
+              <a:rPr sz="1600" dirty="0">
+                <a:solidFill>
+                  <a:schemeClr val="bg1"/>
+                </a:solidFill>
+              </a:rPr>
+            </a:br>
+            <a:r>
+              <a:rPr sz="1600" dirty="0">
+                <a:solidFill>
+                  <a:schemeClr val="bg1"/>
+                </a:solidFill>
+              </a:rPr>
+              <a:t>    existing, err := </a:t>
+            </a:r>
+            <a:r>
+              <a:rPr sz="1600" dirty="0" err="1">
+                <a:solidFill>
+                  <a:schemeClr val="bg1"/>
+                </a:solidFill>
+              </a:rPr>
+              <a:t>ctx.GetStub</a:t>
+            </a:r>
+            <a:r>
+              <a:rPr sz="1600" dirty="0">
+                <a:solidFill>
+                  <a:schemeClr val="bg1"/>
+                </a:solidFill>
+              </a:rPr>
+              <a:t>().</a:t>
+            </a:r>
+            <a:r>
+              <a:rPr sz="1600" dirty="0" err="1">
+                <a:solidFill>
+                  <a:schemeClr val="bg1"/>
+                </a:solidFill>
+              </a:rPr>
+              <a:t>GetState</a:t>
+            </a:r>
+            <a:r>
+              <a:rPr sz="1600" dirty="0">
+                <a:solidFill>
+                  <a:schemeClr val="bg1"/>
+                </a:solidFill>
+              </a:rPr>
+              <a:t>(id)</a:t>
+            </a:r>
+            <a:br>
+              <a:rPr sz="1600" dirty="0">
+                <a:solidFill>
+                  <a:schemeClr val="bg1"/>
+                </a:solidFill>
+              </a:rPr>
+            </a:br>
+            <a:r>
+              <a:rPr sz="1600" dirty="0">
+                <a:solidFill>
+                  <a:schemeClr val="bg1"/>
+                </a:solidFill>
+              </a:rPr>
               <a:t>    if err != nil {</a:t>
             </a:r>
-            <a:br/>
-            <a:r>
-              <a:t>        return fmt.Errorf("error reading state: %v", err)</a:t>
-            </a:r>
-            <a:br/>
-            <a:r>
+            <a:br>
+              <a:rPr sz="1600" dirty="0">
+                <a:solidFill>
+                  <a:schemeClr val="bg1"/>
+                </a:solidFill>
+              </a:rPr>
+            </a:br>
+            <a:r>
+              <a:rPr sz="1600" dirty="0">
+                <a:solidFill>
+                  <a:schemeClr val="bg1"/>
+                </a:solidFill>
+              </a:rPr>
+              <a:t>        return </a:t>
+            </a:r>
+            <a:r>
+              <a:rPr sz="1600" dirty="0" err="1">
+                <a:solidFill>
+                  <a:schemeClr val="bg1"/>
+                </a:solidFill>
+              </a:rPr>
+              <a:t>fmt.Errorf</a:t>
+            </a:r>
+            <a:r>
+              <a:rPr sz="1600" dirty="0">
+                <a:solidFill>
+                  <a:schemeClr val="bg1"/>
+                </a:solidFill>
+              </a:rPr>
+              <a:t>("error reading state: %v", err)</a:t>
+            </a:r>
+            <a:br>
+              <a:rPr sz="1600" dirty="0">
+                <a:solidFill>
+                  <a:schemeClr val="bg1"/>
+                </a:solidFill>
+              </a:rPr>
+            </a:br>
+            <a:r>
+              <a:rPr sz="1600" dirty="0">
+                <a:solidFill>
+                  <a:schemeClr val="bg1"/>
+                </a:solidFill>
+              </a:rPr>
               <a:t>    }</a:t>
             </a:r>
-            <a:br/>
-            <a:r>
+            <a:br>
+              <a:rPr sz="1600" dirty="0">
+                <a:solidFill>
+                  <a:schemeClr val="bg1"/>
+                </a:solidFill>
+              </a:rPr>
+            </a:br>
+            <a:r>
+              <a:rPr sz="1600" dirty="0">
+                <a:solidFill>
+                  <a:schemeClr val="bg1"/>
+                </a:solidFill>
+              </a:rPr>
               <a:t>    if existing != nil {</a:t>
             </a:r>
-            <a:br/>
-            <a:r>
-              <a:t>        return fmt.Errorf("property %s already exists", id)</a:t>
-            </a:r>
-            <a:br/>
-            <a:r>
+            <a:br>
+              <a:rPr sz="1600" dirty="0">
+                <a:solidFill>
+                  <a:schemeClr val="bg1"/>
+                </a:solidFill>
+              </a:rPr>
+            </a:br>
+            <a:r>
+              <a:rPr sz="1600" dirty="0">
+                <a:solidFill>
+                  <a:schemeClr val="bg1"/>
+                </a:solidFill>
+              </a:rPr>
+              <a:t>        return </a:t>
+            </a:r>
+            <a:r>
+              <a:rPr sz="1600" dirty="0" err="1">
+                <a:solidFill>
+                  <a:schemeClr val="bg1"/>
+                </a:solidFill>
+              </a:rPr>
+              <a:t>fmt.Errorf</a:t>
+            </a:r>
+            <a:r>
+              <a:rPr sz="1600" dirty="0">
+                <a:solidFill>
+                  <a:schemeClr val="bg1"/>
+                </a:solidFill>
+              </a:rPr>
+              <a:t>("property %s already exists", id)</a:t>
+            </a:r>
+            <a:br>
+              <a:rPr sz="1600" dirty="0">
+                <a:solidFill>
+                  <a:schemeClr val="bg1"/>
+                </a:solidFill>
+              </a:rPr>
+            </a:br>
+            <a:r>
+              <a:rPr sz="1600" dirty="0">
+                <a:solidFill>
+                  <a:schemeClr val="bg1"/>
+                </a:solidFill>
+              </a:rPr>
               <a:t>    }</a:t>
             </a:r>
-            <a:br/>
-            <a:br/>
-            <a:r>
-              <a:t>    property := Property{</a:t>
-            </a:r>
-            <a:br/>
-            <a:r>
-              <a:t>        DocType:        "property",</a:t>
-            </a:r>
-            <a:br/>
-            <a:r>
+            <a:br>
+              <a:rPr sz="1600" dirty="0">
+                <a:solidFill>
+                  <a:schemeClr val="bg1"/>
+                </a:solidFill>
+              </a:rPr>
+            </a:br>
+            <a:br>
+              <a:rPr sz="1600" dirty="0">
+                <a:solidFill>
+                  <a:schemeClr val="bg1"/>
+                </a:solidFill>
+              </a:rPr>
+            </a:br>
+            <a:endParaRPr sz="1600" dirty="0">
+              <a:solidFill>
+                <a:schemeClr val="bg1"/>
+              </a:solidFill>
+            </a:endParaRPr>
+          </a:p>
+        </p:txBody>
+      </p:sp>
+      <p:sp>
+        <p:nvSpPr>
+          <p:cNvPr id="10" name="CuadroTexto 9">
+            <a:extLst>
+              <a:ext uri="{FF2B5EF4-FFF2-40B4-BE49-F238E27FC236}">
+                <a16:creationId xmlns:a16="http://schemas.microsoft.com/office/drawing/2014/main" id="{231927BD-F057-13FE-9014-203872E42793}"/>
+              </a:ext>
+            </a:extLst>
+          </p:cNvPr>
+          <p:cNvSpPr txBox="1"/>
+          <p:nvPr/>
+        </p:nvSpPr>
+        <p:spPr>
+          <a:xfrm>
+            <a:off x="6094412" y="1828800"/>
+            <a:ext cx="6138746" cy="3970318"/>
+          </a:xfrm>
+          <a:prstGeom prst="rect">
+            <a:avLst/>
+          </a:prstGeom>
+          <a:noFill/>
+        </p:spPr>
+        <p:txBody>
+          <a:bodyPr wrap="square">
+            <a:spAutoFit/>
+          </a:bodyPr>
+          <a:lstStyle/>
+          <a:p>
+            <a:r>
+              <a:rPr lang="es-ES" sz="1800" dirty="0">
+                <a:solidFill>
+                  <a:schemeClr val="bg1"/>
+                </a:solidFill>
+              </a:rPr>
+              <a:t> </a:t>
+            </a:r>
+            <a:r>
+              <a:rPr lang="es-ES" sz="1800" dirty="0" err="1">
+                <a:solidFill>
+                  <a:schemeClr val="bg1"/>
+                </a:solidFill>
+              </a:rPr>
+              <a:t>property</a:t>
+            </a:r>
+            <a:r>
+              <a:rPr lang="es-ES" sz="1800" dirty="0">
+                <a:solidFill>
+                  <a:schemeClr val="bg1"/>
+                </a:solidFill>
+              </a:rPr>
+              <a:t> := </a:t>
+            </a:r>
+            <a:r>
+              <a:rPr lang="es-ES" sz="1800" dirty="0" err="1">
+                <a:solidFill>
+                  <a:schemeClr val="bg1"/>
+                </a:solidFill>
+              </a:rPr>
+              <a:t>Property</a:t>
+            </a:r>
+            <a:r>
+              <a:rPr lang="es-ES" sz="1800" dirty="0">
+                <a:solidFill>
+                  <a:schemeClr val="bg1"/>
+                </a:solidFill>
+              </a:rPr>
+              <a:t>{</a:t>
+            </a:r>
+            <a:br>
+              <a:rPr lang="es-ES" sz="1800" dirty="0">
+                <a:solidFill>
+                  <a:schemeClr val="bg1"/>
+                </a:solidFill>
+              </a:rPr>
+            </a:br>
+            <a:r>
+              <a:rPr lang="es-ES" sz="1800" dirty="0">
+                <a:solidFill>
+                  <a:schemeClr val="bg1"/>
+                </a:solidFill>
+              </a:rPr>
+              <a:t>        </a:t>
+            </a:r>
+            <a:r>
+              <a:rPr lang="es-ES" sz="1800" dirty="0" err="1">
+                <a:solidFill>
+                  <a:schemeClr val="bg1"/>
+                </a:solidFill>
+              </a:rPr>
+              <a:t>DocType</a:t>
+            </a:r>
+            <a:r>
+              <a:rPr lang="es-ES" sz="1800" dirty="0">
+                <a:solidFill>
+                  <a:schemeClr val="bg1"/>
+                </a:solidFill>
+              </a:rPr>
+              <a:t>:        "</a:t>
+            </a:r>
+            <a:r>
+              <a:rPr lang="es-ES" sz="1800" dirty="0" err="1">
+                <a:solidFill>
+                  <a:schemeClr val="bg1"/>
+                </a:solidFill>
+              </a:rPr>
+              <a:t>property</a:t>
+            </a:r>
+            <a:r>
+              <a:rPr lang="es-ES" sz="1800" dirty="0">
+                <a:solidFill>
+                  <a:schemeClr val="bg1"/>
+                </a:solidFill>
+              </a:rPr>
+              <a:t>",</a:t>
+            </a:r>
+            <a:br>
+              <a:rPr lang="es-ES" sz="1800" dirty="0">
+                <a:solidFill>
+                  <a:schemeClr val="bg1"/>
+                </a:solidFill>
+              </a:rPr>
+            </a:br>
+            <a:r>
+              <a:rPr lang="es-ES" sz="1800" dirty="0">
+                <a:solidFill>
+                  <a:schemeClr val="bg1"/>
+                </a:solidFill>
+              </a:rPr>
               <a:t>        ID:             id,</a:t>
             </a:r>
-            <a:br/>
-            <a:r>
-              <a:t>        Address:        address,</a:t>
-            </a:r>
-            <a:br/>
-            <a:r>
-              <a:t>        Owner:          owner,</a:t>
-            </a:r>
-            <a:br/>
-            <a:r>
-              <a:t>        Area:           area,</a:t>
-            </a:r>
-            <a:br/>
-            <a:r>
-              <a:t>        PropertyType:   propType,</a:t>
-            </a:r>
-            <a:br/>
-            <a:r>
+            <a:br>
+              <a:rPr lang="es-ES" sz="1800" dirty="0">
+                <a:solidFill>
+                  <a:schemeClr val="bg1"/>
+                </a:solidFill>
+              </a:rPr>
+            </a:br>
+            <a:r>
+              <a:rPr lang="es-ES" sz="1800" dirty="0">
+                <a:solidFill>
+                  <a:schemeClr val="bg1"/>
+                </a:solidFill>
+              </a:rPr>
+              <a:t>        </a:t>
+            </a:r>
+            <a:r>
+              <a:rPr lang="es-ES" sz="1800" dirty="0" err="1">
+                <a:solidFill>
+                  <a:schemeClr val="bg1"/>
+                </a:solidFill>
+              </a:rPr>
+              <a:t>Address</a:t>
+            </a:r>
+            <a:r>
+              <a:rPr lang="es-ES" sz="1800" dirty="0">
+                <a:solidFill>
+                  <a:schemeClr val="bg1"/>
+                </a:solidFill>
+              </a:rPr>
+              <a:t>:        </a:t>
+            </a:r>
+            <a:r>
+              <a:rPr lang="es-ES" sz="1800" dirty="0" err="1">
+                <a:solidFill>
+                  <a:schemeClr val="bg1"/>
+                </a:solidFill>
+              </a:rPr>
+              <a:t>address</a:t>
+            </a:r>
+            <a:r>
+              <a:rPr lang="es-ES" sz="1800" dirty="0">
+                <a:solidFill>
+                  <a:schemeClr val="bg1"/>
+                </a:solidFill>
+              </a:rPr>
+              <a:t>,</a:t>
+            </a:r>
+            <a:br>
+              <a:rPr lang="es-ES" sz="1800" dirty="0">
+                <a:solidFill>
+                  <a:schemeClr val="bg1"/>
+                </a:solidFill>
+              </a:rPr>
+            </a:br>
+            <a:r>
+              <a:rPr lang="es-ES" sz="1800" dirty="0">
+                <a:solidFill>
+                  <a:schemeClr val="bg1"/>
+                </a:solidFill>
+              </a:rPr>
+              <a:t>        </a:t>
+            </a:r>
+            <a:r>
+              <a:rPr lang="es-ES" sz="1800" dirty="0" err="1">
+                <a:solidFill>
+                  <a:schemeClr val="bg1"/>
+                </a:solidFill>
+              </a:rPr>
+              <a:t>Owner</a:t>
+            </a:r>
+            <a:r>
+              <a:rPr lang="es-ES" sz="1800" dirty="0">
+                <a:solidFill>
+                  <a:schemeClr val="bg1"/>
+                </a:solidFill>
+              </a:rPr>
+              <a:t>:          </a:t>
+            </a:r>
+            <a:r>
+              <a:rPr lang="es-ES" sz="1800" dirty="0" err="1">
+                <a:solidFill>
+                  <a:schemeClr val="bg1"/>
+                </a:solidFill>
+              </a:rPr>
+              <a:t>owner</a:t>
+            </a:r>
+            <a:r>
+              <a:rPr lang="es-ES" sz="1800" dirty="0">
+                <a:solidFill>
+                  <a:schemeClr val="bg1"/>
+                </a:solidFill>
+              </a:rPr>
+              <a:t>,</a:t>
+            </a:r>
+            <a:br>
+              <a:rPr lang="es-ES" sz="1800" dirty="0">
+                <a:solidFill>
+                  <a:schemeClr val="bg1"/>
+                </a:solidFill>
+              </a:rPr>
+            </a:br>
+            <a:r>
+              <a:rPr lang="es-ES" sz="1800" dirty="0">
+                <a:solidFill>
+                  <a:schemeClr val="bg1"/>
+                </a:solidFill>
+              </a:rPr>
+              <a:t>        </a:t>
+            </a:r>
+            <a:r>
+              <a:rPr lang="es-ES" sz="1800" dirty="0" err="1">
+                <a:solidFill>
+                  <a:schemeClr val="bg1"/>
+                </a:solidFill>
+              </a:rPr>
+              <a:t>Area</a:t>
+            </a:r>
+            <a:r>
+              <a:rPr lang="es-ES" sz="1800" dirty="0">
+                <a:solidFill>
+                  <a:schemeClr val="bg1"/>
+                </a:solidFill>
+              </a:rPr>
+              <a:t>:           </a:t>
+            </a:r>
+            <a:r>
+              <a:rPr lang="es-ES" sz="1800" dirty="0" err="1">
+                <a:solidFill>
+                  <a:schemeClr val="bg1"/>
+                </a:solidFill>
+              </a:rPr>
+              <a:t>area</a:t>
+            </a:r>
+            <a:r>
+              <a:rPr lang="es-ES" sz="1800" dirty="0">
+                <a:solidFill>
+                  <a:schemeClr val="bg1"/>
+                </a:solidFill>
+              </a:rPr>
+              <a:t>,</a:t>
+            </a:r>
+            <a:br>
+              <a:rPr lang="es-ES" sz="1800" dirty="0">
+                <a:solidFill>
+                  <a:schemeClr val="bg1"/>
+                </a:solidFill>
+              </a:rPr>
+            </a:br>
+            <a:r>
+              <a:rPr lang="es-ES" sz="1800" dirty="0">
+                <a:solidFill>
+                  <a:schemeClr val="bg1"/>
+                </a:solidFill>
+              </a:rPr>
+              <a:t>        </a:t>
+            </a:r>
+            <a:r>
+              <a:rPr lang="es-ES" sz="1800" dirty="0" err="1">
+                <a:solidFill>
+                  <a:schemeClr val="bg1"/>
+                </a:solidFill>
+              </a:rPr>
+              <a:t>PropertyType</a:t>
+            </a:r>
+            <a:r>
+              <a:rPr lang="es-ES" sz="1800" dirty="0">
+                <a:solidFill>
+                  <a:schemeClr val="bg1"/>
+                </a:solidFill>
+              </a:rPr>
+              <a:t>:   </a:t>
+            </a:r>
+            <a:r>
+              <a:rPr lang="es-ES" sz="1800" dirty="0" err="1">
+                <a:solidFill>
+                  <a:schemeClr val="bg1"/>
+                </a:solidFill>
+              </a:rPr>
+              <a:t>propType</a:t>
+            </a:r>
+            <a:r>
+              <a:rPr lang="es-ES" sz="1800" dirty="0">
+                <a:solidFill>
+                  <a:schemeClr val="bg1"/>
+                </a:solidFill>
+              </a:rPr>
+              <a:t>,</a:t>
+            </a:r>
+            <a:br>
+              <a:rPr lang="es-ES" sz="1800" dirty="0">
+                <a:solidFill>
+                  <a:schemeClr val="bg1"/>
+                </a:solidFill>
+              </a:rPr>
+            </a:br>
+            <a:r>
+              <a:rPr lang="es-ES" sz="1800" dirty="0">
+                <a:solidFill>
+                  <a:schemeClr val="bg1"/>
+                </a:solidFill>
+              </a:rPr>
               <a:t>        Status:         "active",</a:t>
             </a:r>
-            <a:br/>
-            <a:r>
-              <a:t>        AppraisalValue: value,</a:t>
-            </a:r>
-            <a:br/>
-            <a:r>
+            <a:br>
+              <a:rPr lang="es-ES" sz="1800" dirty="0">
+                <a:solidFill>
+                  <a:schemeClr val="bg1"/>
+                </a:solidFill>
+              </a:rPr>
+            </a:br>
+            <a:r>
+              <a:rPr lang="es-ES" sz="1800" dirty="0">
+                <a:solidFill>
+                  <a:schemeClr val="bg1"/>
+                </a:solidFill>
+              </a:rPr>
+              <a:t>        </a:t>
+            </a:r>
+            <a:r>
+              <a:rPr lang="es-ES" sz="1800" dirty="0" err="1">
+                <a:solidFill>
+                  <a:schemeClr val="bg1"/>
+                </a:solidFill>
+              </a:rPr>
+              <a:t>AppraisalValue</a:t>
+            </a:r>
+            <a:r>
+              <a:rPr lang="es-ES" sz="1800" dirty="0">
+                <a:solidFill>
+                  <a:schemeClr val="bg1"/>
+                </a:solidFill>
+              </a:rPr>
+              <a:t>: </a:t>
+            </a:r>
+            <a:r>
+              <a:rPr lang="es-ES" sz="1800" dirty="0" err="1">
+                <a:solidFill>
+                  <a:schemeClr val="bg1"/>
+                </a:solidFill>
+              </a:rPr>
+              <a:t>value</a:t>
+            </a:r>
+            <a:r>
+              <a:rPr lang="es-ES" sz="1800" dirty="0">
+                <a:solidFill>
+                  <a:schemeClr val="bg1"/>
+                </a:solidFill>
+              </a:rPr>
+              <a:t>,</a:t>
+            </a:r>
+            <a:br>
+              <a:rPr lang="es-ES" sz="1800" dirty="0">
+                <a:solidFill>
+                  <a:schemeClr val="bg1"/>
+                </a:solidFill>
+              </a:rPr>
+            </a:br>
+            <a:r>
+              <a:rPr lang="es-ES" sz="1800" dirty="0">
+                <a:solidFill>
+                  <a:schemeClr val="bg1"/>
+                </a:solidFill>
+              </a:rPr>
               <a:t>    }</a:t>
             </a:r>
-            <a:br/>
-            <a:br/>
-            <a:r>
-              <a:t>    propertyJSON, _ := json.Marshal(property)</a:t>
-            </a:r>
-            <a:br/>
-            <a:r>
-              <a:t>    return ctx.GetStub().PutState(id, propertyJSON)</a:t>
-            </a:r>
-            <a:br/>
-            <a:r>
+            <a:br>
+              <a:rPr lang="es-ES" sz="1800" dirty="0">
+                <a:solidFill>
+                  <a:schemeClr val="bg1"/>
+                </a:solidFill>
+              </a:rPr>
+            </a:br>
+            <a:br>
+              <a:rPr lang="es-ES" sz="1800" dirty="0">
+                <a:solidFill>
+                  <a:schemeClr val="bg1"/>
+                </a:solidFill>
+              </a:rPr>
+            </a:br>
+            <a:r>
+              <a:rPr lang="es-ES" sz="1800" dirty="0">
+                <a:solidFill>
+                  <a:schemeClr val="bg1"/>
+                </a:solidFill>
+              </a:rPr>
+              <a:t>    </a:t>
+            </a:r>
+            <a:r>
+              <a:rPr lang="es-ES" sz="1800" dirty="0" err="1">
+                <a:solidFill>
+                  <a:schemeClr val="bg1"/>
+                </a:solidFill>
+              </a:rPr>
+              <a:t>propertyJSON</a:t>
+            </a:r>
+            <a:r>
+              <a:rPr lang="es-ES" sz="1800" dirty="0">
+                <a:solidFill>
+                  <a:schemeClr val="bg1"/>
+                </a:solidFill>
+              </a:rPr>
+              <a:t>, _ := </a:t>
+            </a:r>
+            <a:r>
+              <a:rPr lang="es-ES" sz="1800" dirty="0" err="1">
+                <a:solidFill>
+                  <a:schemeClr val="bg1"/>
+                </a:solidFill>
+              </a:rPr>
+              <a:t>json.Marshal</a:t>
+            </a:r>
+            <a:r>
+              <a:rPr lang="es-ES" sz="1800" dirty="0">
+                <a:solidFill>
+                  <a:schemeClr val="bg1"/>
+                </a:solidFill>
+              </a:rPr>
+              <a:t>(</a:t>
+            </a:r>
+            <a:r>
+              <a:rPr lang="es-ES" sz="1800" dirty="0" err="1">
+                <a:solidFill>
+                  <a:schemeClr val="bg1"/>
+                </a:solidFill>
+              </a:rPr>
+              <a:t>property</a:t>
+            </a:r>
+            <a:r>
+              <a:rPr lang="es-ES" sz="1800" dirty="0">
+                <a:solidFill>
+                  <a:schemeClr val="bg1"/>
+                </a:solidFill>
+              </a:rPr>
+              <a:t>)</a:t>
+            </a:r>
+            <a:br>
+              <a:rPr lang="es-ES" sz="1800" dirty="0">
+                <a:solidFill>
+                  <a:schemeClr val="bg1"/>
+                </a:solidFill>
+              </a:rPr>
+            </a:br>
+            <a:r>
+              <a:rPr lang="es-ES" sz="1800" dirty="0">
+                <a:solidFill>
+                  <a:schemeClr val="bg1"/>
+                </a:solidFill>
+              </a:rPr>
+              <a:t>    </a:t>
+            </a:r>
+            <a:r>
+              <a:rPr lang="es-ES" sz="1800" dirty="0" err="1">
+                <a:solidFill>
+                  <a:schemeClr val="bg1"/>
+                </a:solidFill>
+              </a:rPr>
+              <a:t>return</a:t>
+            </a:r>
+            <a:r>
+              <a:rPr lang="es-ES" sz="1800" dirty="0">
+                <a:solidFill>
+                  <a:schemeClr val="bg1"/>
+                </a:solidFill>
+              </a:rPr>
+              <a:t> </a:t>
+            </a:r>
+            <a:r>
+              <a:rPr lang="es-ES" sz="1800" dirty="0" err="1">
+                <a:solidFill>
+                  <a:schemeClr val="bg1"/>
+                </a:solidFill>
+              </a:rPr>
+              <a:t>ctx.GetStub</a:t>
+            </a:r>
+            <a:r>
+              <a:rPr lang="es-ES" sz="1800" dirty="0">
+                <a:solidFill>
+                  <a:schemeClr val="bg1"/>
+                </a:solidFill>
+              </a:rPr>
+              <a:t>().</a:t>
+            </a:r>
+            <a:r>
+              <a:rPr lang="es-ES" sz="1800" dirty="0" err="1">
+                <a:solidFill>
+                  <a:schemeClr val="bg1"/>
+                </a:solidFill>
+              </a:rPr>
+              <a:t>PutState</a:t>
+            </a:r>
+            <a:r>
+              <a:rPr lang="es-ES" sz="1800" dirty="0">
+                <a:solidFill>
+                  <a:schemeClr val="bg1"/>
+                </a:solidFill>
+              </a:rPr>
+              <a:t>(id, </a:t>
+            </a:r>
+            <a:r>
+              <a:rPr lang="es-ES" sz="1800" dirty="0" err="1">
+                <a:solidFill>
+                  <a:schemeClr val="bg1"/>
+                </a:solidFill>
+              </a:rPr>
+              <a:t>propertyJSON</a:t>
+            </a:r>
+            <a:r>
+              <a:rPr lang="es-ES" sz="1800" dirty="0">
+                <a:solidFill>
+                  <a:schemeClr val="bg1"/>
+                </a:solidFill>
+              </a:rPr>
+              <a:t>)</a:t>
+            </a:r>
+            <a:br>
+              <a:rPr lang="es-ES" sz="1800" dirty="0">
+                <a:solidFill>
+                  <a:schemeClr val="bg1"/>
+                </a:solidFill>
+              </a:rPr>
+            </a:br>
+            <a:r>
+              <a:rPr lang="es-ES" sz="1800" dirty="0">
+                <a:solidFill>
+                  <a:schemeClr val="bg1"/>
+                </a:solidFill>
+              </a:rPr>
               <a:t>}</a:t>
             </a:r>
+            <a:endParaRPr lang="es-ES" dirty="0"/>
+          </a:p>
+        </p:txBody>
+      </p:sp>
+      <p:sp>
+        <p:nvSpPr>
+          <p:cNvPr id="11" name="Rectángulo 10">
+            <a:extLst>
+              <a:ext uri="{FF2B5EF4-FFF2-40B4-BE49-F238E27FC236}">
+                <a16:creationId xmlns:a16="http://schemas.microsoft.com/office/drawing/2014/main" id="{DB3553D2-9A3F-CD83-91C9-144B604D6B87}"/>
+              </a:ext>
+            </a:extLst>
+          </p:cNvPr>
+          <p:cNvSpPr/>
+          <p:nvPr/>
+        </p:nvSpPr>
+        <p:spPr>
+          <a:xfrm>
+            <a:off x="5607949" y="1417320"/>
+            <a:ext cx="45719" cy="5120640"/>
+          </a:xfrm>
+          <a:prstGeom prst="rect">
+            <a:avLst/>
+          </a:prstGeom>
+        </p:spPr>
+        <p:style>
+          <a:lnRef idx="1">
+            <a:schemeClr val="accent1"/>
+          </a:lnRef>
+          <a:fillRef idx="3">
+            <a:schemeClr val="accent1"/>
+          </a:fillRef>
+          <a:effectRef idx="2">
+            <a:schemeClr val="accent1"/>
+          </a:effectRef>
+          <a:fontRef idx="minor">
+            <a:schemeClr val="lt1"/>
+          </a:fontRef>
+        </p:style>
+        <p:txBody>
+          <a:bodyPr rtlCol="0" anchor="ctr"/>
+          <a:lstStyle/>
+          <a:p>
+            <a:pPr algn="ctr"/>
+            <a:endParaRPr lang="es-ES"/>
           </a:p>
         </p:txBody>
       </p:sp>
@@ -6525,7 +9846,7 @@
         <p:spPr>
           <a:xfrm>
             <a:off x="731520" y="1600200"/>
-            <a:ext cx="10698480" cy="4754880"/>
+            <a:ext cx="6483319" cy="4754880"/>
           </a:xfrm>
           <a:prstGeom prst="rect">
             <a:avLst/>
@@ -6536,97 +9857,865 @@
           <a:bodyPr wrap="square"/>
           <a:lstStyle/>
           <a:p>
-            <a:br/>
-            <a:r>
-              <a:t>func (s *SmartContract) ReadProperty(ctx contractapi.TransactionContextInterface,</a:t>
-            </a:r>
-            <a:br/>
-            <a:r>
+            <a:br>
+              <a:rPr sz="1600" dirty="0">
+                <a:solidFill>
+                  <a:schemeClr val="bg1"/>
+                </a:solidFill>
+              </a:rPr>
+            </a:br>
+            <a:r>
+              <a:rPr sz="1600" dirty="0" err="1">
+                <a:solidFill>
+                  <a:schemeClr val="bg1"/>
+                </a:solidFill>
+              </a:rPr>
+              <a:t>func</a:t>
+            </a:r>
+            <a:r>
+              <a:rPr sz="1600" dirty="0">
+                <a:solidFill>
+                  <a:schemeClr val="bg1"/>
+                </a:solidFill>
+              </a:rPr>
+              <a:t> (s *</a:t>
+            </a:r>
+            <a:r>
+              <a:rPr sz="1600" dirty="0" err="1">
+                <a:solidFill>
+                  <a:schemeClr val="bg1"/>
+                </a:solidFill>
+              </a:rPr>
+              <a:t>SmartContract</a:t>
+            </a:r>
+            <a:r>
+              <a:rPr sz="1600" dirty="0">
+                <a:solidFill>
+                  <a:schemeClr val="bg1"/>
+                </a:solidFill>
+              </a:rPr>
+              <a:t>) </a:t>
+            </a:r>
+            <a:r>
+              <a:rPr sz="1600" dirty="0" err="1">
+                <a:solidFill>
+                  <a:schemeClr val="bg1"/>
+                </a:solidFill>
+              </a:rPr>
+              <a:t>ReadProperty</a:t>
+            </a:r>
+            <a:r>
+              <a:rPr sz="1600" dirty="0">
+                <a:solidFill>
+                  <a:schemeClr val="bg1"/>
+                </a:solidFill>
+              </a:rPr>
+              <a:t>(</a:t>
+            </a:r>
+            <a:r>
+              <a:rPr sz="1600" dirty="0" err="1">
+                <a:solidFill>
+                  <a:schemeClr val="bg1"/>
+                </a:solidFill>
+              </a:rPr>
+              <a:t>ctx</a:t>
+            </a:r>
+            <a:r>
+              <a:rPr sz="1600" dirty="0">
+                <a:solidFill>
+                  <a:schemeClr val="bg1"/>
+                </a:solidFill>
+              </a:rPr>
+              <a:t> </a:t>
+            </a:r>
+            <a:r>
+              <a:rPr sz="1600" dirty="0" err="1">
+                <a:solidFill>
+                  <a:schemeClr val="bg1"/>
+                </a:solidFill>
+              </a:rPr>
+              <a:t>contractapi.TransactionContextInterface</a:t>
+            </a:r>
+            <a:r>
+              <a:rPr sz="1600" dirty="0">
+                <a:solidFill>
+                  <a:schemeClr val="bg1"/>
+                </a:solidFill>
+              </a:rPr>
+              <a:t>,</a:t>
+            </a:r>
+            <a:br>
+              <a:rPr sz="1600" dirty="0">
+                <a:solidFill>
+                  <a:schemeClr val="bg1"/>
+                </a:solidFill>
+              </a:rPr>
+            </a:br>
+            <a:r>
+              <a:rPr sz="1600" dirty="0">
+                <a:solidFill>
+                  <a:schemeClr val="bg1"/>
+                </a:solidFill>
+              </a:rPr>
               <a:t>    id string) (*Property, error) {</a:t>
             </a:r>
-            <a:br/>
-            <a:br/>
-            <a:r>
-              <a:t>    propertyJSON, err := ctx.GetStub().GetState(id)</a:t>
-            </a:r>
-            <a:br/>
-            <a:r>
+            <a:br>
+              <a:rPr sz="1600" dirty="0">
+                <a:solidFill>
+                  <a:schemeClr val="bg1"/>
+                </a:solidFill>
+              </a:rPr>
+            </a:br>
+            <a:br>
+              <a:rPr sz="1600" dirty="0">
+                <a:solidFill>
+                  <a:schemeClr val="bg1"/>
+                </a:solidFill>
+              </a:rPr>
+            </a:br>
+            <a:r>
+              <a:rPr sz="1600" dirty="0">
+                <a:solidFill>
+                  <a:schemeClr val="bg1"/>
+                </a:solidFill>
+              </a:rPr>
+              <a:t>    </a:t>
+            </a:r>
+            <a:r>
+              <a:rPr sz="1600" dirty="0" err="1">
+                <a:solidFill>
+                  <a:schemeClr val="bg1"/>
+                </a:solidFill>
+              </a:rPr>
+              <a:t>propertyJSON</a:t>
+            </a:r>
+            <a:r>
+              <a:rPr sz="1600" dirty="0">
+                <a:solidFill>
+                  <a:schemeClr val="bg1"/>
+                </a:solidFill>
+              </a:rPr>
+              <a:t>, err := </a:t>
+            </a:r>
+            <a:r>
+              <a:rPr sz="1600" dirty="0" err="1">
+                <a:solidFill>
+                  <a:schemeClr val="bg1"/>
+                </a:solidFill>
+              </a:rPr>
+              <a:t>ctx.GetStub</a:t>
+            </a:r>
+            <a:r>
+              <a:rPr sz="1600" dirty="0">
+                <a:solidFill>
+                  <a:schemeClr val="bg1"/>
+                </a:solidFill>
+              </a:rPr>
+              <a:t>().</a:t>
+            </a:r>
+            <a:r>
+              <a:rPr sz="1600" dirty="0" err="1">
+                <a:solidFill>
+                  <a:schemeClr val="bg1"/>
+                </a:solidFill>
+              </a:rPr>
+              <a:t>GetState</a:t>
+            </a:r>
+            <a:r>
+              <a:rPr sz="1600" dirty="0">
+                <a:solidFill>
+                  <a:schemeClr val="bg1"/>
+                </a:solidFill>
+              </a:rPr>
+              <a:t>(id)</a:t>
+            </a:r>
+            <a:br>
+              <a:rPr sz="1600" dirty="0">
+                <a:solidFill>
+                  <a:schemeClr val="bg1"/>
+                </a:solidFill>
+              </a:rPr>
+            </a:br>
+            <a:r>
+              <a:rPr sz="1600" dirty="0">
+                <a:solidFill>
+                  <a:schemeClr val="bg1"/>
+                </a:solidFill>
+              </a:rPr>
               <a:t>    if err != nil {</a:t>
             </a:r>
-            <a:br/>
-            <a:r>
-              <a:t>        return nil, fmt.Errorf("failed to read: %v", err)</a:t>
-            </a:r>
-            <a:br/>
-            <a:r>
+            <a:br>
+              <a:rPr sz="1600" dirty="0">
+                <a:solidFill>
+                  <a:schemeClr val="bg1"/>
+                </a:solidFill>
+              </a:rPr>
+            </a:br>
+            <a:r>
+              <a:rPr sz="1600" dirty="0">
+                <a:solidFill>
+                  <a:schemeClr val="bg1"/>
+                </a:solidFill>
+              </a:rPr>
+              <a:t>        return nil, </a:t>
+            </a:r>
+            <a:r>
+              <a:rPr sz="1600" dirty="0" err="1">
+                <a:solidFill>
+                  <a:schemeClr val="bg1"/>
+                </a:solidFill>
+              </a:rPr>
+              <a:t>fmt.Errorf</a:t>
+            </a:r>
+            <a:r>
+              <a:rPr sz="1600" dirty="0">
+                <a:solidFill>
+                  <a:schemeClr val="bg1"/>
+                </a:solidFill>
+              </a:rPr>
+              <a:t>("failed to read: %v", err)</a:t>
+            </a:r>
+            <a:br>
+              <a:rPr sz="1600" dirty="0">
+                <a:solidFill>
+                  <a:schemeClr val="bg1"/>
+                </a:solidFill>
+              </a:rPr>
+            </a:br>
+            <a:r>
+              <a:rPr sz="1600" dirty="0">
+                <a:solidFill>
+                  <a:schemeClr val="bg1"/>
+                </a:solidFill>
+              </a:rPr>
               <a:t>    }</a:t>
             </a:r>
-            <a:br/>
-            <a:r>
-              <a:t>    if propertyJSON == nil {</a:t>
-            </a:r>
-            <a:br/>
-            <a:r>
-              <a:t>        return nil, fmt.Errorf("property %s does not exist", id)</a:t>
-            </a:r>
-            <a:br/>
-            <a:r>
+            <a:br>
+              <a:rPr sz="1600" dirty="0">
+                <a:solidFill>
+                  <a:schemeClr val="bg1"/>
+                </a:solidFill>
+              </a:rPr>
+            </a:br>
+            <a:r>
+              <a:rPr sz="1600" dirty="0">
+                <a:solidFill>
+                  <a:schemeClr val="bg1"/>
+                </a:solidFill>
+              </a:rPr>
+              <a:t>    if </a:t>
+            </a:r>
+            <a:r>
+              <a:rPr sz="1600" dirty="0" err="1">
+                <a:solidFill>
+                  <a:schemeClr val="bg1"/>
+                </a:solidFill>
+              </a:rPr>
+              <a:t>propertyJSON</a:t>
+            </a:r>
+            <a:r>
+              <a:rPr sz="1600" dirty="0">
+                <a:solidFill>
+                  <a:schemeClr val="bg1"/>
+                </a:solidFill>
+              </a:rPr>
+              <a:t> == nil {</a:t>
+            </a:r>
+            <a:br>
+              <a:rPr sz="1600" dirty="0">
+                <a:solidFill>
+                  <a:schemeClr val="bg1"/>
+                </a:solidFill>
+              </a:rPr>
+            </a:br>
+            <a:r>
+              <a:rPr sz="1600" dirty="0">
+                <a:solidFill>
+                  <a:schemeClr val="bg1"/>
+                </a:solidFill>
+              </a:rPr>
+              <a:t>        return nil, </a:t>
+            </a:r>
+            <a:r>
+              <a:rPr sz="1600" dirty="0" err="1">
+                <a:solidFill>
+                  <a:schemeClr val="bg1"/>
+                </a:solidFill>
+              </a:rPr>
+              <a:t>fmt.Errorf</a:t>
+            </a:r>
+            <a:r>
+              <a:rPr sz="1600" dirty="0">
+                <a:solidFill>
+                  <a:schemeClr val="bg1"/>
+                </a:solidFill>
+              </a:rPr>
+              <a:t>("property %s does not exist", id)</a:t>
+            </a:r>
+            <a:br>
+              <a:rPr sz="1600" dirty="0">
+                <a:solidFill>
+                  <a:schemeClr val="bg1"/>
+                </a:solidFill>
+              </a:rPr>
+            </a:br>
+            <a:r>
+              <a:rPr sz="1600" dirty="0">
+                <a:solidFill>
+                  <a:schemeClr val="bg1"/>
+                </a:solidFill>
+              </a:rPr>
               <a:t>    }</a:t>
             </a:r>
-            <a:br/>
-            <a:br/>
-            <a:r>
-              <a:t>    var property Property</a:t>
-            </a:r>
-            <a:br/>
-            <a:r>
-              <a:t>    err = json.Unmarshal(propertyJSON, &amp;property)</a:t>
-            </a:r>
-            <a:br/>
-            <a:r>
+            <a:br>
+              <a:rPr sz="1600" dirty="0">
+                <a:solidFill>
+                  <a:schemeClr val="bg1"/>
+                </a:solidFill>
+              </a:rPr>
+            </a:br>
+            <a:br>
+              <a:rPr sz="1600" dirty="0">
+                <a:solidFill>
+                  <a:schemeClr val="bg1"/>
+                </a:solidFill>
+              </a:rPr>
+            </a:br>
+            <a:r>
+              <a:rPr sz="1600" dirty="0">
+                <a:solidFill>
+                  <a:schemeClr val="bg1"/>
+                </a:solidFill>
+              </a:rPr>
+              <a:t>    var property </a:t>
+            </a:r>
+            <a:r>
+              <a:rPr sz="1600" dirty="0" err="1">
+                <a:solidFill>
+                  <a:schemeClr val="bg1"/>
+                </a:solidFill>
+              </a:rPr>
+              <a:t>Property</a:t>
+            </a:r>
+            <a:br>
+              <a:rPr sz="1600" dirty="0">
+                <a:solidFill>
+                  <a:schemeClr val="bg1"/>
+                </a:solidFill>
+              </a:rPr>
+            </a:br>
+            <a:r>
+              <a:rPr sz="1600" dirty="0">
+                <a:solidFill>
+                  <a:schemeClr val="bg1"/>
+                </a:solidFill>
+              </a:rPr>
+              <a:t>    err = </a:t>
+            </a:r>
+            <a:r>
+              <a:rPr sz="1600" dirty="0" err="1">
+                <a:solidFill>
+                  <a:schemeClr val="bg1"/>
+                </a:solidFill>
+              </a:rPr>
+              <a:t>json.Unmarshal</a:t>
+            </a:r>
+            <a:r>
+              <a:rPr sz="1600" dirty="0">
+                <a:solidFill>
+                  <a:schemeClr val="bg1"/>
+                </a:solidFill>
+              </a:rPr>
+              <a:t>(</a:t>
+            </a:r>
+            <a:r>
+              <a:rPr sz="1600" dirty="0" err="1">
+                <a:solidFill>
+                  <a:schemeClr val="bg1"/>
+                </a:solidFill>
+              </a:rPr>
+              <a:t>propertyJSON</a:t>
+            </a:r>
+            <a:r>
+              <a:rPr sz="1600" dirty="0">
+                <a:solidFill>
+                  <a:schemeClr val="bg1"/>
+                </a:solidFill>
+              </a:rPr>
+              <a:t>, &amp;property)</a:t>
+            </a:r>
+            <a:br>
+              <a:rPr sz="1600" dirty="0">
+                <a:solidFill>
+                  <a:schemeClr val="bg1"/>
+                </a:solidFill>
+              </a:rPr>
+            </a:br>
+            <a:r>
+              <a:rPr sz="1600" dirty="0">
+                <a:solidFill>
+                  <a:schemeClr val="bg1"/>
+                </a:solidFill>
+              </a:rPr>
               <a:t>    if err != nil {</a:t>
             </a:r>
-            <a:br/>
-            <a:r>
+            <a:br>
+              <a:rPr sz="1600" dirty="0">
+                <a:solidFill>
+                  <a:schemeClr val="bg1"/>
+                </a:solidFill>
+              </a:rPr>
+            </a:br>
+            <a:r>
+              <a:rPr sz="1600" dirty="0">
+                <a:solidFill>
+                  <a:schemeClr val="bg1"/>
+                </a:solidFill>
+              </a:rPr>
               <a:t>        return nil, err</a:t>
             </a:r>
-            <a:br/>
-            <a:r>
+            <a:br>
+              <a:rPr sz="1600" dirty="0">
+                <a:solidFill>
+                  <a:schemeClr val="bg1"/>
+                </a:solidFill>
+              </a:rPr>
+            </a:br>
+            <a:r>
+              <a:rPr sz="1600" dirty="0">
+                <a:solidFill>
+                  <a:schemeClr val="bg1"/>
+                </a:solidFill>
+              </a:rPr>
               <a:t>    }</a:t>
             </a:r>
-            <a:br/>
-            <a:r>
+            <a:br>
+              <a:rPr sz="1600" dirty="0">
+                <a:solidFill>
+                  <a:schemeClr val="bg1"/>
+                </a:solidFill>
+              </a:rPr>
+            </a:br>
+            <a:r>
+              <a:rPr sz="1600" dirty="0">
+                <a:solidFill>
+                  <a:schemeClr val="bg1"/>
+                </a:solidFill>
+              </a:rPr>
               <a:t>    return &amp;property, nil</a:t>
             </a:r>
-            <a:br/>
-            <a:r>
+            <a:br>
+              <a:rPr sz="1600" dirty="0">
+                <a:solidFill>
+                  <a:schemeClr val="bg1"/>
+                </a:solidFill>
+              </a:rPr>
+            </a:br>
+            <a:r>
+              <a:rPr sz="1600" dirty="0">
+                <a:solidFill>
+                  <a:schemeClr val="bg1"/>
+                </a:solidFill>
+              </a:rPr>
               <a:t>}</a:t>
             </a:r>
-            <a:br/>
-            <a:br/>
-            <a:r>
+          </a:p>
+        </p:txBody>
+      </p:sp>
+      <p:sp>
+        <p:nvSpPr>
+          <p:cNvPr id="10" name="CuadroTexto 9">
+            <a:extLst>
+              <a:ext uri="{FF2B5EF4-FFF2-40B4-BE49-F238E27FC236}">
+                <a16:creationId xmlns:a16="http://schemas.microsoft.com/office/drawing/2014/main" id="{90AF0E2C-7197-4B61-0F35-9046741F8D90}"/>
+              </a:ext>
+            </a:extLst>
+          </p:cNvPr>
+          <p:cNvSpPr txBox="1"/>
+          <p:nvPr/>
+        </p:nvSpPr>
+        <p:spPr>
+          <a:xfrm>
+            <a:off x="6501719" y="1584354"/>
+            <a:ext cx="4872525" cy="2308324"/>
+          </a:xfrm>
+          <a:prstGeom prst="rect">
+            <a:avLst/>
+          </a:prstGeom>
+          <a:noFill/>
+        </p:spPr>
+        <p:txBody>
+          <a:bodyPr wrap="square">
+            <a:spAutoFit/>
+          </a:bodyPr>
+          <a:lstStyle/>
+          <a:p>
+            <a:br>
+              <a:rPr lang="es-ES" sz="1600" dirty="0">
+                <a:solidFill>
+                  <a:schemeClr val="bg1"/>
+                </a:solidFill>
+              </a:rPr>
+            </a:br>
+            <a:br>
+              <a:rPr lang="es-ES" sz="1600" dirty="0">
+                <a:solidFill>
+                  <a:schemeClr val="bg1"/>
+                </a:solidFill>
+              </a:rPr>
+            </a:br>
+            <a:r>
+              <a:rPr lang="es-ES" sz="1600" dirty="0">
+                <a:solidFill>
+                  <a:schemeClr val="bg1"/>
+                </a:solidFill>
+              </a:rPr>
               <a:t>// En Node.js seria:</a:t>
             </a:r>
-            <a:br/>
-            <a:r>
-              <a:t>// async ReadProperty(ctx, id) {</a:t>
-            </a:r>
-            <a:br/>
-            <a:r>
-              <a:t>//     const data = await ctx.stub.getState(id);</a:t>
-            </a:r>
-            <a:br/>
-            <a:r>
-              <a:t>//     if (!data || data.length === 0) throw new Error('Not found');</a:t>
-            </a:r>
-            <a:br/>
-            <a:r>
-              <a:t>//     return JSON.parse(data.toString());</a:t>
-            </a:r>
-            <a:br/>
-            <a:r>
+            <a:br>
+              <a:rPr lang="es-ES" sz="1600" dirty="0">
+                <a:solidFill>
+                  <a:schemeClr val="bg1"/>
+                </a:solidFill>
+              </a:rPr>
+            </a:br>
+            <a:r>
+              <a:rPr lang="es-ES" sz="1600" dirty="0">
+                <a:solidFill>
+                  <a:schemeClr val="bg1"/>
+                </a:solidFill>
+              </a:rPr>
+              <a:t>// </a:t>
+            </a:r>
+            <a:r>
+              <a:rPr lang="es-ES" sz="1600" dirty="0" err="1">
+                <a:solidFill>
+                  <a:schemeClr val="bg1"/>
+                </a:solidFill>
+              </a:rPr>
+              <a:t>async</a:t>
+            </a:r>
+            <a:r>
+              <a:rPr lang="es-ES" sz="1600" dirty="0">
+                <a:solidFill>
+                  <a:schemeClr val="bg1"/>
+                </a:solidFill>
+              </a:rPr>
+              <a:t> </a:t>
+            </a:r>
+            <a:r>
+              <a:rPr lang="es-ES" sz="1600" dirty="0" err="1">
+                <a:solidFill>
+                  <a:schemeClr val="bg1"/>
+                </a:solidFill>
+              </a:rPr>
+              <a:t>ReadProperty</a:t>
+            </a:r>
+            <a:r>
+              <a:rPr lang="es-ES" sz="1600" dirty="0">
+                <a:solidFill>
+                  <a:schemeClr val="bg1"/>
+                </a:solidFill>
+              </a:rPr>
+              <a:t>(</a:t>
+            </a:r>
+            <a:r>
+              <a:rPr lang="es-ES" sz="1600" dirty="0" err="1">
+                <a:solidFill>
+                  <a:schemeClr val="bg1"/>
+                </a:solidFill>
+              </a:rPr>
+              <a:t>ctx</a:t>
+            </a:r>
+            <a:r>
+              <a:rPr lang="es-ES" sz="1600" dirty="0">
+                <a:solidFill>
+                  <a:schemeClr val="bg1"/>
+                </a:solidFill>
+              </a:rPr>
+              <a:t>, id) {</a:t>
+            </a:r>
+            <a:br>
+              <a:rPr lang="es-ES" sz="1600" dirty="0">
+                <a:solidFill>
+                  <a:schemeClr val="bg1"/>
+                </a:solidFill>
+              </a:rPr>
+            </a:br>
+            <a:r>
+              <a:rPr lang="es-ES" sz="1600" dirty="0">
+                <a:solidFill>
+                  <a:schemeClr val="bg1"/>
+                </a:solidFill>
+              </a:rPr>
+              <a:t>//     </a:t>
+            </a:r>
+            <a:r>
+              <a:rPr lang="es-ES" sz="1600" dirty="0" err="1">
+                <a:solidFill>
+                  <a:schemeClr val="bg1"/>
+                </a:solidFill>
+              </a:rPr>
+              <a:t>const</a:t>
+            </a:r>
+            <a:r>
+              <a:rPr lang="es-ES" sz="1600" dirty="0">
+                <a:solidFill>
+                  <a:schemeClr val="bg1"/>
+                </a:solidFill>
+              </a:rPr>
+              <a:t> data = </a:t>
+            </a:r>
+            <a:r>
+              <a:rPr lang="es-ES" sz="1600" dirty="0" err="1">
+                <a:solidFill>
+                  <a:schemeClr val="bg1"/>
+                </a:solidFill>
+              </a:rPr>
+              <a:t>await</a:t>
+            </a:r>
+            <a:r>
+              <a:rPr lang="es-ES" sz="1600" dirty="0">
+                <a:solidFill>
+                  <a:schemeClr val="bg1"/>
+                </a:solidFill>
+              </a:rPr>
+              <a:t> </a:t>
+            </a:r>
+            <a:r>
+              <a:rPr lang="es-ES" sz="1600" dirty="0" err="1">
+                <a:solidFill>
+                  <a:schemeClr val="bg1"/>
+                </a:solidFill>
+              </a:rPr>
+              <a:t>ctx.stub.getState</a:t>
+            </a:r>
+            <a:r>
+              <a:rPr lang="es-ES" sz="1600" dirty="0">
+                <a:solidFill>
+                  <a:schemeClr val="bg1"/>
+                </a:solidFill>
+              </a:rPr>
+              <a:t>(id);</a:t>
+            </a:r>
+            <a:br>
+              <a:rPr lang="es-ES" sz="1600" dirty="0">
+                <a:solidFill>
+                  <a:schemeClr val="bg1"/>
+                </a:solidFill>
+              </a:rPr>
+            </a:br>
+            <a:r>
+              <a:rPr lang="es-ES" sz="1600" dirty="0">
+                <a:solidFill>
+                  <a:schemeClr val="bg1"/>
+                </a:solidFill>
+              </a:rPr>
+              <a:t>//     </a:t>
+            </a:r>
+            <a:r>
+              <a:rPr lang="es-ES" sz="1600" dirty="0" err="1">
+                <a:solidFill>
+                  <a:schemeClr val="bg1"/>
+                </a:solidFill>
+              </a:rPr>
+              <a:t>if</a:t>
+            </a:r>
+            <a:r>
+              <a:rPr lang="es-ES" sz="1600" dirty="0">
+                <a:solidFill>
+                  <a:schemeClr val="bg1"/>
+                </a:solidFill>
+              </a:rPr>
+              <a:t> (!data || </a:t>
+            </a:r>
+            <a:r>
+              <a:rPr lang="es-ES" sz="1600" dirty="0" err="1">
+                <a:solidFill>
+                  <a:schemeClr val="bg1"/>
+                </a:solidFill>
+              </a:rPr>
+              <a:t>data.length</a:t>
+            </a:r>
+            <a:r>
+              <a:rPr lang="es-ES" sz="1600" dirty="0">
+                <a:solidFill>
+                  <a:schemeClr val="bg1"/>
+                </a:solidFill>
+              </a:rPr>
+              <a:t> === 0) </a:t>
+            </a:r>
+            <a:r>
+              <a:rPr lang="es-ES" sz="1600" dirty="0" err="1">
+                <a:solidFill>
+                  <a:schemeClr val="bg1"/>
+                </a:solidFill>
+              </a:rPr>
+              <a:t>throw</a:t>
+            </a:r>
+            <a:r>
+              <a:rPr lang="es-ES" sz="1600" dirty="0">
+                <a:solidFill>
+                  <a:schemeClr val="bg1"/>
+                </a:solidFill>
+              </a:rPr>
+              <a:t> new Error('</a:t>
+            </a:r>
+            <a:r>
+              <a:rPr lang="es-ES" sz="1600" dirty="0" err="1">
+                <a:solidFill>
+                  <a:schemeClr val="bg1"/>
+                </a:solidFill>
+              </a:rPr>
+              <a:t>Not</a:t>
+            </a:r>
+            <a:r>
+              <a:rPr lang="es-ES" sz="1600" dirty="0">
+                <a:solidFill>
+                  <a:schemeClr val="bg1"/>
+                </a:solidFill>
+              </a:rPr>
+              <a:t> </a:t>
+            </a:r>
+            <a:r>
+              <a:rPr lang="es-ES" sz="1600" dirty="0" err="1">
+                <a:solidFill>
+                  <a:schemeClr val="bg1"/>
+                </a:solidFill>
+              </a:rPr>
+              <a:t>found</a:t>
+            </a:r>
+            <a:r>
+              <a:rPr lang="es-ES" sz="1600" dirty="0">
+                <a:solidFill>
+                  <a:schemeClr val="bg1"/>
+                </a:solidFill>
+              </a:rPr>
+              <a:t>');</a:t>
+            </a:r>
+            <a:br>
+              <a:rPr lang="es-ES" sz="1600" dirty="0">
+                <a:solidFill>
+                  <a:schemeClr val="bg1"/>
+                </a:solidFill>
+              </a:rPr>
+            </a:br>
+            <a:r>
+              <a:rPr lang="es-ES" sz="1600" dirty="0">
+                <a:solidFill>
+                  <a:schemeClr val="bg1"/>
+                </a:solidFill>
+              </a:rPr>
+              <a:t>//     </a:t>
+            </a:r>
+            <a:r>
+              <a:rPr lang="es-ES" sz="1600" dirty="0" err="1">
+                <a:solidFill>
+                  <a:schemeClr val="bg1"/>
+                </a:solidFill>
+              </a:rPr>
+              <a:t>return</a:t>
+            </a:r>
+            <a:r>
+              <a:rPr lang="es-ES" sz="1600" dirty="0">
+                <a:solidFill>
+                  <a:schemeClr val="bg1"/>
+                </a:solidFill>
+              </a:rPr>
+              <a:t> </a:t>
+            </a:r>
+            <a:r>
+              <a:rPr lang="es-ES" sz="1600" dirty="0" err="1">
+                <a:solidFill>
+                  <a:schemeClr val="bg1"/>
+                </a:solidFill>
+              </a:rPr>
+              <a:t>JSON.parse</a:t>
+            </a:r>
+            <a:r>
+              <a:rPr lang="es-ES" sz="1600" dirty="0">
+                <a:solidFill>
+                  <a:schemeClr val="bg1"/>
+                </a:solidFill>
+              </a:rPr>
+              <a:t>(</a:t>
+            </a:r>
+            <a:r>
+              <a:rPr lang="es-ES" sz="1600" dirty="0" err="1">
+                <a:solidFill>
+                  <a:schemeClr val="bg1"/>
+                </a:solidFill>
+              </a:rPr>
+              <a:t>data.toString</a:t>
+            </a:r>
+            <a:r>
+              <a:rPr lang="es-ES" sz="1600" dirty="0">
+                <a:solidFill>
+                  <a:schemeClr val="bg1"/>
+                </a:solidFill>
+              </a:rPr>
+              <a:t>());</a:t>
+            </a:r>
+            <a:br>
+              <a:rPr lang="es-ES" sz="1600" dirty="0">
+                <a:solidFill>
+                  <a:schemeClr val="bg1"/>
+                </a:solidFill>
+              </a:rPr>
+            </a:br>
+            <a:r>
+              <a:rPr lang="es-ES" sz="1600" dirty="0">
+                <a:solidFill>
+                  <a:schemeClr val="bg1"/>
+                </a:solidFill>
+              </a:rPr>
               <a:t>// }</a:t>
             </a:r>
+            <a:endParaRPr lang="es-ES" sz="1600" dirty="0"/>
+          </a:p>
+        </p:txBody>
+      </p:sp>
+      <p:sp>
+        <p:nvSpPr>
+          <p:cNvPr id="11" name="Rectángulo 10">
+            <a:extLst>
+              <a:ext uri="{FF2B5EF4-FFF2-40B4-BE49-F238E27FC236}">
+                <a16:creationId xmlns:a16="http://schemas.microsoft.com/office/drawing/2014/main" id="{F691D078-F9E1-1C7D-4E04-BDD6A0D3F611}"/>
+              </a:ext>
+            </a:extLst>
+          </p:cNvPr>
+          <p:cNvSpPr/>
+          <p:nvPr/>
+        </p:nvSpPr>
+        <p:spPr>
+          <a:xfrm>
+            <a:off x="5887844" y="1417320"/>
+            <a:ext cx="45719" cy="5120640"/>
+          </a:xfrm>
+          <a:prstGeom prst="rect">
+            <a:avLst/>
+          </a:prstGeom>
+        </p:spPr>
+        <p:style>
+          <a:lnRef idx="1">
+            <a:schemeClr val="accent1"/>
+          </a:lnRef>
+          <a:fillRef idx="3">
+            <a:schemeClr val="accent1"/>
+          </a:fillRef>
+          <a:effectRef idx="2">
+            <a:schemeClr val="accent1"/>
+          </a:effectRef>
+          <a:fontRef idx="minor">
+            <a:schemeClr val="lt1"/>
+          </a:fontRef>
+        </p:style>
+        <p:txBody>
+          <a:bodyPr rtlCol="0" anchor="ctr"/>
+          <a:lstStyle/>
+          <a:p>
+            <a:pPr algn="ctr"/>
+            <a:endParaRPr lang="es-ES"/>
           </a:p>
         </p:txBody>
       </p:sp>
@@ -6898,7 +10987,7 @@
         <p:spPr>
           <a:xfrm>
             <a:off x="731520" y="1600200"/>
-            <a:ext cx="10698480" cy="4754880"/>
+            <a:ext cx="5992665" cy="4754880"/>
           </a:xfrm>
           <a:prstGeom prst="rect">
             <a:avLst/>
@@ -6909,82 +10998,852 @@
           <a:bodyPr wrap="square"/>
           <a:lstStyle/>
           <a:p>
-            <a:br/>
-            <a:r>
-              <a:t>func (s *SmartContract) UpdatePropertyValue(ctx contractapi.TransactionContextInterface,</a:t>
-            </a:r>
-            <a:br/>
-            <a:r>
-              <a:t>    id string, newValue int) error {</a:t>
-            </a:r>
-            <a:br/>
-            <a:br/>
-            <a:r>
-              <a:t>    // Leer el activo existente</a:t>
-            </a:r>
-            <a:br/>
-            <a:r>
-              <a:t>    property, err := s.ReadProperty(ctx, id)</a:t>
-            </a:r>
-            <a:br/>
-            <a:r>
+            <a:br>
+              <a:rPr sz="1600" dirty="0">
+                <a:solidFill>
+                  <a:schemeClr val="bg1"/>
+                </a:solidFill>
+              </a:rPr>
+            </a:br>
+            <a:r>
+              <a:rPr sz="1600" dirty="0" err="1">
+                <a:solidFill>
+                  <a:schemeClr val="bg1"/>
+                </a:solidFill>
+              </a:rPr>
+              <a:t>func</a:t>
+            </a:r>
+            <a:r>
+              <a:rPr sz="1600" dirty="0">
+                <a:solidFill>
+                  <a:schemeClr val="bg1"/>
+                </a:solidFill>
+              </a:rPr>
+              <a:t> (s *</a:t>
+            </a:r>
+            <a:r>
+              <a:rPr sz="1600" dirty="0" err="1">
+                <a:solidFill>
+                  <a:schemeClr val="bg1"/>
+                </a:solidFill>
+              </a:rPr>
+              <a:t>SmartContract</a:t>
+            </a:r>
+            <a:r>
+              <a:rPr sz="1600" dirty="0">
+                <a:solidFill>
+                  <a:schemeClr val="bg1"/>
+                </a:solidFill>
+              </a:rPr>
+              <a:t>) </a:t>
+            </a:r>
+            <a:r>
+              <a:rPr sz="1600" dirty="0" err="1">
+                <a:solidFill>
+                  <a:schemeClr val="bg1"/>
+                </a:solidFill>
+              </a:rPr>
+              <a:t>UpdatePropertyValue</a:t>
+            </a:r>
+            <a:r>
+              <a:rPr sz="1600" dirty="0">
+                <a:solidFill>
+                  <a:schemeClr val="bg1"/>
+                </a:solidFill>
+              </a:rPr>
+              <a:t>(</a:t>
+            </a:r>
+            <a:r>
+              <a:rPr sz="1600" dirty="0" err="1">
+                <a:solidFill>
+                  <a:schemeClr val="bg1"/>
+                </a:solidFill>
+              </a:rPr>
+              <a:t>ctx</a:t>
+            </a:r>
+            <a:r>
+              <a:rPr sz="1600" dirty="0">
+                <a:solidFill>
+                  <a:schemeClr val="bg1"/>
+                </a:solidFill>
+              </a:rPr>
+              <a:t> </a:t>
+            </a:r>
+            <a:r>
+              <a:rPr sz="1600" dirty="0" err="1">
+                <a:solidFill>
+                  <a:schemeClr val="bg1"/>
+                </a:solidFill>
+              </a:rPr>
+              <a:t>contractapi.TransactionContextInterface</a:t>
+            </a:r>
+            <a:r>
+              <a:rPr sz="1600" dirty="0">
+                <a:solidFill>
+                  <a:schemeClr val="bg1"/>
+                </a:solidFill>
+              </a:rPr>
+              <a:t>,</a:t>
+            </a:r>
+            <a:br>
+              <a:rPr sz="1600" dirty="0">
+                <a:solidFill>
+                  <a:schemeClr val="bg1"/>
+                </a:solidFill>
+              </a:rPr>
+            </a:br>
+            <a:r>
+              <a:rPr sz="1600" dirty="0">
+                <a:solidFill>
+                  <a:schemeClr val="bg1"/>
+                </a:solidFill>
+              </a:rPr>
+              <a:t>    id string, </a:t>
+            </a:r>
+            <a:r>
+              <a:rPr sz="1600" dirty="0" err="1">
+                <a:solidFill>
+                  <a:schemeClr val="bg1"/>
+                </a:solidFill>
+              </a:rPr>
+              <a:t>newValue</a:t>
+            </a:r>
+            <a:r>
+              <a:rPr sz="1600" dirty="0">
+                <a:solidFill>
+                  <a:schemeClr val="bg1"/>
+                </a:solidFill>
+              </a:rPr>
+              <a:t> int) error {</a:t>
+            </a:r>
+            <a:br>
+              <a:rPr sz="1600" dirty="0">
+                <a:solidFill>
+                  <a:schemeClr val="bg1"/>
+                </a:solidFill>
+              </a:rPr>
+            </a:br>
+            <a:br>
+              <a:rPr sz="1600" dirty="0">
+                <a:solidFill>
+                  <a:schemeClr val="bg1"/>
+                </a:solidFill>
+              </a:rPr>
+            </a:br>
+            <a:r>
+              <a:rPr sz="1600" dirty="0">
+                <a:solidFill>
+                  <a:schemeClr val="bg1"/>
+                </a:solidFill>
+              </a:rPr>
+              <a:t>    // Leer </a:t>
+            </a:r>
+            <a:r>
+              <a:rPr sz="1600" dirty="0" err="1">
+                <a:solidFill>
+                  <a:schemeClr val="bg1"/>
+                </a:solidFill>
+              </a:rPr>
+              <a:t>el</a:t>
+            </a:r>
+            <a:r>
+              <a:rPr sz="1600" dirty="0">
+                <a:solidFill>
+                  <a:schemeClr val="bg1"/>
+                </a:solidFill>
+              </a:rPr>
+              <a:t> </a:t>
+            </a:r>
+            <a:r>
+              <a:rPr sz="1600" dirty="0" err="1">
+                <a:solidFill>
+                  <a:schemeClr val="bg1"/>
+                </a:solidFill>
+              </a:rPr>
+              <a:t>activo</a:t>
+            </a:r>
+            <a:r>
+              <a:rPr sz="1600" dirty="0">
+                <a:solidFill>
+                  <a:schemeClr val="bg1"/>
+                </a:solidFill>
+              </a:rPr>
+              <a:t> </a:t>
+            </a:r>
+            <a:r>
+              <a:rPr sz="1600" dirty="0" err="1">
+                <a:solidFill>
+                  <a:schemeClr val="bg1"/>
+                </a:solidFill>
+              </a:rPr>
+              <a:t>existente</a:t>
+            </a:r>
+            <a:br>
+              <a:rPr sz="1600" dirty="0">
+                <a:solidFill>
+                  <a:schemeClr val="bg1"/>
+                </a:solidFill>
+              </a:rPr>
+            </a:br>
+            <a:r>
+              <a:rPr sz="1600" dirty="0">
+                <a:solidFill>
+                  <a:schemeClr val="bg1"/>
+                </a:solidFill>
+              </a:rPr>
+              <a:t>    property, err := </a:t>
+            </a:r>
+            <a:r>
+              <a:rPr sz="1600" dirty="0" err="1">
+                <a:solidFill>
+                  <a:schemeClr val="bg1"/>
+                </a:solidFill>
+              </a:rPr>
+              <a:t>s.ReadProperty</a:t>
+            </a:r>
+            <a:r>
+              <a:rPr sz="1600" dirty="0">
+                <a:solidFill>
+                  <a:schemeClr val="bg1"/>
+                </a:solidFill>
+              </a:rPr>
+              <a:t>(</a:t>
+            </a:r>
+            <a:r>
+              <a:rPr sz="1600" dirty="0" err="1">
+                <a:solidFill>
+                  <a:schemeClr val="bg1"/>
+                </a:solidFill>
+              </a:rPr>
+              <a:t>ctx</a:t>
+            </a:r>
+            <a:r>
+              <a:rPr sz="1600" dirty="0">
+                <a:solidFill>
+                  <a:schemeClr val="bg1"/>
+                </a:solidFill>
+              </a:rPr>
+              <a:t>, id)</a:t>
+            </a:r>
+            <a:br>
+              <a:rPr sz="1600" dirty="0">
+                <a:solidFill>
+                  <a:schemeClr val="bg1"/>
+                </a:solidFill>
+              </a:rPr>
+            </a:br>
+            <a:r>
+              <a:rPr sz="1600" dirty="0">
+                <a:solidFill>
+                  <a:schemeClr val="bg1"/>
+                </a:solidFill>
+              </a:rPr>
               <a:t>    if err != nil {</a:t>
             </a:r>
-            <a:br/>
-            <a:r>
+            <a:br>
+              <a:rPr sz="1600" dirty="0">
+                <a:solidFill>
+                  <a:schemeClr val="bg1"/>
+                </a:solidFill>
+              </a:rPr>
+            </a:br>
+            <a:r>
+              <a:rPr sz="1600" dirty="0">
+                <a:solidFill>
+                  <a:schemeClr val="bg1"/>
+                </a:solidFill>
+              </a:rPr>
               <a:t>        return err</a:t>
             </a:r>
-            <a:br/>
-            <a:r>
+            <a:br>
+              <a:rPr sz="1600" dirty="0">
+                <a:solidFill>
+                  <a:schemeClr val="bg1"/>
+                </a:solidFill>
+              </a:rPr>
+            </a:br>
+            <a:r>
+              <a:rPr sz="1600" dirty="0">
+                <a:solidFill>
+                  <a:schemeClr val="bg1"/>
+                </a:solidFill>
+              </a:rPr>
               <a:t>    }</a:t>
             </a:r>
-            <a:br/>
-            <a:br/>
-            <a:r>
-              <a:t>    // Verificar permisos: solo el owner puede actualizar</a:t>
-            </a:r>
-            <a:br/>
-            <a:r>
-              <a:t>    clientMSP, _ := ctx.GetClientIdentity().GetMSPID()</a:t>
-            </a:r>
-            <a:br/>
-            <a:r>
-              <a:t>    if property.Owner != clientMSP {</a:t>
-            </a:r>
-            <a:br/>
-            <a:r>
-              <a:t>        return fmt.Errorf("only the owner can update this property")</a:t>
-            </a:r>
-            <a:br/>
-            <a:r>
+            <a:br>
+              <a:rPr sz="1600" dirty="0">
+                <a:solidFill>
+                  <a:schemeClr val="bg1"/>
+                </a:solidFill>
+              </a:rPr>
+            </a:br>
+            <a:br>
+              <a:rPr sz="1600" dirty="0">
+                <a:solidFill>
+                  <a:schemeClr val="bg1"/>
+                </a:solidFill>
+              </a:rPr>
+            </a:br>
+            <a:r>
+              <a:rPr sz="1600" dirty="0">
+                <a:solidFill>
+                  <a:schemeClr val="bg1"/>
+                </a:solidFill>
+              </a:rPr>
+              <a:t>    // </a:t>
+            </a:r>
+            <a:r>
+              <a:rPr sz="1600" dirty="0" err="1">
+                <a:solidFill>
+                  <a:schemeClr val="bg1"/>
+                </a:solidFill>
+              </a:rPr>
+              <a:t>Verificar</a:t>
+            </a:r>
+            <a:r>
+              <a:rPr sz="1600" dirty="0">
+                <a:solidFill>
+                  <a:schemeClr val="bg1"/>
+                </a:solidFill>
+              </a:rPr>
+              <a:t> </a:t>
+            </a:r>
+            <a:r>
+              <a:rPr sz="1600" dirty="0" err="1">
+                <a:solidFill>
+                  <a:schemeClr val="bg1"/>
+                </a:solidFill>
+              </a:rPr>
+              <a:t>permisos</a:t>
+            </a:r>
+            <a:r>
+              <a:rPr sz="1600" dirty="0">
+                <a:solidFill>
+                  <a:schemeClr val="bg1"/>
+                </a:solidFill>
+              </a:rPr>
+              <a:t>: solo </a:t>
+            </a:r>
+            <a:r>
+              <a:rPr sz="1600" dirty="0" err="1">
+                <a:solidFill>
+                  <a:schemeClr val="bg1"/>
+                </a:solidFill>
+              </a:rPr>
+              <a:t>el</a:t>
+            </a:r>
+            <a:r>
+              <a:rPr sz="1600" dirty="0">
+                <a:solidFill>
+                  <a:schemeClr val="bg1"/>
+                </a:solidFill>
+              </a:rPr>
+              <a:t> owner </a:t>
+            </a:r>
+            <a:r>
+              <a:rPr sz="1600" dirty="0" err="1">
+                <a:solidFill>
+                  <a:schemeClr val="bg1"/>
+                </a:solidFill>
+              </a:rPr>
+              <a:t>puede</a:t>
+            </a:r>
+            <a:r>
+              <a:rPr sz="1600" dirty="0">
+                <a:solidFill>
+                  <a:schemeClr val="bg1"/>
+                </a:solidFill>
+              </a:rPr>
+              <a:t> </a:t>
+            </a:r>
+            <a:r>
+              <a:rPr sz="1600" dirty="0" err="1">
+                <a:solidFill>
+                  <a:schemeClr val="bg1"/>
+                </a:solidFill>
+              </a:rPr>
+              <a:t>actualizar</a:t>
+            </a:r>
+            <a:br>
+              <a:rPr sz="1600" dirty="0">
+                <a:solidFill>
+                  <a:schemeClr val="bg1"/>
+                </a:solidFill>
+              </a:rPr>
+            </a:br>
+            <a:r>
+              <a:rPr sz="1600" dirty="0">
+                <a:solidFill>
+                  <a:schemeClr val="bg1"/>
+                </a:solidFill>
+              </a:rPr>
+              <a:t>    </a:t>
+            </a:r>
+            <a:r>
+              <a:rPr sz="1600" dirty="0" err="1">
+                <a:solidFill>
+                  <a:schemeClr val="bg1"/>
+                </a:solidFill>
+              </a:rPr>
+              <a:t>clientMSP</a:t>
+            </a:r>
+            <a:r>
+              <a:rPr sz="1600" dirty="0">
+                <a:solidFill>
+                  <a:schemeClr val="bg1"/>
+                </a:solidFill>
+              </a:rPr>
+              <a:t>, _ := </a:t>
+            </a:r>
+            <a:r>
+              <a:rPr sz="1600" dirty="0" err="1">
+                <a:solidFill>
+                  <a:schemeClr val="bg1"/>
+                </a:solidFill>
+              </a:rPr>
+              <a:t>ctx.GetClientIdentity</a:t>
+            </a:r>
+            <a:r>
+              <a:rPr sz="1600" dirty="0">
+                <a:solidFill>
+                  <a:schemeClr val="bg1"/>
+                </a:solidFill>
+              </a:rPr>
+              <a:t>().</a:t>
+            </a:r>
+            <a:r>
+              <a:rPr sz="1600" dirty="0" err="1">
+                <a:solidFill>
+                  <a:schemeClr val="bg1"/>
+                </a:solidFill>
+              </a:rPr>
+              <a:t>GetMSPID</a:t>
+            </a:r>
+            <a:r>
+              <a:rPr sz="1600" dirty="0">
+                <a:solidFill>
+                  <a:schemeClr val="bg1"/>
+                </a:solidFill>
+              </a:rPr>
+              <a:t>()</a:t>
+            </a:r>
+            <a:br>
+              <a:rPr sz="1600" dirty="0">
+                <a:solidFill>
+                  <a:schemeClr val="bg1"/>
+                </a:solidFill>
+              </a:rPr>
+            </a:br>
+            <a:r>
+              <a:rPr sz="1600" dirty="0">
+                <a:solidFill>
+                  <a:schemeClr val="bg1"/>
+                </a:solidFill>
+              </a:rPr>
+              <a:t>    if </a:t>
+            </a:r>
+            <a:r>
+              <a:rPr sz="1600" dirty="0" err="1">
+                <a:solidFill>
+                  <a:schemeClr val="bg1"/>
+                </a:solidFill>
+              </a:rPr>
+              <a:t>property.Owner</a:t>
+            </a:r>
+            <a:r>
+              <a:rPr sz="1600" dirty="0">
+                <a:solidFill>
+                  <a:schemeClr val="bg1"/>
+                </a:solidFill>
+              </a:rPr>
+              <a:t> != </a:t>
+            </a:r>
+            <a:r>
+              <a:rPr sz="1600" dirty="0" err="1">
+                <a:solidFill>
+                  <a:schemeClr val="bg1"/>
+                </a:solidFill>
+              </a:rPr>
+              <a:t>clientMSP</a:t>
+            </a:r>
+            <a:r>
+              <a:rPr sz="1600" dirty="0">
+                <a:solidFill>
+                  <a:schemeClr val="bg1"/>
+                </a:solidFill>
+              </a:rPr>
+              <a:t> {</a:t>
+            </a:r>
+            <a:br>
+              <a:rPr sz="1600" dirty="0">
+                <a:solidFill>
+                  <a:schemeClr val="bg1"/>
+                </a:solidFill>
+              </a:rPr>
+            </a:br>
+            <a:r>
+              <a:rPr sz="1600" dirty="0">
+                <a:solidFill>
+                  <a:schemeClr val="bg1"/>
+                </a:solidFill>
+              </a:rPr>
+              <a:t>        return </a:t>
+            </a:r>
+            <a:r>
+              <a:rPr sz="1600" dirty="0" err="1">
+                <a:solidFill>
+                  <a:schemeClr val="bg1"/>
+                </a:solidFill>
+              </a:rPr>
+              <a:t>fmt.Errorf</a:t>
+            </a:r>
+            <a:r>
+              <a:rPr sz="1600" dirty="0">
+                <a:solidFill>
+                  <a:schemeClr val="bg1"/>
+                </a:solidFill>
+              </a:rPr>
+              <a:t>("only the owner can update this property")</a:t>
+            </a:r>
+            <a:br>
+              <a:rPr sz="1600" dirty="0">
+                <a:solidFill>
+                  <a:schemeClr val="bg1"/>
+                </a:solidFill>
+              </a:rPr>
+            </a:br>
+            <a:r>
+              <a:rPr sz="1600" dirty="0">
+                <a:solidFill>
+                  <a:schemeClr val="bg1"/>
+                </a:solidFill>
+              </a:rPr>
               <a:t>    }</a:t>
             </a:r>
-            <a:br/>
-            <a:br/>
-            <a:r>
-              <a:t>    // Actualizar campo</a:t>
-            </a:r>
-            <a:br/>
-            <a:r>
-              <a:t>    property.AppraisalValue = newValue</a:t>
-            </a:r>
-            <a:br/>
-            <a:br/>
-            <a:r>
+            <a:br>
+              <a:rPr sz="1600" dirty="0">
+                <a:solidFill>
+                  <a:schemeClr val="bg1"/>
+                </a:solidFill>
+              </a:rPr>
+            </a:br>
+            <a:br>
+              <a:rPr sz="1600" dirty="0">
+                <a:solidFill>
+                  <a:schemeClr val="bg1"/>
+                </a:solidFill>
+              </a:rPr>
+            </a:br>
+            <a:r>
+              <a:rPr sz="1600" dirty="0">
+                <a:solidFill>
+                  <a:schemeClr val="bg1"/>
+                </a:solidFill>
+              </a:rPr>
+              <a:t>    </a:t>
+            </a:r>
+          </a:p>
+        </p:txBody>
+      </p:sp>
+      <p:sp>
+        <p:nvSpPr>
+          <p:cNvPr id="10" name="CuadroTexto 9">
+            <a:extLst>
+              <a:ext uri="{FF2B5EF4-FFF2-40B4-BE49-F238E27FC236}">
+                <a16:creationId xmlns:a16="http://schemas.microsoft.com/office/drawing/2014/main" id="{6ECFBF12-1A0E-2818-655D-81BDA554B60F}"/>
+              </a:ext>
+            </a:extLst>
+          </p:cNvPr>
+          <p:cNvSpPr txBox="1"/>
+          <p:nvPr/>
+        </p:nvSpPr>
+        <p:spPr>
+          <a:xfrm>
+            <a:off x="7097480" y="1828800"/>
+            <a:ext cx="5007440" cy="1815882"/>
+          </a:xfrm>
+          <a:prstGeom prst="rect">
+            <a:avLst/>
+          </a:prstGeom>
+          <a:noFill/>
+        </p:spPr>
+        <p:txBody>
+          <a:bodyPr wrap="square">
+            <a:spAutoFit/>
+          </a:bodyPr>
+          <a:lstStyle/>
+          <a:p>
+            <a:r>
+              <a:rPr lang="es-ES" sz="1600" dirty="0">
+                <a:solidFill>
+                  <a:schemeClr val="bg1"/>
+                </a:solidFill>
+              </a:rPr>
+              <a:t>// Actualizar campo</a:t>
+            </a:r>
+            <a:br>
+              <a:rPr lang="es-ES" sz="1600" dirty="0">
+                <a:solidFill>
+                  <a:schemeClr val="bg1"/>
+                </a:solidFill>
+              </a:rPr>
+            </a:br>
+            <a:r>
+              <a:rPr lang="es-ES" sz="1600" dirty="0">
+                <a:solidFill>
+                  <a:schemeClr val="bg1"/>
+                </a:solidFill>
+              </a:rPr>
+              <a:t>    </a:t>
+            </a:r>
+            <a:r>
+              <a:rPr lang="es-ES" sz="1600" dirty="0" err="1">
+                <a:solidFill>
+                  <a:schemeClr val="bg1"/>
+                </a:solidFill>
+              </a:rPr>
+              <a:t>property.AppraisalValue</a:t>
+            </a:r>
+            <a:r>
+              <a:rPr lang="es-ES" sz="1600" dirty="0">
+                <a:solidFill>
+                  <a:schemeClr val="bg1"/>
+                </a:solidFill>
+              </a:rPr>
+              <a:t> = </a:t>
+            </a:r>
+            <a:r>
+              <a:rPr lang="es-ES" sz="1600" dirty="0" err="1">
+                <a:solidFill>
+                  <a:schemeClr val="bg1"/>
+                </a:solidFill>
+              </a:rPr>
+              <a:t>newValue</a:t>
+            </a:r>
+            <a:br>
+              <a:rPr lang="es-ES" sz="1600" dirty="0">
+                <a:solidFill>
+                  <a:schemeClr val="bg1"/>
+                </a:solidFill>
+              </a:rPr>
+            </a:br>
+            <a:br>
+              <a:rPr lang="es-ES" sz="1600" dirty="0">
+                <a:solidFill>
+                  <a:schemeClr val="bg1"/>
+                </a:solidFill>
+              </a:rPr>
+            </a:br>
+            <a:r>
+              <a:rPr lang="es-ES" sz="1600" dirty="0">
+                <a:solidFill>
+                  <a:schemeClr val="bg1"/>
+                </a:solidFill>
+              </a:rPr>
               <a:t>    // Guardar</a:t>
             </a:r>
-            <a:br/>
-            <a:r>
-              <a:t>    propertyJSON, _ := json.Marshal(property)</a:t>
-            </a:r>
-            <a:br/>
-            <a:r>
-              <a:t>    return ctx.GetStub().PutState(id, propertyJSON)</a:t>
-            </a:r>
-            <a:br/>
-            <a:r>
+            <a:br>
+              <a:rPr lang="es-ES" sz="1600" dirty="0">
+                <a:solidFill>
+                  <a:schemeClr val="bg1"/>
+                </a:solidFill>
+              </a:rPr>
+            </a:br>
+            <a:r>
+              <a:rPr lang="es-ES" sz="1600" dirty="0">
+                <a:solidFill>
+                  <a:schemeClr val="bg1"/>
+                </a:solidFill>
+              </a:rPr>
+              <a:t>    </a:t>
+            </a:r>
+            <a:r>
+              <a:rPr lang="es-ES" sz="1600" dirty="0" err="1">
+                <a:solidFill>
+                  <a:schemeClr val="bg1"/>
+                </a:solidFill>
+              </a:rPr>
+              <a:t>propertyJSON</a:t>
+            </a:r>
+            <a:r>
+              <a:rPr lang="es-ES" sz="1600" dirty="0">
+                <a:solidFill>
+                  <a:schemeClr val="bg1"/>
+                </a:solidFill>
+              </a:rPr>
+              <a:t>, _ := </a:t>
+            </a:r>
+            <a:r>
+              <a:rPr lang="es-ES" sz="1600" dirty="0" err="1">
+                <a:solidFill>
+                  <a:schemeClr val="bg1"/>
+                </a:solidFill>
+              </a:rPr>
+              <a:t>json.Marshal</a:t>
+            </a:r>
+            <a:r>
+              <a:rPr lang="es-ES" sz="1600" dirty="0">
+                <a:solidFill>
+                  <a:schemeClr val="bg1"/>
+                </a:solidFill>
+              </a:rPr>
+              <a:t>(</a:t>
+            </a:r>
+            <a:r>
+              <a:rPr lang="es-ES" sz="1600" dirty="0" err="1">
+                <a:solidFill>
+                  <a:schemeClr val="bg1"/>
+                </a:solidFill>
+              </a:rPr>
+              <a:t>property</a:t>
+            </a:r>
+            <a:r>
+              <a:rPr lang="es-ES" sz="1600" dirty="0">
+                <a:solidFill>
+                  <a:schemeClr val="bg1"/>
+                </a:solidFill>
+              </a:rPr>
+              <a:t>)</a:t>
+            </a:r>
+            <a:br>
+              <a:rPr lang="es-ES" sz="1600" dirty="0">
+                <a:solidFill>
+                  <a:schemeClr val="bg1"/>
+                </a:solidFill>
+              </a:rPr>
+            </a:br>
+            <a:r>
+              <a:rPr lang="es-ES" sz="1600" dirty="0">
+                <a:solidFill>
+                  <a:schemeClr val="bg1"/>
+                </a:solidFill>
+              </a:rPr>
+              <a:t>    </a:t>
+            </a:r>
+            <a:r>
+              <a:rPr lang="es-ES" sz="1600" dirty="0" err="1">
+                <a:solidFill>
+                  <a:schemeClr val="bg1"/>
+                </a:solidFill>
+              </a:rPr>
+              <a:t>return</a:t>
+            </a:r>
+            <a:r>
+              <a:rPr lang="es-ES" sz="1600" dirty="0">
+                <a:solidFill>
+                  <a:schemeClr val="bg1"/>
+                </a:solidFill>
+              </a:rPr>
+              <a:t> </a:t>
+            </a:r>
+            <a:r>
+              <a:rPr lang="es-ES" sz="1600" dirty="0" err="1">
+                <a:solidFill>
+                  <a:schemeClr val="bg1"/>
+                </a:solidFill>
+              </a:rPr>
+              <a:t>ctx.GetStub</a:t>
+            </a:r>
+            <a:r>
+              <a:rPr lang="es-ES" sz="1600" dirty="0">
+                <a:solidFill>
+                  <a:schemeClr val="bg1"/>
+                </a:solidFill>
+              </a:rPr>
+              <a:t>().</a:t>
+            </a:r>
+            <a:r>
+              <a:rPr lang="es-ES" sz="1600" dirty="0" err="1">
+                <a:solidFill>
+                  <a:schemeClr val="bg1"/>
+                </a:solidFill>
+              </a:rPr>
+              <a:t>PutState</a:t>
+            </a:r>
+            <a:r>
+              <a:rPr lang="es-ES" sz="1600" dirty="0">
+                <a:solidFill>
+                  <a:schemeClr val="bg1"/>
+                </a:solidFill>
+              </a:rPr>
+              <a:t>(id, </a:t>
+            </a:r>
+            <a:r>
+              <a:rPr lang="es-ES" sz="1600" dirty="0" err="1">
+                <a:solidFill>
+                  <a:schemeClr val="bg1"/>
+                </a:solidFill>
+              </a:rPr>
+              <a:t>propertyJSON</a:t>
+            </a:r>
+            <a:r>
+              <a:rPr lang="es-ES" sz="1600" dirty="0">
+                <a:solidFill>
+                  <a:schemeClr val="bg1"/>
+                </a:solidFill>
+              </a:rPr>
+              <a:t>)</a:t>
+            </a:r>
+            <a:br>
+              <a:rPr lang="es-ES" sz="1600" dirty="0">
+                <a:solidFill>
+                  <a:schemeClr val="bg1"/>
+                </a:solidFill>
+              </a:rPr>
+            </a:br>
+            <a:r>
+              <a:rPr lang="es-ES" sz="1600" dirty="0">
+                <a:solidFill>
+                  <a:schemeClr val="bg1"/>
+                </a:solidFill>
+              </a:rPr>
               <a:t>}</a:t>
             </a:r>
+            <a:endParaRPr lang="es-ES" sz="1600" dirty="0"/>
+          </a:p>
+        </p:txBody>
+      </p:sp>
+      <p:sp>
+        <p:nvSpPr>
+          <p:cNvPr id="11" name="Rectángulo 10">
+            <a:extLst>
+              <a:ext uri="{FF2B5EF4-FFF2-40B4-BE49-F238E27FC236}">
+                <a16:creationId xmlns:a16="http://schemas.microsoft.com/office/drawing/2014/main" id="{CC6E9A3A-55D7-B1DD-284D-798421284CE0}"/>
+              </a:ext>
+            </a:extLst>
+          </p:cNvPr>
+          <p:cNvSpPr/>
+          <p:nvPr/>
+        </p:nvSpPr>
+        <p:spPr>
+          <a:xfrm>
+            <a:off x="6400800" y="1417320"/>
+            <a:ext cx="45719" cy="5120640"/>
+          </a:xfrm>
+          <a:prstGeom prst="rect">
+            <a:avLst/>
+          </a:prstGeom>
+        </p:spPr>
+        <p:style>
+          <a:lnRef idx="1">
+            <a:schemeClr val="accent1"/>
+          </a:lnRef>
+          <a:fillRef idx="3">
+            <a:schemeClr val="accent1"/>
+          </a:fillRef>
+          <a:effectRef idx="2">
+            <a:schemeClr val="accent1"/>
+          </a:effectRef>
+          <a:fontRef idx="minor">
+            <a:schemeClr val="lt1"/>
+          </a:fontRef>
+        </p:style>
+        <p:txBody>
+          <a:bodyPr rtlCol="0" anchor="ctr"/>
+          <a:lstStyle/>
+          <a:p>
+            <a:pPr algn="ctr"/>
+            <a:endParaRPr lang="es-ES"/>
           </a:p>
         </p:txBody>
       </p:sp>
@@ -9424,8 +14283,50 @@
               </a:defRPr>
             </a:pPr>
             <a:r>
-              <a:t>Objetivo: disenar el modelo de datos y las claves para un Registro de Propiedad</a:t>
-            </a:r>
+              <a:rPr dirty="0" err="1"/>
+              <a:t>Objetivo</a:t>
+            </a:r>
+            <a:r>
+              <a:rPr dirty="0"/>
+              <a:t>: </a:t>
+            </a:r>
+            <a:r>
+              <a:rPr dirty="0" err="1"/>
+              <a:t>disenar</a:t>
+            </a:r>
+            <a:r>
+              <a:rPr dirty="0"/>
+              <a:t> </a:t>
+            </a:r>
+            <a:r>
+              <a:rPr dirty="0" err="1"/>
+              <a:t>el</a:t>
+            </a:r>
+            <a:r>
+              <a:rPr dirty="0"/>
+              <a:t> </a:t>
+            </a:r>
+            <a:r>
+              <a:rPr dirty="0" err="1"/>
+              <a:t>modelo</a:t>
+            </a:r>
+            <a:r>
+              <a:rPr dirty="0"/>
+              <a:t> de </a:t>
+            </a:r>
+            <a:r>
+              <a:rPr dirty="0" err="1"/>
+              <a:t>datos</a:t>
+            </a:r>
+            <a:r>
+              <a:rPr dirty="0"/>
+              <a:t> y las claves para un Registro de </a:t>
+            </a:r>
+            <a:r>
+              <a:rPr dirty="0" err="1"/>
+              <a:t>Propiedad</a:t>
+            </a:r>
+            <a:endParaRPr dirty="0"/>
           </a:p>
           <a:p>
             <a:pPr>
@@ -9439,7 +14340,7 @@
                 <a:latin typeface="Calibri"/>
               </a:defRPr>
             </a:pPr>
-            <a:endParaRPr/>
+            <a:endParaRPr dirty="0"/>
           </a:p>
           <a:p>
             <a:pPr>
@@ -9454,8 +14355,54 @@
               </a:defRPr>
             </a:pPr>
             <a:r>
-              <a:t>1. Definir la estructura de datos (Property) con todos los campos necesarios</a:t>
-            </a:r>
+              <a:rPr dirty="0"/>
+              <a:t>1. </a:t>
+            </a:r>
+            <a:r>
+              <a:rPr dirty="0" err="1"/>
+              <a:t>Definir</a:t>
+            </a:r>
+            <a:r>
+              <a:rPr dirty="0"/>
+              <a:t> la </a:t>
+            </a:r>
+            <a:r>
+              <a:rPr dirty="0" err="1"/>
+              <a:t>estructura</a:t>
+            </a:r>
+            <a:r>
+              <a:rPr dirty="0"/>
+              <a:t> de </a:t>
+            </a:r>
+            <a:r>
+              <a:rPr dirty="0" err="1"/>
+              <a:t>datos</a:t>
+            </a:r>
+            <a:r>
+              <a:rPr dirty="0"/>
+              <a:t> (Property) con </a:t>
+            </a:r>
+            <a:r>
+              <a:rPr dirty="0" err="1"/>
+              <a:t>todos</a:t>
+            </a:r>
+            <a:r>
+              <a:rPr dirty="0"/>
+              <a:t> </a:t>
+            </a:r>
+            <a:r>
+              <a:rPr dirty="0" err="1"/>
+              <a:t>los</a:t>
+            </a:r>
+            <a:r>
+              <a:rPr dirty="0"/>
+              <a:t> campos </a:t>
+            </a:r>
+            <a:r>
+              <a:rPr dirty="0" err="1"/>
+              <a:t>necesarios</a:t>
+            </a:r>
+            <a:endParaRPr dirty="0"/>
           </a:p>
           <a:p>
             <a:pPr>
@@ -9470,7 +14417,40 @@
               </a:defRPr>
             </a:pPr>
             <a:r>
-              <a:t>2. Disenar el key space: ¿que clave usareis? ¿composite keys?</a:t>
+              <a:rPr dirty="0"/>
+              <a:t>2. </a:t>
+            </a:r>
+            <a:r>
+              <a:rPr dirty="0" err="1"/>
+              <a:t>Disenar</a:t>
+            </a:r>
+            <a:r>
+              <a:rPr dirty="0"/>
+              <a:t> </a:t>
+            </a:r>
+            <a:r>
+              <a:rPr dirty="0" err="1"/>
+              <a:t>el</a:t>
+            </a:r>
+            <a:r>
+              <a:rPr dirty="0"/>
+              <a:t> key space: ¿</a:t>
+            </a:r>
+            <a:r>
+              <a:rPr dirty="0" err="1"/>
+              <a:t>que</a:t>
+            </a:r>
+            <a:r>
+              <a:rPr dirty="0"/>
+              <a:t> clave </a:t>
+            </a:r>
+            <a:r>
+              <a:rPr dirty="0" err="1"/>
+              <a:t>usareis</a:t>
+            </a:r>
+            <a:r>
+              <a:rPr dirty="0"/>
+              <a:t>? ¿composite keys?</a:t>
             </a:r>
           </a:p>
           <a:p>
@@ -9486,7 +14466,72 @@
               </a:defRPr>
             </a:pPr>
             <a:r>
-              <a:t>3. Identificar las queries que necesitareis (por propietario, por zona, por tipo...)</a:t>
+              <a:rPr dirty="0"/>
+              <a:t>3. </a:t>
+            </a:r>
+            <a:r>
+              <a:rPr dirty="0" err="1"/>
+              <a:t>Identificar</a:t>
+            </a:r>
+            <a:r>
+              <a:rPr dirty="0"/>
+              <a:t> las queries </a:t>
+            </a:r>
+            <a:r>
+              <a:rPr dirty="0" err="1"/>
+              <a:t>que</a:t>
+            </a:r>
+            <a:r>
+              <a:rPr dirty="0"/>
+              <a:t> </a:t>
+            </a:r>
+            <a:r>
+              <a:rPr dirty="0" err="1"/>
+              <a:t>necesitareis</a:t>
+            </a:r>
+            <a:r>
+              <a:rPr dirty="0"/>
+              <a:t> (</a:t>
+            </a:r>
+            <a:r>
+              <a:rPr dirty="0" err="1"/>
+              <a:t>por</a:t>
+            </a:r>
+            <a:r>
+              <a:rPr dirty="0"/>
+              <a:t> </a:t>
+            </a:r>
+            <a:r>
+              <a:rPr dirty="0" err="1"/>
+              <a:t>propietario</a:t>
+            </a:r>
+            <a:r>
+              <a:rPr dirty="0"/>
+              <a:t>, </a:t>
+            </a:r>
+            <a:r>
+              <a:rPr dirty="0" err="1"/>
+              <a:t>por</a:t>
+            </a:r>
+            <a:r>
+              <a:rPr dirty="0"/>
+              <a:t> zona, </a:t>
+            </a:r>
+            <a:r>
+              <a:rPr dirty="0" err="1"/>
+              <a:t>por</a:t>
+            </a:r>
+            <a:r>
+              <a:rPr dirty="0"/>
+              <a:t> </a:t>
+            </a:r>
+            <a:r>
+              <a:rPr dirty="0" err="1"/>
+              <a:t>tipo</a:t>
+            </a:r>
+            <a:r>
+              <a:rPr dirty="0"/>
+              <a:t>...)</a:t>
             </a:r>
           </a:p>
           <a:p>
@@ -9502,8 +14547,30 @@
               </a:defRPr>
             </a:pPr>
             <a:r>
-              <a:t>4. Decidir: ¿LevelDB o CouchDB? Justificar</a:t>
-            </a:r>
+              <a:rPr dirty="0"/>
+              <a:t>4. </a:t>
+            </a:r>
+            <a:r>
+              <a:rPr dirty="0" err="1"/>
+              <a:t>Decidir</a:t>
+            </a:r>
+            <a:r>
+              <a:rPr dirty="0"/>
+              <a:t>: ¿</a:t>
+            </a:r>
+            <a:r>
+              <a:rPr dirty="0" err="1"/>
+              <a:t>LevelDB</a:t>
+            </a:r>
+            <a:r>
+              <a:rPr dirty="0"/>
+              <a:t> o CouchDB? </a:t>
+            </a:r>
+            <a:r>
+              <a:rPr dirty="0" err="1"/>
+              <a:t>Justificar</a:t>
+            </a:r>
+            <a:endParaRPr dirty="0"/>
           </a:p>
           <a:p>
             <a:pPr>
@@ -9518,7 +14585,56 @@
               </a:defRPr>
             </a:pPr>
             <a:r>
-              <a:t>5. Crear el chaincode CRUD completo usando el prompt de IA como base</a:t>
+              <a:rPr dirty="0"/>
+              <a:t>5. Crear </a:t>
+            </a:r>
+            <a:r>
+              <a:rPr dirty="0" err="1"/>
+              <a:t>el</a:t>
+            </a:r>
+            <a:r>
+              <a:rPr dirty="0"/>
+              <a:t> </a:t>
+            </a:r>
+            <a:r>
+              <a:rPr dirty="0" err="1"/>
+              <a:t>chaincode</a:t>
+            </a:r>
+            <a:r>
+              <a:rPr dirty="0"/>
+              <a:t> CRUD </a:t>
+            </a:r>
+            <a:r>
+              <a:rPr dirty="0" err="1"/>
+              <a:t>completo</a:t>
+            </a:r>
+            <a:r>
+              <a:rPr dirty="0"/>
+              <a:t> </a:t>
+            </a:r>
+            <a:r>
+              <a:rPr dirty="0" err="1"/>
+              <a:t>usando</a:t>
+            </a:r>
+            <a:r>
+              <a:rPr dirty="0"/>
+              <a:t> </a:t>
+            </a:r>
+            <a:r>
+              <a:rPr dirty="0" err="1"/>
+              <a:t>el</a:t>
+            </a:r>
+            <a:r>
+              <a:rPr dirty="0"/>
+              <a:t> prompt de IA </a:t>
+            </a:r>
+            <a:r>
+              <a:rPr dirty="0" err="1"/>
+              <a:t>como</a:t>
+            </a:r>
+            <a:r>
+              <a:rPr dirty="0"/>
+              <a:t> base</a:t>
             </a:r>
           </a:p>
           <a:p>
@@ -9534,8 +14650,46 @@
               </a:defRPr>
             </a:pPr>
             <a:r>
-              <a:t>6. Desplegar en la test-network y probar las operaciones basicas</a:t>
-            </a:r>
+              <a:rPr dirty="0"/>
+              <a:t>6. </a:t>
+            </a:r>
+            <a:r>
+              <a:rPr dirty="0" err="1"/>
+              <a:t>Desplegar</a:t>
+            </a:r>
+            <a:r>
+              <a:rPr dirty="0"/>
+              <a:t> </a:t>
+            </a:r>
+            <a:r>
+              <a:rPr dirty="0" err="1"/>
+              <a:t>en</a:t>
+            </a:r>
+            <a:r>
+              <a:rPr dirty="0"/>
+              <a:t> la test-network y </a:t>
+            </a:r>
+            <a:r>
+              <a:rPr dirty="0" err="1"/>
+              <a:t>probar</a:t>
+            </a:r>
+            <a:r>
+              <a:rPr dirty="0"/>
+              <a:t> las </a:t>
+            </a:r>
+            <a:r>
+              <a:rPr dirty="0" err="1"/>
+              <a:t>operaciones</a:t>
+            </a:r>
+            <a:r>
+              <a:rPr dirty="0"/>
+              <a:t> </a:t>
+            </a:r>
+            <a:r>
+              <a:rPr dirty="0" err="1"/>
+              <a:t>basicas</a:t>
+            </a:r>
+            <a:endParaRPr dirty="0"/>
           </a:p>
           <a:p>
             <a:pPr>
@@ -9549,7 +14703,7 @@
                 <a:latin typeface="Calibri"/>
               </a:defRPr>
             </a:pPr>
-            <a:endParaRPr/>
+            <a:endParaRPr dirty="0"/>
           </a:p>
           <a:p>
             <a:pPr>
@@ -9564,7 +14718,36 @@
               </a:defRPr>
             </a:pPr>
             <a:r>
-              <a:t>Trabajar en parejas. Tiempo estimado: 70 minutos.</a:t>
+              <a:rPr dirty="0" err="1"/>
+              <a:t>Trabajar</a:t>
+            </a:r>
+            <a:r>
+              <a:rPr dirty="0"/>
+              <a:t> </a:t>
+            </a:r>
+            <a:r>
+              <a:rPr dirty="0" err="1"/>
+              <a:t>en</a:t>
+            </a:r>
+            <a:r>
+              <a:rPr dirty="0"/>
+              <a:t> parejas. Tiempo </a:t>
+            </a:r>
+            <a:r>
+              <a:rPr dirty="0" err="1"/>
+              <a:t>estimado</a:t>
+            </a:r>
+            <a:r>
+              <a:rPr dirty="0"/>
+              <a:t>: 70 </a:t>
+            </a:r>
+            <a:r>
+              <a:rPr dirty="0" err="1"/>
+              <a:t>minutos</a:t>
+            </a:r>
+            <a:r>
+              <a:rPr dirty="0"/>
+              <a:t>.</a:t>
             </a:r>
           </a:p>
           <a:p>
@@ -9580,7 +14763,60 @@
               </a:defRPr>
             </a:pPr>
             <a:r>
-              <a:t>Puesta en comun al final: cada pareja explica sus decisiones de diseno.</a:t>
+              <a:rPr dirty="0" err="1"/>
+              <a:t>Puesta</a:t>
+            </a:r>
+            <a:r>
+              <a:rPr dirty="0"/>
+              <a:t> </a:t>
+            </a:r>
+            <a:r>
+              <a:rPr dirty="0" err="1"/>
+              <a:t>en</a:t>
+            </a:r>
+            <a:r>
+              <a:rPr dirty="0"/>
+              <a:t> </a:t>
+            </a:r>
+            <a:r>
+              <a:rPr dirty="0" err="1"/>
+              <a:t>comun</a:t>
+            </a:r>
+            <a:r>
+              <a:rPr dirty="0"/>
+              <a:t> al final: </a:t>
+            </a:r>
+            <a:r>
+              <a:rPr dirty="0" err="1"/>
+              <a:t>cada</a:t>
+            </a:r>
+            <a:r>
+              <a:rPr dirty="0"/>
+              <a:t> pareja </a:t>
+            </a:r>
+            <a:r>
+              <a:rPr dirty="0" err="1"/>
+              <a:t>explica</a:t>
+            </a:r>
+            <a:r>
+              <a:rPr dirty="0"/>
+              <a:t> sus </a:t>
+            </a:r>
+            <a:r>
+              <a:rPr dirty="0" err="1"/>
+              <a:t>decisiones</a:t>
+            </a:r>
+            <a:r>
+              <a:rPr dirty="0"/>
+              <a:t> de </a:t>
+            </a:r>
+            <a:r>
+              <a:rPr dirty="0" err="1"/>
+              <a:t>diseno</a:t>
+            </a:r>
+            <a:r>
+              <a:rPr dirty="0"/>
+              <a:t>.</a:t>
             </a:r>
           </a:p>
         </p:txBody>
@@ -11306,7 +16542,7 @@
         <p:spPr>
           <a:xfrm>
             <a:off x="731520" y="1600200"/>
-            <a:ext cx="10698480" cy="4754880"/>
+            <a:ext cx="5580070" cy="4754880"/>
           </a:xfrm>
           <a:prstGeom prst="rect">
             <a:avLst/>
@@ -11317,98 +16553,1013 @@
           <a:bodyPr wrap="square"/>
           <a:lstStyle/>
           <a:p>
-            <a:br/>
-            <a:r>
+            <a:r>
+              <a:rPr sz="1600" dirty="0">
+                <a:solidFill>
+                  <a:schemeClr val="bg1"/>
+                </a:solidFill>
+              </a:rPr>
               <a:t>package main</a:t>
             </a:r>
-            <a:br/>
-            <a:br/>
-            <a:r>
+            <a:br>
+              <a:rPr sz="1600" dirty="0">
+                <a:solidFill>
+                  <a:schemeClr val="bg1"/>
+                </a:solidFill>
+              </a:rPr>
+            </a:br>
+            <a:br>
+              <a:rPr sz="1600" dirty="0">
+                <a:solidFill>
+                  <a:schemeClr val="bg1"/>
+                </a:solidFill>
+              </a:rPr>
+            </a:br>
+            <a:r>
+              <a:rPr sz="1600" dirty="0">
+                <a:solidFill>
+                  <a:schemeClr val="bg1"/>
+                </a:solidFill>
+              </a:rPr>
               <a:t>import (</a:t>
             </a:r>
-            <a:br/>
-            <a:r>
-              <a:t>    "github.com/hyperledger/fabric-contract-api-go/contractapi"</a:t>
-            </a:r>
-            <a:br/>
-            <a:r>
+            <a:br>
+              <a:rPr sz="1600" dirty="0">
+                <a:solidFill>
+                  <a:schemeClr val="bg1"/>
+                </a:solidFill>
+              </a:rPr>
+            </a:br>
+            <a:r>
+              <a:rPr sz="1600" dirty="0">
+                <a:solidFill>
+                  <a:schemeClr val="bg1"/>
+                </a:solidFill>
+              </a:rPr>
+              <a:t>    "github.com/</a:t>
+            </a:r>
+            <a:r>
+              <a:rPr sz="1600" dirty="0" err="1">
+                <a:solidFill>
+                  <a:schemeClr val="bg1"/>
+                </a:solidFill>
+              </a:rPr>
+              <a:t>hyperledger</a:t>
+            </a:r>
+            <a:r>
+              <a:rPr sz="1600" dirty="0">
+                <a:solidFill>
+                  <a:schemeClr val="bg1"/>
+                </a:solidFill>
+              </a:rPr>
+              <a:t>/fabric-contract-</a:t>
+            </a:r>
+            <a:r>
+              <a:rPr sz="1600" dirty="0" err="1">
+                <a:solidFill>
+                  <a:schemeClr val="bg1"/>
+                </a:solidFill>
+              </a:rPr>
+              <a:t>api</a:t>
+            </a:r>
+            <a:r>
+              <a:rPr sz="1600" dirty="0">
+                <a:solidFill>
+                  <a:schemeClr val="bg1"/>
+                </a:solidFill>
+              </a:rPr>
+              <a:t>-go/</a:t>
+            </a:r>
+            <a:r>
+              <a:rPr sz="1600" dirty="0" err="1">
+                <a:solidFill>
+                  <a:schemeClr val="bg1"/>
+                </a:solidFill>
+              </a:rPr>
+              <a:t>contractapi</a:t>
+            </a:r>
+            <a:r>
+              <a:rPr sz="1600" dirty="0">
+                <a:solidFill>
+                  <a:schemeClr val="bg1"/>
+                </a:solidFill>
+              </a:rPr>
+              <a:t>"</a:t>
+            </a:r>
+            <a:br>
+              <a:rPr sz="1600" dirty="0">
+                <a:solidFill>
+                  <a:schemeClr val="bg1"/>
+                </a:solidFill>
+              </a:rPr>
+            </a:br>
+            <a:r>
+              <a:rPr sz="1600" dirty="0">
+                <a:solidFill>
+                  <a:schemeClr val="bg1"/>
+                </a:solidFill>
+              </a:rPr>
               <a:t>)</a:t>
             </a:r>
-            <a:br/>
-            <a:br/>
-            <a:r>
-              <a:t>// SmartContract proporciona las funciones del chaincode</a:t>
-            </a:r>
-            <a:br/>
-            <a:r>
-              <a:t>type SmartContract struct {</a:t>
-            </a:r>
-            <a:br/>
-            <a:r>
-              <a:t>    contractapi.Contract</a:t>
-            </a:r>
-            <a:br/>
-            <a:r>
+            <a:br>
+              <a:rPr sz="1600" dirty="0">
+                <a:solidFill>
+                  <a:schemeClr val="bg1"/>
+                </a:solidFill>
+              </a:rPr>
+            </a:br>
+            <a:br>
+              <a:rPr sz="1600" dirty="0">
+                <a:solidFill>
+                  <a:schemeClr val="bg1"/>
+                </a:solidFill>
+              </a:rPr>
+            </a:br>
+            <a:r>
+              <a:rPr sz="1600" dirty="0">
+                <a:solidFill>
+                  <a:schemeClr val="bg1"/>
+                </a:solidFill>
+              </a:rPr>
+              <a:t>// </a:t>
+            </a:r>
+            <a:r>
+              <a:rPr sz="1600" dirty="0" err="1">
+                <a:solidFill>
+                  <a:schemeClr val="bg1"/>
+                </a:solidFill>
+              </a:rPr>
+              <a:t>SmartContract</a:t>
+            </a:r>
+            <a:r>
+              <a:rPr sz="1600" dirty="0">
+                <a:solidFill>
+                  <a:schemeClr val="bg1"/>
+                </a:solidFill>
+              </a:rPr>
+              <a:t> </a:t>
+            </a:r>
+            <a:r>
+              <a:rPr sz="1600" dirty="0" err="1">
+                <a:solidFill>
+                  <a:schemeClr val="bg1"/>
+                </a:solidFill>
+              </a:rPr>
+              <a:t>proporciona</a:t>
+            </a:r>
+            <a:r>
+              <a:rPr sz="1600" dirty="0">
+                <a:solidFill>
+                  <a:schemeClr val="bg1"/>
+                </a:solidFill>
+              </a:rPr>
+              <a:t> las </a:t>
+            </a:r>
+            <a:r>
+              <a:rPr sz="1600" dirty="0" err="1">
+                <a:solidFill>
+                  <a:schemeClr val="bg1"/>
+                </a:solidFill>
+              </a:rPr>
+              <a:t>funciones</a:t>
+            </a:r>
+            <a:r>
+              <a:rPr sz="1600" dirty="0">
+                <a:solidFill>
+                  <a:schemeClr val="bg1"/>
+                </a:solidFill>
+              </a:rPr>
+              <a:t> del </a:t>
+            </a:r>
+            <a:r>
+              <a:rPr sz="1600" dirty="0" err="1">
+                <a:solidFill>
+                  <a:schemeClr val="bg1"/>
+                </a:solidFill>
+              </a:rPr>
+              <a:t>chaincode</a:t>
+            </a:r>
+            <a:br>
+              <a:rPr sz="1600" dirty="0">
+                <a:solidFill>
+                  <a:schemeClr val="bg1"/>
+                </a:solidFill>
+              </a:rPr>
+            </a:br>
+            <a:r>
+              <a:rPr sz="1600" dirty="0">
+                <a:solidFill>
+                  <a:schemeClr val="bg1"/>
+                </a:solidFill>
+              </a:rPr>
+              <a:t>type </a:t>
+            </a:r>
+            <a:r>
+              <a:rPr sz="1600" dirty="0" err="1">
+                <a:solidFill>
+                  <a:schemeClr val="bg1"/>
+                </a:solidFill>
+              </a:rPr>
+              <a:t>SmartContract</a:t>
+            </a:r>
+            <a:r>
+              <a:rPr sz="1600" dirty="0">
+                <a:solidFill>
+                  <a:schemeClr val="bg1"/>
+                </a:solidFill>
+              </a:rPr>
+              <a:t> struct {</a:t>
+            </a:r>
+            <a:br>
+              <a:rPr sz="1600" dirty="0">
+                <a:solidFill>
+                  <a:schemeClr val="bg1"/>
+                </a:solidFill>
+              </a:rPr>
+            </a:br>
+            <a:r>
+              <a:rPr sz="1600" dirty="0">
+                <a:solidFill>
+                  <a:schemeClr val="bg1"/>
+                </a:solidFill>
+              </a:rPr>
+              <a:t>    </a:t>
+            </a:r>
+            <a:r>
+              <a:rPr sz="1600" dirty="0" err="1">
+                <a:solidFill>
+                  <a:schemeClr val="bg1"/>
+                </a:solidFill>
+              </a:rPr>
+              <a:t>contractapi.Contract</a:t>
+            </a:r>
+            <a:br>
+              <a:rPr sz="1600" dirty="0">
+                <a:solidFill>
+                  <a:schemeClr val="bg1"/>
+                </a:solidFill>
+              </a:rPr>
+            </a:br>
+            <a:r>
+              <a:rPr sz="1600" dirty="0">
+                <a:solidFill>
+                  <a:schemeClr val="bg1"/>
+                </a:solidFill>
+              </a:rPr>
               <a:t>}</a:t>
             </a:r>
-            <a:br/>
-            <a:br/>
-            <a:r>
-              <a:t>// InitLedger inicializa el ledger con datos de ejemplo</a:t>
-            </a:r>
-            <a:br/>
-            <a:r>
-              <a:t>func (s *SmartContract) InitLedger(ctx contractapi.TransactionContextInterface) error {</a:t>
-            </a:r>
-            <a:br/>
-            <a:r>
-              <a:t>    // Logica de inicializacion aqui</a:t>
-            </a:r>
-            <a:br/>
-            <a:r>
+            <a:br>
+              <a:rPr sz="1600" dirty="0">
+                <a:solidFill>
+                  <a:schemeClr val="bg1"/>
+                </a:solidFill>
+              </a:rPr>
+            </a:br>
+            <a:br>
+              <a:rPr sz="1600" dirty="0">
+                <a:solidFill>
+                  <a:schemeClr val="bg1"/>
+                </a:solidFill>
+              </a:rPr>
+            </a:br>
+            <a:r>
+              <a:rPr sz="1600" dirty="0">
+                <a:solidFill>
+                  <a:schemeClr val="bg1"/>
+                </a:solidFill>
+              </a:rPr>
+              <a:t>// </a:t>
+            </a:r>
+            <a:r>
+              <a:rPr sz="1600" dirty="0" err="1">
+                <a:solidFill>
+                  <a:schemeClr val="bg1"/>
+                </a:solidFill>
+              </a:rPr>
+              <a:t>InitLedger</a:t>
+            </a:r>
+            <a:r>
+              <a:rPr sz="1600" dirty="0">
+                <a:solidFill>
+                  <a:schemeClr val="bg1"/>
+                </a:solidFill>
+              </a:rPr>
+              <a:t> </a:t>
+            </a:r>
+            <a:r>
+              <a:rPr sz="1600" dirty="0" err="1">
+                <a:solidFill>
+                  <a:schemeClr val="bg1"/>
+                </a:solidFill>
+              </a:rPr>
+              <a:t>inicializa</a:t>
+            </a:r>
+            <a:r>
+              <a:rPr sz="1600" dirty="0">
+                <a:solidFill>
+                  <a:schemeClr val="bg1"/>
+                </a:solidFill>
+              </a:rPr>
+              <a:t> </a:t>
+            </a:r>
+            <a:r>
+              <a:rPr sz="1600" dirty="0" err="1">
+                <a:solidFill>
+                  <a:schemeClr val="bg1"/>
+                </a:solidFill>
+              </a:rPr>
+              <a:t>el</a:t>
+            </a:r>
+            <a:r>
+              <a:rPr sz="1600" dirty="0">
+                <a:solidFill>
+                  <a:schemeClr val="bg1"/>
+                </a:solidFill>
+              </a:rPr>
+              <a:t> ledger con </a:t>
+            </a:r>
+            <a:r>
+              <a:rPr sz="1600" dirty="0" err="1">
+                <a:solidFill>
+                  <a:schemeClr val="bg1"/>
+                </a:solidFill>
+              </a:rPr>
+              <a:t>datos</a:t>
+            </a:r>
+            <a:r>
+              <a:rPr sz="1600" dirty="0">
+                <a:solidFill>
+                  <a:schemeClr val="bg1"/>
+                </a:solidFill>
+              </a:rPr>
+              <a:t> de </a:t>
+            </a:r>
+            <a:r>
+              <a:rPr sz="1600" dirty="0" err="1">
+                <a:solidFill>
+                  <a:schemeClr val="bg1"/>
+                </a:solidFill>
+              </a:rPr>
+              <a:t>ejemplo</a:t>
+            </a:r>
+            <a:br>
+              <a:rPr sz="1600" dirty="0">
+                <a:solidFill>
+                  <a:schemeClr val="bg1"/>
+                </a:solidFill>
+              </a:rPr>
+            </a:br>
+            <a:r>
+              <a:rPr sz="1600" dirty="0" err="1">
+                <a:solidFill>
+                  <a:schemeClr val="bg1"/>
+                </a:solidFill>
+              </a:rPr>
+              <a:t>func</a:t>
+            </a:r>
+            <a:r>
+              <a:rPr sz="1600" dirty="0">
+                <a:solidFill>
+                  <a:schemeClr val="bg1"/>
+                </a:solidFill>
+              </a:rPr>
+              <a:t> (s *</a:t>
+            </a:r>
+            <a:r>
+              <a:rPr sz="1600" dirty="0" err="1">
+                <a:solidFill>
+                  <a:schemeClr val="bg1"/>
+                </a:solidFill>
+              </a:rPr>
+              <a:t>SmartContract</a:t>
+            </a:r>
+            <a:r>
+              <a:rPr sz="1600" dirty="0">
+                <a:solidFill>
+                  <a:schemeClr val="bg1"/>
+                </a:solidFill>
+              </a:rPr>
+              <a:t>) </a:t>
+            </a:r>
+            <a:r>
+              <a:rPr sz="1600" dirty="0" err="1">
+                <a:solidFill>
+                  <a:schemeClr val="bg1"/>
+                </a:solidFill>
+              </a:rPr>
+              <a:t>InitLedger</a:t>
+            </a:r>
+            <a:r>
+              <a:rPr sz="1600" dirty="0">
+                <a:solidFill>
+                  <a:schemeClr val="bg1"/>
+                </a:solidFill>
+              </a:rPr>
+              <a:t>(</a:t>
+            </a:r>
+            <a:r>
+              <a:rPr sz="1600" dirty="0" err="1">
+                <a:solidFill>
+                  <a:schemeClr val="bg1"/>
+                </a:solidFill>
+              </a:rPr>
+              <a:t>ctx</a:t>
+            </a:r>
+            <a:r>
+              <a:rPr sz="1600" dirty="0">
+                <a:solidFill>
+                  <a:schemeClr val="bg1"/>
+                </a:solidFill>
+              </a:rPr>
+              <a:t> </a:t>
+            </a:r>
+            <a:r>
+              <a:rPr sz="1600" dirty="0" err="1">
+                <a:solidFill>
+                  <a:schemeClr val="bg1"/>
+                </a:solidFill>
+              </a:rPr>
+              <a:t>contractapi.TransactionContextInterface</a:t>
+            </a:r>
+            <a:r>
+              <a:rPr sz="1600" dirty="0">
+                <a:solidFill>
+                  <a:schemeClr val="bg1"/>
+                </a:solidFill>
+              </a:rPr>
+              <a:t>) error {</a:t>
+            </a:r>
+            <a:br>
+              <a:rPr sz="1600" dirty="0">
+                <a:solidFill>
+                  <a:schemeClr val="bg1"/>
+                </a:solidFill>
+              </a:rPr>
+            </a:br>
+            <a:r>
+              <a:rPr sz="1600" dirty="0">
+                <a:solidFill>
+                  <a:schemeClr val="bg1"/>
+                </a:solidFill>
+              </a:rPr>
+              <a:t>    // Logica de </a:t>
+            </a:r>
+            <a:r>
+              <a:rPr sz="1600" dirty="0" err="1">
+                <a:solidFill>
+                  <a:schemeClr val="bg1"/>
+                </a:solidFill>
+              </a:rPr>
+              <a:t>inicializacion</a:t>
+            </a:r>
+            <a:r>
+              <a:rPr sz="1600" dirty="0">
+                <a:solidFill>
+                  <a:schemeClr val="bg1"/>
+                </a:solidFill>
+              </a:rPr>
+              <a:t> </a:t>
+            </a:r>
+            <a:r>
+              <a:rPr sz="1600" dirty="0" err="1">
+                <a:solidFill>
+                  <a:schemeClr val="bg1"/>
+                </a:solidFill>
+              </a:rPr>
+              <a:t>aqui</a:t>
+            </a:r>
+            <a:br>
+              <a:rPr sz="1600" dirty="0">
+                <a:solidFill>
+                  <a:schemeClr val="bg1"/>
+                </a:solidFill>
+              </a:rPr>
+            </a:br>
+            <a:r>
+              <a:rPr sz="1600" dirty="0">
+                <a:solidFill>
+                  <a:schemeClr val="bg1"/>
+                </a:solidFill>
+              </a:rPr>
               <a:t>    return nil</a:t>
             </a:r>
-            <a:br/>
-            <a:r>
+            <a:br>
+              <a:rPr sz="1600" dirty="0">
+                <a:solidFill>
+                  <a:schemeClr val="bg1"/>
+                </a:solidFill>
+              </a:rPr>
+            </a:br>
+            <a:r>
+              <a:rPr sz="1600" dirty="0">
+                <a:solidFill>
+                  <a:schemeClr val="bg1"/>
+                </a:solidFill>
+              </a:rPr>
               <a:t>}</a:t>
             </a:r>
-            <a:br/>
-            <a:br/>
-            <a:r>
-              <a:t>func main() {</a:t>
-            </a:r>
-            <a:br/>
-            <a:r>
-              <a:t>    chaincode, err := contractapi.NewChaincode(&amp;SmartContract{})</a:t>
-            </a:r>
-            <a:br/>
-            <a:r>
-              <a:t>    if err != nil {</a:t>
-            </a:r>
-            <a:br/>
-            <a:r>
-              <a:t>        panic(err)</a:t>
-            </a:r>
-            <a:br/>
-            <a:r>
+            <a:br>
+              <a:rPr sz="1600" dirty="0">
+                <a:solidFill>
+                  <a:schemeClr val="bg1"/>
+                </a:solidFill>
+              </a:rPr>
+            </a:br>
+            <a:br>
+              <a:rPr sz="1600" dirty="0">
+                <a:solidFill>
+                  <a:schemeClr val="bg1"/>
+                </a:solidFill>
+              </a:rPr>
+            </a:br>
+            <a:endParaRPr sz="1600" dirty="0">
+              <a:solidFill>
+                <a:schemeClr val="bg1"/>
+              </a:solidFill>
+            </a:endParaRPr>
+          </a:p>
+        </p:txBody>
+      </p:sp>
+      <p:sp>
+        <p:nvSpPr>
+          <p:cNvPr id="10" name="CuadroTexto 9">
+            <a:extLst>
+              <a:ext uri="{FF2B5EF4-FFF2-40B4-BE49-F238E27FC236}">
+                <a16:creationId xmlns:a16="http://schemas.microsoft.com/office/drawing/2014/main" id="{77D732CC-2AD7-8474-C081-783EDC03225D}"/>
+              </a:ext>
+            </a:extLst>
+          </p:cNvPr>
+          <p:cNvSpPr txBox="1"/>
+          <p:nvPr/>
+        </p:nvSpPr>
+        <p:spPr>
+          <a:xfrm>
+            <a:off x="6961148" y="2232014"/>
+            <a:ext cx="4743172" cy="2554545"/>
+          </a:xfrm>
+          <a:prstGeom prst="rect">
+            <a:avLst/>
+          </a:prstGeom>
+          <a:noFill/>
+        </p:spPr>
+        <p:txBody>
+          <a:bodyPr wrap="square">
+            <a:spAutoFit/>
+          </a:bodyPr>
+          <a:lstStyle/>
+          <a:p>
+            <a:r>
+              <a:rPr lang="es-ES" sz="1600" dirty="0" err="1">
+                <a:solidFill>
+                  <a:schemeClr val="bg1"/>
+                </a:solidFill>
+              </a:rPr>
+              <a:t>func</a:t>
+            </a:r>
+            <a:r>
+              <a:rPr lang="es-ES" sz="1600" dirty="0">
+                <a:solidFill>
+                  <a:schemeClr val="bg1"/>
+                </a:solidFill>
+              </a:rPr>
+              <a:t> </a:t>
+            </a:r>
+            <a:r>
+              <a:rPr lang="es-ES" sz="1600" dirty="0" err="1">
+                <a:solidFill>
+                  <a:schemeClr val="bg1"/>
+                </a:solidFill>
+              </a:rPr>
+              <a:t>main</a:t>
+            </a:r>
+            <a:r>
+              <a:rPr lang="es-ES" sz="1600" dirty="0">
+                <a:solidFill>
+                  <a:schemeClr val="bg1"/>
+                </a:solidFill>
+              </a:rPr>
+              <a:t>() {</a:t>
+            </a:r>
+            <a:br>
+              <a:rPr lang="es-ES" sz="1600" dirty="0">
+                <a:solidFill>
+                  <a:schemeClr val="bg1"/>
+                </a:solidFill>
+              </a:rPr>
+            </a:br>
+            <a:r>
+              <a:rPr lang="es-ES" sz="1600" dirty="0">
+                <a:solidFill>
+                  <a:schemeClr val="bg1"/>
+                </a:solidFill>
+              </a:rPr>
+              <a:t>    </a:t>
+            </a:r>
+            <a:r>
+              <a:rPr lang="es-ES" sz="1600" dirty="0" err="1">
+                <a:solidFill>
+                  <a:schemeClr val="bg1"/>
+                </a:solidFill>
+              </a:rPr>
+              <a:t>chaincode</a:t>
+            </a:r>
+            <a:r>
+              <a:rPr lang="es-ES" sz="1600" dirty="0">
+                <a:solidFill>
+                  <a:schemeClr val="bg1"/>
+                </a:solidFill>
+              </a:rPr>
+              <a:t>, </a:t>
+            </a:r>
+            <a:r>
+              <a:rPr lang="es-ES" sz="1600" dirty="0" err="1">
+                <a:solidFill>
+                  <a:schemeClr val="bg1"/>
+                </a:solidFill>
+              </a:rPr>
+              <a:t>err</a:t>
+            </a:r>
+            <a:r>
+              <a:rPr lang="es-ES" sz="1600" dirty="0">
+                <a:solidFill>
+                  <a:schemeClr val="bg1"/>
+                </a:solidFill>
+              </a:rPr>
+              <a:t> := </a:t>
+            </a:r>
+            <a:r>
+              <a:rPr lang="es-ES" sz="1600" dirty="0" err="1">
+                <a:solidFill>
+                  <a:schemeClr val="bg1"/>
+                </a:solidFill>
+              </a:rPr>
+              <a:t>contractapi.NewChaincode</a:t>
+            </a:r>
+            <a:r>
+              <a:rPr lang="es-ES" sz="1600" dirty="0">
+                <a:solidFill>
+                  <a:schemeClr val="bg1"/>
+                </a:solidFill>
+              </a:rPr>
+              <a:t>(&amp;</a:t>
+            </a:r>
+            <a:r>
+              <a:rPr lang="es-ES" sz="1600" dirty="0" err="1">
+                <a:solidFill>
+                  <a:schemeClr val="bg1"/>
+                </a:solidFill>
+              </a:rPr>
+              <a:t>SmartContract</a:t>
+            </a:r>
+            <a:r>
+              <a:rPr lang="es-ES" sz="1600" dirty="0">
+                <a:solidFill>
+                  <a:schemeClr val="bg1"/>
+                </a:solidFill>
+              </a:rPr>
+              <a:t>{})</a:t>
+            </a:r>
+            <a:br>
+              <a:rPr lang="es-ES" sz="1600" dirty="0">
+                <a:solidFill>
+                  <a:schemeClr val="bg1"/>
+                </a:solidFill>
+              </a:rPr>
+            </a:br>
+            <a:r>
+              <a:rPr lang="es-ES" sz="1600" dirty="0">
+                <a:solidFill>
+                  <a:schemeClr val="bg1"/>
+                </a:solidFill>
+              </a:rPr>
+              <a:t>    </a:t>
+            </a:r>
+            <a:r>
+              <a:rPr lang="es-ES" sz="1600" dirty="0" err="1">
+                <a:solidFill>
+                  <a:schemeClr val="bg1"/>
+                </a:solidFill>
+              </a:rPr>
+              <a:t>if</a:t>
+            </a:r>
+            <a:r>
+              <a:rPr lang="es-ES" sz="1600" dirty="0">
+                <a:solidFill>
+                  <a:schemeClr val="bg1"/>
+                </a:solidFill>
+              </a:rPr>
+              <a:t> </a:t>
+            </a:r>
+            <a:r>
+              <a:rPr lang="es-ES" sz="1600" dirty="0" err="1">
+                <a:solidFill>
+                  <a:schemeClr val="bg1"/>
+                </a:solidFill>
+              </a:rPr>
+              <a:t>err</a:t>
+            </a:r>
+            <a:r>
+              <a:rPr lang="es-ES" sz="1600" dirty="0">
+                <a:solidFill>
+                  <a:schemeClr val="bg1"/>
+                </a:solidFill>
+              </a:rPr>
+              <a:t> != </a:t>
+            </a:r>
+            <a:r>
+              <a:rPr lang="es-ES" sz="1600" dirty="0" err="1">
+                <a:solidFill>
+                  <a:schemeClr val="bg1"/>
+                </a:solidFill>
+              </a:rPr>
+              <a:t>nil</a:t>
+            </a:r>
+            <a:r>
+              <a:rPr lang="es-ES" sz="1600" dirty="0">
+                <a:solidFill>
+                  <a:schemeClr val="bg1"/>
+                </a:solidFill>
+              </a:rPr>
+              <a:t> {</a:t>
+            </a:r>
+            <a:br>
+              <a:rPr lang="es-ES" sz="1600" dirty="0">
+                <a:solidFill>
+                  <a:schemeClr val="bg1"/>
+                </a:solidFill>
+              </a:rPr>
+            </a:br>
+            <a:r>
+              <a:rPr lang="es-ES" sz="1600" dirty="0">
+                <a:solidFill>
+                  <a:schemeClr val="bg1"/>
+                </a:solidFill>
+              </a:rPr>
+              <a:t>        </a:t>
+            </a:r>
+            <a:r>
+              <a:rPr lang="es-ES" sz="1600" dirty="0" err="1">
+                <a:solidFill>
+                  <a:schemeClr val="bg1"/>
+                </a:solidFill>
+              </a:rPr>
+              <a:t>panic</a:t>
+            </a:r>
+            <a:r>
+              <a:rPr lang="es-ES" sz="1600" dirty="0">
+                <a:solidFill>
+                  <a:schemeClr val="bg1"/>
+                </a:solidFill>
+              </a:rPr>
+              <a:t>(</a:t>
+            </a:r>
+            <a:r>
+              <a:rPr lang="es-ES" sz="1600" dirty="0" err="1">
+                <a:solidFill>
+                  <a:schemeClr val="bg1"/>
+                </a:solidFill>
+              </a:rPr>
+              <a:t>err</a:t>
+            </a:r>
+            <a:r>
+              <a:rPr lang="es-ES" sz="1600" dirty="0">
+                <a:solidFill>
+                  <a:schemeClr val="bg1"/>
+                </a:solidFill>
+              </a:rPr>
+              <a:t>)</a:t>
+            </a:r>
+            <a:br>
+              <a:rPr lang="es-ES" sz="1600" dirty="0">
+                <a:solidFill>
+                  <a:schemeClr val="bg1"/>
+                </a:solidFill>
+              </a:rPr>
+            </a:br>
+            <a:r>
+              <a:rPr lang="es-ES" sz="1600" dirty="0">
+                <a:solidFill>
+                  <a:schemeClr val="bg1"/>
+                </a:solidFill>
+              </a:rPr>
               <a:t>    }</a:t>
             </a:r>
-            <a:br/>
-            <a:r>
-              <a:t>    if err := chaincode.Start(); err != nil {</a:t>
-            </a:r>
-            <a:br/>
-            <a:r>
-              <a:t>        panic(err)</a:t>
-            </a:r>
-            <a:br/>
-            <a:r>
+            <a:br>
+              <a:rPr lang="es-ES" sz="1600" dirty="0">
+                <a:solidFill>
+                  <a:schemeClr val="bg1"/>
+                </a:solidFill>
+              </a:rPr>
+            </a:br>
+            <a:r>
+              <a:rPr lang="es-ES" sz="1600" dirty="0">
+                <a:solidFill>
+                  <a:schemeClr val="bg1"/>
+                </a:solidFill>
+              </a:rPr>
+              <a:t>    </a:t>
+            </a:r>
+            <a:r>
+              <a:rPr lang="es-ES" sz="1600" dirty="0" err="1">
+                <a:solidFill>
+                  <a:schemeClr val="bg1"/>
+                </a:solidFill>
+              </a:rPr>
+              <a:t>if</a:t>
+            </a:r>
+            <a:r>
+              <a:rPr lang="es-ES" sz="1600" dirty="0">
+                <a:solidFill>
+                  <a:schemeClr val="bg1"/>
+                </a:solidFill>
+              </a:rPr>
+              <a:t> </a:t>
+            </a:r>
+            <a:r>
+              <a:rPr lang="es-ES" sz="1600" dirty="0" err="1">
+                <a:solidFill>
+                  <a:schemeClr val="bg1"/>
+                </a:solidFill>
+              </a:rPr>
+              <a:t>err</a:t>
+            </a:r>
+            <a:r>
+              <a:rPr lang="es-ES" sz="1600" dirty="0">
+                <a:solidFill>
+                  <a:schemeClr val="bg1"/>
+                </a:solidFill>
+              </a:rPr>
+              <a:t> := </a:t>
+            </a:r>
+            <a:r>
+              <a:rPr lang="es-ES" sz="1600" dirty="0" err="1">
+                <a:solidFill>
+                  <a:schemeClr val="bg1"/>
+                </a:solidFill>
+              </a:rPr>
+              <a:t>chaincode.Start</a:t>
+            </a:r>
+            <a:r>
+              <a:rPr lang="es-ES" sz="1600" dirty="0">
+                <a:solidFill>
+                  <a:schemeClr val="bg1"/>
+                </a:solidFill>
+              </a:rPr>
+              <a:t>(); </a:t>
+            </a:r>
+            <a:r>
+              <a:rPr lang="es-ES" sz="1600" dirty="0" err="1">
+                <a:solidFill>
+                  <a:schemeClr val="bg1"/>
+                </a:solidFill>
+              </a:rPr>
+              <a:t>err</a:t>
+            </a:r>
+            <a:r>
+              <a:rPr lang="es-ES" sz="1600" dirty="0">
+                <a:solidFill>
+                  <a:schemeClr val="bg1"/>
+                </a:solidFill>
+              </a:rPr>
+              <a:t> != </a:t>
+            </a:r>
+            <a:r>
+              <a:rPr lang="es-ES" sz="1600" dirty="0" err="1">
+                <a:solidFill>
+                  <a:schemeClr val="bg1"/>
+                </a:solidFill>
+              </a:rPr>
+              <a:t>nil</a:t>
+            </a:r>
+            <a:r>
+              <a:rPr lang="es-ES" sz="1600" dirty="0">
+                <a:solidFill>
+                  <a:schemeClr val="bg1"/>
+                </a:solidFill>
+              </a:rPr>
+              <a:t> {</a:t>
+            </a:r>
+            <a:br>
+              <a:rPr lang="es-ES" sz="1600" dirty="0">
+                <a:solidFill>
+                  <a:schemeClr val="bg1"/>
+                </a:solidFill>
+              </a:rPr>
+            </a:br>
+            <a:r>
+              <a:rPr lang="es-ES" sz="1600" dirty="0">
+                <a:solidFill>
+                  <a:schemeClr val="bg1"/>
+                </a:solidFill>
+              </a:rPr>
+              <a:t>        </a:t>
+            </a:r>
+            <a:r>
+              <a:rPr lang="es-ES" sz="1600" dirty="0" err="1">
+                <a:solidFill>
+                  <a:schemeClr val="bg1"/>
+                </a:solidFill>
+              </a:rPr>
+              <a:t>panic</a:t>
+            </a:r>
+            <a:r>
+              <a:rPr lang="es-ES" sz="1600" dirty="0">
+                <a:solidFill>
+                  <a:schemeClr val="bg1"/>
+                </a:solidFill>
+              </a:rPr>
+              <a:t>(</a:t>
+            </a:r>
+            <a:r>
+              <a:rPr lang="es-ES" sz="1600" dirty="0" err="1">
+                <a:solidFill>
+                  <a:schemeClr val="bg1"/>
+                </a:solidFill>
+              </a:rPr>
+              <a:t>err</a:t>
+            </a:r>
+            <a:r>
+              <a:rPr lang="es-ES" sz="1600" dirty="0">
+                <a:solidFill>
+                  <a:schemeClr val="bg1"/>
+                </a:solidFill>
+              </a:rPr>
+              <a:t>)</a:t>
+            </a:r>
+            <a:br>
+              <a:rPr lang="es-ES" sz="1600" dirty="0">
+                <a:solidFill>
+                  <a:schemeClr val="bg1"/>
+                </a:solidFill>
+              </a:rPr>
+            </a:br>
+            <a:r>
+              <a:rPr lang="es-ES" sz="1600" dirty="0">
+                <a:solidFill>
+                  <a:schemeClr val="bg1"/>
+                </a:solidFill>
+              </a:rPr>
               <a:t>    }</a:t>
             </a:r>
-            <a:br/>
-            <a:r>
+            <a:br>
+              <a:rPr lang="es-ES" sz="1600" dirty="0">
+                <a:solidFill>
+                  <a:schemeClr val="bg1"/>
+                </a:solidFill>
+              </a:rPr>
+            </a:br>
+            <a:r>
+              <a:rPr lang="es-ES" sz="1600" dirty="0">
+                <a:solidFill>
+                  <a:schemeClr val="bg1"/>
+                </a:solidFill>
+              </a:rPr>
               <a:t>}</a:t>
             </a:r>
+          </a:p>
+        </p:txBody>
+      </p:sp>
+      <p:sp>
+        <p:nvSpPr>
+          <p:cNvPr id="11" name="Rectángulo 10">
+            <a:extLst>
+              <a:ext uri="{FF2B5EF4-FFF2-40B4-BE49-F238E27FC236}">
+                <a16:creationId xmlns:a16="http://schemas.microsoft.com/office/drawing/2014/main" id="{B3A1F12C-69B1-581F-365C-71AD39923D78}"/>
+              </a:ext>
+            </a:extLst>
+          </p:cNvPr>
+          <p:cNvSpPr/>
+          <p:nvPr/>
+        </p:nvSpPr>
+        <p:spPr>
+          <a:xfrm>
+            <a:off x="6311590" y="1417320"/>
+            <a:ext cx="45719" cy="5028085"/>
+          </a:xfrm>
+          <a:prstGeom prst="rect">
+            <a:avLst/>
+          </a:prstGeom>
+        </p:spPr>
+        <p:style>
+          <a:lnRef idx="1">
+            <a:schemeClr val="accent1"/>
+          </a:lnRef>
+          <a:fillRef idx="3">
+            <a:schemeClr val="accent1"/>
+          </a:fillRef>
+          <a:effectRef idx="2">
+            <a:schemeClr val="accent1"/>
+          </a:effectRef>
+          <a:fontRef idx="minor">
+            <a:schemeClr val="lt1"/>
+          </a:fontRef>
+        </p:style>
+        <p:txBody>
+          <a:bodyPr rtlCol="0" anchor="ctr"/>
+          <a:lstStyle/>
+          <a:p>
+            <a:pPr algn="ctr"/>
+            <a:endParaRPr lang="es-ES"/>
           </a:p>
         </p:txBody>
       </p:sp>
@@ -11680,7 +17831,7 @@
         <p:spPr>
           <a:xfrm>
             <a:off x="731520" y="1600200"/>
-            <a:ext cx="10698480" cy="4754880"/>
+            <a:ext cx="5446256" cy="4754880"/>
           </a:xfrm>
           <a:prstGeom prst="rect">
             <a:avLst/>
@@ -11691,103 +17842,887 @@
           <a:bodyPr wrap="square"/>
           <a:lstStyle/>
           <a:p>
-            <a:br/>
-            <a:r>
+            <a:br>
+              <a:rPr dirty="0"/>
+            </a:br>
+            <a:r>
+              <a:rPr sz="1600" dirty="0">
+                <a:solidFill>
+                  <a:schemeClr val="bg1"/>
+                </a:solidFill>
+              </a:rPr>
               <a:t>'use strict';</a:t>
             </a:r>
-            <a:br/>
-            <a:br/>
-            <a:r>
-              <a:t>const { Contract } = require('fabric-contract-api');</a:t>
-            </a:r>
-            <a:br/>
-            <a:br/>
-            <a:r>
-              <a:t>class AssetContract extends Contract {</a:t>
-            </a:r>
-            <a:br/>
-            <a:br/>
-            <a:r>
-              <a:t>    async InitLedger(ctx) {</a:t>
-            </a:r>
-            <a:br/>
-            <a:r>
-              <a:t>        // Logica de inicializacion aqui</a:t>
-            </a:r>
-            <a:br/>
-            <a:r>
+            <a:br>
+              <a:rPr sz="1600" dirty="0">
+                <a:solidFill>
+                  <a:schemeClr val="bg1"/>
+                </a:solidFill>
+              </a:rPr>
+            </a:br>
+            <a:br>
+              <a:rPr sz="1600" dirty="0">
+                <a:solidFill>
+                  <a:schemeClr val="bg1"/>
+                </a:solidFill>
+              </a:rPr>
+            </a:br>
+            <a:r>
+              <a:rPr sz="1600" dirty="0">
+                <a:solidFill>
+                  <a:schemeClr val="bg1"/>
+                </a:solidFill>
+              </a:rPr>
+              <a:t>const { Contract } = require('fabric-contract-</a:t>
+            </a:r>
+            <a:r>
+              <a:rPr sz="1600" dirty="0" err="1">
+                <a:solidFill>
+                  <a:schemeClr val="bg1"/>
+                </a:solidFill>
+              </a:rPr>
+              <a:t>api</a:t>
+            </a:r>
+            <a:r>
+              <a:rPr sz="1600" dirty="0">
+                <a:solidFill>
+                  <a:schemeClr val="bg1"/>
+                </a:solidFill>
+              </a:rPr>
+              <a:t>');</a:t>
+            </a:r>
+            <a:br>
+              <a:rPr sz="1600" dirty="0">
+                <a:solidFill>
+                  <a:schemeClr val="bg1"/>
+                </a:solidFill>
+              </a:rPr>
+            </a:br>
+            <a:br>
+              <a:rPr sz="1600" dirty="0">
+                <a:solidFill>
+                  <a:schemeClr val="bg1"/>
+                </a:solidFill>
+              </a:rPr>
+            </a:br>
+            <a:r>
+              <a:rPr sz="1600" dirty="0">
+                <a:solidFill>
+                  <a:schemeClr val="bg1"/>
+                </a:solidFill>
+              </a:rPr>
+              <a:t>class </a:t>
+            </a:r>
+            <a:r>
+              <a:rPr sz="1600" dirty="0" err="1">
+                <a:solidFill>
+                  <a:schemeClr val="bg1"/>
+                </a:solidFill>
+              </a:rPr>
+              <a:t>AssetContract</a:t>
+            </a:r>
+            <a:r>
+              <a:rPr sz="1600" dirty="0">
+                <a:solidFill>
+                  <a:schemeClr val="bg1"/>
+                </a:solidFill>
+              </a:rPr>
+              <a:t> extends Contract {</a:t>
+            </a:r>
+            <a:br>
+              <a:rPr sz="1600" dirty="0">
+                <a:solidFill>
+                  <a:schemeClr val="bg1"/>
+                </a:solidFill>
+              </a:rPr>
+            </a:br>
+            <a:br>
+              <a:rPr sz="1600" dirty="0">
+                <a:solidFill>
+                  <a:schemeClr val="bg1"/>
+                </a:solidFill>
+              </a:rPr>
+            </a:br>
+            <a:r>
+              <a:rPr sz="1600" dirty="0">
+                <a:solidFill>
+                  <a:schemeClr val="bg1"/>
+                </a:solidFill>
+              </a:rPr>
+              <a:t>    async </a:t>
+            </a:r>
+            <a:r>
+              <a:rPr sz="1600" dirty="0" err="1">
+                <a:solidFill>
+                  <a:schemeClr val="bg1"/>
+                </a:solidFill>
+              </a:rPr>
+              <a:t>InitLedger</a:t>
+            </a:r>
+            <a:r>
+              <a:rPr sz="1600" dirty="0">
+                <a:solidFill>
+                  <a:schemeClr val="bg1"/>
+                </a:solidFill>
+              </a:rPr>
+              <a:t>(</a:t>
+            </a:r>
+            <a:r>
+              <a:rPr sz="1600" dirty="0" err="1">
+                <a:solidFill>
+                  <a:schemeClr val="bg1"/>
+                </a:solidFill>
+              </a:rPr>
+              <a:t>ctx</a:t>
+            </a:r>
+            <a:r>
+              <a:rPr sz="1600" dirty="0">
+                <a:solidFill>
+                  <a:schemeClr val="bg1"/>
+                </a:solidFill>
+              </a:rPr>
+              <a:t>) {</a:t>
+            </a:r>
+            <a:br>
+              <a:rPr sz="1600" dirty="0">
+                <a:solidFill>
+                  <a:schemeClr val="bg1"/>
+                </a:solidFill>
+              </a:rPr>
+            </a:br>
+            <a:r>
+              <a:rPr sz="1600" dirty="0">
+                <a:solidFill>
+                  <a:schemeClr val="bg1"/>
+                </a:solidFill>
+              </a:rPr>
+              <a:t>        // Logica de </a:t>
+            </a:r>
+            <a:r>
+              <a:rPr sz="1600" dirty="0" err="1">
+                <a:solidFill>
+                  <a:schemeClr val="bg1"/>
+                </a:solidFill>
+              </a:rPr>
+              <a:t>inicializacion</a:t>
+            </a:r>
+            <a:r>
+              <a:rPr sz="1600" dirty="0">
+                <a:solidFill>
+                  <a:schemeClr val="bg1"/>
+                </a:solidFill>
+              </a:rPr>
+              <a:t> </a:t>
+            </a:r>
+            <a:r>
+              <a:rPr sz="1600" dirty="0" err="1">
+                <a:solidFill>
+                  <a:schemeClr val="bg1"/>
+                </a:solidFill>
+              </a:rPr>
+              <a:t>aqui</a:t>
+            </a:r>
+            <a:br>
+              <a:rPr sz="1600" dirty="0">
+                <a:solidFill>
+                  <a:schemeClr val="bg1"/>
+                </a:solidFill>
+              </a:rPr>
+            </a:br>
+            <a:r>
+              <a:rPr sz="1600" dirty="0">
+                <a:solidFill>
+                  <a:schemeClr val="bg1"/>
+                </a:solidFill>
+              </a:rPr>
               <a:t>        const assets = [</a:t>
             </a:r>
-            <a:br/>
-            <a:r>
+            <a:br>
+              <a:rPr sz="1600" dirty="0">
+                <a:solidFill>
+                  <a:schemeClr val="bg1"/>
+                </a:solidFill>
+              </a:rPr>
+            </a:br>
+            <a:r>
+              <a:rPr sz="1600" dirty="0">
+                <a:solidFill>
+                  <a:schemeClr val="bg1"/>
+                </a:solidFill>
+              </a:rPr>
               <a:t>            { ID: 'asset1', Owner: 'Alice', Value: 100 },</a:t>
             </a:r>
-            <a:br/>
-            <a:r>
+            <a:br>
+              <a:rPr sz="1600" dirty="0">
+                <a:solidFill>
+                  <a:schemeClr val="bg1"/>
+                </a:solidFill>
+              </a:rPr>
+            </a:br>
+            <a:r>
+              <a:rPr sz="1600" dirty="0">
+                <a:solidFill>
+                  <a:schemeClr val="bg1"/>
+                </a:solidFill>
+              </a:rPr>
               <a:t>            { ID: 'asset2', Owner: 'Bob',   Value: 200 },</a:t>
             </a:r>
-            <a:br/>
-            <a:r>
+            <a:br>
+              <a:rPr sz="1600" dirty="0">
+                <a:solidFill>
+                  <a:schemeClr val="bg1"/>
+                </a:solidFill>
+              </a:rPr>
+            </a:br>
+            <a:r>
+              <a:rPr sz="1600" dirty="0">
+                <a:solidFill>
+                  <a:schemeClr val="bg1"/>
+                </a:solidFill>
+              </a:rPr>
               <a:t>        ];</a:t>
             </a:r>
-            <a:br/>
-            <a:r>
+            <a:br>
+              <a:rPr sz="1600" dirty="0">
+                <a:solidFill>
+                  <a:schemeClr val="bg1"/>
+                </a:solidFill>
+              </a:rPr>
+            </a:br>
+            <a:r>
+              <a:rPr sz="1600" dirty="0">
+                <a:solidFill>
+                  <a:schemeClr val="bg1"/>
+                </a:solidFill>
+              </a:rPr>
               <a:t>        for (const asset of assets) {</a:t>
             </a:r>
-            <a:br/>
-            <a:r>
-              <a:t>            await ctx.stub.putState(asset.ID,</a:t>
-            </a:r>
-            <a:br/>
-            <a:r>
-              <a:t>                Buffer.from(JSON.stringify(asset)));</a:t>
-            </a:r>
-            <a:br/>
-            <a:r>
+            <a:br>
+              <a:rPr sz="1600" dirty="0">
+                <a:solidFill>
+                  <a:schemeClr val="bg1"/>
+                </a:solidFill>
+              </a:rPr>
+            </a:br>
+            <a:r>
+              <a:rPr sz="1600" dirty="0">
+                <a:solidFill>
+                  <a:schemeClr val="bg1"/>
+                </a:solidFill>
+              </a:rPr>
+              <a:t>            await </a:t>
+            </a:r>
+            <a:r>
+              <a:rPr sz="1600" dirty="0" err="1">
+                <a:solidFill>
+                  <a:schemeClr val="bg1"/>
+                </a:solidFill>
+              </a:rPr>
+              <a:t>ctx.stub.putState</a:t>
+            </a:r>
+            <a:r>
+              <a:rPr sz="1600" dirty="0">
+                <a:solidFill>
+                  <a:schemeClr val="bg1"/>
+                </a:solidFill>
+              </a:rPr>
+              <a:t>(asset.ID,</a:t>
+            </a:r>
+            <a:br>
+              <a:rPr sz="1600" dirty="0">
+                <a:solidFill>
+                  <a:schemeClr val="bg1"/>
+                </a:solidFill>
+              </a:rPr>
+            </a:br>
+            <a:r>
+              <a:rPr sz="1600" dirty="0">
+                <a:solidFill>
+                  <a:schemeClr val="bg1"/>
+                </a:solidFill>
+              </a:rPr>
+              <a:t>                </a:t>
+            </a:r>
+            <a:r>
+              <a:rPr sz="1600" dirty="0" err="1">
+                <a:solidFill>
+                  <a:schemeClr val="bg1"/>
+                </a:solidFill>
+              </a:rPr>
+              <a:t>Buffer.from</a:t>
+            </a:r>
+            <a:r>
+              <a:rPr sz="1600" dirty="0">
+                <a:solidFill>
+                  <a:schemeClr val="bg1"/>
+                </a:solidFill>
+              </a:rPr>
+              <a:t>(</a:t>
+            </a:r>
+            <a:r>
+              <a:rPr sz="1600" dirty="0" err="1">
+                <a:solidFill>
+                  <a:schemeClr val="bg1"/>
+                </a:solidFill>
+              </a:rPr>
+              <a:t>JSON.stringify</a:t>
+            </a:r>
+            <a:r>
+              <a:rPr sz="1600" dirty="0">
+                <a:solidFill>
+                  <a:schemeClr val="bg1"/>
+                </a:solidFill>
+              </a:rPr>
+              <a:t>(asset)));</a:t>
+            </a:r>
+            <a:br>
+              <a:rPr sz="1600" dirty="0">
+                <a:solidFill>
+                  <a:schemeClr val="bg1"/>
+                </a:solidFill>
+              </a:rPr>
+            </a:br>
+            <a:r>
+              <a:rPr sz="1600" dirty="0">
+                <a:solidFill>
+                  <a:schemeClr val="bg1"/>
+                </a:solidFill>
+              </a:rPr>
               <a:t>        }</a:t>
             </a:r>
-            <a:br/>
-            <a:r>
+            <a:br>
+              <a:rPr sz="1600" dirty="0">
+                <a:solidFill>
+                  <a:schemeClr val="bg1"/>
+                </a:solidFill>
+              </a:rPr>
+            </a:br>
+            <a:r>
+              <a:rPr sz="1600" dirty="0">
+                <a:solidFill>
+                  <a:schemeClr val="bg1"/>
+                </a:solidFill>
+              </a:rPr>
               <a:t>    }</a:t>
             </a:r>
-            <a:br/>
-            <a:br/>
-            <a:r>
-              <a:t>    async ReadAsset(ctx, id) {</a:t>
-            </a:r>
-            <a:br/>
-            <a:r>
-              <a:t>        const assetJSON = await ctx.stub.getState(id);</a:t>
-            </a:r>
-            <a:br/>
-            <a:r>
-              <a:t>        if (!assetJSON || assetJSON.length === 0) {</a:t>
-            </a:r>
-            <a:br/>
-            <a:r>
-              <a:t>            throw new Error(`Asset ${id} does not exist`);</a:t>
-            </a:r>
-            <a:br/>
-            <a:r>
+            <a:br>
+              <a:rPr sz="1600" dirty="0">
+                <a:solidFill>
+                  <a:schemeClr val="bg1"/>
+                </a:solidFill>
+              </a:rPr>
+            </a:br>
+            <a:br>
+              <a:rPr sz="1600" dirty="0">
+                <a:solidFill>
+                  <a:schemeClr val="bg1"/>
+                </a:solidFill>
+              </a:rPr>
+            </a:br>
+            <a:r>
+              <a:rPr sz="1600" dirty="0">
+                <a:solidFill>
+                  <a:schemeClr val="bg1"/>
+                </a:solidFill>
+              </a:rPr>
+              <a:t>;</a:t>
+            </a:r>
+            <a:endParaRPr dirty="0">
+              <a:solidFill>
+                <a:schemeClr val="bg1"/>
+              </a:solidFill>
+            </a:endParaRPr>
+          </a:p>
+        </p:txBody>
+      </p:sp>
+      <p:sp>
+        <p:nvSpPr>
+          <p:cNvPr id="10" name="CuadroTexto 9">
+            <a:extLst>
+              <a:ext uri="{FF2B5EF4-FFF2-40B4-BE49-F238E27FC236}">
+                <a16:creationId xmlns:a16="http://schemas.microsoft.com/office/drawing/2014/main" id="{39CA4082-FC7C-4B99-CB20-D772769917C7}"/>
+              </a:ext>
+            </a:extLst>
+          </p:cNvPr>
+          <p:cNvSpPr txBox="1"/>
+          <p:nvPr/>
+        </p:nvSpPr>
+        <p:spPr>
+          <a:xfrm>
+            <a:off x="6280924" y="2143657"/>
+            <a:ext cx="4914900" cy="2554545"/>
+          </a:xfrm>
+          <a:prstGeom prst="rect">
+            <a:avLst/>
+          </a:prstGeom>
+          <a:noFill/>
+        </p:spPr>
+        <p:txBody>
+          <a:bodyPr wrap="square">
+            <a:spAutoFit/>
+          </a:bodyPr>
+          <a:lstStyle/>
+          <a:p>
+            <a:r>
+              <a:rPr lang="es-ES" sz="1600" dirty="0" err="1">
+                <a:solidFill>
+                  <a:schemeClr val="bg1"/>
+                </a:solidFill>
+              </a:rPr>
+              <a:t>async</a:t>
+            </a:r>
+            <a:r>
+              <a:rPr lang="es-ES" sz="1600" dirty="0">
+                <a:solidFill>
+                  <a:schemeClr val="bg1"/>
+                </a:solidFill>
+              </a:rPr>
+              <a:t> </a:t>
+            </a:r>
+            <a:r>
+              <a:rPr lang="es-ES" sz="1600" dirty="0" err="1">
+                <a:solidFill>
+                  <a:schemeClr val="bg1"/>
+                </a:solidFill>
+              </a:rPr>
+              <a:t>ReadAsset</a:t>
+            </a:r>
+            <a:r>
+              <a:rPr lang="es-ES" sz="1600" dirty="0">
+                <a:solidFill>
+                  <a:schemeClr val="bg1"/>
+                </a:solidFill>
+              </a:rPr>
+              <a:t>(</a:t>
+            </a:r>
+            <a:r>
+              <a:rPr lang="es-ES" sz="1600" dirty="0" err="1">
+                <a:solidFill>
+                  <a:schemeClr val="bg1"/>
+                </a:solidFill>
+              </a:rPr>
+              <a:t>ctx</a:t>
+            </a:r>
+            <a:r>
+              <a:rPr lang="es-ES" sz="1600" dirty="0">
+                <a:solidFill>
+                  <a:schemeClr val="bg1"/>
+                </a:solidFill>
+              </a:rPr>
+              <a:t>, id) {</a:t>
+            </a:r>
+            <a:br>
+              <a:rPr lang="es-ES" sz="1600" dirty="0">
+                <a:solidFill>
+                  <a:schemeClr val="bg1"/>
+                </a:solidFill>
+              </a:rPr>
+            </a:br>
+            <a:r>
+              <a:rPr lang="es-ES" sz="1600" dirty="0">
+                <a:solidFill>
+                  <a:schemeClr val="bg1"/>
+                </a:solidFill>
+              </a:rPr>
+              <a:t>        </a:t>
+            </a:r>
+            <a:r>
+              <a:rPr lang="es-ES" sz="1600" dirty="0" err="1">
+                <a:solidFill>
+                  <a:schemeClr val="bg1"/>
+                </a:solidFill>
+              </a:rPr>
+              <a:t>const</a:t>
+            </a:r>
+            <a:r>
+              <a:rPr lang="es-ES" sz="1600" dirty="0">
+                <a:solidFill>
+                  <a:schemeClr val="bg1"/>
+                </a:solidFill>
+              </a:rPr>
+              <a:t> </a:t>
+            </a:r>
+            <a:r>
+              <a:rPr lang="es-ES" sz="1600" dirty="0" err="1">
+                <a:solidFill>
+                  <a:schemeClr val="bg1"/>
+                </a:solidFill>
+              </a:rPr>
+              <a:t>assetJSON</a:t>
+            </a:r>
+            <a:r>
+              <a:rPr lang="es-ES" sz="1600" dirty="0">
+                <a:solidFill>
+                  <a:schemeClr val="bg1"/>
+                </a:solidFill>
+              </a:rPr>
+              <a:t> = </a:t>
+            </a:r>
+            <a:r>
+              <a:rPr lang="es-ES" sz="1600" dirty="0" err="1">
+                <a:solidFill>
+                  <a:schemeClr val="bg1"/>
+                </a:solidFill>
+              </a:rPr>
+              <a:t>await</a:t>
+            </a:r>
+            <a:r>
+              <a:rPr lang="es-ES" sz="1600" dirty="0">
+                <a:solidFill>
+                  <a:schemeClr val="bg1"/>
+                </a:solidFill>
+              </a:rPr>
+              <a:t> </a:t>
+            </a:r>
+            <a:r>
+              <a:rPr lang="es-ES" sz="1600" dirty="0" err="1">
+                <a:solidFill>
+                  <a:schemeClr val="bg1"/>
+                </a:solidFill>
+              </a:rPr>
+              <a:t>ctx.stub.getState</a:t>
+            </a:r>
+            <a:r>
+              <a:rPr lang="es-ES" sz="1600" dirty="0">
+                <a:solidFill>
+                  <a:schemeClr val="bg1"/>
+                </a:solidFill>
+              </a:rPr>
+              <a:t>(id);</a:t>
+            </a:r>
+            <a:br>
+              <a:rPr lang="es-ES" sz="1600" dirty="0">
+                <a:solidFill>
+                  <a:schemeClr val="bg1"/>
+                </a:solidFill>
+              </a:rPr>
+            </a:br>
+            <a:r>
+              <a:rPr lang="es-ES" sz="1600" dirty="0">
+                <a:solidFill>
+                  <a:schemeClr val="bg1"/>
+                </a:solidFill>
+              </a:rPr>
+              <a:t>        </a:t>
+            </a:r>
+            <a:r>
+              <a:rPr lang="es-ES" sz="1600" dirty="0" err="1">
+                <a:solidFill>
+                  <a:schemeClr val="bg1"/>
+                </a:solidFill>
+              </a:rPr>
+              <a:t>if</a:t>
+            </a:r>
+            <a:r>
+              <a:rPr lang="es-ES" sz="1600" dirty="0">
+                <a:solidFill>
+                  <a:schemeClr val="bg1"/>
+                </a:solidFill>
+              </a:rPr>
+              <a:t> (!</a:t>
+            </a:r>
+            <a:r>
+              <a:rPr lang="es-ES" sz="1600" dirty="0" err="1">
+                <a:solidFill>
+                  <a:schemeClr val="bg1"/>
+                </a:solidFill>
+              </a:rPr>
+              <a:t>assetJSON</a:t>
+            </a:r>
+            <a:r>
+              <a:rPr lang="es-ES" sz="1600" dirty="0">
+                <a:solidFill>
+                  <a:schemeClr val="bg1"/>
+                </a:solidFill>
+              </a:rPr>
+              <a:t> || </a:t>
+            </a:r>
+            <a:r>
+              <a:rPr lang="es-ES" sz="1600" dirty="0" err="1">
+                <a:solidFill>
+                  <a:schemeClr val="bg1"/>
+                </a:solidFill>
+              </a:rPr>
+              <a:t>assetJSON.length</a:t>
+            </a:r>
+            <a:r>
+              <a:rPr lang="es-ES" sz="1600" dirty="0">
+                <a:solidFill>
+                  <a:schemeClr val="bg1"/>
+                </a:solidFill>
+              </a:rPr>
+              <a:t> === 0) {</a:t>
+            </a:r>
+            <a:br>
+              <a:rPr lang="es-ES" sz="1600" dirty="0">
+                <a:solidFill>
+                  <a:schemeClr val="bg1"/>
+                </a:solidFill>
+              </a:rPr>
+            </a:br>
+            <a:r>
+              <a:rPr lang="es-ES" sz="1600" dirty="0">
+                <a:solidFill>
+                  <a:schemeClr val="bg1"/>
+                </a:solidFill>
+              </a:rPr>
+              <a:t>            </a:t>
+            </a:r>
+            <a:r>
+              <a:rPr lang="es-ES" sz="1600" dirty="0" err="1">
+                <a:solidFill>
+                  <a:schemeClr val="bg1"/>
+                </a:solidFill>
+              </a:rPr>
+              <a:t>throw</a:t>
+            </a:r>
+            <a:r>
+              <a:rPr lang="es-ES" sz="1600" dirty="0">
+                <a:solidFill>
+                  <a:schemeClr val="bg1"/>
+                </a:solidFill>
+              </a:rPr>
+              <a:t> new Error(`</a:t>
+            </a:r>
+            <a:r>
+              <a:rPr lang="es-ES" sz="1600" dirty="0" err="1">
+                <a:solidFill>
+                  <a:schemeClr val="bg1"/>
+                </a:solidFill>
+              </a:rPr>
+              <a:t>Asset</a:t>
+            </a:r>
+            <a:r>
+              <a:rPr lang="es-ES" sz="1600" dirty="0">
+                <a:solidFill>
+                  <a:schemeClr val="bg1"/>
+                </a:solidFill>
+              </a:rPr>
+              <a:t> ${id} </a:t>
+            </a:r>
+            <a:r>
+              <a:rPr lang="es-ES" sz="1600" dirty="0" err="1">
+                <a:solidFill>
+                  <a:schemeClr val="bg1"/>
+                </a:solidFill>
+              </a:rPr>
+              <a:t>does</a:t>
+            </a:r>
+            <a:r>
+              <a:rPr lang="es-ES" sz="1600" dirty="0">
+                <a:solidFill>
+                  <a:schemeClr val="bg1"/>
+                </a:solidFill>
+              </a:rPr>
+              <a:t> </a:t>
+            </a:r>
+            <a:r>
+              <a:rPr lang="es-ES" sz="1600" dirty="0" err="1">
+                <a:solidFill>
+                  <a:schemeClr val="bg1"/>
+                </a:solidFill>
+              </a:rPr>
+              <a:t>not</a:t>
+            </a:r>
+            <a:r>
+              <a:rPr lang="es-ES" sz="1600" dirty="0">
+                <a:solidFill>
+                  <a:schemeClr val="bg1"/>
+                </a:solidFill>
+              </a:rPr>
+              <a:t> </a:t>
+            </a:r>
+            <a:r>
+              <a:rPr lang="es-ES" sz="1600" dirty="0" err="1">
+                <a:solidFill>
+                  <a:schemeClr val="bg1"/>
+                </a:solidFill>
+              </a:rPr>
+              <a:t>exist</a:t>
+            </a:r>
+            <a:r>
+              <a:rPr lang="es-ES" sz="1600" dirty="0">
+                <a:solidFill>
+                  <a:schemeClr val="bg1"/>
+                </a:solidFill>
+              </a:rPr>
+              <a:t>`);</a:t>
+            </a:r>
+            <a:br>
+              <a:rPr lang="es-ES" sz="1600" dirty="0">
+                <a:solidFill>
+                  <a:schemeClr val="bg1"/>
+                </a:solidFill>
+              </a:rPr>
+            </a:br>
+            <a:r>
+              <a:rPr lang="es-ES" sz="1600" dirty="0">
+                <a:solidFill>
+                  <a:schemeClr val="bg1"/>
+                </a:solidFill>
+              </a:rPr>
               <a:t>        }</a:t>
             </a:r>
-            <a:br/>
-            <a:r>
-              <a:t>        return assetJSON.toString();</a:t>
-            </a:r>
-            <a:br/>
-            <a:r>
+            <a:br>
+              <a:rPr lang="es-ES" sz="1600" dirty="0">
+                <a:solidFill>
+                  <a:schemeClr val="bg1"/>
+                </a:solidFill>
+              </a:rPr>
+            </a:br>
+            <a:r>
+              <a:rPr lang="es-ES" sz="1600" dirty="0">
+                <a:solidFill>
+                  <a:schemeClr val="bg1"/>
+                </a:solidFill>
+              </a:rPr>
+              <a:t>        </a:t>
+            </a:r>
+            <a:r>
+              <a:rPr lang="es-ES" sz="1600" dirty="0" err="1">
+                <a:solidFill>
+                  <a:schemeClr val="bg1"/>
+                </a:solidFill>
+              </a:rPr>
+              <a:t>return</a:t>
+            </a:r>
+            <a:r>
+              <a:rPr lang="es-ES" sz="1600" dirty="0">
+                <a:solidFill>
+                  <a:schemeClr val="bg1"/>
+                </a:solidFill>
+              </a:rPr>
+              <a:t> </a:t>
+            </a:r>
+            <a:r>
+              <a:rPr lang="es-ES" sz="1600" dirty="0" err="1">
+                <a:solidFill>
+                  <a:schemeClr val="bg1"/>
+                </a:solidFill>
+              </a:rPr>
+              <a:t>assetJSON.toString</a:t>
+            </a:r>
+            <a:r>
+              <a:rPr lang="es-ES" sz="1600" dirty="0">
+                <a:solidFill>
+                  <a:schemeClr val="bg1"/>
+                </a:solidFill>
+              </a:rPr>
+              <a:t>();</a:t>
+            </a:r>
+            <a:br>
+              <a:rPr lang="es-ES" sz="1600" dirty="0">
+                <a:solidFill>
+                  <a:schemeClr val="bg1"/>
+                </a:solidFill>
+              </a:rPr>
+            </a:br>
+            <a:r>
+              <a:rPr lang="es-ES" sz="1600" dirty="0">
+                <a:solidFill>
+                  <a:schemeClr val="bg1"/>
+                </a:solidFill>
+              </a:rPr>
               <a:t>    }</a:t>
             </a:r>
-            <a:br/>
-            <a:r>
+            <a:br>
+              <a:rPr lang="es-ES" sz="1600" dirty="0">
+                <a:solidFill>
+                  <a:schemeClr val="bg1"/>
+                </a:solidFill>
+              </a:rPr>
+            </a:br>
+            <a:r>
+              <a:rPr lang="es-ES" sz="1600" dirty="0">
+                <a:solidFill>
+                  <a:schemeClr val="bg1"/>
+                </a:solidFill>
+              </a:rPr>
               <a:t>}</a:t>
             </a:r>
-            <a:br/>
-            <a:br/>
-            <a:r>
-              <a:t>module.exports = AssetContract;</a:t>
-            </a:r>
+            <a:br>
+              <a:rPr lang="es-ES" sz="1600" dirty="0">
+                <a:solidFill>
+                  <a:schemeClr val="bg1"/>
+                </a:solidFill>
+              </a:rPr>
+            </a:br>
+            <a:br>
+              <a:rPr lang="es-ES" sz="1600" dirty="0">
+                <a:solidFill>
+                  <a:schemeClr val="bg1"/>
+                </a:solidFill>
+              </a:rPr>
+            </a:br>
+            <a:r>
+              <a:rPr lang="es-ES" sz="1600" dirty="0" err="1">
+                <a:solidFill>
+                  <a:schemeClr val="bg1"/>
+                </a:solidFill>
+              </a:rPr>
+              <a:t>module.exports</a:t>
+            </a:r>
+            <a:r>
+              <a:rPr lang="es-ES" sz="1600" dirty="0">
+                <a:solidFill>
+                  <a:schemeClr val="bg1"/>
+                </a:solidFill>
+              </a:rPr>
+              <a:t> = </a:t>
+            </a:r>
+            <a:r>
+              <a:rPr lang="es-ES" sz="1600" dirty="0" err="1">
+                <a:solidFill>
+                  <a:schemeClr val="bg1"/>
+                </a:solidFill>
+              </a:rPr>
+              <a:t>AssetContract</a:t>
+            </a:r>
+            <a:endParaRPr lang="es-ES" sz="1600" dirty="0"/>
+          </a:p>
+        </p:txBody>
+      </p:sp>
+      <p:sp>
+        <p:nvSpPr>
+          <p:cNvPr id="11" name="Rectángulo 10">
+            <a:extLst>
+              <a:ext uri="{FF2B5EF4-FFF2-40B4-BE49-F238E27FC236}">
+                <a16:creationId xmlns:a16="http://schemas.microsoft.com/office/drawing/2014/main" id="{79B00DC3-DFAF-8CCA-CA7B-4686CC1B635F}"/>
+              </a:ext>
+            </a:extLst>
+          </p:cNvPr>
+          <p:cNvSpPr/>
+          <p:nvPr/>
+        </p:nvSpPr>
+        <p:spPr>
+          <a:xfrm>
+            <a:off x="5596798" y="1417320"/>
+            <a:ext cx="45719" cy="5120640"/>
+          </a:xfrm>
+          <a:prstGeom prst="rect">
+            <a:avLst/>
+          </a:prstGeom>
+        </p:spPr>
+        <p:style>
+          <a:lnRef idx="1">
+            <a:schemeClr val="accent1"/>
+          </a:lnRef>
+          <a:fillRef idx="3">
+            <a:schemeClr val="accent1"/>
+          </a:fillRef>
+          <a:effectRef idx="2">
+            <a:schemeClr val="accent1"/>
+          </a:effectRef>
+          <a:fontRef idx="minor">
+            <a:schemeClr val="lt1"/>
+          </a:fontRef>
+        </p:style>
+        <p:txBody>
+          <a:bodyPr rtlCol="0" anchor="ctr"/>
+          <a:lstStyle/>
+          <a:p>
+            <a:pPr algn="ctr"/>
+            <a:endParaRPr lang="es-ES"/>
           </a:p>
         </p:txBody>
       </p:sp>

--- a/docs/slides/Modulo 4/dia_2.pptx
+++ b/docs/slides/Modulo 4/dia_2.pptx
@@ -3785,7 +3785,7 @@
               </a:defRPr>
             </a:pPr>
             <a:r>
-              <a:t>GO</a:t>
+              <a:t>NODE.JS</a:t>
             </a:r>
           </a:p>
         </p:txBody>
@@ -3854,7 +3854,8 @@
           <a:bodyPr wrap="square"/>
           <a:lstStyle/>
           <a:p>
-            <a:br>
+            <a:pPr/>
+            <a:r>
               <a:rPr sz="1600" dirty="0">
                 <a:solidFill>
                   <a:schemeClr val="bg1">
@@ -3862,7 +3863,11 @@
                   </a:schemeClr>
                 </a:solidFill>
               </a:rPr>
-            </a:br>
+              <a:t>// Crear una clave compuesta para un activo</a:t>
+            </a:r>
+          </a:p>
+          <a:p>
+            <a:pPr/>
             <a:r>
               <a:rPr sz="1600" dirty="0">
                 <a:solidFill>
@@ -3871,18 +3876,11 @@
                   </a:schemeClr>
                 </a:solidFill>
               </a:rPr>
-              <a:t>// Crear </a:t>
-            </a:r>
-            <a:r>
-              <a:rPr sz="1600" dirty="0" err="1">
-                <a:solidFill>
-                  <a:schemeClr val="bg1">
-                    <a:lumMod val="95000"/>
-                  </a:schemeClr>
-                </a:solidFill>
-              </a:rPr>
-              <a:t>una</a:t>
-            </a:r>
+              <a:t>async CreateAsset(ctx, owner, assetType, id, value) {</a:t>
+            </a:r>
+          </a:p>
+          <a:p>
+            <a:pPr/>
             <a:r>
               <a:rPr sz="1600" dirty="0">
                 <a:solidFill>
@@ -3891,18 +3889,11 @@
                   </a:schemeClr>
                 </a:solidFill>
               </a:rPr>
-              <a:t> clave </a:t>
-            </a:r>
-            <a:r>
-              <a:rPr sz="1600" dirty="0" err="1">
-                <a:solidFill>
-                  <a:schemeClr val="bg1">
-                    <a:lumMod val="95000"/>
-                  </a:schemeClr>
-                </a:solidFill>
-              </a:rPr>
-              <a:t>compuesta</a:t>
-            </a:r>
+              <a:t>    // Clave compuesta: permite buscar por owner o por type</a:t>
+            </a:r>
+          </a:p>
+          <a:p>
+            <a:pPr/>
             <a:r>
               <a:rPr sz="1600" dirty="0">
                 <a:solidFill>
@@ -3911,19 +3902,12 @@
                   </a:schemeClr>
                 </a:solidFill>
               </a:rPr>
-              <a:t> para un </a:t>
-            </a:r>
-            <a:r>
-              <a:rPr sz="1600" dirty="0" err="1">
-                <a:solidFill>
-                  <a:schemeClr val="bg1">
-                    <a:lumMod val="95000"/>
-                  </a:schemeClr>
-                </a:solidFill>
-              </a:rPr>
-              <a:t>activo</a:t>
-            </a:r>
-            <a:br>
+              <a:t>    const key = ctx.stub.createCompositeKey('asset',</a:t>
+            </a:r>
+          </a:p>
+          <a:p>
+            <a:pPr/>
+            <a:r>
               <a:rPr sz="1600" dirty="0">
                 <a:solidFill>
                   <a:schemeClr val="bg1">
@@ -3931,17 +3915,11 @@
                   </a:schemeClr>
                 </a:solidFill>
               </a:rPr>
-            </a:br>
-            <a:r>
-              <a:rPr sz="1600" dirty="0" err="1">
-                <a:solidFill>
-                  <a:schemeClr val="bg1">
-                    <a:lumMod val="95000"/>
-                  </a:schemeClr>
-                </a:solidFill>
-              </a:rPr>
-              <a:t>func</a:t>
-            </a:r>
+              <a:t>        [owner, assetType, id]);</a:t>
+            </a:r>
+          </a:p>
+          <a:p>
+            <a:pPr/>
             <a:r>
               <a:rPr sz="1600" dirty="0">
                 <a:solidFill>
@@ -3950,18 +3928,11 @@
                   </a:schemeClr>
                 </a:solidFill>
               </a:rPr>
-              <a:t> (s *</a:t>
-            </a:r>
-            <a:r>
-              <a:rPr sz="1600" dirty="0" err="1">
-                <a:solidFill>
-                  <a:schemeClr val="bg1">
-                    <a:lumMod val="95000"/>
-                  </a:schemeClr>
-                </a:solidFill>
-              </a:rPr>
-              <a:t>SmartContract</a:t>
-            </a:r>
+              <a:t/>
+            </a:r>
+          </a:p>
+          <a:p>
+            <a:pPr/>
             <a:r>
               <a:rPr sz="1600" dirty="0">
                 <a:solidFill>
@@ -3970,18 +3941,11 @@
                   </a:schemeClr>
                 </a:solidFill>
               </a:rPr>
-              <a:t>) </a:t>
-            </a:r>
-            <a:r>
-              <a:rPr sz="1600" dirty="0" err="1">
-                <a:solidFill>
-                  <a:schemeClr val="bg1">
-                    <a:lumMod val="95000"/>
-                  </a:schemeClr>
-                </a:solidFill>
-              </a:rPr>
-              <a:t>CreateAsset</a:t>
-            </a:r>
+              <a:t>    const asset = { ID: id, Owner: owner,</a:t>
+            </a:r>
+          </a:p>
+          <a:p>
+            <a:pPr/>
             <a:r>
               <a:rPr sz="1600" dirty="0">
                 <a:solidFill>
@@ -3990,18 +3954,11 @@
                   </a:schemeClr>
                 </a:solidFill>
               </a:rPr>
-              <a:t>(</a:t>
-            </a:r>
-            <a:r>
-              <a:rPr sz="1600" dirty="0" err="1">
-                <a:solidFill>
-                  <a:schemeClr val="bg1">
-                    <a:lumMod val="95000"/>
-                  </a:schemeClr>
-                </a:solidFill>
-              </a:rPr>
-              <a:t>ctx</a:t>
-            </a:r>
+              <a:t>                    Type: assetType, Value: value };</a:t>
+            </a:r>
+          </a:p>
+          <a:p>
+            <a:pPr/>
             <a:r>
               <a:rPr sz="1600" dirty="0">
                 <a:solidFill>
@@ -4010,18 +3967,11 @@
                   </a:schemeClr>
                 </a:solidFill>
               </a:rPr>
-              <a:t> </a:t>
-            </a:r>
-            <a:r>
-              <a:rPr sz="1600" dirty="0" err="1">
-                <a:solidFill>
-                  <a:schemeClr val="bg1">
-                    <a:lumMod val="95000"/>
-                  </a:schemeClr>
-                </a:solidFill>
-              </a:rPr>
-              <a:t>contractapi.TransactionContextInterface</a:t>
-            </a:r>
+              <a:t/>
+            </a:r>
+          </a:p>
+          <a:p>
+            <a:pPr/>
             <a:r>
               <a:rPr sz="1600" dirty="0">
                 <a:solidFill>
@@ -4030,9 +3980,12 @@
                   </a:schemeClr>
                 </a:solidFill>
               </a:rPr>
-              <a:t>,</a:t>
-            </a:r>
-            <a:br>
+              <a:t>    await ctx.stub.putState(key,</a:t>
+            </a:r>
+          </a:p>
+          <a:p>
+            <a:pPr/>
+            <a:r>
               <a:rPr sz="1600" dirty="0">
                 <a:solidFill>
                   <a:schemeClr val="bg1">
@@ -4040,7 +3993,11 @@
                   </a:schemeClr>
                 </a:solidFill>
               </a:rPr>
-            </a:br>
+              <a:t>        Buffer.from(JSON.stringify(asset)));</a:t>
+            </a:r>
+          </a:p>
+          <a:p>
+            <a:pPr/>
             <a:r>
               <a:rPr sz="1600" dirty="0">
                 <a:solidFill>
@@ -4049,532 +4006,8 @@
                   </a:schemeClr>
                 </a:solidFill>
               </a:rPr>
-              <a:t>    owner string, </a:t>
-            </a:r>
-            <a:r>
-              <a:rPr sz="1600" dirty="0" err="1">
-                <a:solidFill>
-                  <a:schemeClr val="bg1">
-                    <a:lumMod val="95000"/>
-                  </a:schemeClr>
-                </a:solidFill>
-              </a:rPr>
-              <a:t>assetType</a:t>
-            </a:r>
-            <a:r>
-              <a:rPr sz="1600" dirty="0">
-                <a:solidFill>
-                  <a:schemeClr val="bg1">
-                    <a:lumMod val="95000"/>
-                  </a:schemeClr>
-                </a:solidFill>
-              </a:rPr>
-              <a:t> string, id string, value int) error {</a:t>
-            </a:r>
-            <a:br>
-              <a:rPr sz="1600" dirty="0">
-                <a:solidFill>
-                  <a:schemeClr val="bg1">
-                    <a:lumMod val="95000"/>
-                  </a:schemeClr>
-                </a:solidFill>
-              </a:rPr>
-            </a:br>
-            <a:br>
-              <a:rPr sz="1600" dirty="0">
-                <a:solidFill>
-                  <a:schemeClr val="bg1">
-                    <a:lumMod val="95000"/>
-                  </a:schemeClr>
-                </a:solidFill>
-              </a:rPr>
-            </a:br>
-            <a:r>
-              <a:rPr sz="1600" dirty="0">
-                <a:solidFill>
-                  <a:schemeClr val="bg1">
-                    <a:lumMod val="95000"/>
-                  </a:schemeClr>
-                </a:solidFill>
-              </a:rPr>
-              <a:t>    // Clave </a:t>
-            </a:r>
-            <a:r>
-              <a:rPr sz="1600" dirty="0" err="1">
-                <a:solidFill>
-                  <a:schemeClr val="bg1">
-                    <a:lumMod val="95000"/>
-                  </a:schemeClr>
-                </a:solidFill>
-              </a:rPr>
-              <a:t>compuesta</a:t>
-            </a:r>
-            <a:r>
-              <a:rPr sz="1600" dirty="0">
-                <a:solidFill>
-                  <a:schemeClr val="bg1">
-                    <a:lumMod val="95000"/>
-                  </a:schemeClr>
-                </a:solidFill>
-              </a:rPr>
-              <a:t>: </a:t>
-            </a:r>
-            <a:r>
-              <a:rPr sz="1600" dirty="0" err="1">
-                <a:solidFill>
-                  <a:schemeClr val="bg1">
-                    <a:lumMod val="95000"/>
-                  </a:schemeClr>
-                </a:solidFill>
-              </a:rPr>
-              <a:t>permite</a:t>
-            </a:r>
-            <a:r>
-              <a:rPr sz="1600" dirty="0">
-                <a:solidFill>
-                  <a:schemeClr val="bg1">
-                    <a:lumMod val="95000"/>
-                  </a:schemeClr>
-                </a:solidFill>
-              </a:rPr>
-              <a:t> </a:t>
-            </a:r>
-            <a:r>
-              <a:rPr sz="1600" dirty="0" err="1">
-                <a:solidFill>
-                  <a:schemeClr val="bg1">
-                    <a:lumMod val="95000"/>
-                  </a:schemeClr>
-                </a:solidFill>
-              </a:rPr>
-              <a:t>buscar</a:t>
-            </a:r>
-            <a:r>
-              <a:rPr sz="1600" dirty="0">
-                <a:solidFill>
-                  <a:schemeClr val="bg1">
-                    <a:lumMod val="95000"/>
-                  </a:schemeClr>
-                </a:solidFill>
-              </a:rPr>
-              <a:t> </a:t>
-            </a:r>
-            <a:r>
-              <a:rPr sz="1600" dirty="0" err="1">
-                <a:solidFill>
-                  <a:schemeClr val="bg1">
-                    <a:lumMod val="95000"/>
-                  </a:schemeClr>
-                </a:solidFill>
-              </a:rPr>
-              <a:t>por</a:t>
-            </a:r>
-            <a:r>
-              <a:rPr sz="1600" dirty="0">
-                <a:solidFill>
-                  <a:schemeClr val="bg1">
-                    <a:lumMod val="95000"/>
-                  </a:schemeClr>
-                </a:solidFill>
-              </a:rPr>
-              <a:t> owner o </a:t>
-            </a:r>
-            <a:r>
-              <a:rPr sz="1600" dirty="0" err="1">
-                <a:solidFill>
-                  <a:schemeClr val="bg1">
-                    <a:lumMod val="95000"/>
-                  </a:schemeClr>
-                </a:solidFill>
-              </a:rPr>
-              <a:t>por</a:t>
-            </a:r>
-            <a:r>
-              <a:rPr sz="1600" dirty="0">
-                <a:solidFill>
-                  <a:schemeClr val="bg1">
-                    <a:lumMod val="95000"/>
-                  </a:schemeClr>
-                </a:solidFill>
-              </a:rPr>
-              <a:t> type</a:t>
-            </a:r>
-            <a:br>
-              <a:rPr sz="1600" dirty="0">
-                <a:solidFill>
-                  <a:schemeClr val="bg1">
-                    <a:lumMod val="95000"/>
-                  </a:schemeClr>
-                </a:solidFill>
-              </a:rPr>
-            </a:br>
-            <a:r>
-              <a:rPr sz="1600" dirty="0">
-                <a:solidFill>
-                  <a:schemeClr val="bg1">
-                    <a:lumMod val="95000"/>
-                  </a:schemeClr>
-                </a:solidFill>
-              </a:rPr>
-              <a:t>    key, err := </a:t>
-            </a:r>
-            <a:r>
-              <a:rPr sz="1600" dirty="0" err="1">
-                <a:solidFill>
-                  <a:schemeClr val="bg1">
-                    <a:lumMod val="95000"/>
-                  </a:schemeClr>
-                </a:solidFill>
-              </a:rPr>
-              <a:t>ctx.GetStub</a:t>
-            </a:r>
-            <a:r>
-              <a:rPr sz="1600" dirty="0">
-                <a:solidFill>
-                  <a:schemeClr val="bg1">
-                    <a:lumMod val="95000"/>
-                  </a:schemeClr>
-                </a:solidFill>
-              </a:rPr>
-              <a:t>().</a:t>
-            </a:r>
-            <a:r>
-              <a:rPr sz="1600" dirty="0" err="1">
-                <a:solidFill>
-                  <a:schemeClr val="bg1">
-                    <a:lumMod val="95000"/>
-                  </a:schemeClr>
-                </a:solidFill>
-              </a:rPr>
-              <a:t>CreateCompositeKey</a:t>
-            </a:r>
-            <a:r>
-              <a:rPr sz="1600" dirty="0">
-                <a:solidFill>
-                  <a:schemeClr val="bg1">
-                    <a:lumMod val="95000"/>
-                  </a:schemeClr>
-                </a:solidFill>
-              </a:rPr>
-              <a:t>("asset",</a:t>
-            </a:r>
-            <a:br>
-              <a:rPr sz="1600" dirty="0">
-                <a:solidFill>
-                  <a:schemeClr val="bg1">
-                    <a:lumMod val="95000"/>
-                  </a:schemeClr>
-                </a:solidFill>
-              </a:rPr>
-            </a:br>
-            <a:r>
-              <a:rPr sz="1600" dirty="0">
-                <a:solidFill>
-                  <a:schemeClr val="bg1">
-                    <a:lumMod val="95000"/>
-                  </a:schemeClr>
-                </a:solidFill>
-              </a:rPr>
-              <a:t>        []string{owner, </a:t>
-            </a:r>
-            <a:r>
-              <a:rPr sz="1600" dirty="0" err="1">
-                <a:solidFill>
-                  <a:schemeClr val="bg1">
-                    <a:lumMod val="95000"/>
-                  </a:schemeClr>
-                </a:solidFill>
-              </a:rPr>
-              <a:t>assetType</a:t>
-            </a:r>
-            <a:r>
-              <a:rPr sz="1600" dirty="0">
-                <a:solidFill>
-                  <a:schemeClr val="bg1">
-                    <a:lumMod val="95000"/>
-                  </a:schemeClr>
-                </a:solidFill>
-              </a:rPr>
-              <a:t>, id})</a:t>
-            </a:r>
-            <a:br>
-              <a:rPr sz="1600" dirty="0">
-                <a:solidFill>
-                  <a:schemeClr val="bg1">
-                    <a:lumMod val="95000"/>
-                  </a:schemeClr>
-                </a:solidFill>
-              </a:rPr>
-            </a:br>
-            <a:r>
-              <a:rPr sz="1600" dirty="0">
-                <a:solidFill>
-                  <a:schemeClr val="bg1">
-                    <a:lumMod val="95000"/>
-                  </a:schemeClr>
-                </a:solidFill>
-              </a:rPr>
-              <a:t>    if err != nil {</a:t>
-            </a:r>
-            <a:br>
-              <a:rPr sz="1600" dirty="0">
-                <a:solidFill>
-                  <a:schemeClr val="bg1">
-                    <a:lumMod val="95000"/>
-                  </a:schemeClr>
-                </a:solidFill>
-              </a:rPr>
-            </a:br>
-            <a:r>
-              <a:rPr sz="1600" dirty="0">
-                <a:solidFill>
-                  <a:schemeClr val="bg1">
-                    <a:lumMod val="95000"/>
-                  </a:schemeClr>
-                </a:solidFill>
-              </a:rPr>
-              <a:t>        return err</a:t>
-            </a:r>
-            <a:br>
-              <a:rPr sz="1600" dirty="0">
-                <a:solidFill>
-                  <a:schemeClr val="bg1">
-                    <a:lumMod val="95000"/>
-                  </a:schemeClr>
-                </a:solidFill>
-              </a:rPr>
-            </a:br>
-            <a:r>
-              <a:rPr sz="1600" dirty="0">
-                <a:solidFill>
-                  <a:schemeClr val="bg1">
-                    <a:lumMod val="95000"/>
-                  </a:schemeClr>
-                </a:solidFill>
-              </a:rPr>
-              <a:t>    }</a:t>
-            </a:r>
-            <a:br>
-              <a:rPr sz="1600" dirty="0">
-                <a:solidFill>
-                  <a:schemeClr val="bg1">
-                    <a:lumMod val="95000"/>
-                  </a:schemeClr>
-                </a:solidFill>
-              </a:rPr>
-            </a:br>
-            <a:br>
-              <a:rPr sz="1600" dirty="0">
-                <a:solidFill>
-                  <a:schemeClr val="bg1">
-                    <a:lumMod val="95000"/>
-                  </a:schemeClr>
-                </a:solidFill>
-              </a:rPr>
-            </a:br>
-            <a:r>
-              <a:rPr sz="1600" dirty="0">
-                <a:solidFill>
-                  <a:schemeClr val="bg1">
-                    <a:lumMod val="95000"/>
-                  </a:schemeClr>
-                </a:solidFill>
-              </a:rPr>
-              <a:t>    asset := Asset{ID: id, Owner: owner, Type: </a:t>
-            </a:r>
-            <a:r>
-              <a:rPr sz="1600" dirty="0" err="1">
-                <a:solidFill>
-                  <a:schemeClr val="bg1">
-                    <a:lumMod val="95000"/>
-                  </a:schemeClr>
-                </a:solidFill>
-              </a:rPr>
-              <a:t>assetType</a:t>
-            </a:r>
-            <a:r>
-              <a:rPr sz="1600" dirty="0">
-                <a:solidFill>
-                  <a:schemeClr val="bg1">
-                    <a:lumMod val="95000"/>
-                  </a:schemeClr>
-                </a:solidFill>
-              </a:rPr>
-              <a:t>, Value: value}</a:t>
-            </a:r>
-            <a:br>
-              <a:rPr sz="1600" dirty="0">
-                <a:solidFill>
-                  <a:schemeClr val="bg1">
-                    <a:lumMod val="95000"/>
-                  </a:schemeClr>
-                </a:solidFill>
-              </a:rPr>
-            </a:br>
-            <a:r>
-              <a:rPr sz="1600" dirty="0">
-                <a:solidFill>
-                  <a:schemeClr val="bg1">
-                    <a:lumMod val="95000"/>
-                  </a:schemeClr>
-                </a:solidFill>
-              </a:rPr>
-              <a:t>    </a:t>
-            </a:r>
-            <a:r>
-              <a:rPr sz="1600" dirty="0" err="1">
-                <a:solidFill>
-                  <a:schemeClr val="bg1">
-                    <a:lumMod val="95000"/>
-                  </a:schemeClr>
-                </a:solidFill>
-              </a:rPr>
-              <a:t>assetJSON</a:t>
-            </a:r>
-            <a:r>
-              <a:rPr sz="1600" dirty="0">
-                <a:solidFill>
-                  <a:schemeClr val="bg1">
-                    <a:lumMod val="95000"/>
-                  </a:schemeClr>
-                </a:solidFill>
-              </a:rPr>
-              <a:t>, _ := </a:t>
-            </a:r>
-            <a:r>
-              <a:rPr sz="1600" dirty="0" err="1">
-                <a:solidFill>
-                  <a:schemeClr val="bg1">
-                    <a:lumMod val="95000"/>
-                  </a:schemeClr>
-                </a:solidFill>
-              </a:rPr>
-              <a:t>json.Marshal</a:t>
-            </a:r>
-            <a:r>
-              <a:rPr sz="1600" dirty="0">
-                <a:solidFill>
-                  <a:schemeClr val="bg1">
-                    <a:lumMod val="95000"/>
-                  </a:schemeClr>
-                </a:solidFill>
-              </a:rPr>
-              <a:t>(asset)</a:t>
-            </a:r>
-            <a:br>
-              <a:rPr sz="1600" dirty="0">
-                <a:solidFill>
-                  <a:schemeClr val="bg1">
-                    <a:lumMod val="95000"/>
-                  </a:schemeClr>
-                </a:solidFill>
-              </a:rPr>
-            </a:br>
-            <a:r>
-              <a:rPr sz="1600" dirty="0">
-                <a:solidFill>
-                  <a:schemeClr val="bg1">
-                    <a:lumMod val="95000"/>
-                  </a:schemeClr>
-                </a:solidFill>
-              </a:rPr>
-              <a:t>    return </a:t>
-            </a:r>
-            <a:r>
-              <a:rPr sz="1600" dirty="0" err="1">
-                <a:solidFill>
-                  <a:schemeClr val="bg1">
-                    <a:lumMod val="95000"/>
-                  </a:schemeClr>
-                </a:solidFill>
-              </a:rPr>
-              <a:t>ctx.GetStub</a:t>
-            </a:r>
-            <a:r>
-              <a:rPr sz="1600" dirty="0">
-                <a:solidFill>
-                  <a:schemeClr val="bg1">
-                    <a:lumMod val="95000"/>
-                  </a:schemeClr>
-                </a:solidFill>
-              </a:rPr>
-              <a:t>().</a:t>
-            </a:r>
-            <a:r>
-              <a:rPr sz="1600" dirty="0" err="1">
-                <a:solidFill>
-                  <a:schemeClr val="bg1">
-                    <a:lumMod val="95000"/>
-                  </a:schemeClr>
-                </a:solidFill>
-              </a:rPr>
-              <a:t>PutState</a:t>
-            </a:r>
-            <a:r>
-              <a:rPr sz="1600" dirty="0">
-                <a:solidFill>
-                  <a:schemeClr val="bg1">
-                    <a:lumMod val="95000"/>
-                  </a:schemeClr>
-                </a:solidFill>
-              </a:rPr>
-              <a:t>(key, </a:t>
-            </a:r>
-            <a:r>
-              <a:rPr sz="1600" dirty="0" err="1">
-                <a:solidFill>
-                  <a:schemeClr val="bg1">
-                    <a:lumMod val="95000"/>
-                  </a:schemeClr>
-                </a:solidFill>
-              </a:rPr>
-              <a:t>assetJSON</a:t>
-            </a:r>
-            <a:r>
-              <a:rPr sz="1600" dirty="0">
-                <a:solidFill>
-                  <a:schemeClr val="bg1">
-                    <a:lumMod val="95000"/>
-                  </a:schemeClr>
-                </a:solidFill>
-              </a:rPr>
-              <a:t>)</a:t>
-            </a:r>
-            <a:br>
-              <a:rPr sz="1600" dirty="0">
-                <a:solidFill>
-                  <a:schemeClr val="bg1">
-                    <a:lumMod val="95000"/>
-                  </a:schemeClr>
-                </a:solidFill>
-              </a:rPr>
-            </a:br>
-            <a:r>
-              <a:rPr sz="1600" dirty="0">
-                <a:solidFill>
-                  <a:schemeClr val="bg1">
-                    <a:lumMod val="95000"/>
-                  </a:schemeClr>
-                </a:solidFill>
-              </a:rPr>
               <a:t>}</a:t>
             </a:r>
-            <a:br>
-              <a:rPr sz="1600" dirty="0">
-                <a:solidFill>
-                  <a:schemeClr val="bg1">
-                    <a:lumMod val="95000"/>
-                  </a:schemeClr>
-                </a:solidFill>
-              </a:rPr>
-            </a:br>
-            <a:endParaRPr sz="1600" dirty="0">
-              <a:solidFill>
-                <a:schemeClr val="bg1">
-                  <a:lumMod val="95000"/>
-                </a:schemeClr>
-              </a:solidFill>
-            </a:endParaRPr>
           </a:p>
         </p:txBody>
       </p:sp>
@@ -4606,7 +4039,8 @@
           </a:bodyPr>
           <a:lstStyle/>
           <a:p>
-            <a:br>
+            <a:pPr/>
+            <a:r>
               <a:rPr lang="es-ES" sz="1600" dirty="0">
                 <a:solidFill>
                   <a:schemeClr val="bg1">
@@ -4614,7 +4048,11 @@
                   </a:schemeClr>
                 </a:solidFill>
               </a:rPr>
-            </a:br>
+              <a:t>// Buscar todos los activos de un propietario</a:t>
+            </a:r>
+          </a:p>
+          <a:p>
+            <a:pPr/>
             <a:r>
               <a:rPr lang="es-ES" sz="1600" dirty="0">
                 <a:solidFill>
@@ -4623,9 +4061,12 @@
                   </a:schemeClr>
                 </a:solidFill>
               </a:rPr>
-              <a:t>// Buscar todos los activos de un propietario</a:t>
-            </a:r>
-            <a:br>
+              <a:t>async GetAssetsByOwner(ctx, owner) {</a:t>
+            </a:r>
+          </a:p>
+          <a:p>
+            <a:pPr/>
+            <a:r>
               <a:rPr lang="es-ES" sz="1600" dirty="0">
                 <a:solidFill>
                   <a:schemeClr val="bg1">
@@ -4633,17 +4074,11 @@
                   </a:schemeClr>
                 </a:solidFill>
               </a:rPr>
-            </a:br>
-            <a:r>
-              <a:rPr lang="es-ES" sz="1600" dirty="0" err="1">
-                <a:solidFill>
-                  <a:schemeClr val="bg1">
-                    <a:lumMod val="95000"/>
-                  </a:schemeClr>
-                </a:solidFill>
-              </a:rPr>
-              <a:t>func</a:t>
-            </a:r>
+              <a:t>    const iterator = await ctx.stub</a:t>
+            </a:r>
+          </a:p>
+          <a:p>
+            <a:pPr/>
             <a:r>
               <a:rPr lang="es-ES" sz="1600" dirty="0">
                 <a:solidFill>
@@ -4652,18 +4087,11 @@
                   </a:schemeClr>
                 </a:solidFill>
               </a:rPr>
-              <a:t> (s *</a:t>
-            </a:r>
-            <a:r>
-              <a:rPr lang="es-ES" sz="1600" dirty="0" err="1">
-                <a:solidFill>
-                  <a:schemeClr val="bg1">
-                    <a:lumMod val="95000"/>
-                  </a:schemeClr>
-                </a:solidFill>
-              </a:rPr>
-              <a:t>SmartContract</a:t>
-            </a:r>
+              <a:t>        .getStateByPartialCompositeKey('asset', [owner]);</a:t>
+            </a:r>
+          </a:p>
+          <a:p>
+            <a:pPr/>
             <a:r>
               <a:rPr lang="es-ES" sz="1600" dirty="0">
                 <a:solidFill>
@@ -4672,18 +4100,11 @@
                   </a:schemeClr>
                 </a:solidFill>
               </a:rPr>
-              <a:t>) </a:t>
-            </a:r>
-            <a:r>
-              <a:rPr lang="es-ES" sz="1600" dirty="0" err="1">
-                <a:solidFill>
-                  <a:schemeClr val="bg1">
-                    <a:lumMod val="95000"/>
-                  </a:schemeClr>
-                </a:solidFill>
-              </a:rPr>
-              <a:t>GetAssetsByOwner</a:t>
-            </a:r>
+              <a:t>    // ... iterar sobre resultados</a:t>
+            </a:r>
+          </a:p>
+          <a:p>
+            <a:pPr/>
             <a:r>
               <a:rPr lang="es-ES" sz="1600" dirty="0">
                 <a:solidFill>
@@ -4692,353 +4113,8 @@
                   </a:schemeClr>
                 </a:solidFill>
               </a:rPr>
-              <a:t>(</a:t>
-            </a:r>
-            <a:r>
-              <a:rPr lang="es-ES" sz="1600" dirty="0" err="1">
-                <a:solidFill>
-                  <a:schemeClr val="bg1">
-                    <a:lumMod val="95000"/>
-                  </a:schemeClr>
-                </a:solidFill>
-              </a:rPr>
-              <a:t>ctx</a:t>
-            </a:r>
-            <a:r>
-              <a:rPr lang="es-ES" sz="1600" dirty="0">
-                <a:solidFill>
-                  <a:schemeClr val="bg1">
-                    <a:lumMod val="95000"/>
-                  </a:schemeClr>
-                </a:solidFill>
-              </a:rPr>
-              <a:t> </a:t>
-            </a:r>
-            <a:r>
-              <a:rPr lang="es-ES" sz="1600" dirty="0" err="1">
-                <a:solidFill>
-                  <a:schemeClr val="bg1">
-                    <a:lumMod val="95000"/>
-                  </a:schemeClr>
-                </a:solidFill>
-              </a:rPr>
-              <a:t>contractapi.TransactionContextInterface</a:t>
-            </a:r>
-            <a:r>
-              <a:rPr lang="es-ES" sz="1600" dirty="0">
-                <a:solidFill>
-                  <a:schemeClr val="bg1">
-                    <a:lumMod val="95000"/>
-                  </a:schemeClr>
-                </a:solidFill>
-              </a:rPr>
-              <a:t>,</a:t>
-            </a:r>
-            <a:br>
-              <a:rPr lang="es-ES" sz="1600" dirty="0">
-                <a:solidFill>
-                  <a:schemeClr val="bg1">
-                    <a:lumMod val="95000"/>
-                  </a:schemeClr>
-                </a:solidFill>
-              </a:rPr>
-            </a:br>
-            <a:r>
-              <a:rPr lang="es-ES" sz="1600" dirty="0">
-                <a:solidFill>
-                  <a:schemeClr val="bg1">
-                    <a:lumMod val="95000"/>
-                  </a:schemeClr>
-                </a:solidFill>
-              </a:rPr>
-              <a:t>    </a:t>
-            </a:r>
-            <a:r>
-              <a:rPr lang="es-ES" sz="1600" dirty="0" err="1">
-                <a:solidFill>
-                  <a:schemeClr val="bg1">
-                    <a:lumMod val="95000"/>
-                  </a:schemeClr>
-                </a:solidFill>
-              </a:rPr>
-              <a:t>owner</a:t>
-            </a:r>
-            <a:r>
-              <a:rPr lang="es-ES" sz="1600" dirty="0">
-                <a:solidFill>
-                  <a:schemeClr val="bg1">
-                    <a:lumMod val="95000"/>
-                  </a:schemeClr>
-                </a:solidFill>
-              </a:rPr>
-              <a:t> </a:t>
-            </a:r>
-            <a:r>
-              <a:rPr lang="es-ES" sz="1600" dirty="0" err="1">
-                <a:solidFill>
-                  <a:schemeClr val="bg1">
-                    <a:lumMod val="95000"/>
-                  </a:schemeClr>
-                </a:solidFill>
-              </a:rPr>
-              <a:t>string</a:t>
-            </a:r>
-            <a:r>
-              <a:rPr lang="es-ES" sz="1600" dirty="0">
-                <a:solidFill>
-                  <a:schemeClr val="bg1">
-                    <a:lumMod val="95000"/>
-                  </a:schemeClr>
-                </a:solidFill>
-              </a:rPr>
-              <a:t>) ([]*</a:t>
-            </a:r>
-            <a:r>
-              <a:rPr lang="es-ES" sz="1600" dirty="0" err="1">
-                <a:solidFill>
-                  <a:schemeClr val="bg1">
-                    <a:lumMod val="95000"/>
-                  </a:schemeClr>
-                </a:solidFill>
-              </a:rPr>
-              <a:t>Asset</a:t>
-            </a:r>
-            <a:r>
-              <a:rPr lang="es-ES" sz="1600" dirty="0">
-                <a:solidFill>
-                  <a:schemeClr val="bg1">
-                    <a:lumMod val="95000"/>
-                  </a:schemeClr>
-                </a:solidFill>
-              </a:rPr>
-              <a:t>, error) {</a:t>
-            </a:r>
-            <a:br>
-              <a:rPr lang="es-ES" sz="1600" dirty="0">
-                <a:solidFill>
-                  <a:schemeClr val="bg1">
-                    <a:lumMod val="95000"/>
-                  </a:schemeClr>
-                </a:solidFill>
-              </a:rPr>
-            </a:br>
-            <a:br>
-              <a:rPr lang="es-ES" sz="1600" dirty="0">
-                <a:solidFill>
-                  <a:schemeClr val="bg1">
-                    <a:lumMod val="95000"/>
-                  </a:schemeClr>
-                </a:solidFill>
-              </a:rPr>
-            </a:br>
-            <a:r>
-              <a:rPr lang="es-ES" sz="1600" dirty="0">
-                <a:solidFill>
-                  <a:schemeClr val="bg1">
-                    <a:lumMod val="95000"/>
-                  </a:schemeClr>
-                </a:solidFill>
-              </a:rPr>
-              <a:t>    </a:t>
-            </a:r>
-            <a:r>
-              <a:rPr lang="es-ES" sz="1600" dirty="0" err="1">
-                <a:solidFill>
-                  <a:schemeClr val="bg1">
-                    <a:lumMod val="95000"/>
-                  </a:schemeClr>
-                </a:solidFill>
-              </a:rPr>
-              <a:t>iterator</a:t>
-            </a:r>
-            <a:r>
-              <a:rPr lang="es-ES" sz="1600" dirty="0">
-                <a:solidFill>
-                  <a:schemeClr val="bg1">
-                    <a:lumMod val="95000"/>
-                  </a:schemeClr>
-                </a:solidFill>
-              </a:rPr>
-              <a:t>, </a:t>
-            </a:r>
-            <a:r>
-              <a:rPr lang="es-ES" sz="1600" dirty="0" err="1">
-                <a:solidFill>
-                  <a:schemeClr val="bg1">
-                    <a:lumMod val="95000"/>
-                  </a:schemeClr>
-                </a:solidFill>
-              </a:rPr>
-              <a:t>err</a:t>
-            </a:r>
-            <a:r>
-              <a:rPr lang="es-ES" sz="1600" dirty="0">
-                <a:solidFill>
-                  <a:schemeClr val="bg1">
-                    <a:lumMod val="95000"/>
-                  </a:schemeClr>
-                </a:solidFill>
-              </a:rPr>
-              <a:t> := </a:t>
-            </a:r>
-            <a:r>
-              <a:rPr lang="es-ES" sz="1600" dirty="0" err="1">
-                <a:solidFill>
-                  <a:schemeClr val="bg1">
-                    <a:lumMod val="95000"/>
-                  </a:schemeClr>
-                </a:solidFill>
-              </a:rPr>
-              <a:t>ctx.GetStub</a:t>
-            </a:r>
-            <a:r>
-              <a:rPr lang="es-ES" sz="1600" dirty="0">
-                <a:solidFill>
-                  <a:schemeClr val="bg1">
-                    <a:lumMod val="95000"/>
-                  </a:schemeClr>
-                </a:solidFill>
-              </a:rPr>
-              <a:t>().</a:t>
-            </a:r>
-            <a:r>
-              <a:rPr lang="es-ES" sz="1600" dirty="0" err="1">
-                <a:solidFill>
-                  <a:schemeClr val="bg1">
-                    <a:lumMod val="95000"/>
-                  </a:schemeClr>
-                </a:solidFill>
-              </a:rPr>
-              <a:t>GetStateByPartialCompositeKey</a:t>
-            </a:r>
-            <a:r>
-              <a:rPr lang="es-ES" sz="1600" dirty="0">
-                <a:solidFill>
-                  <a:schemeClr val="bg1">
-                    <a:lumMod val="95000"/>
-                  </a:schemeClr>
-                </a:solidFill>
-              </a:rPr>
-              <a:t>("</a:t>
-            </a:r>
-            <a:r>
-              <a:rPr lang="es-ES" sz="1600" dirty="0" err="1">
-                <a:solidFill>
-                  <a:schemeClr val="bg1">
-                    <a:lumMod val="95000"/>
-                  </a:schemeClr>
-                </a:solidFill>
-              </a:rPr>
-              <a:t>asset</a:t>
-            </a:r>
-            <a:r>
-              <a:rPr lang="es-ES" sz="1600" dirty="0">
-                <a:solidFill>
-                  <a:schemeClr val="bg1">
-                    <a:lumMod val="95000"/>
-                  </a:schemeClr>
-                </a:solidFill>
-              </a:rPr>
-              <a:t>",</a:t>
-            </a:r>
-            <a:br>
-              <a:rPr lang="es-ES" sz="1600" dirty="0">
-                <a:solidFill>
-                  <a:schemeClr val="bg1">
-                    <a:lumMod val="95000"/>
-                  </a:schemeClr>
-                </a:solidFill>
-              </a:rPr>
-            </a:br>
-            <a:r>
-              <a:rPr lang="es-ES" sz="1600" dirty="0">
-                <a:solidFill>
-                  <a:schemeClr val="bg1">
-                    <a:lumMod val="95000"/>
-                  </a:schemeClr>
-                </a:solidFill>
-              </a:rPr>
-              <a:t>        []</a:t>
-            </a:r>
-            <a:r>
-              <a:rPr lang="es-ES" sz="1600" dirty="0" err="1">
-                <a:solidFill>
-                  <a:schemeClr val="bg1">
-                    <a:lumMod val="95000"/>
-                  </a:schemeClr>
-                </a:solidFill>
-              </a:rPr>
-              <a:t>string</a:t>
-            </a:r>
-            <a:r>
-              <a:rPr lang="es-ES" sz="1600" dirty="0">
-                <a:solidFill>
-                  <a:schemeClr val="bg1">
-                    <a:lumMod val="95000"/>
-                  </a:schemeClr>
-                </a:solidFill>
-              </a:rPr>
-              <a:t>{</a:t>
-            </a:r>
-            <a:r>
-              <a:rPr lang="es-ES" sz="1600" dirty="0" err="1">
-                <a:solidFill>
-                  <a:schemeClr val="bg1">
-                    <a:lumMod val="95000"/>
-                  </a:schemeClr>
-                </a:solidFill>
-              </a:rPr>
-              <a:t>owner</a:t>
-            </a:r>
-            <a:r>
-              <a:rPr lang="es-ES" sz="1600" dirty="0">
-                <a:solidFill>
-                  <a:schemeClr val="bg1">
-                    <a:lumMod val="95000"/>
-                  </a:schemeClr>
-                </a:solidFill>
-              </a:rPr>
-              <a:t>})</a:t>
-            </a:r>
-            <a:br>
-              <a:rPr lang="es-ES" sz="1600" dirty="0">
-                <a:solidFill>
-                  <a:schemeClr val="bg1">
-                    <a:lumMod val="95000"/>
-                  </a:schemeClr>
-                </a:solidFill>
-              </a:rPr>
-            </a:br>
-            <a:r>
-              <a:rPr lang="es-ES" sz="1600" dirty="0">
-                <a:solidFill>
-                  <a:schemeClr val="bg1">
-                    <a:lumMod val="95000"/>
-                  </a:schemeClr>
-                </a:solidFill>
-              </a:rPr>
-              <a:t>    // ... iterar sobre resultados</a:t>
-            </a:r>
-            <a:br>
-              <a:rPr lang="es-ES" sz="1600" dirty="0">
-                <a:solidFill>
-                  <a:schemeClr val="bg1">
-                    <a:lumMod val="95000"/>
-                  </a:schemeClr>
-                </a:solidFill>
-              </a:rPr>
-            </a:br>
-            <a:r>
-              <a:rPr lang="es-ES" sz="1600" dirty="0">
-                <a:solidFill>
-                  <a:schemeClr val="bg1">
-                    <a:lumMod val="95000"/>
-                  </a:schemeClr>
-                </a:solidFill>
-              </a:rPr>
               <a:t>}</a:t>
             </a:r>
-            <a:endParaRPr lang="es-ES" sz="1600" dirty="0"/>
           </a:p>
         </p:txBody>
       </p:sp>
@@ -5610,7 +4686,7 @@
               </a:defRPr>
             </a:pPr>
             <a:r>
-              <a:t>GO</a:t>
+              <a:t>NODE.JS</a:t>
             </a:r>
           </a:p>
         </p:txBody>
@@ -5679,7 +4755,8 @@
           <a:bodyPr wrap="square"/>
           <a:lstStyle/>
           <a:p>
-            <a:br>
+            <a:pPr/>
+            <a:r>
               <a:rPr sz="1600" dirty="0">
                 <a:solidFill>
                   <a:schemeClr val="bg1">
@@ -5687,7 +4764,11 @@
                   </a:schemeClr>
                 </a:solidFill>
               </a:rPr>
-            </a:br>
+              <a:t>// Propiedad inmobiliaria (JSDoc describe los campos)</a:t>
+            </a:r>
+          </a:p>
+          <a:p>
+            <a:pPr/>
             <a:r>
               <a:rPr sz="1600" dirty="0">
                 <a:solidFill>
@@ -5696,18 +4777,11 @@
                   </a:schemeClr>
                 </a:solidFill>
               </a:rPr>
-              <a:t>// </a:t>
-            </a:r>
-            <a:r>
-              <a:rPr sz="1600" dirty="0" err="1">
-                <a:solidFill>
-                  <a:schemeClr val="bg1">
-                    <a:lumMod val="95000"/>
-                  </a:schemeClr>
-                </a:solidFill>
-              </a:rPr>
-              <a:t>Propiedad</a:t>
-            </a:r>
+              <a:t>/**</a:t>
+            </a:r>
+          </a:p>
+          <a:p>
+            <a:pPr/>
             <a:r>
               <a:rPr sz="1600" dirty="0">
                 <a:solidFill>
@@ -5716,19 +4790,12 @@
                   </a:schemeClr>
                 </a:solidFill>
               </a:rPr>
-              <a:t> </a:t>
-            </a:r>
-            <a:r>
-              <a:rPr sz="1600" dirty="0" err="1">
-                <a:solidFill>
-                  <a:schemeClr val="bg1">
-                    <a:lumMod val="95000"/>
-                  </a:schemeClr>
-                </a:solidFill>
-              </a:rPr>
-              <a:t>inmobiliaria</a:t>
-            </a:r>
-            <a:br>
+              <a:t> * @typedef {Object} Property</a:t>
+            </a:r>
+          </a:p>
+          <a:p>
+            <a:pPr/>
+            <a:r>
               <a:rPr sz="1600" dirty="0">
                 <a:solidFill>
                   <a:schemeClr val="bg1">
@@ -5736,7 +4803,11 @@
                   </a:schemeClr>
                 </a:solidFill>
               </a:rPr>
-            </a:br>
+              <a:t> * @property {string} docType        - siempre "property"</a:t>
+            </a:r>
+          </a:p>
+          <a:p>
+            <a:pPr/>
             <a:r>
               <a:rPr sz="1600" dirty="0">
                 <a:solidFill>
@@ -5745,9 +4816,12 @@
                   </a:schemeClr>
                 </a:solidFill>
               </a:rPr>
-              <a:t>type Property struct {</a:t>
-            </a:r>
-            <a:br>
+              <a:t> * @property {string} id             - referencia catastral</a:t>
+            </a:r>
+          </a:p>
+          <a:p>
+            <a:pPr/>
+            <a:r>
               <a:rPr sz="1600" dirty="0">
                 <a:solidFill>
                   <a:schemeClr val="bg1">
@@ -5755,7 +4829,11 @@
                   </a:schemeClr>
                 </a:solidFill>
               </a:rPr>
-            </a:br>
+              <a:t> * @property {string} address        - direccion fisica</a:t>
+            </a:r>
+          </a:p>
+          <a:p>
+            <a:pPr/>
             <a:r>
               <a:rPr sz="1600" dirty="0">
                 <a:solidFill>
@@ -5764,18 +4842,11 @@
                   </a:schemeClr>
                 </a:solidFill>
               </a:rPr>
-              <a:t>    </a:t>
-            </a:r>
-            <a:r>
-              <a:rPr sz="1600" dirty="0" err="1">
-                <a:solidFill>
-                  <a:schemeClr val="bg1">
-                    <a:lumMod val="95000"/>
-                  </a:schemeClr>
-                </a:solidFill>
-              </a:rPr>
-              <a:t>DocType</a:t>
-            </a:r>
+              <a:t> * @property {string} owner          - ID del propietario (MSP)</a:t>
+            </a:r>
+          </a:p>
+          <a:p>
+            <a:pPr/>
             <a:r>
               <a:rPr sz="1600" dirty="0">
                 <a:solidFill>
@@ -5784,18 +4855,11 @@
                   </a:schemeClr>
                 </a:solidFill>
               </a:rPr>
-              <a:t>       string `</a:t>
-            </a:r>
-            <a:r>
-              <a:rPr sz="1600" dirty="0" err="1">
-                <a:solidFill>
-                  <a:schemeClr val="bg1">
-                    <a:lumMod val="95000"/>
-                  </a:schemeClr>
-                </a:solidFill>
-              </a:rPr>
-              <a:t>json</a:t>
-            </a:r>
+              <a:t> * @property {string} ownerName      - nombre del propietario</a:t>
+            </a:r>
+          </a:p>
+          <a:p>
+            <a:pPr/>
             <a:r>
               <a:rPr sz="1600" dirty="0">
                 <a:solidFill>
@@ -5804,18 +4868,11 @@
                   </a:schemeClr>
                 </a:solidFill>
               </a:rPr>
-              <a:t>:"</a:t>
-            </a:r>
-            <a:r>
-              <a:rPr sz="1600" dirty="0" err="1">
-                <a:solidFill>
-                  <a:schemeClr val="bg1">
-                    <a:lumMod val="95000"/>
-                  </a:schemeClr>
-                </a:solidFill>
-              </a:rPr>
-              <a:t>docType</a:t>
-            </a:r>
+              <a:t> * @property {number} area           - metros cuadrados</a:t>
+            </a:r>
+          </a:p>
+          <a:p>
+            <a:pPr/>
             <a:r>
               <a:rPr sz="1600" dirty="0">
                 <a:solidFill>
@@ -5824,18 +4881,11 @@
                   </a:schemeClr>
                 </a:solidFill>
               </a:rPr>
-              <a:t>"`       // </a:t>
-            </a:r>
-            <a:r>
-              <a:rPr sz="1600" dirty="0" err="1">
-                <a:solidFill>
-                  <a:schemeClr val="bg1">
-                    <a:lumMod val="95000"/>
-                  </a:schemeClr>
-                </a:solidFill>
-              </a:rPr>
-              <a:t>siempre</a:t>
-            </a:r>
+              <a:t> * @property {string} propertyType   - "apartment"|"house"|"land"</a:t>
+            </a:r>
+          </a:p>
+          <a:p>
+            <a:pPr/>
             <a:r>
               <a:rPr sz="1600" dirty="0">
                 <a:solidFill>
@@ -5844,9 +4894,12 @@
                   </a:schemeClr>
                 </a:solidFill>
               </a:rPr>
-              <a:t> "property"</a:t>
-            </a:r>
-            <a:br>
+              <a:t> * @property {string} status         - "active"|"transferring"|"blocked"</a:t>
+            </a:r>
+          </a:p>
+          <a:p>
+            <a:pPr/>
+            <a:r>
               <a:rPr sz="1600" dirty="0">
                 <a:solidFill>
                   <a:schemeClr val="bg1">
@@ -5854,7 +4907,11 @@
                   </a:schemeClr>
                 </a:solidFill>
               </a:rPr>
-            </a:br>
+              <a:t> * @property {string} registeredAt   - fecha de registro</a:t>
+            </a:r>
+          </a:p>
+          <a:p>
+            <a:pPr/>
             <a:r>
               <a:rPr sz="1600" dirty="0">
                 <a:solidFill>
@@ -5863,18 +4920,11 @@
                   </a:schemeClr>
                 </a:solidFill>
               </a:rPr>
-              <a:t>    ID            string `</a:t>
-            </a:r>
-            <a:r>
-              <a:rPr sz="1600" dirty="0" err="1">
-                <a:solidFill>
-                  <a:schemeClr val="bg1">
-                    <a:lumMod val="95000"/>
-                  </a:schemeClr>
-                </a:solidFill>
-              </a:rPr>
-              <a:t>json</a:t>
-            </a:r>
+              <a:t> * @property {number} appraisalValue - valor de tasacion (euros)</a:t>
+            </a:r>
+          </a:p>
+          <a:p>
+            <a:pPr/>
             <a:r>
               <a:rPr sz="1600" dirty="0">
                 <a:solidFill>
@@ -5883,18 +4933,11 @@
                   </a:schemeClr>
                 </a:solidFill>
               </a:rPr>
-              <a:t>:"id"`            // </a:t>
-            </a:r>
-            <a:r>
-              <a:rPr sz="1600" dirty="0" err="1">
-                <a:solidFill>
-                  <a:schemeClr val="bg1">
-                    <a:lumMod val="95000"/>
-                  </a:schemeClr>
-                </a:solidFill>
-              </a:rPr>
-              <a:t>referencia</a:t>
-            </a:r>
+              <a:t> */</a:t>
+            </a:r>
+          </a:p>
+          <a:p>
+            <a:pPr/>
             <a:r>
               <a:rPr sz="1600" dirty="0">
                 <a:solidFill>
@@ -5903,19 +4946,12 @@
                   </a:schemeClr>
                 </a:solidFill>
               </a:rPr>
-              <a:t> </a:t>
-            </a:r>
-            <a:r>
-              <a:rPr sz="1600" dirty="0" err="1">
-                <a:solidFill>
-                  <a:schemeClr val="bg1">
-                    <a:lumMod val="95000"/>
-                  </a:schemeClr>
-                </a:solidFill>
-              </a:rPr>
-              <a:t>catastral</a:t>
-            </a:r>
-            <a:br>
+              <a:t/>
+            </a:r>
+          </a:p>
+          <a:p>
+            <a:pPr/>
+            <a:r>
               <a:rPr sz="1600" dirty="0">
                 <a:solidFill>
                   <a:schemeClr val="bg1">
@@ -5923,7 +4959,11 @@
                   </a:schemeClr>
                 </a:solidFill>
               </a:rPr>
-            </a:br>
+              <a:t>// Key design: "property" + comunidad + municipio + referencia_catastral</a:t>
+            </a:r>
+          </a:p>
+          <a:p>
+            <a:pPr/>
             <a:r>
               <a:rPr sz="1600" dirty="0">
                 <a:solidFill>
@@ -5932,836 +4972,7 @@
                   </a:schemeClr>
                 </a:solidFill>
               </a:rPr>
-              <a:t>    Address       string `</a:t>
-            </a:r>
-            <a:r>
-              <a:rPr sz="1600" dirty="0" err="1">
-                <a:solidFill>
-                  <a:schemeClr val="bg1">
-                    <a:lumMod val="95000"/>
-                  </a:schemeClr>
-                </a:solidFill>
-              </a:rPr>
-              <a:t>json</a:t>
-            </a:r>
-            <a:r>
-              <a:rPr sz="1600" dirty="0">
-                <a:solidFill>
-                  <a:schemeClr val="bg1">
-                    <a:lumMod val="95000"/>
-                  </a:schemeClr>
-                </a:solidFill>
-              </a:rPr>
-              <a:t>:"address"`       // </a:t>
-            </a:r>
-            <a:r>
-              <a:rPr sz="1600" dirty="0" err="1">
-                <a:solidFill>
-                  <a:schemeClr val="bg1">
-                    <a:lumMod val="95000"/>
-                  </a:schemeClr>
-                </a:solidFill>
-              </a:rPr>
-              <a:t>direccion</a:t>
-            </a:r>
-            <a:r>
-              <a:rPr sz="1600" dirty="0">
-                <a:solidFill>
-                  <a:schemeClr val="bg1">
-                    <a:lumMod val="95000"/>
-                  </a:schemeClr>
-                </a:solidFill>
-              </a:rPr>
-              <a:t> </a:t>
-            </a:r>
-            <a:r>
-              <a:rPr sz="1600" dirty="0" err="1">
-                <a:solidFill>
-                  <a:schemeClr val="bg1">
-                    <a:lumMod val="95000"/>
-                  </a:schemeClr>
-                </a:solidFill>
-              </a:rPr>
-              <a:t>fisica</a:t>
-            </a:r>
-            <a:br>
-              <a:rPr sz="1600" dirty="0">
-                <a:solidFill>
-                  <a:schemeClr val="bg1">
-                    <a:lumMod val="95000"/>
-                  </a:schemeClr>
-                </a:solidFill>
-              </a:rPr>
-            </a:br>
-            <a:r>
-              <a:rPr sz="1600" dirty="0">
-                <a:solidFill>
-                  <a:schemeClr val="bg1">
-                    <a:lumMod val="95000"/>
-                  </a:schemeClr>
-                </a:solidFill>
-              </a:rPr>
-              <a:t>    Owner         string `</a:t>
-            </a:r>
-            <a:r>
-              <a:rPr sz="1600" dirty="0" err="1">
-                <a:solidFill>
-                  <a:schemeClr val="bg1">
-                    <a:lumMod val="95000"/>
-                  </a:schemeClr>
-                </a:solidFill>
-              </a:rPr>
-              <a:t>json</a:t>
-            </a:r>
-            <a:r>
-              <a:rPr sz="1600" dirty="0">
-                <a:solidFill>
-                  <a:schemeClr val="bg1">
-                    <a:lumMod val="95000"/>
-                  </a:schemeClr>
-                </a:solidFill>
-              </a:rPr>
-              <a:t>:"owner"`         // ID del </a:t>
-            </a:r>
-            <a:r>
-              <a:rPr sz="1600" dirty="0" err="1">
-                <a:solidFill>
-                  <a:schemeClr val="bg1">
-                    <a:lumMod val="95000"/>
-                  </a:schemeClr>
-                </a:solidFill>
-              </a:rPr>
-              <a:t>propietario</a:t>
-            </a:r>
-            <a:r>
-              <a:rPr sz="1600" dirty="0">
-                <a:solidFill>
-                  <a:schemeClr val="bg1">
-                    <a:lumMod val="95000"/>
-                  </a:schemeClr>
-                </a:solidFill>
-              </a:rPr>
-              <a:t> (MSP)</a:t>
-            </a:r>
-            <a:br>
-              <a:rPr sz="1600" dirty="0">
-                <a:solidFill>
-                  <a:schemeClr val="bg1">
-                    <a:lumMod val="95000"/>
-                  </a:schemeClr>
-                </a:solidFill>
-              </a:rPr>
-            </a:br>
-            <a:r>
-              <a:rPr sz="1600" dirty="0">
-                <a:solidFill>
-                  <a:schemeClr val="bg1">
-                    <a:lumMod val="95000"/>
-                  </a:schemeClr>
-                </a:solidFill>
-              </a:rPr>
-              <a:t>    </a:t>
-            </a:r>
-            <a:r>
-              <a:rPr sz="1600" dirty="0" err="1">
-                <a:solidFill>
-                  <a:schemeClr val="bg1">
-                    <a:lumMod val="95000"/>
-                  </a:schemeClr>
-                </a:solidFill>
-              </a:rPr>
-              <a:t>OwnerName</a:t>
-            </a:r>
-            <a:r>
-              <a:rPr sz="1600" dirty="0">
-                <a:solidFill>
-                  <a:schemeClr val="bg1">
-                    <a:lumMod val="95000"/>
-                  </a:schemeClr>
-                </a:solidFill>
-              </a:rPr>
-              <a:t>     string `</a:t>
-            </a:r>
-            <a:r>
-              <a:rPr sz="1600" dirty="0" err="1">
-                <a:solidFill>
-                  <a:schemeClr val="bg1">
-                    <a:lumMod val="95000"/>
-                  </a:schemeClr>
-                </a:solidFill>
-              </a:rPr>
-              <a:t>json</a:t>
-            </a:r>
-            <a:r>
-              <a:rPr sz="1600" dirty="0">
-                <a:solidFill>
-                  <a:schemeClr val="bg1">
-                    <a:lumMod val="95000"/>
-                  </a:schemeClr>
-                </a:solidFill>
-              </a:rPr>
-              <a:t>:"</a:t>
-            </a:r>
-            <a:r>
-              <a:rPr sz="1600" dirty="0" err="1">
-                <a:solidFill>
-                  <a:schemeClr val="bg1">
-                    <a:lumMod val="95000"/>
-                  </a:schemeClr>
-                </a:solidFill>
-              </a:rPr>
-              <a:t>ownerName</a:t>
-            </a:r>
-            <a:r>
-              <a:rPr sz="1600" dirty="0">
-                <a:solidFill>
-                  <a:schemeClr val="bg1">
-                    <a:lumMod val="95000"/>
-                  </a:schemeClr>
-                </a:solidFill>
-              </a:rPr>
-              <a:t>"`     // </a:t>
-            </a:r>
-            <a:r>
-              <a:rPr sz="1600" dirty="0" err="1">
-                <a:solidFill>
-                  <a:schemeClr val="bg1">
-                    <a:lumMod val="95000"/>
-                  </a:schemeClr>
-                </a:solidFill>
-              </a:rPr>
-              <a:t>nombre</a:t>
-            </a:r>
-            <a:r>
-              <a:rPr sz="1600" dirty="0">
-                <a:solidFill>
-                  <a:schemeClr val="bg1">
-                    <a:lumMod val="95000"/>
-                  </a:schemeClr>
-                </a:solidFill>
-              </a:rPr>
-              <a:t> del </a:t>
-            </a:r>
-            <a:r>
-              <a:rPr sz="1600" dirty="0" err="1">
-                <a:solidFill>
-                  <a:schemeClr val="bg1">
-                    <a:lumMod val="95000"/>
-                  </a:schemeClr>
-                </a:solidFill>
-              </a:rPr>
-              <a:t>propietario</a:t>
-            </a:r>
-            <a:br>
-              <a:rPr sz="1600" dirty="0">
-                <a:solidFill>
-                  <a:schemeClr val="bg1">
-                    <a:lumMod val="95000"/>
-                  </a:schemeClr>
-                </a:solidFill>
-              </a:rPr>
-            </a:br>
-            <a:r>
-              <a:rPr sz="1600" dirty="0">
-                <a:solidFill>
-                  <a:schemeClr val="bg1">
-                    <a:lumMod val="95000"/>
-                  </a:schemeClr>
-                </a:solidFill>
-              </a:rPr>
-              <a:t>    Area          int    `</a:t>
-            </a:r>
-            <a:r>
-              <a:rPr sz="1600" dirty="0" err="1">
-                <a:solidFill>
-                  <a:schemeClr val="bg1">
-                    <a:lumMod val="95000"/>
-                  </a:schemeClr>
-                </a:solidFill>
-              </a:rPr>
-              <a:t>json</a:t>
-            </a:r>
-            <a:r>
-              <a:rPr sz="1600" dirty="0">
-                <a:solidFill>
-                  <a:schemeClr val="bg1">
-                    <a:lumMod val="95000"/>
-                  </a:schemeClr>
-                </a:solidFill>
-              </a:rPr>
-              <a:t>:"area"`          // metros </a:t>
-            </a:r>
-            <a:r>
-              <a:rPr sz="1600" dirty="0" err="1">
-                <a:solidFill>
-                  <a:schemeClr val="bg1">
-                    <a:lumMod val="95000"/>
-                  </a:schemeClr>
-                </a:solidFill>
-              </a:rPr>
-              <a:t>cuadrados</a:t>
-            </a:r>
-            <a:br>
-              <a:rPr sz="1600" dirty="0">
-                <a:solidFill>
-                  <a:schemeClr val="bg1">
-                    <a:lumMod val="95000"/>
-                  </a:schemeClr>
-                </a:solidFill>
-              </a:rPr>
-            </a:br>
-            <a:r>
-              <a:rPr sz="1600" dirty="0">
-                <a:solidFill>
-                  <a:schemeClr val="bg1">
-                    <a:lumMod val="95000"/>
-                  </a:schemeClr>
-                </a:solidFill>
-              </a:rPr>
-              <a:t>    </a:t>
-            </a:r>
-            <a:r>
-              <a:rPr sz="1600" dirty="0" err="1">
-                <a:solidFill>
-                  <a:schemeClr val="bg1">
-                    <a:lumMod val="95000"/>
-                  </a:schemeClr>
-                </a:solidFill>
-              </a:rPr>
-              <a:t>PropertyType</a:t>
-            </a:r>
-            <a:r>
-              <a:rPr sz="1600" dirty="0">
-                <a:solidFill>
-                  <a:schemeClr val="bg1">
-                    <a:lumMod val="95000"/>
-                  </a:schemeClr>
-                </a:solidFill>
-              </a:rPr>
-              <a:t>  string `</a:t>
-            </a:r>
-            <a:r>
-              <a:rPr sz="1600" dirty="0" err="1">
-                <a:solidFill>
-                  <a:schemeClr val="bg1">
-                    <a:lumMod val="95000"/>
-                  </a:schemeClr>
-                </a:solidFill>
-              </a:rPr>
-              <a:t>json</a:t>
-            </a:r>
-            <a:r>
-              <a:rPr sz="1600" dirty="0">
-                <a:solidFill>
-                  <a:schemeClr val="bg1">
-                    <a:lumMod val="95000"/>
-                  </a:schemeClr>
-                </a:solidFill>
-              </a:rPr>
-              <a:t>:"</a:t>
-            </a:r>
-            <a:r>
-              <a:rPr sz="1600" dirty="0" err="1">
-                <a:solidFill>
-                  <a:schemeClr val="bg1">
-                    <a:lumMod val="95000"/>
-                  </a:schemeClr>
-                </a:solidFill>
-              </a:rPr>
-              <a:t>propertyType</a:t>
-            </a:r>
-            <a:r>
-              <a:rPr sz="1600" dirty="0">
-                <a:solidFill>
-                  <a:schemeClr val="bg1">
-                    <a:lumMod val="95000"/>
-                  </a:schemeClr>
-                </a:solidFill>
-              </a:rPr>
-              <a:t>"`  // "</a:t>
-            </a:r>
-            <a:r>
-              <a:rPr sz="1600" dirty="0" err="1">
-                <a:solidFill>
-                  <a:schemeClr val="bg1">
-                    <a:lumMod val="95000"/>
-                  </a:schemeClr>
-                </a:solidFill>
-              </a:rPr>
-              <a:t>apartment"|"house"|"land</a:t>
-            </a:r>
-            <a:r>
-              <a:rPr sz="1600" dirty="0">
-                <a:solidFill>
-                  <a:schemeClr val="bg1">
-                    <a:lumMod val="95000"/>
-                  </a:schemeClr>
-                </a:solidFill>
-              </a:rPr>
-              <a:t>"</a:t>
-            </a:r>
-            <a:br>
-              <a:rPr sz="1600" dirty="0">
-                <a:solidFill>
-                  <a:schemeClr val="bg1">
-                    <a:lumMod val="95000"/>
-                  </a:schemeClr>
-                </a:solidFill>
-              </a:rPr>
-            </a:br>
-            <a:r>
-              <a:rPr sz="1600" dirty="0">
-                <a:solidFill>
-                  <a:schemeClr val="bg1">
-                    <a:lumMod val="95000"/>
-                  </a:schemeClr>
-                </a:solidFill>
-              </a:rPr>
-              <a:t>    Status        string `</a:t>
-            </a:r>
-            <a:r>
-              <a:rPr sz="1600" dirty="0" err="1">
-                <a:solidFill>
-                  <a:schemeClr val="bg1">
-                    <a:lumMod val="95000"/>
-                  </a:schemeClr>
-                </a:solidFill>
-              </a:rPr>
-              <a:t>json</a:t>
-            </a:r>
-            <a:r>
-              <a:rPr sz="1600" dirty="0">
-                <a:solidFill>
-                  <a:schemeClr val="bg1">
-                    <a:lumMod val="95000"/>
-                  </a:schemeClr>
-                </a:solidFill>
-              </a:rPr>
-              <a:t>:"status"`        // "</a:t>
-            </a:r>
-            <a:r>
-              <a:rPr sz="1600" dirty="0" err="1">
-                <a:solidFill>
-                  <a:schemeClr val="bg1">
-                    <a:lumMod val="95000"/>
-                  </a:schemeClr>
-                </a:solidFill>
-              </a:rPr>
-              <a:t>active"|"transferring"|"blocked</a:t>
-            </a:r>
-            <a:r>
-              <a:rPr sz="1600" dirty="0">
-                <a:solidFill>
-                  <a:schemeClr val="bg1">
-                    <a:lumMod val="95000"/>
-                  </a:schemeClr>
-                </a:solidFill>
-              </a:rPr>
-              <a:t>"</a:t>
-            </a:r>
-            <a:br>
-              <a:rPr sz="1600" dirty="0">
-                <a:solidFill>
-                  <a:schemeClr val="bg1">
-                    <a:lumMod val="95000"/>
-                  </a:schemeClr>
-                </a:solidFill>
-              </a:rPr>
-            </a:br>
-            <a:r>
-              <a:rPr sz="1600" dirty="0">
-                <a:solidFill>
-                  <a:schemeClr val="bg1">
-                    <a:lumMod val="95000"/>
-                  </a:schemeClr>
-                </a:solidFill>
-              </a:rPr>
-              <a:t>    </a:t>
-            </a:r>
-            <a:r>
-              <a:rPr sz="1600" dirty="0" err="1">
-                <a:solidFill>
-                  <a:schemeClr val="bg1">
-                    <a:lumMod val="95000"/>
-                  </a:schemeClr>
-                </a:solidFill>
-              </a:rPr>
-              <a:t>RegisteredAt</a:t>
-            </a:r>
-            <a:r>
-              <a:rPr sz="1600" dirty="0">
-                <a:solidFill>
-                  <a:schemeClr val="bg1">
-                    <a:lumMod val="95000"/>
-                  </a:schemeClr>
-                </a:solidFill>
-              </a:rPr>
-              <a:t>  string `</a:t>
-            </a:r>
-            <a:r>
-              <a:rPr sz="1600" dirty="0" err="1">
-                <a:solidFill>
-                  <a:schemeClr val="bg1">
-                    <a:lumMod val="95000"/>
-                  </a:schemeClr>
-                </a:solidFill>
-              </a:rPr>
-              <a:t>json</a:t>
-            </a:r>
-            <a:r>
-              <a:rPr sz="1600" dirty="0">
-                <a:solidFill>
-                  <a:schemeClr val="bg1">
-                    <a:lumMod val="95000"/>
-                  </a:schemeClr>
-                </a:solidFill>
-              </a:rPr>
-              <a:t>:"</a:t>
-            </a:r>
-            <a:r>
-              <a:rPr sz="1600" dirty="0" err="1">
-                <a:solidFill>
-                  <a:schemeClr val="bg1">
-                    <a:lumMod val="95000"/>
-                  </a:schemeClr>
-                </a:solidFill>
-              </a:rPr>
-              <a:t>registeredAt</a:t>
-            </a:r>
-            <a:r>
-              <a:rPr sz="1600" dirty="0">
-                <a:solidFill>
-                  <a:schemeClr val="bg1">
-                    <a:lumMod val="95000"/>
-                  </a:schemeClr>
-                </a:solidFill>
-              </a:rPr>
-              <a:t>"`  // </a:t>
-            </a:r>
-            <a:r>
-              <a:rPr sz="1600" dirty="0" err="1">
-                <a:solidFill>
-                  <a:schemeClr val="bg1">
-                    <a:lumMod val="95000"/>
-                  </a:schemeClr>
-                </a:solidFill>
-              </a:rPr>
-              <a:t>fecha</a:t>
-            </a:r>
-            <a:r>
-              <a:rPr sz="1600" dirty="0">
-                <a:solidFill>
-                  <a:schemeClr val="bg1">
-                    <a:lumMod val="95000"/>
-                  </a:schemeClr>
-                </a:solidFill>
-              </a:rPr>
-              <a:t> de </a:t>
-            </a:r>
-            <a:r>
-              <a:rPr sz="1600" dirty="0" err="1">
-                <a:solidFill>
-                  <a:schemeClr val="bg1">
-                    <a:lumMod val="95000"/>
-                  </a:schemeClr>
-                </a:solidFill>
-              </a:rPr>
-              <a:t>registro</a:t>
-            </a:r>
-            <a:br>
-              <a:rPr sz="1600" dirty="0">
-                <a:solidFill>
-                  <a:schemeClr val="bg1">
-                    <a:lumMod val="95000"/>
-                  </a:schemeClr>
-                </a:solidFill>
-              </a:rPr>
-            </a:br>
-            <a:r>
-              <a:rPr sz="1600" dirty="0">
-                <a:solidFill>
-                  <a:schemeClr val="bg1">
-                    <a:lumMod val="95000"/>
-                  </a:schemeClr>
-                </a:solidFill>
-              </a:rPr>
-              <a:t>    </a:t>
-            </a:r>
-            <a:r>
-              <a:rPr sz="1600" dirty="0" err="1">
-                <a:solidFill>
-                  <a:schemeClr val="bg1">
-                    <a:lumMod val="95000"/>
-                  </a:schemeClr>
-                </a:solidFill>
-              </a:rPr>
-              <a:t>AppraisalValue</a:t>
-            </a:r>
-            <a:r>
-              <a:rPr sz="1600" dirty="0">
-                <a:solidFill>
-                  <a:schemeClr val="bg1">
-                    <a:lumMod val="95000"/>
-                  </a:schemeClr>
-                </a:solidFill>
-              </a:rPr>
-              <a:t> int   `</a:t>
-            </a:r>
-            <a:r>
-              <a:rPr sz="1600" dirty="0" err="1">
-                <a:solidFill>
-                  <a:schemeClr val="bg1">
-                    <a:lumMod val="95000"/>
-                  </a:schemeClr>
-                </a:solidFill>
-              </a:rPr>
-              <a:t>json</a:t>
-            </a:r>
-            <a:r>
-              <a:rPr sz="1600" dirty="0">
-                <a:solidFill>
-                  <a:schemeClr val="bg1">
-                    <a:lumMod val="95000"/>
-                  </a:schemeClr>
-                </a:solidFill>
-              </a:rPr>
-              <a:t>:"</a:t>
-            </a:r>
-            <a:r>
-              <a:rPr sz="1600" dirty="0" err="1">
-                <a:solidFill>
-                  <a:schemeClr val="bg1">
-                    <a:lumMod val="95000"/>
-                  </a:schemeClr>
-                </a:solidFill>
-              </a:rPr>
-              <a:t>appraisalValue</a:t>
-            </a:r>
-            <a:r>
-              <a:rPr sz="1600" dirty="0">
-                <a:solidFill>
-                  <a:schemeClr val="bg1">
-                    <a:lumMod val="95000"/>
-                  </a:schemeClr>
-                </a:solidFill>
-              </a:rPr>
-              <a:t>"` // valor de </a:t>
-            </a:r>
-            <a:r>
-              <a:rPr sz="1600" dirty="0" err="1">
-                <a:solidFill>
-                  <a:schemeClr val="bg1">
-                    <a:lumMod val="95000"/>
-                  </a:schemeClr>
-                </a:solidFill>
-              </a:rPr>
-              <a:t>tasacion</a:t>
-            </a:r>
-            <a:r>
-              <a:rPr sz="1600" dirty="0">
-                <a:solidFill>
-                  <a:schemeClr val="bg1">
-                    <a:lumMod val="95000"/>
-                  </a:schemeClr>
-                </a:solidFill>
-              </a:rPr>
-              <a:t> (euros)</a:t>
-            </a:r>
-            <a:br>
-              <a:rPr sz="1600" dirty="0">
-                <a:solidFill>
-                  <a:schemeClr val="bg1">
-                    <a:lumMod val="95000"/>
-                  </a:schemeClr>
-                </a:solidFill>
-              </a:rPr>
-            </a:br>
-            <a:r>
-              <a:rPr sz="1600" dirty="0">
-                <a:solidFill>
-                  <a:schemeClr val="bg1">
-                    <a:lumMod val="95000"/>
-                  </a:schemeClr>
-                </a:solidFill>
-              </a:rPr>
-              <a:t>}</a:t>
-            </a:r>
-            <a:br>
-              <a:rPr sz="1600" dirty="0">
-                <a:solidFill>
-                  <a:schemeClr val="bg1">
-                    <a:lumMod val="95000"/>
-                  </a:schemeClr>
-                </a:solidFill>
-              </a:rPr>
-            </a:br>
-            <a:br>
-              <a:rPr sz="1600" dirty="0">
-                <a:solidFill>
-                  <a:schemeClr val="bg1">
-                    <a:lumMod val="95000"/>
-                  </a:schemeClr>
-                </a:solidFill>
-              </a:rPr>
-            </a:br>
-            <a:r>
-              <a:rPr sz="1600" dirty="0">
-                <a:solidFill>
-                  <a:schemeClr val="bg1">
-                    <a:lumMod val="95000"/>
-                  </a:schemeClr>
-                </a:solidFill>
-              </a:rPr>
-              <a:t>// Key design: "property" + comunidad + municipio + </a:t>
-            </a:r>
-            <a:r>
-              <a:rPr sz="1600" dirty="0" err="1">
-                <a:solidFill>
-                  <a:schemeClr val="bg1">
-                    <a:lumMod val="95000"/>
-                  </a:schemeClr>
-                </a:solidFill>
-              </a:rPr>
-              <a:t>referencia_catastral</a:t>
-            </a:r>
-            <a:br>
-              <a:rPr sz="1600" dirty="0">
-                <a:solidFill>
-                  <a:schemeClr val="bg1">
-                    <a:lumMod val="95000"/>
-                  </a:schemeClr>
-                </a:solidFill>
-              </a:rPr>
-            </a:br>
-            <a:r>
-              <a:rPr sz="1600" dirty="0">
-                <a:solidFill>
-                  <a:schemeClr val="bg1">
-                    <a:lumMod val="95000"/>
-                  </a:schemeClr>
-                </a:solidFill>
-              </a:rPr>
-              <a:t>// </a:t>
-            </a:r>
-            <a:r>
-              <a:rPr sz="1600" dirty="0" err="1">
-                <a:solidFill>
-                  <a:schemeClr val="bg1">
-                    <a:lumMod val="95000"/>
-                  </a:schemeClr>
-                </a:solidFill>
-              </a:rPr>
-              <a:t>Permite</a:t>
-            </a:r>
-            <a:r>
-              <a:rPr sz="1600" dirty="0">
-                <a:solidFill>
-                  <a:schemeClr val="bg1">
-                    <a:lumMod val="95000"/>
-                  </a:schemeClr>
-                </a:solidFill>
-              </a:rPr>
-              <a:t> </a:t>
-            </a:r>
-            <a:r>
-              <a:rPr sz="1600" dirty="0" err="1">
-                <a:solidFill>
-                  <a:schemeClr val="bg1">
-                    <a:lumMod val="95000"/>
-                  </a:schemeClr>
-                </a:solidFill>
-              </a:rPr>
-              <a:t>buscar</a:t>
-            </a:r>
-            <a:r>
-              <a:rPr sz="1600" dirty="0">
-                <a:solidFill>
-                  <a:schemeClr val="bg1">
-                    <a:lumMod val="95000"/>
-                  </a:schemeClr>
-                </a:solidFill>
-              </a:rPr>
-              <a:t> </a:t>
-            </a:r>
-            <a:r>
-              <a:rPr sz="1600" dirty="0" err="1">
-                <a:solidFill>
-                  <a:schemeClr val="bg1">
-                    <a:lumMod val="95000"/>
-                  </a:schemeClr>
-                </a:solidFill>
-              </a:rPr>
-              <a:t>por</a:t>
-            </a:r>
-            <a:r>
-              <a:rPr sz="1600" dirty="0">
-                <a:solidFill>
-                  <a:schemeClr val="bg1">
-                    <a:lumMod val="95000"/>
-                  </a:schemeClr>
-                </a:solidFill>
-              </a:rPr>
-              <a:t> comunidad, </a:t>
-            </a:r>
-            <a:r>
-              <a:rPr sz="1600" dirty="0" err="1">
-                <a:solidFill>
-                  <a:schemeClr val="bg1">
-                    <a:lumMod val="95000"/>
-                  </a:schemeClr>
-                </a:solidFill>
-              </a:rPr>
-              <a:t>por</a:t>
-            </a:r>
-            <a:r>
-              <a:rPr sz="1600" dirty="0">
-                <a:solidFill>
-                  <a:schemeClr val="bg1">
-                    <a:lumMod val="95000"/>
-                  </a:schemeClr>
-                </a:solidFill>
-              </a:rPr>
-              <a:t> municipio, o </a:t>
-            </a:r>
-            <a:r>
-              <a:rPr sz="1600" dirty="0" err="1">
-                <a:solidFill>
-                  <a:schemeClr val="bg1">
-                    <a:lumMod val="95000"/>
-                  </a:schemeClr>
-                </a:solidFill>
-              </a:rPr>
-              <a:t>por</a:t>
-            </a:r>
-            <a:r>
-              <a:rPr sz="1600" dirty="0">
-                <a:solidFill>
-                  <a:schemeClr val="bg1">
-                    <a:lumMod val="95000"/>
-                  </a:schemeClr>
-                </a:solidFill>
-              </a:rPr>
-              <a:t> </a:t>
-            </a:r>
-            <a:r>
-              <a:rPr sz="1600" dirty="0" err="1">
-                <a:solidFill>
-                  <a:schemeClr val="bg1">
-                    <a:lumMod val="95000"/>
-                  </a:schemeClr>
-                </a:solidFill>
-              </a:rPr>
-              <a:t>referencia</a:t>
-            </a:r>
-            <a:r>
-              <a:rPr sz="1600" dirty="0">
-                <a:solidFill>
-                  <a:schemeClr val="bg1">
-                    <a:lumMod val="95000"/>
-                  </a:schemeClr>
-                </a:solidFill>
-              </a:rPr>
-              <a:t> exacta</a:t>
+              <a:t>// Permite buscar por comunidad, por municipio, o por referencia exacta</a:t>
             </a:r>
           </a:p>
         </p:txBody>
@@ -7505,7 +5716,7 @@
               </a:defRPr>
             </a:pPr>
             <a:r>
-              <a:t>GO</a:t>
+              <a:t>NODE.JS</a:t>
             </a:r>
           </a:p>
         </p:txBody>
@@ -7574,6 +5785,7 @@
           <a:bodyPr wrap="square"/>
           <a:lstStyle/>
           <a:p>
+            <a:pPr/>
             <a:r>
               <a:rPr sz="1600" dirty="0">
                 <a:solidFill>
@@ -7582,18 +5794,11 @@
                   </a:schemeClr>
                 </a:solidFill>
               </a:rPr>
-              <a:t>// </a:t>
-            </a:r>
-            <a:r>
-              <a:rPr sz="1600" dirty="0" err="1">
-                <a:solidFill>
-                  <a:schemeClr val="bg1">
-                    <a:lumMod val="95000"/>
-                  </a:schemeClr>
-                </a:solidFill>
-              </a:rPr>
-              <a:t>Buscar</a:t>
-            </a:r>
+              <a:t>// Buscar propiedades por tipo y rango de valor</a:t>
+            </a:r>
+          </a:p>
+          <a:p>
+            <a:pPr/>
             <a:r>
               <a:rPr sz="1600" dirty="0">
                 <a:solidFill>
@@ -7602,18 +5807,11 @@
                   </a:schemeClr>
                 </a:solidFill>
               </a:rPr>
-              <a:t> </a:t>
-            </a:r>
-            <a:r>
-              <a:rPr sz="1600" dirty="0" err="1">
-                <a:solidFill>
-                  <a:schemeClr val="bg1">
-                    <a:lumMod val="95000"/>
-                  </a:schemeClr>
-                </a:solidFill>
-              </a:rPr>
-              <a:t>propiedades</a:t>
-            </a:r>
+              <a:t>async QueryProperties(ctx, propertyType, minValue) {</a:t>
+            </a:r>
+          </a:p>
+          <a:p>
+            <a:pPr/>
             <a:r>
               <a:rPr sz="1600" dirty="0">
                 <a:solidFill>
@@ -7622,18 +5820,11 @@
                   </a:schemeClr>
                 </a:solidFill>
               </a:rPr>
-              <a:t> </a:t>
-            </a:r>
-            <a:r>
-              <a:rPr sz="1600" dirty="0" err="1">
-                <a:solidFill>
-                  <a:schemeClr val="bg1">
-                    <a:lumMod val="95000"/>
-                  </a:schemeClr>
-                </a:solidFill>
-              </a:rPr>
-              <a:t>por</a:t>
-            </a:r>
+              <a:t>    // Mango query (sintaxis CouchDB)</a:t>
+            </a:r>
+          </a:p>
+          <a:p>
+            <a:pPr/>
             <a:r>
               <a:rPr sz="1600" dirty="0">
                 <a:solidFill>
@@ -7642,18 +5833,11 @@
                   </a:schemeClr>
                 </a:solidFill>
               </a:rPr>
-              <a:t> </a:t>
-            </a:r>
-            <a:r>
-              <a:rPr sz="1600" dirty="0" err="1">
-                <a:solidFill>
-                  <a:schemeClr val="bg1">
-                    <a:lumMod val="95000"/>
-                  </a:schemeClr>
-                </a:solidFill>
-              </a:rPr>
-              <a:t>tipo</a:t>
-            </a:r>
+              <a:t>    const queryString = JSON.stringify({</a:t>
+            </a:r>
+          </a:p>
+          <a:p>
+            <a:pPr/>
             <a:r>
               <a:rPr sz="1600" dirty="0">
                 <a:solidFill>
@@ -7662,18 +5846,11 @@
                   </a:schemeClr>
                 </a:solidFill>
               </a:rPr>
-              <a:t> y </a:t>
-            </a:r>
-            <a:r>
-              <a:rPr sz="1600" dirty="0" err="1">
-                <a:solidFill>
-                  <a:schemeClr val="bg1">
-                    <a:lumMod val="95000"/>
-                  </a:schemeClr>
-                </a:solidFill>
-              </a:rPr>
-              <a:t>rango</a:t>
-            </a:r>
+              <a:t>        selector: {</a:t>
+            </a:r>
+          </a:p>
+          <a:p>
+            <a:pPr/>
             <a:r>
               <a:rPr sz="1600" dirty="0">
                 <a:solidFill>
@@ -7682,9 +5859,12 @@
                   </a:schemeClr>
                 </a:solidFill>
               </a:rPr>
-              <a:t> de valor</a:t>
-            </a:r>
-            <a:br>
+              <a:t>            docType: 'property',</a:t>
+            </a:r>
+          </a:p>
+          <a:p>
+            <a:pPr/>
+            <a:r>
               <a:rPr sz="1600" dirty="0">
                 <a:solidFill>
                   <a:schemeClr val="bg1">
@@ -7692,17 +5872,11 @@
                   </a:schemeClr>
                 </a:solidFill>
               </a:rPr>
-            </a:br>
-            <a:r>
-              <a:rPr sz="1600" dirty="0" err="1">
-                <a:solidFill>
-                  <a:schemeClr val="bg1">
-                    <a:lumMod val="95000"/>
-                  </a:schemeClr>
-                </a:solidFill>
-              </a:rPr>
-              <a:t>func</a:t>
-            </a:r>
+              <a:t>            propertyType: propertyType,</a:t>
+            </a:r>
+          </a:p>
+          <a:p>
+            <a:pPr/>
             <a:r>
               <a:rPr sz="1600" dirty="0">
                 <a:solidFill>
@@ -7711,18 +5885,11 @@
                   </a:schemeClr>
                 </a:solidFill>
               </a:rPr>
-              <a:t> (s *</a:t>
-            </a:r>
-            <a:r>
-              <a:rPr sz="1600" dirty="0" err="1">
-                <a:solidFill>
-                  <a:schemeClr val="bg1">
-                    <a:lumMod val="95000"/>
-                  </a:schemeClr>
-                </a:solidFill>
-              </a:rPr>
-              <a:t>SmartContract</a:t>
-            </a:r>
+              <a:t>            appraisalValue: { $gte: parseInt(minValue) }</a:t>
+            </a:r>
+          </a:p>
+          <a:p>
+            <a:pPr/>
             <a:r>
               <a:rPr sz="1600" dirty="0">
                 <a:solidFill>
@@ -7731,18 +5898,11 @@
                   </a:schemeClr>
                 </a:solidFill>
               </a:rPr>
-              <a:t>) </a:t>
-            </a:r>
-            <a:r>
-              <a:rPr sz="1600" dirty="0" err="1">
-                <a:solidFill>
-                  <a:schemeClr val="bg1">
-                    <a:lumMod val="95000"/>
-                  </a:schemeClr>
-                </a:solidFill>
-              </a:rPr>
-              <a:t>QueryProperties</a:t>
-            </a:r>
+              <a:t>        },</a:t>
+            </a:r>
+          </a:p>
+          <a:p>
+            <a:pPr/>
             <a:r>
               <a:rPr sz="1600" dirty="0">
                 <a:solidFill>
@@ -7751,18 +5911,11 @@
                   </a:schemeClr>
                 </a:solidFill>
               </a:rPr>
-              <a:t>(</a:t>
-            </a:r>
-            <a:r>
-              <a:rPr sz="1600" dirty="0" err="1">
-                <a:solidFill>
-                  <a:schemeClr val="bg1">
-                    <a:lumMod val="95000"/>
-                  </a:schemeClr>
-                </a:solidFill>
-              </a:rPr>
-              <a:t>ctx</a:t>
-            </a:r>
+              <a:t>        sort: [{ appraisalValue: 'desc' }],</a:t>
+            </a:r>
+          </a:p>
+          <a:p>
+            <a:pPr/>
             <a:r>
               <a:rPr sz="1600" dirty="0">
                 <a:solidFill>
@@ -7771,18 +5924,11 @@
                   </a:schemeClr>
                 </a:solidFill>
               </a:rPr>
-              <a:t> </a:t>
-            </a:r>
-            <a:r>
-              <a:rPr sz="1600" dirty="0" err="1">
-                <a:solidFill>
-                  <a:schemeClr val="bg1">
-                    <a:lumMod val="95000"/>
-                  </a:schemeClr>
-                </a:solidFill>
-              </a:rPr>
-              <a:t>contractapi.TransactionContextInterface</a:t>
-            </a:r>
+              <a:t>        use_index: 'indexPropertyType'</a:t>
+            </a:r>
+          </a:p>
+          <a:p>
+            <a:pPr/>
             <a:r>
               <a:rPr sz="1600" dirty="0">
                 <a:solidFill>
@@ -7791,9 +5937,12 @@
                   </a:schemeClr>
                 </a:solidFill>
               </a:rPr>
-              <a:t>,</a:t>
-            </a:r>
-            <a:br>
+              <a:t>    });</a:t>
+            </a:r>
+          </a:p>
+          <a:p>
+            <a:pPr/>
+            <a:r>
               <a:rPr sz="1600" dirty="0">
                 <a:solidFill>
                   <a:schemeClr val="bg1">
@@ -7801,7 +5950,11 @@
                   </a:schemeClr>
                 </a:solidFill>
               </a:rPr>
-            </a:br>
+              <a:t/>
+            </a:r>
+          </a:p>
+          <a:p>
+            <a:pPr/>
             <a:r>
               <a:rPr sz="1600" dirty="0">
                 <a:solidFill>
@@ -7810,18 +5963,11 @@
                   </a:schemeClr>
                 </a:solidFill>
               </a:rPr>
-              <a:t>    </a:t>
-            </a:r>
-            <a:r>
-              <a:rPr sz="1600" dirty="0" err="1">
-                <a:solidFill>
-                  <a:schemeClr val="bg1">
-                    <a:lumMod val="95000"/>
-                  </a:schemeClr>
-                </a:solidFill>
-              </a:rPr>
-              <a:t>propertyType</a:t>
-            </a:r>
+              <a:t>    const iterator = await ctx.stub.getQueryResult(queryString);</a:t>
+            </a:r>
+          </a:p>
+          <a:p>
+            <a:pPr/>
             <a:r>
               <a:rPr sz="1600" dirty="0">
                 <a:solidFill>
@@ -7830,750 +5976,11 @@
                   </a:schemeClr>
                 </a:solidFill>
               </a:rPr>
-              <a:t> string, </a:t>
-            </a:r>
-            <a:r>
-              <a:rPr sz="1600" dirty="0" err="1">
-                <a:solidFill>
-                  <a:schemeClr val="bg1">
-                    <a:lumMod val="95000"/>
-                  </a:schemeClr>
-                </a:solidFill>
-              </a:rPr>
-              <a:t>minValue</a:t>
-            </a:r>
-            <a:r>
-              <a:rPr sz="1600" dirty="0">
-                <a:solidFill>
-                  <a:schemeClr val="bg1">
-                    <a:lumMod val="95000"/>
-                  </a:schemeClr>
-                </a:solidFill>
-              </a:rPr>
-              <a:t> int) ([]*Property, error) {</a:t>
-            </a:r>
-            <a:br>
-              <a:rPr sz="1600" dirty="0">
-                <a:solidFill>
-                  <a:schemeClr val="bg1">
-                    <a:lumMod val="95000"/>
-                  </a:schemeClr>
-                </a:solidFill>
-              </a:rPr>
-            </a:br>
-            <a:r>
-              <a:rPr sz="1600" dirty="0">
-                <a:solidFill>
-                  <a:schemeClr val="bg1">
-                    <a:lumMod val="95000"/>
-                  </a:schemeClr>
-                </a:solidFill>
-              </a:rPr>
-              <a:t>    // Mango query (</a:t>
-            </a:r>
-            <a:r>
-              <a:rPr sz="1600" dirty="0" err="1">
-                <a:solidFill>
-                  <a:schemeClr val="bg1">
-                    <a:lumMod val="95000"/>
-                  </a:schemeClr>
-                </a:solidFill>
-              </a:rPr>
-              <a:t>sintaxis</a:t>
-            </a:r>
-            <a:r>
-              <a:rPr sz="1600" dirty="0">
-                <a:solidFill>
-                  <a:schemeClr val="bg1">
-                    <a:lumMod val="95000"/>
-                  </a:schemeClr>
-                </a:solidFill>
-              </a:rPr>
-              <a:t> CouchDB)</a:t>
-            </a:r>
-            <a:br>
-              <a:rPr sz="1600" dirty="0">
-                <a:solidFill>
-                  <a:schemeClr val="bg1">
-                    <a:lumMod val="95000"/>
-                  </a:schemeClr>
-                </a:solidFill>
-              </a:rPr>
-            </a:br>
-            <a:r>
-              <a:rPr sz="1600" dirty="0">
-                <a:solidFill>
-                  <a:schemeClr val="bg1">
-                    <a:lumMod val="95000"/>
-                  </a:schemeClr>
-                </a:solidFill>
-              </a:rPr>
-              <a:t>    </a:t>
-            </a:r>
-            <a:r>
-              <a:rPr sz="1600" dirty="0" err="1">
-                <a:solidFill>
-                  <a:schemeClr val="bg1">
-                    <a:lumMod val="95000"/>
-                  </a:schemeClr>
-                </a:solidFill>
-              </a:rPr>
-              <a:t>queryString</a:t>
-            </a:r>
-            <a:r>
-              <a:rPr sz="1600" dirty="0">
-                <a:solidFill>
-                  <a:schemeClr val="bg1">
-                    <a:lumMod val="95000"/>
-                  </a:schemeClr>
-                </a:solidFill>
-              </a:rPr>
-              <a:t> := </a:t>
-            </a:r>
-            <a:r>
-              <a:rPr sz="1600" dirty="0" err="1">
-                <a:solidFill>
-                  <a:schemeClr val="bg1">
-                    <a:lumMod val="95000"/>
-                  </a:schemeClr>
-                </a:solidFill>
-              </a:rPr>
-              <a:t>fmt.Sprintf</a:t>
-            </a:r>
-            <a:r>
-              <a:rPr sz="1600" dirty="0">
-                <a:solidFill>
-                  <a:schemeClr val="bg1">
-                    <a:lumMod val="95000"/>
-                  </a:schemeClr>
-                </a:solidFill>
-              </a:rPr>
-              <a:t>(</a:t>
-            </a:r>
-            <a:br>
-              <a:rPr sz="1600" dirty="0">
-                <a:solidFill>
-                  <a:schemeClr val="bg1">
-                    <a:lumMod val="95000"/>
-                  </a:schemeClr>
-                </a:solidFill>
-              </a:rPr>
-            </a:br>
-            <a:r>
-              <a:rPr sz="1600" dirty="0">
-                <a:solidFill>
-                  <a:schemeClr val="bg1">
-                    <a:lumMod val="95000"/>
-                  </a:schemeClr>
-                </a:solidFill>
-              </a:rPr>
-              <a:t>        `{"selector":{</a:t>
-            </a:r>
-            <a:br>
-              <a:rPr sz="1600" dirty="0">
-                <a:solidFill>
-                  <a:schemeClr val="bg1">
-                    <a:lumMod val="95000"/>
-                  </a:schemeClr>
-                </a:solidFill>
-              </a:rPr>
-            </a:br>
-            <a:r>
-              <a:rPr sz="1600" dirty="0">
-                <a:solidFill>
-                  <a:schemeClr val="bg1">
-                    <a:lumMod val="95000"/>
-                  </a:schemeClr>
-                </a:solidFill>
-              </a:rPr>
-              <a:t>            "</a:t>
-            </a:r>
-            <a:r>
-              <a:rPr sz="1600" dirty="0" err="1">
-                <a:solidFill>
-                  <a:schemeClr val="bg1">
-                    <a:lumMod val="95000"/>
-                  </a:schemeClr>
-                </a:solidFill>
-              </a:rPr>
-              <a:t>docType</a:t>
-            </a:r>
-            <a:r>
-              <a:rPr sz="1600" dirty="0">
-                <a:solidFill>
-                  <a:schemeClr val="bg1">
-                    <a:lumMod val="95000"/>
-                  </a:schemeClr>
-                </a:solidFill>
-              </a:rPr>
-              <a:t>": "property",</a:t>
-            </a:r>
-            <a:br>
-              <a:rPr sz="1600" dirty="0">
-                <a:solidFill>
-                  <a:schemeClr val="bg1">
-                    <a:lumMod val="95000"/>
-                  </a:schemeClr>
-                </a:solidFill>
-              </a:rPr>
-            </a:br>
-            <a:r>
-              <a:rPr sz="1600" dirty="0">
-                <a:solidFill>
-                  <a:schemeClr val="bg1">
-                    <a:lumMod val="95000"/>
-                  </a:schemeClr>
-                </a:solidFill>
-              </a:rPr>
-              <a:t>            "</a:t>
-            </a:r>
-            <a:r>
-              <a:rPr sz="1600" dirty="0" err="1">
-                <a:solidFill>
-                  <a:schemeClr val="bg1">
-                    <a:lumMod val="95000"/>
-                  </a:schemeClr>
-                </a:solidFill>
-              </a:rPr>
-              <a:t>propertyType</a:t>
-            </a:r>
-            <a:r>
-              <a:rPr sz="1600" dirty="0">
-                <a:solidFill>
-                  <a:schemeClr val="bg1">
-                    <a:lumMod val="95000"/>
-                  </a:schemeClr>
-                </a:solidFill>
-              </a:rPr>
-              <a:t>": "%s",</a:t>
-            </a:r>
-            <a:br>
-              <a:rPr sz="1600" dirty="0">
-                <a:solidFill>
-                  <a:schemeClr val="bg1">
-                    <a:lumMod val="95000"/>
-                  </a:schemeClr>
-                </a:solidFill>
-              </a:rPr>
-            </a:br>
-            <a:r>
-              <a:rPr sz="1600" dirty="0">
-                <a:solidFill>
-                  <a:schemeClr val="bg1">
-                    <a:lumMod val="95000"/>
-                  </a:schemeClr>
-                </a:solidFill>
-              </a:rPr>
-              <a:t>            "</a:t>
-            </a:r>
-            <a:r>
-              <a:rPr sz="1600" dirty="0" err="1">
-                <a:solidFill>
-                  <a:schemeClr val="bg1">
-                    <a:lumMod val="95000"/>
-                  </a:schemeClr>
-                </a:solidFill>
-              </a:rPr>
-              <a:t>appraisalValue</a:t>
-            </a:r>
-            <a:r>
-              <a:rPr sz="1600" dirty="0">
-                <a:solidFill>
-                  <a:schemeClr val="bg1">
-                    <a:lumMod val="95000"/>
-                  </a:schemeClr>
-                </a:solidFill>
-              </a:rPr>
-              <a:t>": {"$</a:t>
-            </a:r>
-            <a:r>
-              <a:rPr sz="1600" dirty="0" err="1">
-                <a:solidFill>
-                  <a:schemeClr val="bg1">
-                    <a:lumMod val="95000"/>
-                  </a:schemeClr>
-                </a:solidFill>
-              </a:rPr>
-              <a:t>gte</a:t>
-            </a:r>
-            <a:r>
-              <a:rPr sz="1600" dirty="0">
-                <a:solidFill>
-                  <a:schemeClr val="bg1">
-                    <a:lumMod val="95000"/>
-                  </a:schemeClr>
-                </a:solidFill>
-              </a:rPr>
-              <a:t>": %d}</a:t>
-            </a:r>
-            <a:br>
-              <a:rPr sz="1600" dirty="0">
-                <a:solidFill>
-                  <a:schemeClr val="bg1">
-                    <a:lumMod val="95000"/>
-                  </a:schemeClr>
-                </a:solidFill>
-              </a:rPr>
-            </a:br>
-            <a:r>
-              <a:rPr sz="1600" dirty="0">
-                <a:solidFill>
-                  <a:schemeClr val="bg1">
-                    <a:lumMod val="95000"/>
-                  </a:schemeClr>
-                </a:solidFill>
-              </a:rPr>
-              <a:t>        },</a:t>
-            </a:r>
-            <a:br>
-              <a:rPr sz="1600" dirty="0">
-                <a:solidFill>
-                  <a:schemeClr val="bg1">
-                    <a:lumMod val="95000"/>
-                  </a:schemeClr>
-                </a:solidFill>
-              </a:rPr>
-            </a:br>
-            <a:r>
-              <a:rPr sz="1600" dirty="0">
-                <a:solidFill>
-                  <a:schemeClr val="bg1">
-                    <a:lumMod val="95000"/>
-                  </a:schemeClr>
-                </a:solidFill>
-              </a:rPr>
-              <a:t>        "sort": [{"</a:t>
-            </a:r>
-            <a:r>
-              <a:rPr sz="1600" dirty="0" err="1">
-                <a:solidFill>
-                  <a:schemeClr val="bg1">
-                    <a:lumMod val="95000"/>
-                  </a:schemeClr>
-                </a:solidFill>
-              </a:rPr>
-              <a:t>appraisalValue</a:t>
-            </a:r>
-            <a:r>
-              <a:rPr sz="1600" dirty="0">
-                <a:solidFill>
-                  <a:schemeClr val="bg1">
-                    <a:lumMod val="95000"/>
-                  </a:schemeClr>
-                </a:solidFill>
-              </a:rPr>
-              <a:t>": "desc"}],</a:t>
-            </a:r>
-            <a:br>
-              <a:rPr sz="1600" dirty="0">
-                <a:solidFill>
-                  <a:schemeClr val="bg1">
-                    <a:lumMod val="95000"/>
-                  </a:schemeClr>
-                </a:solidFill>
-              </a:rPr>
-            </a:br>
-            <a:r>
-              <a:rPr sz="1600" dirty="0">
-                <a:solidFill>
-                  <a:schemeClr val="bg1">
-                    <a:lumMod val="95000"/>
-                  </a:schemeClr>
-                </a:solidFill>
-              </a:rPr>
-              <a:t>        "</a:t>
-            </a:r>
-            <a:r>
-              <a:rPr sz="1600" dirty="0" err="1">
-                <a:solidFill>
-                  <a:schemeClr val="bg1">
-                    <a:lumMod val="95000"/>
-                  </a:schemeClr>
-                </a:solidFill>
-              </a:rPr>
-              <a:t>use_index</a:t>
-            </a:r>
-            <a:r>
-              <a:rPr sz="1600" dirty="0">
-                <a:solidFill>
-                  <a:schemeClr val="bg1">
-                    <a:lumMod val="95000"/>
-                  </a:schemeClr>
-                </a:solidFill>
-              </a:rPr>
-              <a:t>": "</a:t>
-            </a:r>
-            <a:r>
-              <a:rPr sz="1600" dirty="0" err="1">
-                <a:solidFill>
-                  <a:schemeClr val="bg1">
-                    <a:lumMod val="95000"/>
-                  </a:schemeClr>
-                </a:solidFill>
-              </a:rPr>
-              <a:t>indexPropertyType</a:t>
-            </a:r>
-            <a:r>
-              <a:rPr sz="1600" dirty="0">
-                <a:solidFill>
-                  <a:schemeClr val="bg1">
-                    <a:lumMod val="95000"/>
-                  </a:schemeClr>
-                </a:solidFill>
-              </a:rPr>
-              <a:t>"}`,</a:t>
-            </a:r>
-            <a:br>
-              <a:rPr sz="1600" dirty="0">
-                <a:solidFill>
-                  <a:schemeClr val="bg1">
-                    <a:lumMod val="95000"/>
-                  </a:schemeClr>
-                </a:solidFill>
-              </a:rPr>
-            </a:br>
-            <a:r>
-              <a:rPr sz="1600" dirty="0">
-                <a:solidFill>
-                  <a:schemeClr val="bg1">
-                    <a:lumMod val="95000"/>
-                  </a:schemeClr>
-                </a:solidFill>
-              </a:rPr>
-              <a:t>        </a:t>
-            </a:r>
-            <a:r>
-              <a:rPr sz="1600" dirty="0" err="1">
-                <a:solidFill>
-                  <a:schemeClr val="bg1">
-                    <a:lumMod val="95000"/>
-                  </a:schemeClr>
-                </a:solidFill>
-              </a:rPr>
-              <a:t>propertyType</a:t>
-            </a:r>
-            <a:r>
-              <a:rPr sz="1600" dirty="0">
-                <a:solidFill>
-                  <a:schemeClr val="bg1">
-                    <a:lumMod val="95000"/>
-                  </a:schemeClr>
-                </a:solidFill>
-              </a:rPr>
-              <a:t>, </a:t>
-            </a:r>
-            <a:r>
-              <a:rPr sz="1600" dirty="0" err="1">
-                <a:solidFill>
-                  <a:schemeClr val="bg1">
-                    <a:lumMod val="95000"/>
-                  </a:schemeClr>
-                </a:solidFill>
-              </a:rPr>
-              <a:t>minValue</a:t>
-            </a:r>
-            <a:r>
-              <a:rPr sz="1600" dirty="0">
-                <a:solidFill>
-                  <a:schemeClr val="bg1">
-                    <a:lumMod val="95000"/>
-                  </a:schemeClr>
-                </a:solidFill>
-              </a:rPr>
-              <a:t>)</a:t>
-            </a:r>
-            <a:br>
-              <a:rPr sz="1600" dirty="0">
-                <a:solidFill>
-                  <a:schemeClr val="bg1">
-                    <a:lumMod val="95000"/>
-                  </a:schemeClr>
-                </a:solidFill>
-              </a:rPr>
-            </a:br>
-            <a:r>
-              <a:rPr sz="1600" dirty="0">
-                <a:solidFill>
-                  <a:schemeClr val="bg1">
-                    <a:lumMod val="95000"/>
-                  </a:schemeClr>
-                </a:solidFill>
-              </a:rPr>
-              <a:t>    </a:t>
-            </a:r>
-            <a:r>
-              <a:rPr sz="1600" dirty="0" err="1">
-                <a:solidFill>
-                  <a:schemeClr val="bg1">
-                    <a:lumMod val="95000"/>
-                  </a:schemeClr>
-                </a:solidFill>
-              </a:rPr>
-              <a:t>resultsIterator</a:t>
-            </a:r>
-            <a:r>
-              <a:rPr sz="1600" dirty="0">
-                <a:solidFill>
-                  <a:schemeClr val="bg1">
-                    <a:lumMod val="95000"/>
-                  </a:schemeClr>
-                </a:solidFill>
-              </a:rPr>
-              <a:t>, err := </a:t>
-            </a:r>
-            <a:r>
-              <a:rPr sz="1600" dirty="0" err="1">
-                <a:solidFill>
-                  <a:schemeClr val="bg1">
-                    <a:lumMod val="95000"/>
-                  </a:schemeClr>
-                </a:solidFill>
-              </a:rPr>
-              <a:t>ctx.GetStub</a:t>
-            </a:r>
-            <a:r>
-              <a:rPr sz="1600" dirty="0">
-                <a:solidFill>
-                  <a:schemeClr val="bg1">
-                    <a:lumMod val="95000"/>
-                  </a:schemeClr>
-                </a:solidFill>
-              </a:rPr>
-              <a:t>().</a:t>
-            </a:r>
-            <a:r>
-              <a:rPr sz="1600" dirty="0" err="1">
-                <a:solidFill>
-                  <a:schemeClr val="bg1">
-                    <a:lumMod val="95000"/>
-                  </a:schemeClr>
-                </a:solidFill>
-              </a:rPr>
-              <a:t>GetQueryResult</a:t>
-            </a:r>
-            <a:r>
-              <a:rPr sz="1600" dirty="0">
-                <a:solidFill>
-                  <a:schemeClr val="bg1">
-                    <a:lumMod val="95000"/>
-                  </a:schemeClr>
-                </a:solidFill>
-              </a:rPr>
-              <a:t>(</a:t>
-            </a:r>
-            <a:r>
-              <a:rPr sz="1600" dirty="0" err="1">
-                <a:solidFill>
-                  <a:schemeClr val="bg1">
-                    <a:lumMod val="95000"/>
-                  </a:schemeClr>
-                </a:solidFill>
-              </a:rPr>
-              <a:t>queryString</a:t>
-            </a:r>
-            <a:r>
-              <a:rPr sz="1600" dirty="0">
-                <a:solidFill>
-                  <a:schemeClr val="bg1">
-                    <a:lumMod val="95000"/>
-                  </a:schemeClr>
-                </a:solidFill>
-              </a:rPr>
-              <a:t>)</a:t>
-            </a:r>
-            <a:br>
-              <a:rPr sz="1600" dirty="0">
-                <a:solidFill>
-                  <a:schemeClr val="bg1">
-                    <a:lumMod val="95000"/>
-                  </a:schemeClr>
-                </a:solidFill>
-              </a:rPr>
-            </a:br>
-            <a:r>
-              <a:rPr sz="1600" dirty="0">
-                <a:solidFill>
-                  <a:schemeClr val="bg1">
-                    <a:lumMod val="95000"/>
-                  </a:schemeClr>
-                </a:solidFill>
-              </a:rPr>
-              <a:t>    if err != nil {</a:t>
-            </a:r>
-            <a:br>
-              <a:rPr sz="1600" dirty="0">
-                <a:solidFill>
-                  <a:schemeClr val="bg1">
-                    <a:lumMod val="95000"/>
-                  </a:schemeClr>
-                </a:solidFill>
-              </a:rPr>
-            </a:br>
-            <a:r>
-              <a:rPr sz="1600" dirty="0">
-                <a:solidFill>
-                  <a:schemeClr val="bg1">
-                    <a:lumMod val="95000"/>
-                  </a:schemeClr>
-                </a:solidFill>
-              </a:rPr>
-              <a:t>        return nil, err</a:t>
-            </a:r>
-            <a:br>
-              <a:rPr sz="1600" dirty="0">
-                <a:solidFill>
-                  <a:schemeClr val="bg1">
-                    <a:lumMod val="95000"/>
-                  </a:schemeClr>
-                </a:solidFill>
-              </a:rPr>
-            </a:br>
-            <a:r>
-              <a:rPr sz="1600" dirty="0">
-                <a:solidFill>
-                  <a:schemeClr val="bg1">
-                    <a:lumMod val="95000"/>
-                  </a:schemeClr>
-                </a:solidFill>
-              </a:rPr>
-              <a:t>    }</a:t>
-            </a:r>
-            <a:br>
-              <a:rPr sz="1600" dirty="0">
-                <a:solidFill>
-                  <a:schemeClr val="bg1">
-                    <a:lumMod val="95000"/>
-                  </a:schemeClr>
-                </a:solidFill>
-              </a:rPr>
-            </a:br>
-            <a:r>
-              <a:rPr sz="1600" dirty="0">
-                <a:solidFill>
-                  <a:schemeClr val="bg1">
-                    <a:lumMod val="95000"/>
-                  </a:schemeClr>
-                </a:solidFill>
-              </a:rPr>
-              <a:t>    defer </a:t>
-            </a:r>
-            <a:r>
-              <a:rPr sz="1600" dirty="0" err="1">
-                <a:solidFill>
-                  <a:schemeClr val="bg1">
-                    <a:lumMod val="95000"/>
-                  </a:schemeClr>
-                </a:solidFill>
-              </a:rPr>
-              <a:t>resultsIterator.Close</a:t>
-            </a:r>
-            <a:r>
-              <a:rPr sz="1600" dirty="0">
-                <a:solidFill>
-                  <a:schemeClr val="bg1">
-                    <a:lumMod val="95000"/>
-                  </a:schemeClr>
-                </a:solidFill>
-              </a:rPr>
-              <a:t>()</a:t>
-            </a:r>
-            <a:br>
-              <a:rPr sz="1600" dirty="0">
-                <a:solidFill>
-                  <a:schemeClr val="bg1">
-                    <a:lumMod val="95000"/>
-                  </a:schemeClr>
-                </a:solidFill>
-              </a:rPr>
-            </a:br>
-            <a:br>
-              <a:rPr sz="1600" dirty="0">
-                <a:solidFill>
-                  <a:schemeClr val="bg1">
-                    <a:lumMod val="95000"/>
-                  </a:schemeClr>
-                </a:solidFill>
-              </a:rPr>
-            </a:br>
-            <a:r>
-              <a:rPr sz="1600" dirty="0">
-                <a:solidFill>
-                  <a:schemeClr val="bg1">
-                    <a:lumMod val="95000"/>
-                  </a:schemeClr>
-                </a:solidFill>
-              </a:rPr>
-              <a:t>    // </a:t>
-            </a:r>
-            <a:r>
-              <a:rPr sz="1600" dirty="0" err="1">
-                <a:solidFill>
-                  <a:schemeClr val="bg1">
-                    <a:lumMod val="95000"/>
-                  </a:schemeClr>
-                </a:solidFill>
-              </a:rPr>
-              <a:t>Iterar</a:t>
-            </a:r>
-            <a:r>
-              <a:rPr sz="1600" dirty="0">
-                <a:solidFill>
-                  <a:schemeClr val="bg1">
-                    <a:lumMod val="95000"/>
-                  </a:schemeClr>
-                </a:solidFill>
-              </a:rPr>
-              <a:t> y </a:t>
-            </a:r>
-            <a:r>
-              <a:rPr sz="1600" dirty="0" err="1">
-                <a:solidFill>
-                  <a:schemeClr val="bg1">
-                    <a:lumMod val="95000"/>
-                  </a:schemeClr>
-                </a:solidFill>
-              </a:rPr>
-              <a:t>deserializar</a:t>
-            </a:r>
-            <a:r>
-              <a:rPr sz="1600" dirty="0">
-                <a:solidFill>
-                  <a:schemeClr val="bg1">
-                    <a:lumMod val="95000"/>
-                  </a:schemeClr>
-                </a:solidFill>
-              </a:rPr>
-              <a:t> </a:t>
-            </a:r>
-            <a:r>
-              <a:rPr sz="1600" dirty="0" err="1">
-                <a:solidFill>
-                  <a:schemeClr val="bg1">
-                    <a:lumMod val="95000"/>
-                  </a:schemeClr>
-                </a:solidFill>
-              </a:rPr>
-              <a:t>resultados</a:t>
-            </a:r>
-            <a:r>
-              <a:rPr sz="1600" dirty="0">
-                <a:solidFill>
-                  <a:schemeClr val="bg1">
-                    <a:lumMod val="95000"/>
-                  </a:schemeClr>
-                </a:solidFill>
-              </a:rPr>
-              <a:t>...</a:t>
-            </a:r>
-            <a:br>
-              <a:rPr sz="1600" dirty="0">
-                <a:solidFill>
-                  <a:schemeClr val="bg1">
-                    <a:lumMod val="95000"/>
-                  </a:schemeClr>
-                </a:solidFill>
-              </a:rPr>
-            </a:br>
+              <a:t>    // Iterar y deserializar resultados...</a:t>
+            </a:r>
+          </a:p>
+          <a:p>
+            <a:pPr/>
             <a:r>
               <a:rPr sz="1600" dirty="0">
                 <a:solidFill>
@@ -9109,7 +6516,7 @@
               </a:defRPr>
             </a:pPr>
             <a:r>
-              <a:t>GO</a:t>
+              <a:t>NODE.JS</a:t>
             </a:r>
           </a:p>
         </p:txBody>
@@ -9178,15 +6585,7 @@
           <a:bodyPr wrap="square"/>
           <a:lstStyle/>
           <a:p>
-            <a:br>
-              <a:rPr sz="1600" dirty="0">
-                <a:solidFill>
-                  <a:schemeClr val="bg1">
-                    <a:lumMod val="95000"/>
-                  </a:schemeClr>
-                </a:solidFill>
-              </a:rPr>
-            </a:br>
+            <a:pPr/>
             <a:r>
               <a:rPr sz="1600" dirty="0" err="1">
                 <a:solidFill>
@@ -9195,18 +6594,11 @@
                   </a:schemeClr>
                 </a:solidFill>
               </a:rPr>
-              <a:t>func</a:t>
-            </a:r>
-            <a:r>
-              <a:rPr sz="1600" dirty="0">
-                <a:solidFill>
-                  <a:schemeClr val="bg1">
-                    <a:lumMod val="95000"/>
-                  </a:schemeClr>
-                </a:solidFill>
-              </a:rPr>
-              <a:t> (s *</a:t>
-            </a:r>
+              <a:t>async CreateProperty(ctx, id, address, owner,</a:t>
+            </a:r>
+          </a:p>
+          <a:p>
+            <a:pPr/>
             <a:r>
               <a:rPr sz="1600" dirty="0" err="1">
                 <a:solidFill>
@@ -9215,18 +6607,11 @@
                   </a:schemeClr>
                 </a:solidFill>
               </a:rPr>
-              <a:t>SmartContract</a:t>
-            </a:r>
-            <a:r>
-              <a:rPr sz="1600" dirty="0">
-                <a:solidFill>
-                  <a:schemeClr val="bg1">
-                    <a:lumMod val="95000"/>
-                  </a:schemeClr>
-                </a:solidFill>
-              </a:rPr>
-              <a:t>) </a:t>
-            </a:r>
+              <a:t>    area, propType, value) {</a:t>
+            </a:r>
+          </a:p>
+          <a:p>
+            <a:pPr/>
             <a:r>
               <a:rPr sz="1600" dirty="0" err="1">
                 <a:solidFill>
@@ -9235,18 +6620,11 @@
                   </a:schemeClr>
                 </a:solidFill>
               </a:rPr>
-              <a:t>CreateProperty</a:t>
-            </a:r>
-            <a:r>
-              <a:rPr sz="1600" dirty="0">
-                <a:solidFill>
-                  <a:schemeClr val="bg1">
-                    <a:lumMod val="95000"/>
-                  </a:schemeClr>
-                </a:solidFill>
-              </a:rPr>
-              <a:t>(</a:t>
-            </a:r>
+              <a:t/>
+            </a:r>
+          </a:p>
+          <a:p>
+            <a:pPr/>
             <a:r>
               <a:rPr sz="1600" dirty="0" err="1">
                 <a:solidFill>
@@ -9255,18 +6633,11 @@
                   </a:schemeClr>
                 </a:solidFill>
               </a:rPr>
-              <a:t>ctx</a:t>
-            </a:r>
-            <a:r>
-              <a:rPr sz="1600" dirty="0">
-                <a:solidFill>
-                  <a:schemeClr val="bg1">
-                    <a:lumMod val="95000"/>
-                  </a:schemeClr>
-                </a:solidFill>
-              </a:rPr>
-              <a:t> </a:t>
-            </a:r>
+              <a:t>    // Verificar que no existe</a:t>
+            </a:r>
+          </a:p>
+          <a:p>
+            <a:pPr/>
             <a:r>
               <a:rPr sz="1600" dirty="0" err="1">
                 <a:solidFill>
@@ -9275,56 +6646,11 @@
                   </a:schemeClr>
                 </a:solidFill>
               </a:rPr>
-              <a:t>contractapi.TransactionContextInterface</a:t>
-            </a:r>
-            <a:r>
-              <a:rPr sz="1600" dirty="0">
-                <a:solidFill>
-                  <a:schemeClr val="bg1">
-                    <a:lumMod val="95000"/>
-                  </a:schemeClr>
-                </a:solidFill>
-              </a:rPr>
-              <a:t>,</a:t>
-            </a:r>
-            <a:br>
-              <a:rPr sz="1600" dirty="0">
-                <a:solidFill>
-                  <a:schemeClr val="bg1">
-                    <a:lumMod val="95000"/>
-                  </a:schemeClr>
-                </a:solidFill>
-              </a:rPr>
-            </a:br>
-            <a:r>
-              <a:rPr sz="1600" dirty="0">
-                <a:solidFill>
-                  <a:schemeClr val="bg1">
-                    <a:lumMod val="95000"/>
-                  </a:schemeClr>
-                </a:solidFill>
-              </a:rPr>
-              <a:t>    id string, address string, owner string, area int,</a:t>
-            </a:r>
-            <a:br>
-              <a:rPr sz="1600" dirty="0">
-                <a:solidFill>
-                  <a:schemeClr val="bg1">
-                    <a:lumMod val="95000"/>
-                  </a:schemeClr>
-                </a:solidFill>
-              </a:rPr>
-            </a:br>
-            <a:r>
-              <a:rPr sz="1600" dirty="0">
-                <a:solidFill>
-                  <a:schemeClr val="bg1">
-                    <a:lumMod val="95000"/>
-                  </a:schemeClr>
-                </a:solidFill>
-              </a:rPr>
-              <a:t>    </a:t>
-            </a:r>
+              <a:t>    const existing = await ctx.stub.getState(id);</a:t>
+            </a:r>
+          </a:p>
+          <a:p>
+            <a:pPr/>
             <a:r>
               <a:rPr sz="1600" dirty="0" err="1">
                 <a:solidFill>
@@ -9333,46 +6659,11 @@
                   </a:schemeClr>
                 </a:solidFill>
               </a:rPr>
-              <a:t>propType</a:t>
-            </a:r>
-            <a:r>
-              <a:rPr sz="1600" dirty="0">
-                <a:solidFill>
-                  <a:schemeClr val="bg1">
-                    <a:lumMod val="95000"/>
-                  </a:schemeClr>
-                </a:solidFill>
-              </a:rPr>
-              <a:t> string, value int) error {</a:t>
-            </a:r>
-            <a:br>
-              <a:rPr sz="1600" dirty="0">
-                <a:solidFill>
-                  <a:schemeClr val="bg1">
-                    <a:lumMod val="95000"/>
-                  </a:schemeClr>
-                </a:solidFill>
-              </a:rPr>
-            </a:br>
-            <a:br>
-              <a:rPr sz="1600" dirty="0">
-                <a:solidFill>
-                  <a:schemeClr val="bg1">
-                    <a:lumMod val="95000"/>
-                  </a:schemeClr>
-                </a:solidFill>
-              </a:rPr>
-            </a:br>
-            <a:r>
-              <a:rPr sz="1600" dirty="0">
-                <a:solidFill>
-                  <a:schemeClr val="bg1">
-                    <a:lumMod val="95000"/>
-                  </a:schemeClr>
-                </a:solidFill>
-              </a:rPr>
-              <a:t>    // </a:t>
-            </a:r>
+              <a:t>    if (existing &amp;&amp; existing.length &gt; 0) {</a:t>
+            </a:r>
+          </a:p>
+          <a:p>
+            <a:pPr/>
             <a:r>
               <a:rPr sz="1600" dirty="0" err="1">
                 <a:solidFill>
@@ -9381,18 +6672,11 @@
                   </a:schemeClr>
                 </a:solidFill>
               </a:rPr>
-              <a:t>Verificar</a:t>
-            </a:r>
-            <a:r>
-              <a:rPr sz="1600" dirty="0">
-                <a:solidFill>
-                  <a:schemeClr val="bg1">
-                    <a:lumMod val="95000"/>
-                  </a:schemeClr>
-                </a:solidFill>
-              </a:rPr>
-              <a:t> </a:t>
-            </a:r>
+              <a:t>        throw new Error(</a:t>
+            </a:r>
+          </a:p>
+          <a:p>
+            <a:pPr/>
             <a:r>
               <a:rPr sz="1600" dirty="0" err="1">
                 <a:solidFill>
@@ -9401,18 +6685,11 @@
                   </a:schemeClr>
                 </a:solidFill>
               </a:rPr>
-              <a:t>que</a:t>
-            </a:r>
-            <a:r>
-              <a:rPr sz="1600" dirty="0">
-                <a:solidFill>
-                  <a:schemeClr val="bg1">
-                    <a:lumMod val="95000"/>
-                  </a:schemeClr>
-                </a:solidFill>
-              </a:rPr>
-              <a:t> no </a:t>
-            </a:r>
+              <a:t>            `property ${id} already exists`);</a:t>
+            </a:r>
+          </a:p>
+          <a:p>
+            <a:pPr/>
             <a:r>
               <a:rPr sz="1600" dirty="0" err="1">
                 <a:solidFill>
@@ -9421,248 +6698,7 @@
                   </a:schemeClr>
                 </a:solidFill>
               </a:rPr>
-              <a:t>existe</a:t>
-            </a:r>
-            <a:br>
-              <a:rPr sz="1600" dirty="0">
-                <a:solidFill>
-                  <a:schemeClr val="bg1">
-                    <a:lumMod val="95000"/>
-                  </a:schemeClr>
-                </a:solidFill>
-              </a:rPr>
-            </a:br>
-            <a:r>
-              <a:rPr sz="1600" dirty="0">
-                <a:solidFill>
-                  <a:schemeClr val="bg1">
-                    <a:lumMod val="95000"/>
-                  </a:schemeClr>
-                </a:solidFill>
-              </a:rPr>
-              <a:t>    existing, err := </a:t>
-            </a:r>
-            <a:r>
-              <a:rPr sz="1600" dirty="0" err="1">
-                <a:solidFill>
-                  <a:schemeClr val="bg1">
-                    <a:lumMod val="95000"/>
-                  </a:schemeClr>
-                </a:solidFill>
-              </a:rPr>
-              <a:t>ctx.GetStub</a:t>
-            </a:r>
-            <a:r>
-              <a:rPr sz="1600" dirty="0">
-                <a:solidFill>
-                  <a:schemeClr val="bg1">
-                    <a:lumMod val="95000"/>
-                  </a:schemeClr>
-                </a:solidFill>
-              </a:rPr>
-              <a:t>().</a:t>
-            </a:r>
-            <a:r>
-              <a:rPr sz="1600" dirty="0" err="1">
-                <a:solidFill>
-                  <a:schemeClr val="bg1">
-                    <a:lumMod val="95000"/>
-                  </a:schemeClr>
-                </a:solidFill>
-              </a:rPr>
-              <a:t>GetState</a:t>
-            </a:r>
-            <a:r>
-              <a:rPr sz="1600" dirty="0">
-                <a:solidFill>
-                  <a:schemeClr val="bg1">
-                    <a:lumMod val="95000"/>
-                  </a:schemeClr>
-                </a:solidFill>
-              </a:rPr>
-              <a:t>(id)</a:t>
-            </a:r>
-            <a:br>
-              <a:rPr sz="1600" dirty="0">
-                <a:solidFill>
-                  <a:schemeClr val="bg1">
-                    <a:lumMod val="95000"/>
-                  </a:schemeClr>
-                </a:solidFill>
-              </a:rPr>
-            </a:br>
-            <a:r>
-              <a:rPr sz="1600" dirty="0">
-                <a:solidFill>
-                  <a:schemeClr val="bg1">
-                    <a:lumMod val="95000"/>
-                  </a:schemeClr>
-                </a:solidFill>
-              </a:rPr>
-              <a:t>    if err != nil {</a:t>
-            </a:r>
-            <a:br>
-              <a:rPr sz="1600" dirty="0">
-                <a:solidFill>
-                  <a:schemeClr val="bg1">
-                    <a:lumMod val="95000"/>
-                  </a:schemeClr>
-                </a:solidFill>
-              </a:rPr>
-            </a:br>
-            <a:r>
-              <a:rPr sz="1600" dirty="0">
-                <a:solidFill>
-                  <a:schemeClr val="bg1">
-                    <a:lumMod val="95000"/>
-                  </a:schemeClr>
-                </a:solidFill>
-              </a:rPr>
-              <a:t>        return </a:t>
-            </a:r>
-            <a:r>
-              <a:rPr sz="1600" dirty="0" err="1">
-                <a:solidFill>
-                  <a:schemeClr val="bg1">
-                    <a:lumMod val="95000"/>
-                  </a:schemeClr>
-                </a:solidFill>
-              </a:rPr>
-              <a:t>fmt.Errorf</a:t>
-            </a:r>
-            <a:r>
-              <a:rPr sz="1600" dirty="0">
-                <a:solidFill>
-                  <a:schemeClr val="bg1">
-                    <a:lumMod val="95000"/>
-                  </a:schemeClr>
-                </a:solidFill>
-              </a:rPr>
-              <a:t>("error reading state: %v", err)</a:t>
-            </a:r>
-            <a:br>
-              <a:rPr sz="1600" dirty="0">
-                <a:solidFill>
-                  <a:schemeClr val="bg1">
-                    <a:lumMod val="95000"/>
-                  </a:schemeClr>
-                </a:solidFill>
-              </a:rPr>
-            </a:br>
-            <a:r>
-              <a:rPr sz="1600" dirty="0">
-                <a:solidFill>
-                  <a:schemeClr val="bg1">
-                    <a:lumMod val="95000"/>
-                  </a:schemeClr>
-                </a:solidFill>
-              </a:rPr>
               <a:t>    }</a:t>
-            </a:r>
-            <a:br>
-              <a:rPr sz="1600" dirty="0">
-                <a:solidFill>
-                  <a:schemeClr val="bg1">
-                    <a:lumMod val="95000"/>
-                  </a:schemeClr>
-                </a:solidFill>
-              </a:rPr>
-            </a:br>
-            <a:r>
-              <a:rPr sz="1600" dirty="0">
-                <a:solidFill>
-                  <a:schemeClr val="bg1">
-                    <a:lumMod val="95000"/>
-                  </a:schemeClr>
-                </a:solidFill>
-              </a:rPr>
-              <a:t>    if existing != nil {</a:t>
-            </a:r>
-            <a:br>
-              <a:rPr sz="1600" dirty="0">
-                <a:solidFill>
-                  <a:schemeClr val="bg1">
-                    <a:lumMod val="95000"/>
-                  </a:schemeClr>
-                </a:solidFill>
-              </a:rPr>
-            </a:br>
-            <a:r>
-              <a:rPr sz="1600" dirty="0">
-                <a:solidFill>
-                  <a:schemeClr val="bg1">
-                    <a:lumMod val="95000"/>
-                  </a:schemeClr>
-                </a:solidFill>
-              </a:rPr>
-              <a:t>        return </a:t>
-            </a:r>
-            <a:r>
-              <a:rPr sz="1600" dirty="0" err="1">
-                <a:solidFill>
-                  <a:schemeClr val="bg1">
-                    <a:lumMod val="95000"/>
-                  </a:schemeClr>
-                </a:solidFill>
-              </a:rPr>
-              <a:t>fmt.Errorf</a:t>
-            </a:r>
-            <a:r>
-              <a:rPr sz="1600" dirty="0">
-                <a:solidFill>
-                  <a:schemeClr val="bg1">
-                    <a:lumMod val="95000"/>
-                  </a:schemeClr>
-                </a:solidFill>
-              </a:rPr>
-              <a:t>("property %s already exists", id)</a:t>
-            </a:r>
-            <a:br>
-              <a:rPr sz="1600" dirty="0">
-                <a:solidFill>
-                  <a:schemeClr val="bg1">
-                    <a:lumMod val="95000"/>
-                  </a:schemeClr>
-                </a:solidFill>
-              </a:rPr>
-            </a:br>
-            <a:r>
-              <a:rPr sz="1600" dirty="0">
-                <a:solidFill>
-                  <a:schemeClr val="bg1">
-                    <a:lumMod val="95000"/>
-                  </a:schemeClr>
-                </a:solidFill>
-              </a:rPr>
-              <a:t>    }</a:t>
-            </a:r>
-            <a:br>
-              <a:rPr sz="1600" dirty="0">
-                <a:solidFill>
-                  <a:schemeClr val="bg1">
-                    <a:lumMod val="95000"/>
-                  </a:schemeClr>
-                </a:solidFill>
-              </a:rPr>
-            </a:br>
-            <a:br>
-              <a:rPr sz="1600" dirty="0">
-                <a:solidFill>
-                  <a:schemeClr val="bg1">
-                    <a:lumMod val="95000"/>
-                  </a:schemeClr>
-                </a:solidFill>
-              </a:rPr>
-            </a:br>
-            <a:r>
-              <a:rPr sz="1600" dirty="0">
-                <a:solidFill>
-                  <a:schemeClr val="bg1">
-                    <a:lumMod val="95000"/>
-                  </a:schemeClr>
-                </a:solidFill>
-              </a:rPr>
-              <a:t>    </a:t>
             </a:r>
           </a:p>
         </p:txBody>
@@ -9695,6 +6731,7 @@
           </a:bodyPr>
           <a:lstStyle/>
           <a:p>
+            <a:pPr/>
             <a:r>
               <a:rPr lang="es-ES" sz="1600" dirty="0" err="1">
                 <a:solidFill>
@@ -9703,18 +6740,11 @@
                   </a:schemeClr>
                 </a:solidFill>
               </a:rPr>
-              <a:t>property</a:t>
-            </a:r>
-            <a:r>
-              <a:rPr lang="es-ES" sz="1600" dirty="0">
-                <a:solidFill>
-                  <a:schemeClr val="bg1">
-                    <a:lumMod val="95000"/>
-                  </a:schemeClr>
-                </a:solidFill>
-              </a:rPr>
-              <a:t> := </a:t>
-            </a:r>
+              <a:t>    const property = {</a:t>
+            </a:r>
+          </a:p>
+          <a:p>
+            <a:pPr/>
             <a:r>
               <a:rPr lang="es-ES" sz="1600" dirty="0" err="1">
                 <a:solidFill>
@@ -9723,37 +6753,11 @@
                   </a:schemeClr>
                 </a:solidFill>
               </a:rPr>
-              <a:t>Property</a:t>
-            </a:r>
-            <a:r>
-              <a:rPr lang="es-ES" sz="1600" dirty="0">
-                <a:solidFill>
-                  <a:schemeClr val="bg1">
-                    <a:lumMod val="95000"/>
-                  </a:schemeClr>
-                </a:solidFill>
-              </a:rPr>
-              <a:t>{</a:t>
-            </a:r>
-            <a:br>
-              <a:rPr lang="es-ES" sz="1600" dirty="0">
-                <a:solidFill>
-                  <a:schemeClr val="bg1">
-                    <a:lumMod val="95000"/>
-                  </a:schemeClr>
-                </a:solidFill>
-              </a:rPr>
-            </a:br>
-            <a:r>
-              <a:rPr lang="es-ES" sz="1600" dirty="0">
-                <a:solidFill>
-                  <a:schemeClr val="bg1">
-                    <a:lumMod val="95000"/>
-                  </a:schemeClr>
-                </a:solidFill>
-              </a:rPr>
-              <a:t>        </a:t>
-            </a:r>
+              <a:t>        docType: 'property',</a:t>
+            </a:r>
+          </a:p>
+          <a:p>
+            <a:pPr/>
             <a:r>
               <a:rPr lang="es-ES" sz="1600" dirty="0" err="1">
                 <a:solidFill>
@@ -9762,18 +6766,11 @@
                   </a:schemeClr>
                 </a:solidFill>
               </a:rPr>
-              <a:t>DocType</a:t>
-            </a:r>
-            <a:r>
-              <a:rPr lang="es-ES" sz="1600" dirty="0">
-                <a:solidFill>
-                  <a:schemeClr val="bg1">
-                    <a:lumMod val="95000"/>
-                  </a:schemeClr>
-                </a:solidFill>
-              </a:rPr>
-              <a:t>:        "</a:t>
-            </a:r>
+              <a:t>        id,</a:t>
+            </a:r>
+          </a:p>
+          <a:p>
+            <a:pPr/>
             <a:r>
               <a:rPr lang="es-ES" sz="1600" dirty="0" err="1">
                 <a:solidFill>
@@ -9782,56 +6779,11 @@
                   </a:schemeClr>
                 </a:solidFill>
               </a:rPr>
-              <a:t>property</a:t>
-            </a:r>
-            <a:r>
-              <a:rPr lang="es-ES" sz="1600" dirty="0">
-                <a:solidFill>
-                  <a:schemeClr val="bg1">
-                    <a:lumMod val="95000"/>
-                  </a:schemeClr>
-                </a:solidFill>
-              </a:rPr>
-              <a:t>",</a:t>
-            </a:r>
-            <a:br>
-              <a:rPr lang="es-ES" sz="1600" dirty="0">
-                <a:solidFill>
-                  <a:schemeClr val="bg1">
-                    <a:lumMod val="95000"/>
-                  </a:schemeClr>
-                </a:solidFill>
-              </a:rPr>
-            </a:br>
-            <a:r>
-              <a:rPr lang="es-ES" sz="1600" dirty="0">
-                <a:solidFill>
-                  <a:schemeClr val="bg1">
-                    <a:lumMod val="95000"/>
-                  </a:schemeClr>
-                </a:solidFill>
-              </a:rPr>
-              <a:t>        ID:             id,</a:t>
-            </a:r>
-            <a:br>
-              <a:rPr lang="es-ES" sz="1600" dirty="0">
-                <a:solidFill>
-                  <a:schemeClr val="bg1">
-                    <a:lumMod val="95000"/>
-                  </a:schemeClr>
-                </a:solidFill>
-              </a:rPr>
-            </a:br>
-            <a:r>
-              <a:rPr lang="es-ES" sz="1600" dirty="0">
-                <a:solidFill>
-                  <a:schemeClr val="bg1">
-                    <a:lumMod val="95000"/>
-                  </a:schemeClr>
-                </a:solidFill>
-              </a:rPr>
-              <a:t>        </a:t>
-            </a:r>
+              <a:t>        address,</a:t>
+            </a:r>
+          </a:p>
+          <a:p>
+            <a:pPr/>
             <a:r>
               <a:rPr lang="es-ES" sz="1600" dirty="0" err="1">
                 <a:solidFill>
@@ -9840,18 +6792,11 @@
                   </a:schemeClr>
                 </a:solidFill>
               </a:rPr>
-              <a:t>Address</a:t>
-            </a:r>
-            <a:r>
-              <a:rPr lang="es-ES" sz="1600" dirty="0">
-                <a:solidFill>
-                  <a:schemeClr val="bg1">
-                    <a:lumMod val="95000"/>
-                  </a:schemeClr>
-                </a:solidFill>
-              </a:rPr>
-              <a:t>:        </a:t>
-            </a:r>
+              <a:t>        owner,</a:t>
+            </a:r>
+          </a:p>
+          <a:p>
+            <a:pPr/>
             <a:r>
               <a:rPr lang="es-ES" sz="1600" dirty="0" err="1">
                 <a:solidFill>
@@ -9860,37 +6805,11 @@
                   </a:schemeClr>
                 </a:solidFill>
               </a:rPr>
-              <a:t>address</a:t>
-            </a:r>
-            <a:r>
-              <a:rPr lang="es-ES" sz="1600" dirty="0">
-                <a:solidFill>
-                  <a:schemeClr val="bg1">
-                    <a:lumMod val="95000"/>
-                  </a:schemeClr>
-                </a:solidFill>
-              </a:rPr>
-              <a:t>,</a:t>
-            </a:r>
-            <a:br>
-              <a:rPr lang="es-ES" sz="1600" dirty="0">
-                <a:solidFill>
-                  <a:schemeClr val="bg1">
-                    <a:lumMod val="95000"/>
-                  </a:schemeClr>
-                </a:solidFill>
-              </a:rPr>
-            </a:br>
-            <a:r>
-              <a:rPr lang="es-ES" sz="1600" dirty="0">
-                <a:solidFill>
-                  <a:schemeClr val="bg1">
-                    <a:lumMod val="95000"/>
-                  </a:schemeClr>
-                </a:solidFill>
-              </a:rPr>
-              <a:t>        </a:t>
-            </a:r>
+              <a:t>        area: parseInt(area),</a:t>
+            </a:r>
+          </a:p>
+          <a:p>
+            <a:pPr/>
             <a:r>
               <a:rPr lang="es-ES" sz="1600" dirty="0" err="1">
                 <a:solidFill>
@@ -9899,18 +6818,11 @@
                   </a:schemeClr>
                 </a:solidFill>
               </a:rPr>
-              <a:t>Owner</a:t>
-            </a:r>
-            <a:r>
-              <a:rPr lang="es-ES" sz="1600" dirty="0">
-                <a:solidFill>
-                  <a:schemeClr val="bg1">
-                    <a:lumMod val="95000"/>
-                  </a:schemeClr>
-                </a:solidFill>
-              </a:rPr>
-              <a:t>:          </a:t>
-            </a:r>
+              <a:t>        propertyType: propType,</a:t>
+            </a:r>
+          </a:p>
+          <a:p>
+            <a:pPr/>
             <a:r>
               <a:rPr lang="es-ES" sz="1600" dirty="0" err="1">
                 <a:solidFill>
@@ -9919,37 +6831,11 @@
                   </a:schemeClr>
                 </a:solidFill>
               </a:rPr>
-              <a:t>owner</a:t>
-            </a:r>
-            <a:r>
-              <a:rPr lang="es-ES" sz="1600" dirty="0">
-                <a:solidFill>
-                  <a:schemeClr val="bg1">
-                    <a:lumMod val="95000"/>
-                  </a:schemeClr>
-                </a:solidFill>
-              </a:rPr>
-              <a:t>,</a:t>
-            </a:r>
-            <a:br>
-              <a:rPr lang="es-ES" sz="1600" dirty="0">
-                <a:solidFill>
-                  <a:schemeClr val="bg1">
-                    <a:lumMod val="95000"/>
-                  </a:schemeClr>
-                </a:solidFill>
-              </a:rPr>
-            </a:br>
-            <a:r>
-              <a:rPr lang="es-ES" sz="1600" dirty="0">
-                <a:solidFill>
-                  <a:schemeClr val="bg1">
-                    <a:lumMod val="95000"/>
-                  </a:schemeClr>
-                </a:solidFill>
-              </a:rPr>
-              <a:t>        </a:t>
-            </a:r>
+              <a:t>        status: 'active',</a:t>
+            </a:r>
+          </a:p>
+          <a:p>
+            <a:pPr/>
             <a:r>
               <a:rPr lang="es-ES" sz="1600" dirty="0" err="1">
                 <a:solidFill>
@@ -9958,18 +6844,11 @@
                   </a:schemeClr>
                 </a:solidFill>
               </a:rPr>
-              <a:t>Area</a:t>
-            </a:r>
-            <a:r>
-              <a:rPr lang="es-ES" sz="1600" dirty="0">
-                <a:solidFill>
-                  <a:schemeClr val="bg1">
-                    <a:lumMod val="95000"/>
-                  </a:schemeClr>
-                </a:solidFill>
-              </a:rPr>
-              <a:t>:           </a:t>
-            </a:r>
+              <a:t>        appraisalValue: parseInt(value)</a:t>
+            </a:r>
+          </a:p>
+          <a:p>
+            <a:pPr/>
             <a:r>
               <a:rPr lang="es-ES" sz="1600" dirty="0" err="1">
                 <a:solidFill>
@@ -9978,37 +6857,11 @@
                   </a:schemeClr>
                 </a:solidFill>
               </a:rPr>
-              <a:t>area</a:t>
-            </a:r>
-            <a:r>
-              <a:rPr lang="es-ES" sz="1600" dirty="0">
-                <a:solidFill>
-                  <a:schemeClr val="bg1">
-                    <a:lumMod val="95000"/>
-                  </a:schemeClr>
-                </a:solidFill>
-              </a:rPr>
-              <a:t>,</a:t>
-            </a:r>
-            <a:br>
-              <a:rPr lang="es-ES" sz="1600" dirty="0">
-                <a:solidFill>
-                  <a:schemeClr val="bg1">
-                    <a:lumMod val="95000"/>
-                  </a:schemeClr>
-                </a:solidFill>
-              </a:rPr>
-            </a:br>
-            <a:r>
-              <a:rPr lang="es-ES" sz="1600" dirty="0">
-                <a:solidFill>
-                  <a:schemeClr val="bg1">
-                    <a:lumMod val="95000"/>
-                  </a:schemeClr>
-                </a:solidFill>
-              </a:rPr>
-              <a:t>        </a:t>
-            </a:r>
+              <a:t>    };</a:t>
+            </a:r>
+          </a:p>
+          <a:p>
+            <a:pPr/>
             <a:r>
               <a:rPr lang="es-ES" sz="1600" dirty="0" err="1">
                 <a:solidFill>
@@ -10017,18 +6870,11 @@
                   </a:schemeClr>
                 </a:solidFill>
               </a:rPr>
-              <a:t>PropertyType</a:t>
-            </a:r>
-            <a:r>
-              <a:rPr lang="es-ES" sz="1600" dirty="0">
-                <a:solidFill>
-                  <a:schemeClr val="bg1">
-                    <a:lumMod val="95000"/>
-                  </a:schemeClr>
-                </a:solidFill>
-              </a:rPr>
-              <a:t>:   </a:t>
-            </a:r>
+              <a:t/>
+            </a:r>
+          </a:p>
+          <a:p>
+            <a:pPr/>
             <a:r>
               <a:rPr lang="es-ES" sz="1600" dirty="0" err="1">
                 <a:solidFill>
@@ -10037,56 +6883,11 @@
                   </a:schemeClr>
                 </a:solidFill>
               </a:rPr>
-              <a:t>propType</a:t>
-            </a:r>
-            <a:r>
-              <a:rPr lang="es-ES" sz="1600" dirty="0">
-                <a:solidFill>
-                  <a:schemeClr val="bg1">
-                    <a:lumMod val="95000"/>
-                  </a:schemeClr>
-                </a:solidFill>
-              </a:rPr>
-              <a:t>,</a:t>
-            </a:r>
-            <a:br>
-              <a:rPr lang="es-ES" sz="1600" dirty="0">
-                <a:solidFill>
-                  <a:schemeClr val="bg1">
-                    <a:lumMod val="95000"/>
-                  </a:schemeClr>
-                </a:solidFill>
-              </a:rPr>
-            </a:br>
-            <a:r>
-              <a:rPr lang="es-ES" sz="1600" dirty="0">
-                <a:solidFill>
-                  <a:schemeClr val="bg1">
-                    <a:lumMod val="95000"/>
-                  </a:schemeClr>
-                </a:solidFill>
-              </a:rPr>
-              <a:t>        Status:         "active",</a:t>
-            </a:r>
-            <a:br>
-              <a:rPr lang="es-ES" sz="1600" dirty="0">
-                <a:solidFill>
-                  <a:schemeClr val="bg1">
-                    <a:lumMod val="95000"/>
-                  </a:schemeClr>
-                </a:solidFill>
-              </a:rPr>
-            </a:br>
-            <a:r>
-              <a:rPr lang="es-ES" sz="1600" dirty="0">
-                <a:solidFill>
-                  <a:schemeClr val="bg1">
-                    <a:lumMod val="95000"/>
-                  </a:schemeClr>
-                </a:solidFill>
-              </a:rPr>
-              <a:t>        </a:t>
-            </a:r>
+              <a:t>    await ctx.stub.putState(id,</a:t>
+            </a:r>
+          </a:p>
+          <a:p>
+            <a:pPr/>
             <a:r>
               <a:rPr lang="es-ES" sz="1600" dirty="0" err="1">
                 <a:solidFill>
@@ -10095,18 +6896,11 @@
                   </a:schemeClr>
                 </a:solidFill>
               </a:rPr>
-              <a:t>AppraisalValue</a:t>
-            </a:r>
-            <a:r>
-              <a:rPr lang="es-ES" sz="1600" dirty="0">
-                <a:solidFill>
-                  <a:schemeClr val="bg1">
-                    <a:lumMod val="95000"/>
-                  </a:schemeClr>
-                </a:solidFill>
-              </a:rPr>
-              <a:t>: </a:t>
-            </a:r>
+              <a:t>        Buffer.from(JSON.stringify(property)));</a:t>
+            </a:r>
+          </a:p>
+          <a:p>
+            <a:pPr/>
             <a:r>
               <a:rPr lang="es-ES" sz="1600" dirty="0" err="1">
                 <a:solidFill>
@@ -10115,244 +6909,8 @@
                   </a:schemeClr>
                 </a:solidFill>
               </a:rPr>
-              <a:t>value</a:t>
-            </a:r>
-            <a:r>
-              <a:rPr lang="es-ES" sz="1600" dirty="0">
-                <a:solidFill>
-                  <a:schemeClr val="bg1">
-                    <a:lumMod val="95000"/>
-                  </a:schemeClr>
-                </a:solidFill>
-              </a:rPr>
-              <a:t>,</a:t>
-            </a:r>
-            <a:br>
-              <a:rPr lang="es-ES" sz="1600" dirty="0">
-                <a:solidFill>
-                  <a:schemeClr val="bg1">
-                    <a:lumMod val="95000"/>
-                  </a:schemeClr>
-                </a:solidFill>
-              </a:rPr>
-            </a:br>
-            <a:r>
-              <a:rPr lang="es-ES" sz="1600" dirty="0">
-                <a:solidFill>
-                  <a:schemeClr val="bg1">
-                    <a:lumMod val="95000"/>
-                  </a:schemeClr>
-                </a:solidFill>
-              </a:rPr>
-              <a:t>    }</a:t>
-            </a:r>
-            <a:br>
-              <a:rPr lang="es-ES" sz="1600" dirty="0">
-                <a:solidFill>
-                  <a:schemeClr val="bg1">
-                    <a:lumMod val="95000"/>
-                  </a:schemeClr>
-                </a:solidFill>
-              </a:rPr>
-            </a:br>
-            <a:br>
-              <a:rPr lang="es-ES" sz="1600" dirty="0">
-                <a:solidFill>
-                  <a:schemeClr val="bg1">
-                    <a:lumMod val="95000"/>
-                  </a:schemeClr>
-                </a:solidFill>
-              </a:rPr>
-            </a:br>
-            <a:r>
-              <a:rPr lang="es-ES" sz="1600" dirty="0">
-                <a:solidFill>
-                  <a:schemeClr val="bg1">
-                    <a:lumMod val="95000"/>
-                  </a:schemeClr>
-                </a:solidFill>
-              </a:rPr>
-              <a:t>    </a:t>
-            </a:r>
-            <a:r>
-              <a:rPr lang="es-ES" sz="1600" dirty="0" err="1">
-                <a:solidFill>
-                  <a:schemeClr val="bg1">
-                    <a:lumMod val="95000"/>
-                  </a:schemeClr>
-                </a:solidFill>
-              </a:rPr>
-              <a:t>propertyJSON</a:t>
-            </a:r>
-            <a:r>
-              <a:rPr lang="es-ES" sz="1600" dirty="0">
-                <a:solidFill>
-                  <a:schemeClr val="bg1">
-                    <a:lumMod val="95000"/>
-                  </a:schemeClr>
-                </a:solidFill>
-              </a:rPr>
-              <a:t>, _ := </a:t>
-            </a:r>
-            <a:r>
-              <a:rPr lang="es-ES" sz="1600" dirty="0" err="1">
-                <a:solidFill>
-                  <a:schemeClr val="bg1">
-                    <a:lumMod val="95000"/>
-                  </a:schemeClr>
-                </a:solidFill>
-              </a:rPr>
-              <a:t>json.Marshal</a:t>
-            </a:r>
-            <a:r>
-              <a:rPr lang="es-ES" sz="1600" dirty="0">
-                <a:solidFill>
-                  <a:schemeClr val="bg1">
-                    <a:lumMod val="95000"/>
-                  </a:schemeClr>
-                </a:solidFill>
-              </a:rPr>
-              <a:t>(</a:t>
-            </a:r>
-            <a:r>
-              <a:rPr lang="es-ES" sz="1600" dirty="0" err="1">
-                <a:solidFill>
-                  <a:schemeClr val="bg1">
-                    <a:lumMod val="95000"/>
-                  </a:schemeClr>
-                </a:solidFill>
-              </a:rPr>
-              <a:t>property</a:t>
-            </a:r>
-            <a:r>
-              <a:rPr lang="es-ES" sz="1600" dirty="0">
-                <a:solidFill>
-                  <a:schemeClr val="bg1">
-                    <a:lumMod val="95000"/>
-                  </a:schemeClr>
-                </a:solidFill>
-              </a:rPr>
-              <a:t>)</a:t>
-            </a:r>
-            <a:br>
-              <a:rPr lang="es-ES" sz="1600" dirty="0">
-                <a:solidFill>
-                  <a:schemeClr val="bg1">
-                    <a:lumMod val="95000"/>
-                  </a:schemeClr>
-                </a:solidFill>
-              </a:rPr>
-            </a:br>
-            <a:r>
-              <a:rPr lang="es-ES" sz="1600" dirty="0">
-                <a:solidFill>
-                  <a:schemeClr val="bg1">
-                    <a:lumMod val="95000"/>
-                  </a:schemeClr>
-                </a:solidFill>
-              </a:rPr>
-              <a:t>    </a:t>
-            </a:r>
-            <a:r>
-              <a:rPr lang="es-ES" sz="1600" dirty="0" err="1">
-                <a:solidFill>
-                  <a:schemeClr val="bg1">
-                    <a:lumMod val="95000"/>
-                  </a:schemeClr>
-                </a:solidFill>
-              </a:rPr>
-              <a:t>return</a:t>
-            </a:r>
-            <a:r>
-              <a:rPr lang="es-ES" sz="1600" dirty="0">
-                <a:solidFill>
-                  <a:schemeClr val="bg1">
-                    <a:lumMod val="95000"/>
-                  </a:schemeClr>
-                </a:solidFill>
-              </a:rPr>
-              <a:t> </a:t>
-            </a:r>
-            <a:r>
-              <a:rPr lang="es-ES" sz="1600" dirty="0" err="1">
-                <a:solidFill>
-                  <a:schemeClr val="bg1">
-                    <a:lumMod val="95000"/>
-                  </a:schemeClr>
-                </a:solidFill>
-              </a:rPr>
-              <a:t>ctx.GetStub</a:t>
-            </a:r>
-            <a:r>
-              <a:rPr lang="es-ES" sz="1600" dirty="0">
-                <a:solidFill>
-                  <a:schemeClr val="bg1">
-                    <a:lumMod val="95000"/>
-                  </a:schemeClr>
-                </a:solidFill>
-              </a:rPr>
-              <a:t>().</a:t>
-            </a:r>
-            <a:r>
-              <a:rPr lang="es-ES" sz="1600" dirty="0" err="1">
-                <a:solidFill>
-                  <a:schemeClr val="bg1">
-                    <a:lumMod val="95000"/>
-                  </a:schemeClr>
-                </a:solidFill>
-              </a:rPr>
-              <a:t>PutState</a:t>
-            </a:r>
-            <a:r>
-              <a:rPr lang="es-ES" sz="1600" dirty="0">
-                <a:solidFill>
-                  <a:schemeClr val="bg1">
-                    <a:lumMod val="95000"/>
-                  </a:schemeClr>
-                </a:solidFill>
-              </a:rPr>
-              <a:t>(id, </a:t>
-            </a:r>
-            <a:r>
-              <a:rPr lang="es-ES" sz="1600" dirty="0" err="1">
-                <a:solidFill>
-                  <a:schemeClr val="bg1">
-                    <a:lumMod val="95000"/>
-                  </a:schemeClr>
-                </a:solidFill>
-              </a:rPr>
-              <a:t>propertyJSON</a:t>
-            </a:r>
-            <a:r>
-              <a:rPr lang="es-ES" sz="1600" dirty="0">
-                <a:solidFill>
-                  <a:schemeClr val="bg1">
-                    <a:lumMod val="95000"/>
-                  </a:schemeClr>
-                </a:solidFill>
-              </a:rPr>
-              <a:t>)</a:t>
-            </a:r>
-            <a:br>
-              <a:rPr lang="es-ES" sz="1600" dirty="0">
-                <a:solidFill>
-                  <a:schemeClr val="bg1">
-                    <a:lumMod val="95000"/>
-                  </a:schemeClr>
-                </a:solidFill>
-              </a:rPr>
-            </a:br>
-            <a:r>
-              <a:rPr lang="es-ES" sz="1600" dirty="0">
-                <a:solidFill>
-                  <a:schemeClr val="bg1">
-                    <a:lumMod val="95000"/>
-                  </a:schemeClr>
-                </a:solidFill>
-              </a:rPr>
               <a:t>}</a:t>
             </a:r>
-            <a:endParaRPr lang="es-ES" sz="1600" dirty="0"/>
           </a:p>
         </p:txBody>
       </p:sp>
@@ -10610,7 +7168,7 @@
               </a:defRPr>
             </a:pPr>
             <a:r>
-              <a:t>GO</a:t>
+              <a:t>NODE.JS</a:t>
             </a:r>
           </a:p>
         </p:txBody>
@@ -10679,15 +7237,7 @@
           <a:bodyPr wrap="square"/>
           <a:lstStyle/>
           <a:p>
-            <a:br>
-              <a:rPr sz="1600" dirty="0">
-                <a:solidFill>
-                  <a:schemeClr val="bg1">
-                    <a:lumMod val="95000"/>
-                  </a:schemeClr>
-                </a:solidFill>
-              </a:rPr>
-            </a:br>
+            <a:pPr/>
             <a:r>
               <a:rPr sz="1600" dirty="0" err="1">
                 <a:solidFill>
@@ -10696,18 +7246,11 @@
                   </a:schemeClr>
                 </a:solidFill>
               </a:rPr>
-              <a:t>func</a:t>
-            </a:r>
-            <a:r>
-              <a:rPr sz="1600" dirty="0">
-                <a:solidFill>
-                  <a:schemeClr val="bg1">
-                    <a:lumMod val="95000"/>
-                  </a:schemeClr>
-                </a:solidFill>
-              </a:rPr>
-              <a:t> (s *</a:t>
-            </a:r>
+              <a:t>async ReadProperty(ctx, id) {</a:t>
+            </a:r>
+          </a:p>
+          <a:p>
+            <a:pPr/>
             <a:r>
               <a:rPr sz="1600" dirty="0" err="1">
                 <a:solidFill>
@@ -10716,18 +7259,11 @@
                   </a:schemeClr>
                 </a:solidFill>
               </a:rPr>
-              <a:t>SmartContract</a:t>
-            </a:r>
-            <a:r>
-              <a:rPr sz="1600" dirty="0">
-                <a:solidFill>
-                  <a:schemeClr val="bg1">
-                    <a:lumMod val="95000"/>
-                  </a:schemeClr>
-                </a:solidFill>
-              </a:rPr>
-              <a:t>) </a:t>
-            </a:r>
+              <a:t>    const propertyJSON = await ctx.stub.getState(id);</a:t>
+            </a:r>
+          </a:p>
+          <a:p>
+            <a:pPr/>
             <a:r>
               <a:rPr sz="1600" dirty="0" err="1">
                 <a:solidFill>
@@ -10736,18 +7272,11 @@
                   </a:schemeClr>
                 </a:solidFill>
               </a:rPr>
-              <a:t>ReadProperty</a:t>
-            </a:r>
-            <a:r>
-              <a:rPr sz="1600" dirty="0">
-                <a:solidFill>
-                  <a:schemeClr val="bg1">
-                    <a:lumMod val="95000"/>
-                  </a:schemeClr>
-                </a:solidFill>
-              </a:rPr>
-              <a:t>(</a:t>
-            </a:r>
+              <a:t/>
+            </a:r>
+          </a:p>
+          <a:p>
+            <a:pPr/>
             <a:r>
               <a:rPr sz="1600" dirty="0" err="1">
                 <a:solidFill>
@@ -10756,18 +7285,11 @@
                   </a:schemeClr>
                 </a:solidFill>
               </a:rPr>
-              <a:t>ctx</a:t>
-            </a:r>
-            <a:r>
-              <a:rPr sz="1600" dirty="0">
-                <a:solidFill>
-                  <a:schemeClr val="bg1">
-                    <a:lumMod val="95000"/>
-                  </a:schemeClr>
-                </a:solidFill>
-              </a:rPr>
-              <a:t> </a:t>
-            </a:r>
+              <a:t>    if (!propertyJSON || propertyJSON.length === 0) {</a:t>
+            </a:r>
+          </a:p>
+          <a:p>
+            <a:pPr/>
             <a:r>
               <a:rPr sz="1600" dirty="0" err="1">
                 <a:solidFill>
@@ -10776,65 +7298,11 @@
                   </a:schemeClr>
                 </a:solidFill>
               </a:rPr>
-              <a:t>contractapi.TransactionContextInterface</a:t>
-            </a:r>
-            <a:r>
-              <a:rPr sz="1600" dirty="0">
-                <a:solidFill>
-                  <a:schemeClr val="bg1">
-                    <a:lumMod val="95000"/>
-                  </a:schemeClr>
-                </a:solidFill>
-              </a:rPr>
-              <a:t>,</a:t>
-            </a:r>
-            <a:br>
-              <a:rPr sz="1600" dirty="0">
-                <a:solidFill>
-                  <a:schemeClr val="bg1">
-                    <a:lumMod val="95000"/>
-                  </a:schemeClr>
-                </a:solidFill>
-              </a:rPr>
-            </a:br>
-            <a:r>
-              <a:rPr sz="1600" dirty="0">
-                <a:solidFill>
-                  <a:schemeClr val="bg1">
-                    <a:lumMod val="95000"/>
-                  </a:schemeClr>
-                </a:solidFill>
-              </a:rPr>
-              <a:t>    id string) (*Property, error) {</a:t>
-            </a:r>
-            <a:br>
-              <a:rPr sz="1600" dirty="0">
-                <a:solidFill>
-                  <a:schemeClr val="bg1">
-                    <a:lumMod val="95000"/>
-                  </a:schemeClr>
-                </a:solidFill>
-              </a:rPr>
-            </a:br>
-            <a:br>
-              <a:rPr sz="1600" dirty="0">
-                <a:solidFill>
-                  <a:schemeClr val="bg1">
-                    <a:lumMod val="95000"/>
-                  </a:schemeClr>
-                </a:solidFill>
-              </a:rPr>
-            </a:br>
-            <a:r>
-              <a:rPr sz="1600" dirty="0">
-                <a:solidFill>
-                  <a:schemeClr val="bg1">
-                    <a:lumMod val="95000"/>
-                  </a:schemeClr>
-                </a:solidFill>
-              </a:rPr>
-              <a:t>    </a:t>
-            </a:r>
+              <a:t>        throw new Error(</a:t>
+            </a:r>
+          </a:p>
+          <a:p>
+            <a:pPr/>
             <a:r>
               <a:rPr sz="1600" dirty="0" err="1">
                 <a:solidFill>
@@ -10843,18 +7311,11 @@
                   </a:schemeClr>
                 </a:solidFill>
               </a:rPr>
-              <a:t>propertyJSON</a:t>
-            </a:r>
-            <a:r>
-              <a:rPr sz="1600" dirty="0">
-                <a:solidFill>
-                  <a:schemeClr val="bg1">
-                    <a:lumMod val="95000"/>
-                  </a:schemeClr>
-                </a:solidFill>
-              </a:rPr>
-              <a:t>, err := </a:t>
-            </a:r>
+              <a:t>            `property ${id} does not exist`);</a:t>
+            </a:r>
+          </a:p>
+          <a:p>
+            <a:pPr/>
             <a:r>
               <a:rPr sz="1600" dirty="0" err="1">
                 <a:solidFill>
@@ -10863,18 +7324,11 @@
                   </a:schemeClr>
                 </a:solidFill>
               </a:rPr>
-              <a:t>ctx.GetStub</a:t>
-            </a:r>
-            <a:r>
-              <a:rPr sz="1600" dirty="0">
-                <a:solidFill>
-                  <a:schemeClr val="bg1">
-                    <a:lumMod val="95000"/>
-                  </a:schemeClr>
-                </a:solidFill>
-              </a:rPr>
-              <a:t>().</a:t>
-            </a:r>
+              <a:t>    }</a:t>
+            </a:r>
+          </a:p>
+          <a:p>
+            <a:pPr/>
             <a:r>
               <a:rPr sz="1600" dirty="0" err="1">
                 <a:solidFill>
@@ -10883,56 +7337,11 @@
                   </a:schemeClr>
                 </a:solidFill>
               </a:rPr>
-              <a:t>GetState</a:t>
-            </a:r>
-            <a:r>
-              <a:rPr sz="1600" dirty="0">
-                <a:solidFill>
-                  <a:schemeClr val="bg1">
-                    <a:lumMod val="95000"/>
-                  </a:schemeClr>
-                </a:solidFill>
-              </a:rPr>
-              <a:t>(id)</a:t>
-            </a:r>
-            <a:br>
-              <a:rPr sz="1600" dirty="0">
-                <a:solidFill>
-                  <a:schemeClr val="bg1">
-                    <a:lumMod val="95000"/>
-                  </a:schemeClr>
-                </a:solidFill>
-              </a:rPr>
-            </a:br>
-            <a:r>
-              <a:rPr sz="1600" dirty="0">
-                <a:solidFill>
-                  <a:schemeClr val="bg1">
-                    <a:lumMod val="95000"/>
-                  </a:schemeClr>
-                </a:solidFill>
-              </a:rPr>
-              <a:t>    if err != nil {</a:t>
-            </a:r>
-            <a:br>
-              <a:rPr sz="1600" dirty="0">
-                <a:solidFill>
-                  <a:schemeClr val="bg1">
-                    <a:lumMod val="95000"/>
-                  </a:schemeClr>
-                </a:solidFill>
-              </a:rPr>
-            </a:br>
-            <a:r>
-              <a:rPr sz="1600" dirty="0">
-                <a:solidFill>
-                  <a:schemeClr val="bg1">
-                    <a:lumMod val="95000"/>
-                  </a:schemeClr>
-                </a:solidFill>
-              </a:rPr>
-              <a:t>        return nil, </a:t>
-            </a:r>
+              <a:t/>
+            </a:r>
+          </a:p>
+          <a:p>
+            <a:pPr/>
             <a:r>
               <a:rPr sz="1600" dirty="0" err="1">
                 <a:solidFill>
@@ -10941,56 +7350,11 @@
                   </a:schemeClr>
                 </a:solidFill>
               </a:rPr>
-              <a:t>fmt.Errorf</a:t>
-            </a:r>
-            <a:r>
-              <a:rPr sz="1600" dirty="0">
-                <a:solidFill>
-                  <a:schemeClr val="bg1">
-                    <a:lumMod val="95000"/>
-                  </a:schemeClr>
-                </a:solidFill>
-              </a:rPr>
-              <a:t>("failed to read: %v", err)</a:t>
-            </a:r>
-            <a:br>
-              <a:rPr sz="1600" dirty="0">
-                <a:solidFill>
-                  <a:schemeClr val="bg1">
-                    <a:lumMod val="95000"/>
-                  </a:schemeClr>
-                </a:solidFill>
-              </a:rPr>
-            </a:br>
-            <a:r>
-              <a:rPr sz="1600" dirty="0">
-                <a:solidFill>
-                  <a:schemeClr val="bg1">
-                    <a:lumMod val="95000"/>
-                  </a:schemeClr>
-                </a:solidFill>
-              </a:rPr>
-              <a:t>    }</a:t>
-            </a:r>
-            <a:br>
-              <a:rPr sz="1600" dirty="0">
-                <a:solidFill>
-                  <a:schemeClr val="bg1">
-                    <a:lumMod val="95000"/>
-                  </a:schemeClr>
-                </a:solidFill>
-              </a:rPr>
-            </a:br>
-            <a:r>
-              <a:rPr sz="1600" dirty="0">
-                <a:solidFill>
-                  <a:schemeClr val="bg1">
-                    <a:lumMod val="95000"/>
-                  </a:schemeClr>
-                </a:solidFill>
-              </a:rPr>
-              <a:t>    if </a:t>
-            </a:r>
+              <a:t>    const property = JSON.parse(propertyJSON.toString());</a:t>
+            </a:r>
+          </a:p>
+          <a:p>
+            <a:pPr/>
             <a:r>
               <a:rPr sz="1600" dirty="0" err="1">
                 <a:solidFill>
@@ -10999,260 +7363,13 @@
                   </a:schemeClr>
                 </a:solidFill>
               </a:rPr>
-              <a:t>propertyJSON</a:t>
-            </a:r>
-            <a:r>
-              <a:rPr sz="1600" dirty="0">
-                <a:solidFill>
-                  <a:schemeClr val="bg1">
-                    <a:lumMod val="95000"/>
-                  </a:schemeClr>
-                </a:solidFill>
-              </a:rPr>
-              <a:t> == nil {</a:t>
-            </a:r>
-            <a:br>
-              <a:rPr sz="1600" dirty="0">
-                <a:solidFill>
-                  <a:schemeClr val="bg1">
-                    <a:lumMod val="95000"/>
-                  </a:schemeClr>
-                </a:solidFill>
-              </a:rPr>
-            </a:br>
-            <a:r>
-              <a:rPr sz="1600" dirty="0">
-                <a:solidFill>
-                  <a:schemeClr val="bg1">
-                    <a:lumMod val="95000"/>
-                  </a:schemeClr>
-                </a:solidFill>
-              </a:rPr>
-              <a:t>        return nil, </a:t>
-            </a:r>
+              <a:t>    return property;</a:t>
+            </a:r>
+          </a:p>
+          <a:p>
+            <a:pPr/>
             <a:r>
               <a:rPr sz="1600" dirty="0" err="1">
-                <a:solidFill>
-                  <a:schemeClr val="bg1">
-                    <a:lumMod val="95000"/>
-                  </a:schemeClr>
-                </a:solidFill>
-              </a:rPr>
-              <a:t>fmt.Errorf</a:t>
-            </a:r>
-            <a:r>
-              <a:rPr sz="1600" dirty="0">
-                <a:solidFill>
-                  <a:schemeClr val="bg1">
-                    <a:lumMod val="95000"/>
-                  </a:schemeClr>
-                </a:solidFill>
-              </a:rPr>
-              <a:t>("property %s does not exist", id)</a:t>
-            </a:r>
-            <a:br>
-              <a:rPr sz="1600" dirty="0">
-                <a:solidFill>
-                  <a:schemeClr val="bg1">
-                    <a:lumMod val="95000"/>
-                  </a:schemeClr>
-                </a:solidFill>
-              </a:rPr>
-            </a:br>
-            <a:r>
-              <a:rPr sz="1600" dirty="0">
-                <a:solidFill>
-                  <a:schemeClr val="bg1">
-                    <a:lumMod val="95000"/>
-                  </a:schemeClr>
-                </a:solidFill>
-              </a:rPr>
-              <a:t>    }</a:t>
-            </a:r>
-            <a:br>
-              <a:rPr sz="1600" dirty="0">
-                <a:solidFill>
-                  <a:schemeClr val="bg1">
-                    <a:lumMod val="95000"/>
-                  </a:schemeClr>
-                </a:solidFill>
-              </a:rPr>
-            </a:br>
-            <a:br>
-              <a:rPr sz="1600" dirty="0">
-                <a:solidFill>
-                  <a:schemeClr val="bg1">
-                    <a:lumMod val="95000"/>
-                  </a:schemeClr>
-                </a:solidFill>
-              </a:rPr>
-            </a:br>
-            <a:r>
-              <a:rPr sz="1600" dirty="0">
-                <a:solidFill>
-                  <a:schemeClr val="bg1">
-                    <a:lumMod val="95000"/>
-                  </a:schemeClr>
-                </a:solidFill>
-              </a:rPr>
-              <a:t>    var property </a:t>
-            </a:r>
-            <a:r>
-              <a:rPr sz="1600" dirty="0" err="1">
-                <a:solidFill>
-                  <a:schemeClr val="bg1">
-                    <a:lumMod val="95000"/>
-                  </a:schemeClr>
-                </a:solidFill>
-              </a:rPr>
-              <a:t>Property</a:t>
-            </a:r>
-            <a:br>
-              <a:rPr sz="1600" dirty="0">
-                <a:solidFill>
-                  <a:schemeClr val="bg1">
-                    <a:lumMod val="95000"/>
-                  </a:schemeClr>
-                </a:solidFill>
-              </a:rPr>
-            </a:br>
-            <a:r>
-              <a:rPr sz="1600" dirty="0">
-                <a:solidFill>
-                  <a:schemeClr val="bg1">
-                    <a:lumMod val="95000"/>
-                  </a:schemeClr>
-                </a:solidFill>
-              </a:rPr>
-              <a:t>    err = </a:t>
-            </a:r>
-            <a:r>
-              <a:rPr sz="1600" dirty="0" err="1">
-                <a:solidFill>
-                  <a:schemeClr val="bg1">
-                    <a:lumMod val="95000"/>
-                  </a:schemeClr>
-                </a:solidFill>
-              </a:rPr>
-              <a:t>json.Unmarshal</a:t>
-            </a:r>
-            <a:r>
-              <a:rPr sz="1600" dirty="0">
-                <a:solidFill>
-                  <a:schemeClr val="bg1">
-                    <a:lumMod val="95000"/>
-                  </a:schemeClr>
-                </a:solidFill>
-              </a:rPr>
-              <a:t>(</a:t>
-            </a:r>
-            <a:r>
-              <a:rPr sz="1600" dirty="0" err="1">
-                <a:solidFill>
-                  <a:schemeClr val="bg1">
-                    <a:lumMod val="95000"/>
-                  </a:schemeClr>
-                </a:solidFill>
-              </a:rPr>
-              <a:t>propertyJSON</a:t>
-            </a:r>
-            <a:r>
-              <a:rPr sz="1600" dirty="0">
-                <a:solidFill>
-                  <a:schemeClr val="bg1">
-                    <a:lumMod val="95000"/>
-                  </a:schemeClr>
-                </a:solidFill>
-              </a:rPr>
-              <a:t>, &amp;property)</a:t>
-            </a:r>
-            <a:br>
-              <a:rPr sz="1600" dirty="0">
-                <a:solidFill>
-                  <a:schemeClr val="bg1">
-                    <a:lumMod val="95000"/>
-                  </a:schemeClr>
-                </a:solidFill>
-              </a:rPr>
-            </a:br>
-            <a:r>
-              <a:rPr sz="1600" dirty="0">
-                <a:solidFill>
-                  <a:schemeClr val="bg1">
-                    <a:lumMod val="95000"/>
-                  </a:schemeClr>
-                </a:solidFill>
-              </a:rPr>
-              <a:t>    if err != nil {</a:t>
-            </a:r>
-            <a:br>
-              <a:rPr sz="1600" dirty="0">
-                <a:solidFill>
-                  <a:schemeClr val="bg1">
-                    <a:lumMod val="95000"/>
-                  </a:schemeClr>
-                </a:solidFill>
-              </a:rPr>
-            </a:br>
-            <a:r>
-              <a:rPr sz="1600" dirty="0">
-                <a:solidFill>
-                  <a:schemeClr val="bg1">
-                    <a:lumMod val="95000"/>
-                  </a:schemeClr>
-                </a:solidFill>
-              </a:rPr>
-              <a:t>        return nil, err</a:t>
-            </a:r>
-            <a:br>
-              <a:rPr sz="1600" dirty="0">
-                <a:solidFill>
-                  <a:schemeClr val="bg1">
-                    <a:lumMod val="95000"/>
-                  </a:schemeClr>
-                </a:solidFill>
-              </a:rPr>
-            </a:br>
-            <a:r>
-              <a:rPr sz="1600" dirty="0">
-                <a:solidFill>
-                  <a:schemeClr val="bg1">
-                    <a:lumMod val="95000"/>
-                  </a:schemeClr>
-                </a:solidFill>
-              </a:rPr>
-              <a:t>    }</a:t>
-            </a:r>
-            <a:br>
-              <a:rPr sz="1600" dirty="0">
-                <a:solidFill>
-                  <a:schemeClr val="bg1">
-                    <a:lumMod val="95000"/>
-                  </a:schemeClr>
-                </a:solidFill>
-              </a:rPr>
-            </a:br>
-            <a:r>
-              <a:rPr sz="1600" dirty="0">
-                <a:solidFill>
-                  <a:schemeClr val="bg1">
-                    <a:lumMod val="95000"/>
-                  </a:schemeClr>
-                </a:solidFill>
-              </a:rPr>
-              <a:t>    return &amp;property, nil</a:t>
-            </a:r>
-            <a:br>
-              <a:rPr sz="1600" dirty="0">
-                <a:solidFill>
-                  <a:schemeClr val="bg1">
-                    <a:lumMod val="95000"/>
-                  </a:schemeClr>
-                </a:solidFill>
-              </a:rPr>
-            </a:br>
-            <a:r>
-              <a:rPr sz="1600" dirty="0">
                 <a:solidFill>
                   <a:schemeClr val="bg1">
                     <a:lumMod val="95000"/>
@@ -11292,7 +7409,8 @@
           </a:bodyPr>
           <a:lstStyle/>
           <a:p>
-            <a:br>
+            <a:pPr/>
+            <a:r>
               <a:rPr lang="es-ES" sz="1600" dirty="0">
                 <a:solidFill>
                   <a:schemeClr val="bg1">
@@ -11300,8 +7418,12 @@
                   </a:schemeClr>
                 </a:solidFill>
               </a:rPr>
-            </a:br>
-            <a:br>
+              <a:t>// En Go seria:</a:t>
+            </a:r>
+          </a:p>
+          <a:p>
+            <a:pPr/>
+            <a:r>
               <a:rPr lang="es-ES" sz="1600" dirty="0">
                 <a:solidFill>
                   <a:schemeClr val="bg1">
@@ -11309,7 +7431,11 @@
                   </a:schemeClr>
                 </a:solidFill>
               </a:rPr>
-            </a:br>
+              <a:t>// func (s *SmartContract) ReadProperty(</a:t>
+            </a:r>
+          </a:p>
+          <a:p>
+            <a:pPr/>
             <a:r>
               <a:rPr lang="es-ES" sz="1600" dirty="0">
                 <a:solidFill>
@@ -11318,9 +7444,12 @@
                   </a:schemeClr>
                 </a:solidFill>
               </a:rPr>
-              <a:t>// En Node.js seria:</a:t>
-            </a:r>
-            <a:br>
+              <a:t>//     ctx ..., id string) (*Property, error) {</a:t>
+            </a:r>
+          </a:p>
+          <a:p>
+            <a:pPr/>
+            <a:r>
               <a:rPr lang="es-ES" sz="1600" dirty="0">
                 <a:solidFill>
                   <a:schemeClr val="bg1">
@@ -11328,7 +7457,11 @@
                   </a:schemeClr>
                 </a:solidFill>
               </a:rPr>
-            </a:br>
+              <a:t>//     data, err := ctx.GetStub().GetState(id)</a:t>
+            </a:r>
+          </a:p>
+          <a:p>
+            <a:pPr/>
             <a:r>
               <a:rPr lang="es-ES" sz="1600" dirty="0">
                 <a:solidFill>
@@ -11337,18 +7470,11 @@
                   </a:schemeClr>
                 </a:solidFill>
               </a:rPr>
-              <a:t>// </a:t>
-            </a:r>
-            <a:r>
-              <a:rPr lang="es-ES" sz="1600" dirty="0" err="1">
-                <a:solidFill>
-                  <a:schemeClr val="bg1">
-                    <a:lumMod val="95000"/>
-                  </a:schemeClr>
-                </a:solidFill>
-              </a:rPr>
-              <a:t>async</a:t>
-            </a:r>
+              <a:t>//     if err != nil { return nil, err }</a:t>
+            </a:r>
+          </a:p>
+          <a:p>
+            <a:pPr/>
             <a:r>
               <a:rPr lang="es-ES" sz="1600" dirty="0">
                 <a:solidFill>
@@ -11357,18 +7483,11 @@
                   </a:schemeClr>
                 </a:solidFill>
               </a:rPr>
-              <a:t> </a:t>
-            </a:r>
-            <a:r>
-              <a:rPr lang="es-ES" sz="1600" dirty="0" err="1">
-                <a:solidFill>
-                  <a:schemeClr val="bg1">
-                    <a:lumMod val="95000"/>
-                  </a:schemeClr>
-                </a:solidFill>
-              </a:rPr>
-              <a:t>ReadProperty</a:t>
-            </a:r>
+              <a:t>//     if data == nil {</a:t>
+            </a:r>
+          </a:p>
+          <a:p>
+            <a:pPr/>
             <a:r>
               <a:rPr lang="es-ES" sz="1600" dirty="0">
                 <a:solidFill>
@@ -11377,18 +7496,11 @@
                   </a:schemeClr>
                 </a:solidFill>
               </a:rPr>
-              <a:t>(</a:t>
-            </a:r>
-            <a:r>
-              <a:rPr lang="es-ES" sz="1600" dirty="0" err="1">
-                <a:solidFill>
-                  <a:schemeClr val="bg1">
-                    <a:lumMod val="95000"/>
-                  </a:schemeClr>
-                </a:solidFill>
-              </a:rPr>
-              <a:t>ctx</a:t>
-            </a:r>
+              <a:t>//         return nil, errors.New("not found")</a:t>
+            </a:r>
+          </a:p>
+          <a:p>
+            <a:pPr/>
             <a:r>
               <a:rPr lang="es-ES" sz="1600" dirty="0">
                 <a:solidFill>
@@ -11397,9 +7509,12 @@
                   </a:schemeClr>
                 </a:solidFill>
               </a:rPr>
-              <a:t>, id) {</a:t>
-            </a:r>
-            <a:br>
+              <a:t>//     }</a:t>
+            </a:r>
+          </a:p>
+          <a:p>
+            <a:pPr/>
+            <a:r>
               <a:rPr lang="es-ES" sz="1600" dirty="0">
                 <a:solidFill>
                   <a:schemeClr val="bg1">
@@ -11407,7 +7522,11 @@
                   </a:schemeClr>
                 </a:solidFill>
               </a:rPr>
-            </a:br>
+              <a:t>//     var p Property</a:t>
+            </a:r>
+          </a:p>
+          <a:p>
+            <a:pPr/>
             <a:r>
               <a:rPr lang="es-ES" sz="1600" dirty="0">
                 <a:solidFill>
@@ -11416,18 +7535,11 @@
                   </a:schemeClr>
                 </a:solidFill>
               </a:rPr>
-              <a:t>//     </a:t>
-            </a:r>
-            <a:r>
-              <a:rPr lang="es-ES" sz="1600" dirty="0" err="1">
-                <a:solidFill>
-                  <a:schemeClr val="bg1">
-                    <a:lumMod val="95000"/>
-                  </a:schemeClr>
-                </a:solidFill>
-              </a:rPr>
-              <a:t>const</a:t>
-            </a:r>
+              <a:t>//     json.Unmarshal(data, &amp;p)</a:t>
+            </a:r>
+          </a:p>
+          <a:p>
+            <a:pPr/>
             <a:r>
               <a:rPr lang="es-ES" sz="1600" dirty="0">
                 <a:solidFill>
@@ -11436,18 +7548,11 @@
                   </a:schemeClr>
                 </a:solidFill>
               </a:rPr>
-              <a:t> data = </a:t>
-            </a:r>
-            <a:r>
-              <a:rPr lang="es-ES" sz="1600" dirty="0" err="1">
-                <a:solidFill>
-                  <a:schemeClr val="bg1">
-                    <a:lumMod val="95000"/>
-                  </a:schemeClr>
-                </a:solidFill>
-              </a:rPr>
-              <a:t>await</a:t>
-            </a:r>
+              <a:t>//     return &amp;p, nil</a:t>
+            </a:r>
+          </a:p>
+          <a:p>
+            <a:pPr/>
             <a:r>
               <a:rPr lang="es-ES" sz="1600" dirty="0">
                 <a:solidFill>
@@ -11456,246 +7561,8 @@
                   </a:schemeClr>
                 </a:solidFill>
               </a:rPr>
-              <a:t> </a:t>
-            </a:r>
-            <a:r>
-              <a:rPr lang="es-ES" sz="1600" dirty="0" err="1">
-                <a:solidFill>
-                  <a:schemeClr val="bg1">
-                    <a:lumMod val="95000"/>
-                  </a:schemeClr>
-                </a:solidFill>
-              </a:rPr>
-              <a:t>ctx.stub.getState</a:t>
-            </a:r>
-            <a:r>
-              <a:rPr lang="es-ES" sz="1600" dirty="0">
-                <a:solidFill>
-                  <a:schemeClr val="bg1">
-                    <a:lumMod val="95000"/>
-                  </a:schemeClr>
-                </a:solidFill>
-              </a:rPr>
-              <a:t>(id);</a:t>
-            </a:r>
-            <a:br>
-              <a:rPr lang="es-ES" sz="1600" dirty="0">
-                <a:solidFill>
-                  <a:schemeClr val="bg1">
-                    <a:lumMod val="95000"/>
-                  </a:schemeClr>
-                </a:solidFill>
-              </a:rPr>
-            </a:br>
-            <a:r>
-              <a:rPr lang="es-ES" sz="1600" dirty="0">
-                <a:solidFill>
-                  <a:schemeClr val="bg1">
-                    <a:lumMod val="95000"/>
-                  </a:schemeClr>
-                </a:solidFill>
-              </a:rPr>
-              <a:t>//     </a:t>
-            </a:r>
-            <a:r>
-              <a:rPr lang="es-ES" sz="1600" dirty="0" err="1">
-                <a:solidFill>
-                  <a:schemeClr val="bg1">
-                    <a:lumMod val="95000"/>
-                  </a:schemeClr>
-                </a:solidFill>
-              </a:rPr>
-              <a:t>if</a:t>
-            </a:r>
-            <a:r>
-              <a:rPr lang="es-ES" sz="1600" dirty="0">
-                <a:solidFill>
-                  <a:schemeClr val="bg1">
-                    <a:lumMod val="95000"/>
-                  </a:schemeClr>
-                </a:solidFill>
-              </a:rPr>
-              <a:t> (!data || </a:t>
-            </a:r>
-            <a:r>
-              <a:rPr lang="es-ES" sz="1600" dirty="0" err="1">
-                <a:solidFill>
-                  <a:schemeClr val="bg1">
-                    <a:lumMod val="95000"/>
-                  </a:schemeClr>
-                </a:solidFill>
-              </a:rPr>
-              <a:t>data.length</a:t>
-            </a:r>
-            <a:r>
-              <a:rPr lang="es-ES" sz="1600" dirty="0">
-                <a:solidFill>
-                  <a:schemeClr val="bg1">
-                    <a:lumMod val="95000"/>
-                  </a:schemeClr>
-                </a:solidFill>
-              </a:rPr>
-              <a:t> === 0) </a:t>
-            </a:r>
-            <a:r>
-              <a:rPr lang="es-ES" sz="1600" dirty="0" err="1">
-                <a:solidFill>
-                  <a:schemeClr val="bg1">
-                    <a:lumMod val="95000"/>
-                  </a:schemeClr>
-                </a:solidFill>
-              </a:rPr>
-              <a:t>throw</a:t>
-            </a:r>
-            <a:r>
-              <a:rPr lang="es-ES" sz="1600" dirty="0">
-                <a:solidFill>
-                  <a:schemeClr val="bg1">
-                    <a:lumMod val="95000"/>
-                  </a:schemeClr>
-                </a:solidFill>
-              </a:rPr>
-              <a:t> new Error('</a:t>
-            </a:r>
-            <a:r>
-              <a:rPr lang="es-ES" sz="1600" dirty="0" err="1">
-                <a:solidFill>
-                  <a:schemeClr val="bg1">
-                    <a:lumMod val="95000"/>
-                  </a:schemeClr>
-                </a:solidFill>
-              </a:rPr>
-              <a:t>Not</a:t>
-            </a:r>
-            <a:r>
-              <a:rPr lang="es-ES" sz="1600" dirty="0">
-                <a:solidFill>
-                  <a:schemeClr val="bg1">
-                    <a:lumMod val="95000"/>
-                  </a:schemeClr>
-                </a:solidFill>
-              </a:rPr>
-              <a:t> </a:t>
-            </a:r>
-            <a:r>
-              <a:rPr lang="es-ES" sz="1600" dirty="0" err="1">
-                <a:solidFill>
-                  <a:schemeClr val="bg1">
-                    <a:lumMod val="95000"/>
-                  </a:schemeClr>
-                </a:solidFill>
-              </a:rPr>
-              <a:t>found</a:t>
-            </a:r>
-            <a:r>
-              <a:rPr lang="es-ES" sz="1600" dirty="0">
-                <a:solidFill>
-                  <a:schemeClr val="bg1">
-                    <a:lumMod val="95000"/>
-                  </a:schemeClr>
-                </a:solidFill>
-              </a:rPr>
-              <a:t>');</a:t>
-            </a:r>
-            <a:br>
-              <a:rPr lang="es-ES" sz="1600" dirty="0">
-                <a:solidFill>
-                  <a:schemeClr val="bg1">
-                    <a:lumMod val="95000"/>
-                  </a:schemeClr>
-                </a:solidFill>
-              </a:rPr>
-            </a:br>
-            <a:r>
-              <a:rPr lang="es-ES" sz="1600" dirty="0">
-                <a:solidFill>
-                  <a:schemeClr val="bg1">
-                    <a:lumMod val="95000"/>
-                  </a:schemeClr>
-                </a:solidFill>
-              </a:rPr>
-              <a:t>//     </a:t>
-            </a:r>
-            <a:r>
-              <a:rPr lang="es-ES" sz="1600" dirty="0" err="1">
-                <a:solidFill>
-                  <a:schemeClr val="bg1">
-                    <a:lumMod val="95000"/>
-                  </a:schemeClr>
-                </a:solidFill>
-              </a:rPr>
-              <a:t>return</a:t>
-            </a:r>
-            <a:r>
-              <a:rPr lang="es-ES" sz="1600" dirty="0">
-                <a:solidFill>
-                  <a:schemeClr val="bg1">
-                    <a:lumMod val="95000"/>
-                  </a:schemeClr>
-                </a:solidFill>
-              </a:rPr>
-              <a:t> </a:t>
-            </a:r>
-            <a:r>
-              <a:rPr lang="es-ES" sz="1600" dirty="0" err="1">
-                <a:solidFill>
-                  <a:schemeClr val="bg1">
-                    <a:lumMod val="95000"/>
-                  </a:schemeClr>
-                </a:solidFill>
-              </a:rPr>
-              <a:t>JSON.parse</a:t>
-            </a:r>
-            <a:r>
-              <a:rPr lang="es-ES" sz="1600" dirty="0">
-                <a:solidFill>
-                  <a:schemeClr val="bg1">
-                    <a:lumMod val="95000"/>
-                  </a:schemeClr>
-                </a:solidFill>
-              </a:rPr>
-              <a:t>(</a:t>
-            </a:r>
-            <a:r>
-              <a:rPr lang="es-ES" sz="1600" dirty="0" err="1">
-                <a:solidFill>
-                  <a:schemeClr val="bg1">
-                    <a:lumMod val="95000"/>
-                  </a:schemeClr>
-                </a:solidFill>
-              </a:rPr>
-              <a:t>data.toString</a:t>
-            </a:r>
-            <a:r>
-              <a:rPr lang="es-ES" sz="1600" dirty="0">
-                <a:solidFill>
-                  <a:schemeClr val="bg1">
-                    <a:lumMod val="95000"/>
-                  </a:schemeClr>
-                </a:solidFill>
-              </a:rPr>
-              <a:t>());</a:t>
-            </a:r>
-            <a:br>
-              <a:rPr lang="es-ES" sz="1600" dirty="0">
-                <a:solidFill>
-                  <a:schemeClr val="bg1">
-                    <a:lumMod val="95000"/>
-                  </a:schemeClr>
-                </a:solidFill>
-              </a:rPr>
-            </a:br>
-            <a:r>
-              <a:rPr lang="es-ES" sz="1600" dirty="0">
-                <a:solidFill>
-                  <a:schemeClr val="bg1">
-                    <a:lumMod val="95000"/>
-                  </a:schemeClr>
-                </a:solidFill>
-              </a:rPr>
               <a:t>// }</a:t>
             </a:r>
-            <a:endParaRPr lang="es-ES" sz="1600" dirty="0"/>
           </a:p>
         </p:txBody>
       </p:sp>
@@ -11953,7 +7820,7 @@
               </a:defRPr>
             </a:pPr>
             <a:r>
-              <a:t>GO</a:t>
+              <a:t>NODE.JS</a:t>
             </a:r>
           </a:p>
         </p:txBody>
@@ -12022,15 +7889,7 @@
           <a:bodyPr wrap="square"/>
           <a:lstStyle/>
           <a:p>
-            <a:br>
-              <a:rPr sz="1600" dirty="0">
-                <a:solidFill>
-                  <a:schemeClr val="bg1">
-                    <a:lumMod val="95000"/>
-                  </a:schemeClr>
-                </a:solidFill>
-              </a:rPr>
-            </a:br>
+            <a:pPr/>
             <a:r>
               <a:rPr sz="1600" dirty="0" err="1">
                 <a:solidFill>
@@ -12039,18 +7898,11 @@
                   </a:schemeClr>
                 </a:solidFill>
               </a:rPr>
-              <a:t>func</a:t>
-            </a:r>
-            <a:r>
-              <a:rPr sz="1600" dirty="0">
-                <a:solidFill>
-                  <a:schemeClr val="bg1">
-                    <a:lumMod val="95000"/>
-                  </a:schemeClr>
-                </a:solidFill>
-              </a:rPr>
-              <a:t> (s *</a:t>
-            </a:r>
+              <a:t>async UpdatePropertyValue(ctx, id, newValue) {</a:t>
+            </a:r>
+          </a:p>
+          <a:p>
+            <a:pPr/>
             <a:r>
               <a:rPr sz="1600" dirty="0" err="1">
                 <a:solidFill>
@@ -12059,18 +7911,11 @@
                   </a:schemeClr>
                 </a:solidFill>
               </a:rPr>
-              <a:t>SmartContract</a:t>
-            </a:r>
-            <a:r>
-              <a:rPr sz="1600" dirty="0">
-                <a:solidFill>
-                  <a:schemeClr val="bg1">
-                    <a:lumMod val="95000"/>
-                  </a:schemeClr>
-                </a:solidFill>
-              </a:rPr>
-              <a:t>) </a:t>
-            </a:r>
+              <a:t>    // Leer el activo existente</a:t>
+            </a:r>
+          </a:p>
+          <a:p>
+            <a:pPr/>
             <a:r>
               <a:rPr sz="1600" dirty="0" err="1">
                 <a:solidFill>
@@ -12079,18 +7924,11 @@
                   </a:schemeClr>
                 </a:solidFill>
               </a:rPr>
-              <a:t>UpdatePropertyValue</a:t>
-            </a:r>
-            <a:r>
-              <a:rPr sz="1600" dirty="0">
-                <a:solidFill>
-                  <a:schemeClr val="bg1">
-                    <a:lumMod val="95000"/>
-                  </a:schemeClr>
-                </a:solidFill>
-              </a:rPr>
-              <a:t>(</a:t>
-            </a:r>
+              <a:t>    const property = await this.ReadProperty(ctx, id);</a:t>
+            </a:r>
+          </a:p>
+          <a:p>
+            <a:pPr/>
             <a:r>
               <a:rPr sz="1600" dirty="0" err="1">
                 <a:solidFill>
@@ -12099,18 +7937,11 @@
                   </a:schemeClr>
                 </a:solidFill>
               </a:rPr>
-              <a:t>ctx</a:t>
-            </a:r>
-            <a:r>
-              <a:rPr sz="1600" dirty="0">
-                <a:solidFill>
-                  <a:schemeClr val="bg1">
-                    <a:lumMod val="95000"/>
-                  </a:schemeClr>
-                </a:solidFill>
-              </a:rPr>
-              <a:t> </a:t>
-            </a:r>
+              <a:t/>
+            </a:r>
+          </a:p>
+          <a:p>
+            <a:pPr/>
             <a:r>
               <a:rPr sz="1600" dirty="0" err="1">
                 <a:solidFill>
@@ -12119,37 +7950,11 @@
                   </a:schemeClr>
                 </a:solidFill>
               </a:rPr>
-              <a:t>contractapi.TransactionContextInterface</a:t>
-            </a:r>
-            <a:r>
-              <a:rPr sz="1600" dirty="0">
-                <a:solidFill>
-                  <a:schemeClr val="bg1">
-                    <a:lumMod val="95000"/>
-                  </a:schemeClr>
-                </a:solidFill>
-              </a:rPr>
-              <a:t>,</a:t>
-            </a:r>
-            <a:br>
-              <a:rPr sz="1600" dirty="0">
-                <a:solidFill>
-                  <a:schemeClr val="bg1">
-                    <a:lumMod val="95000"/>
-                  </a:schemeClr>
-                </a:solidFill>
-              </a:rPr>
-            </a:br>
-            <a:r>
-              <a:rPr sz="1600" dirty="0">
-                <a:solidFill>
-                  <a:schemeClr val="bg1">
-                    <a:lumMod val="95000"/>
-                  </a:schemeClr>
-                </a:solidFill>
-              </a:rPr>
-              <a:t>    id string, </a:t>
-            </a:r>
+              <a:t>    // Verificar permisos: solo el owner puede actualizar</a:t>
+            </a:r>
+          </a:p>
+          <a:p>
+            <a:pPr/>
             <a:r>
               <a:rPr sz="1600" dirty="0" err="1">
                 <a:solidFill>
@@ -12158,46 +7963,11 @@
                   </a:schemeClr>
                 </a:solidFill>
               </a:rPr>
-              <a:t>newValue</a:t>
-            </a:r>
-            <a:r>
-              <a:rPr sz="1600" dirty="0">
-                <a:solidFill>
-                  <a:schemeClr val="bg1">
-                    <a:lumMod val="95000"/>
-                  </a:schemeClr>
-                </a:solidFill>
-              </a:rPr>
-              <a:t> int) error {</a:t>
-            </a:r>
-            <a:br>
-              <a:rPr sz="1600" dirty="0">
-                <a:solidFill>
-                  <a:schemeClr val="bg1">
-                    <a:lumMod val="95000"/>
-                  </a:schemeClr>
-                </a:solidFill>
-              </a:rPr>
-            </a:br>
-            <a:br>
-              <a:rPr sz="1600" dirty="0">
-                <a:solidFill>
-                  <a:schemeClr val="bg1">
-                    <a:lumMod val="95000"/>
-                  </a:schemeClr>
-                </a:solidFill>
-              </a:rPr>
-            </a:br>
-            <a:r>
-              <a:rPr sz="1600" dirty="0">
-                <a:solidFill>
-                  <a:schemeClr val="bg1">
-                    <a:lumMod val="95000"/>
-                  </a:schemeClr>
-                </a:solidFill>
-              </a:rPr>
-              <a:t>    // Leer </a:t>
-            </a:r>
+              <a:t>    const clientMSP = ctx.clientIdentity.getMSPID();</a:t>
+            </a:r>
+          </a:p>
+          <a:p>
+            <a:pPr/>
             <a:r>
               <a:rPr sz="1600" dirty="0" err="1">
                 <a:solidFill>
@@ -12206,18 +7976,11 @@
                   </a:schemeClr>
                 </a:solidFill>
               </a:rPr>
-              <a:t>el</a:t>
-            </a:r>
-            <a:r>
-              <a:rPr sz="1600" dirty="0">
-                <a:solidFill>
-                  <a:schemeClr val="bg1">
-                    <a:lumMod val="95000"/>
-                  </a:schemeClr>
-                </a:solidFill>
-              </a:rPr>
-              <a:t> </a:t>
-            </a:r>
+              <a:t>    if (property.owner !== clientMSP) {</a:t>
+            </a:r>
+          </a:p>
+          <a:p>
+            <a:pPr/>
             <a:r>
               <a:rPr sz="1600" dirty="0" err="1">
                 <a:solidFill>
@@ -12226,18 +7989,11 @@
                   </a:schemeClr>
                 </a:solidFill>
               </a:rPr>
-              <a:t>activo</a:t>
-            </a:r>
-            <a:r>
-              <a:rPr sz="1600" dirty="0">
-                <a:solidFill>
-                  <a:schemeClr val="bg1">
-                    <a:lumMod val="95000"/>
-                  </a:schemeClr>
-                </a:solidFill>
-              </a:rPr>
-              <a:t> </a:t>
-            </a:r>
+              <a:t>        throw new Error(</a:t>
+            </a:r>
+          </a:p>
+          <a:p>
+            <a:pPr/>
             <a:r>
               <a:rPr sz="1600" dirty="0" err="1">
                 <a:solidFill>
@@ -12246,27 +8002,11 @@
                   </a:schemeClr>
                 </a:solidFill>
               </a:rPr>
-              <a:t>existente</a:t>
-            </a:r>
-            <a:br>
-              <a:rPr sz="1600" dirty="0">
-                <a:solidFill>
-                  <a:schemeClr val="bg1">
-                    <a:lumMod val="95000"/>
-                  </a:schemeClr>
-                </a:solidFill>
-              </a:rPr>
-            </a:br>
-            <a:r>
-              <a:rPr sz="1600" dirty="0">
-                <a:solidFill>
-                  <a:schemeClr val="bg1">
-                    <a:lumMod val="95000"/>
-                  </a:schemeClr>
-                </a:solidFill>
-              </a:rPr>
-              <a:t>    property, err := </a:t>
-            </a:r>
+              <a:t>            'only the owner can update this property');</a:t>
+            </a:r>
+          </a:p>
+          <a:p>
+            <a:pPr/>
             <a:r>
               <a:rPr sz="1600" dirty="0" err="1">
                 <a:solidFill>
@@ -12275,425 +8015,8 @@
                   </a:schemeClr>
                 </a:solidFill>
               </a:rPr>
-              <a:t>s.ReadProperty</a:t>
-            </a:r>
-            <a:r>
-              <a:rPr sz="1600" dirty="0">
-                <a:solidFill>
-                  <a:schemeClr val="bg1">
-                    <a:lumMod val="95000"/>
-                  </a:schemeClr>
-                </a:solidFill>
-              </a:rPr>
-              <a:t>(</a:t>
-            </a:r>
-            <a:r>
-              <a:rPr sz="1600" dirty="0" err="1">
-                <a:solidFill>
-                  <a:schemeClr val="bg1">
-                    <a:lumMod val="95000"/>
-                  </a:schemeClr>
-                </a:solidFill>
-              </a:rPr>
-              <a:t>ctx</a:t>
-            </a:r>
-            <a:r>
-              <a:rPr sz="1600" dirty="0">
-                <a:solidFill>
-                  <a:schemeClr val="bg1">
-                    <a:lumMod val="95000"/>
-                  </a:schemeClr>
-                </a:solidFill>
-              </a:rPr>
-              <a:t>, id)</a:t>
-            </a:r>
-            <a:br>
-              <a:rPr sz="1600" dirty="0">
-                <a:solidFill>
-                  <a:schemeClr val="bg1">
-                    <a:lumMod val="95000"/>
-                  </a:schemeClr>
-                </a:solidFill>
-              </a:rPr>
-            </a:br>
-            <a:r>
-              <a:rPr sz="1600" dirty="0">
-                <a:solidFill>
-                  <a:schemeClr val="bg1">
-                    <a:lumMod val="95000"/>
-                  </a:schemeClr>
-                </a:solidFill>
-              </a:rPr>
-              <a:t>    if err != nil {</a:t>
-            </a:r>
-            <a:br>
-              <a:rPr sz="1600" dirty="0">
-                <a:solidFill>
-                  <a:schemeClr val="bg1">
-                    <a:lumMod val="95000"/>
-                  </a:schemeClr>
-                </a:solidFill>
-              </a:rPr>
-            </a:br>
-            <a:r>
-              <a:rPr sz="1600" dirty="0">
-                <a:solidFill>
-                  <a:schemeClr val="bg1">
-                    <a:lumMod val="95000"/>
-                  </a:schemeClr>
-                </a:solidFill>
-              </a:rPr>
-              <a:t>        return err</a:t>
-            </a:r>
-            <a:br>
-              <a:rPr sz="1600" dirty="0">
-                <a:solidFill>
-                  <a:schemeClr val="bg1">
-                    <a:lumMod val="95000"/>
-                  </a:schemeClr>
-                </a:solidFill>
-              </a:rPr>
-            </a:br>
-            <a:r>
-              <a:rPr sz="1600" dirty="0">
-                <a:solidFill>
-                  <a:schemeClr val="bg1">
-                    <a:lumMod val="95000"/>
-                  </a:schemeClr>
-                </a:solidFill>
-              </a:rPr>
               <a:t>    }</a:t>
             </a:r>
-            <a:br>
-              <a:rPr sz="1600" dirty="0">
-                <a:solidFill>
-                  <a:schemeClr val="bg1">
-                    <a:lumMod val="95000"/>
-                  </a:schemeClr>
-                </a:solidFill>
-              </a:rPr>
-            </a:br>
-            <a:br>
-              <a:rPr sz="1600" dirty="0">
-                <a:solidFill>
-                  <a:schemeClr val="bg1">
-                    <a:lumMod val="95000"/>
-                  </a:schemeClr>
-                </a:solidFill>
-              </a:rPr>
-            </a:br>
-            <a:r>
-              <a:rPr sz="1600" dirty="0">
-                <a:solidFill>
-                  <a:schemeClr val="bg1">
-                    <a:lumMod val="95000"/>
-                  </a:schemeClr>
-                </a:solidFill>
-              </a:rPr>
-              <a:t>    // </a:t>
-            </a:r>
-            <a:r>
-              <a:rPr sz="1600" dirty="0" err="1">
-                <a:solidFill>
-                  <a:schemeClr val="bg1">
-                    <a:lumMod val="95000"/>
-                  </a:schemeClr>
-                </a:solidFill>
-              </a:rPr>
-              <a:t>Verificar</a:t>
-            </a:r>
-            <a:r>
-              <a:rPr sz="1600" dirty="0">
-                <a:solidFill>
-                  <a:schemeClr val="bg1">
-                    <a:lumMod val="95000"/>
-                  </a:schemeClr>
-                </a:solidFill>
-              </a:rPr>
-              <a:t> </a:t>
-            </a:r>
-            <a:r>
-              <a:rPr sz="1600" dirty="0" err="1">
-                <a:solidFill>
-                  <a:schemeClr val="bg1">
-                    <a:lumMod val="95000"/>
-                  </a:schemeClr>
-                </a:solidFill>
-              </a:rPr>
-              <a:t>permisos</a:t>
-            </a:r>
-            <a:r>
-              <a:rPr sz="1600" dirty="0">
-                <a:solidFill>
-                  <a:schemeClr val="bg1">
-                    <a:lumMod val="95000"/>
-                  </a:schemeClr>
-                </a:solidFill>
-              </a:rPr>
-              <a:t>: solo </a:t>
-            </a:r>
-            <a:r>
-              <a:rPr sz="1600" dirty="0" err="1">
-                <a:solidFill>
-                  <a:schemeClr val="bg1">
-                    <a:lumMod val="95000"/>
-                  </a:schemeClr>
-                </a:solidFill>
-              </a:rPr>
-              <a:t>el</a:t>
-            </a:r>
-            <a:r>
-              <a:rPr sz="1600" dirty="0">
-                <a:solidFill>
-                  <a:schemeClr val="bg1">
-                    <a:lumMod val="95000"/>
-                  </a:schemeClr>
-                </a:solidFill>
-              </a:rPr>
-              <a:t> owner </a:t>
-            </a:r>
-            <a:r>
-              <a:rPr sz="1600" dirty="0" err="1">
-                <a:solidFill>
-                  <a:schemeClr val="bg1">
-                    <a:lumMod val="95000"/>
-                  </a:schemeClr>
-                </a:solidFill>
-              </a:rPr>
-              <a:t>puede</a:t>
-            </a:r>
-            <a:r>
-              <a:rPr sz="1600" dirty="0">
-                <a:solidFill>
-                  <a:schemeClr val="bg1">
-                    <a:lumMod val="95000"/>
-                  </a:schemeClr>
-                </a:solidFill>
-              </a:rPr>
-              <a:t> </a:t>
-            </a:r>
-            <a:r>
-              <a:rPr sz="1600" dirty="0" err="1">
-                <a:solidFill>
-                  <a:schemeClr val="bg1">
-                    <a:lumMod val="95000"/>
-                  </a:schemeClr>
-                </a:solidFill>
-              </a:rPr>
-              <a:t>actualizar</a:t>
-            </a:r>
-            <a:br>
-              <a:rPr sz="1600" dirty="0">
-                <a:solidFill>
-                  <a:schemeClr val="bg1">
-                    <a:lumMod val="95000"/>
-                  </a:schemeClr>
-                </a:solidFill>
-              </a:rPr>
-            </a:br>
-            <a:r>
-              <a:rPr sz="1600" dirty="0">
-                <a:solidFill>
-                  <a:schemeClr val="bg1">
-                    <a:lumMod val="95000"/>
-                  </a:schemeClr>
-                </a:solidFill>
-              </a:rPr>
-              <a:t>    </a:t>
-            </a:r>
-            <a:r>
-              <a:rPr sz="1600" dirty="0" err="1">
-                <a:solidFill>
-                  <a:schemeClr val="bg1">
-                    <a:lumMod val="95000"/>
-                  </a:schemeClr>
-                </a:solidFill>
-              </a:rPr>
-              <a:t>clientMSP</a:t>
-            </a:r>
-            <a:r>
-              <a:rPr sz="1600" dirty="0">
-                <a:solidFill>
-                  <a:schemeClr val="bg1">
-                    <a:lumMod val="95000"/>
-                  </a:schemeClr>
-                </a:solidFill>
-              </a:rPr>
-              <a:t>, _ := </a:t>
-            </a:r>
-            <a:r>
-              <a:rPr sz="1600" dirty="0" err="1">
-                <a:solidFill>
-                  <a:schemeClr val="bg1">
-                    <a:lumMod val="95000"/>
-                  </a:schemeClr>
-                </a:solidFill>
-              </a:rPr>
-              <a:t>ctx.GetClientIdentity</a:t>
-            </a:r>
-            <a:r>
-              <a:rPr sz="1600" dirty="0">
-                <a:solidFill>
-                  <a:schemeClr val="bg1">
-                    <a:lumMod val="95000"/>
-                  </a:schemeClr>
-                </a:solidFill>
-              </a:rPr>
-              <a:t>().</a:t>
-            </a:r>
-            <a:r>
-              <a:rPr sz="1600" dirty="0" err="1">
-                <a:solidFill>
-                  <a:schemeClr val="bg1">
-                    <a:lumMod val="95000"/>
-                  </a:schemeClr>
-                </a:solidFill>
-              </a:rPr>
-              <a:t>GetMSPID</a:t>
-            </a:r>
-            <a:r>
-              <a:rPr sz="1600" dirty="0">
-                <a:solidFill>
-                  <a:schemeClr val="bg1">
-                    <a:lumMod val="95000"/>
-                  </a:schemeClr>
-                </a:solidFill>
-              </a:rPr>
-              <a:t>()</a:t>
-            </a:r>
-            <a:br>
-              <a:rPr sz="1600" dirty="0">
-                <a:solidFill>
-                  <a:schemeClr val="bg1">
-                    <a:lumMod val="95000"/>
-                  </a:schemeClr>
-                </a:solidFill>
-              </a:rPr>
-            </a:br>
-            <a:r>
-              <a:rPr sz="1600" dirty="0">
-                <a:solidFill>
-                  <a:schemeClr val="bg1">
-                    <a:lumMod val="95000"/>
-                  </a:schemeClr>
-                </a:solidFill>
-              </a:rPr>
-              <a:t>    if </a:t>
-            </a:r>
-            <a:r>
-              <a:rPr sz="1600" dirty="0" err="1">
-                <a:solidFill>
-                  <a:schemeClr val="bg1">
-                    <a:lumMod val="95000"/>
-                  </a:schemeClr>
-                </a:solidFill>
-              </a:rPr>
-              <a:t>property.Owner</a:t>
-            </a:r>
-            <a:r>
-              <a:rPr sz="1600" dirty="0">
-                <a:solidFill>
-                  <a:schemeClr val="bg1">
-                    <a:lumMod val="95000"/>
-                  </a:schemeClr>
-                </a:solidFill>
-              </a:rPr>
-              <a:t> != </a:t>
-            </a:r>
-            <a:r>
-              <a:rPr sz="1600" dirty="0" err="1">
-                <a:solidFill>
-                  <a:schemeClr val="bg1">
-                    <a:lumMod val="95000"/>
-                  </a:schemeClr>
-                </a:solidFill>
-              </a:rPr>
-              <a:t>clientMSP</a:t>
-            </a:r>
-            <a:r>
-              <a:rPr sz="1600" dirty="0">
-                <a:solidFill>
-                  <a:schemeClr val="bg1">
-                    <a:lumMod val="95000"/>
-                  </a:schemeClr>
-                </a:solidFill>
-              </a:rPr>
-              <a:t> {</a:t>
-            </a:r>
-            <a:br>
-              <a:rPr sz="1600" dirty="0">
-                <a:solidFill>
-                  <a:schemeClr val="bg1">
-                    <a:lumMod val="95000"/>
-                  </a:schemeClr>
-                </a:solidFill>
-              </a:rPr>
-            </a:br>
-            <a:r>
-              <a:rPr sz="1600" dirty="0">
-                <a:solidFill>
-                  <a:schemeClr val="bg1">
-                    <a:lumMod val="95000"/>
-                  </a:schemeClr>
-                </a:solidFill>
-              </a:rPr>
-              <a:t>        return </a:t>
-            </a:r>
-            <a:r>
-              <a:rPr sz="1600" dirty="0" err="1">
-                <a:solidFill>
-                  <a:schemeClr val="bg1">
-                    <a:lumMod val="95000"/>
-                  </a:schemeClr>
-                </a:solidFill>
-              </a:rPr>
-              <a:t>fmt.Errorf</a:t>
-            </a:r>
-            <a:r>
-              <a:rPr sz="1600" dirty="0">
-                <a:solidFill>
-                  <a:schemeClr val="bg1">
-                    <a:lumMod val="95000"/>
-                  </a:schemeClr>
-                </a:solidFill>
-              </a:rPr>
-              <a:t>("only the owner can update this property")</a:t>
-            </a:r>
-            <a:br>
-              <a:rPr sz="1600" dirty="0">
-                <a:solidFill>
-                  <a:schemeClr val="bg1">
-                    <a:lumMod val="95000"/>
-                  </a:schemeClr>
-                </a:solidFill>
-              </a:rPr>
-            </a:br>
-            <a:r>
-              <a:rPr sz="1600" dirty="0">
-                <a:solidFill>
-                  <a:schemeClr val="bg1">
-                    <a:lumMod val="95000"/>
-                  </a:schemeClr>
-                </a:solidFill>
-              </a:rPr>
-              <a:t>    }</a:t>
-            </a:r>
-            <a:br>
-              <a:rPr sz="1600" dirty="0">
-                <a:solidFill>
-                  <a:schemeClr val="bg1">
-                    <a:lumMod val="95000"/>
-                  </a:schemeClr>
-                </a:solidFill>
-              </a:rPr>
-            </a:br>
-            <a:endParaRPr sz="1600" dirty="0">
-              <a:solidFill>
-                <a:schemeClr val="bg1">
-                  <a:lumMod val="95000"/>
-                </a:schemeClr>
-              </a:solidFill>
-            </a:endParaRPr>
           </a:p>
         </p:txBody>
       </p:sp>
@@ -12725,7 +8048,8 @@
           </a:bodyPr>
           <a:lstStyle/>
           <a:p>
-            <a:br>
+            <a:pPr/>
+            <a:r>
               <a:rPr lang="es-ES" sz="1600" dirty="0">
                 <a:solidFill>
                   <a:schemeClr val="bg1">
@@ -12733,7 +8057,11 @@
                   </a:schemeClr>
                 </a:solidFill>
               </a:rPr>
-            </a:br>
+              <a:t>    // Actualizar campo</a:t>
+            </a:r>
+          </a:p>
+          <a:p>
+            <a:pPr/>
             <a:r>
               <a:rPr lang="es-ES" sz="1600" dirty="0">
                 <a:solidFill>
@@ -12742,9 +8070,12 @@
                   </a:schemeClr>
                 </a:solidFill>
               </a:rPr>
-              <a:t>    // Actualizar campo</a:t>
-            </a:r>
-            <a:br>
+              <a:t>    property.appraisalValue = parseInt(newValue);</a:t>
+            </a:r>
+          </a:p>
+          <a:p>
+            <a:pPr/>
+            <a:r>
               <a:rPr lang="es-ES" sz="1600" dirty="0">
                 <a:solidFill>
                   <a:schemeClr val="bg1">
@@ -12752,7 +8083,11 @@
                   </a:schemeClr>
                 </a:solidFill>
               </a:rPr>
-            </a:br>
+              <a:t/>
+            </a:r>
+          </a:p>
+          <a:p>
+            <a:pPr/>
             <a:r>
               <a:rPr lang="es-ES" sz="1600" dirty="0">
                 <a:solidFill>
@@ -12761,18 +8096,11 @@
                   </a:schemeClr>
                 </a:solidFill>
               </a:rPr>
-              <a:t>    </a:t>
-            </a:r>
-            <a:r>
-              <a:rPr lang="es-ES" sz="1600" dirty="0" err="1">
-                <a:solidFill>
-                  <a:schemeClr val="bg1">
-                    <a:lumMod val="95000"/>
-                  </a:schemeClr>
-                </a:solidFill>
-              </a:rPr>
-              <a:t>property.AppraisalValue</a:t>
-            </a:r>
+              <a:t>    // Guardar</a:t>
+            </a:r>
+          </a:p>
+          <a:p>
+            <a:pPr/>
             <a:r>
               <a:rPr lang="es-ES" sz="1600" dirty="0">
                 <a:solidFill>
@@ -12781,19 +8109,12 @@
                   </a:schemeClr>
                 </a:solidFill>
               </a:rPr>
-              <a:t> = </a:t>
-            </a:r>
-            <a:r>
-              <a:rPr lang="es-ES" sz="1600" dirty="0" err="1">
-                <a:solidFill>
-                  <a:schemeClr val="bg1">
-                    <a:lumMod val="95000"/>
-                  </a:schemeClr>
-                </a:solidFill>
-              </a:rPr>
-              <a:t>newValue</a:t>
-            </a:r>
-            <a:br>
+              <a:t>    await ctx.stub.putState(id,</a:t>
+            </a:r>
+          </a:p>
+          <a:p>
+            <a:pPr/>
+            <a:r>
               <a:rPr lang="es-ES" sz="1600" dirty="0">
                 <a:solidFill>
                   <a:schemeClr val="bg1">
@@ -12801,8 +8122,12 @@
                   </a:schemeClr>
                 </a:solidFill>
               </a:rPr>
-            </a:br>
-            <a:br>
+              <a:t>        Buffer.from(JSON.stringify(property)));</a:t>
+            </a:r>
+          </a:p>
+          <a:p>
+            <a:pPr/>
+            <a:r>
               <a:rPr lang="es-ES" sz="1600" dirty="0">
                 <a:solidFill>
                   <a:schemeClr val="bg1">
@@ -12810,215 +8135,8 @@
                   </a:schemeClr>
                 </a:solidFill>
               </a:rPr>
-            </a:br>
-            <a:r>
-              <a:rPr lang="es-ES" sz="1600" dirty="0">
-                <a:solidFill>
-                  <a:schemeClr val="bg1">
-                    <a:lumMod val="95000"/>
-                  </a:schemeClr>
-                </a:solidFill>
-              </a:rPr>
-              <a:t>    // Guardar</a:t>
-            </a:r>
-            <a:br>
-              <a:rPr lang="es-ES" sz="1600" dirty="0">
-                <a:solidFill>
-                  <a:schemeClr val="bg1">
-                    <a:lumMod val="95000"/>
-                  </a:schemeClr>
-                </a:solidFill>
-              </a:rPr>
-            </a:br>
-            <a:r>
-              <a:rPr lang="es-ES" sz="1600" dirty="0">
-                <a:solidFill>
-                  <a:schemeClr val="bg1">
-                    <a:lumMod val="95000"/>
-                  </a:schemeClr>
-                </a:solidFill>
-              </a:rPr>
-              <a:t>    </a:t>
-            </a:r>
-            <a:r>
-              <a:rPr lang="es-ES" sz="1600" dirty="0" err="1">
-                <a:solidFill>
-                  <a:schemeClr val="bg1">
-                    <a:lumMod val="95000"/>
-                  </a:schemeClr>
-                </a:solidFill>
-              </a:rPr>
-              <a:t>propertyJSON</a:t>
-            </a:r>
-            <a:r>
-              <a:rPr lang="es-ES" sz="1600" dirty="0">
-                <a:solidFill>
-                  <a:schemeClr val="bg1">
-                    <a:lumMod val="95000"/>
-                  </a:schemeClr>
-                </a:solidFill>
-              </a:rPr>
-              <a:t>, _ := </a:t>
-            </a:r>
-            <a:r>
-              <a:rPr lang="es-ES" sz="1600" dirty="0" err="1">
-                <a:solidFill>
-                  <a:schemeClr val="bg1">
-                    <a:lumMod val="95000"/>
-                  </a:schemeClr>
-                </a:solidFill>
-              </a:rPr>
-              <a:t>json.Marshal</a:t>
-            </a:r>
-            <a:r>
-              <a:rPr lang="es-ES" sz="1600" dirty="0">
-                <a:solidFill>
-                  <a:schemeClr val="bg1">
-                    <a:lumMod val="95000"/>
-                  </a:schemeClr>
-                </a:solidFill>
-              </a:rPr>
-              <a:t>(</a:t>
-            </a:r>
-            <a:r>
-              <a:rPr lang="es-ES" sz="1600" dirty="0" err="1">
-                <a:solidFill>
-                  <a:schemeClr val="bg1">
-                    <a:lumMod val="95000"/>
-                  </a:schemeClr>
-                </a:solidFill>
-              </a:rPr>
-              <a:t>property</a:t>
-            </a:r>
-            <a:r>
-              <a:rPr lang="es-ES" sz="1600" dirty="0">
-                <a:solidFill>
-                  <a:schemeClr val="bg1">
-                    <a:lumMod val="95000"/>
-                  </a:schemeClr>
-                </a:solidFill>
-              </a:rPr>
-              <a:t>)</a:t>
-            </a:r>
-            <a:br>
-              <a:rPr lang="es-ES" sz="1600" dirty="0">
-                <a:solidFill>
-                  <a:schemeClr val="bg1">
-                    <a:lumMod val="95000"/>
-                  </a:schemeClr>
-                </a:solidFill>
-              </a:rPr>
-            </a:br>
-            <a:r>
-              <a:rPr lang="es-ES" sz="1600" dirty="0">
-                <a:solidFill>
-                  <a:schemeClr val="bg1">
-                    <a:lumMod val="95000"/>
-                  </a:schemeClr>
-                </a:solidFill>
-              </a:rPr>
-              <a:t>    </a:t>
-            </a:r>
-            <a:r>
-              <a:rPr lang="es-ES" sz="1600" dirty="0" err="1">
-                <a:solidFill>
-                  <a:schemeClr val="bg1">
-                    <a:lumMod val="95000"/>
-                  </a:schemeClr>
-                </a:solidFill>
-              </a:rPr>
-              <a:t>return</a:t>
-            </a:r>
-            <a:r>
-              <a:rPr lang="es-ES" sz="1600" dirty="0">
-                <a:solidFill>
-                  <a:schemeClr val="bg1">
-                    <a:lumMod val="95000"/>
-                  </a:schemeClr>
-                </a:solidFill>
-              </a:rPr>
-              <a:t> </a:t>
-            </a:r>
-            <a:r>
-              <a:rPr lang="es-ES" sz="1600" dirty="0" err="1">
-                <a:solidFill>
-                  <a:schemeClr val="bg1">
-                    <a:lumMod val="95000"/>
-                  </a:schemeClr>
-                </a:solidFill>
-              </a:rPr>
-              <a:t>ctx.GetStub</a:t>
-            </a:r>
-            <a:r>
-              <a:rPr lang="es-ES" sz="1600" dirty="0">
-                <a:solidFill>
-                  <a:schemeClr val="bg1">
-                    <a:lumMod val="95000"/>
-                  </a:schemeClr>
-                </a:solidFill>
-              </a:rPr>
-              <a:t>().</a:t>
-            </a:r>
-            <a:r>
-              <a:rPr lang="es-ES" sz="1600" dirty="0" err="1">
-                <a:solidFill>
-                  <a:schemeClr val="bg1">
-                    <a:lumMod val="95000"/>
-                  </a:schemeClr>
-                </a:solidFill>
-              </a:rPr>
-              <a:t>PutState</a:t>
-            </a:r>
-            <a:r>
-              <a:rPr lang="es-ES" sz="1600" dirty="0">
-                <a:solidFill>
-                  <a:schemeClr val="bg1">
-                    <a:lumMod val="95000"/>
-                  </a:schemeClr>
-                </a:solidFill>
-              </a:rPr>
-              <a:t>(id, </a:t>
-            </a:r>
-            <a:r>
-              <a:rPr lang="es-ES" sz="1600" dirty="0" err="1">
-                <a:solidFill>
-                  <a:schemeClr val="bg1">
-                    <a:lumMod val="95000"/>
-                  </a:schemeClr>
-                </a:solidFill>
-              </a:rPr>
-              <a:t>propertyJSON</a:t>
-            </a:r>
-            <a:r>
-              <a:rPr lang="es-ES" sz="1600" dirty="0">
-                <a:solidFill>
-                  <a:schemeClr val="bg1">
-                    <a:lumMod val="95000"/>
-                  </a:schemeClr>
-                </a:solidFill>
-              </a:rPr>
-              <a:t>)</a:t>
-            </a:r>
-            <a:br>
-              <a:rPr lang="es-ES" sz="1600" dirty="0">
-                <a:solidFill>
-                  <a:schemeClr val="bg1">
-                    <a:lumMod val="95000"/>
-                  </a:schemeClr>
-                </a:solidFill>
-              </a:rPr>
-            </a:br>
-            <a:r>
-              <a:rPr lang="es-ES" sz="1600" dirty="0">
-                <a:solidFill>
-                  <a:schemeClr val="bg1">
-                    <a:lumMod val="95000"/>
-                  </a:schemeClr>
-                </a:solidFill>
-              </a:rPr>
               <a:t>}</a:t>
             </a:r>
-            <a:endParaRPr lang="es-ES" sz="1600" dirty="0"/>
           </a:p>
         </p:txBody>
       </p:sp>
@@ -13510,7 +8628,7 @@
               </a:defRPr>
             </a:pPr>
             <a:r>
-              <a:t>GO</a:t>
+              <a:t>NODE.JS</a:t>
             </a:r>
           </a:p>
         </p:txBody>
@@ -13579,7 +8697,8 @@
           <a:bodyPr wrap="square"/>
           <a:lstStyle/>
           <a:p>
-            <a:br>
+            <a:pPr/>
+            <a:r>
               <a:rPr sz="1600" dirty="0">
                 <a:solidFill>
                   <a:schemeClr val="bg1">
@@ -13587,7 +8706,11 @@
                   </a:schemeClr>
                 </a:solidFill>
               </a:rPr>
-            </a:br>
+              <a:t>// Delete: borrado logico (cambiar status)</a:t>
+            </a:r>
+          </a:p>
+          <a:p>
+            <a:pPr/>
             <a:r>
               <a:rPr sz="1600" dirty="0">
                 <a:solidFill>
@@ -13596,18 +8719,11 @@
                   </a:schemeClr>
                 </a:solidFill>
               </a:rPr>
-              <a:t>// Delete: </a:t>
-            </a:r>
-            <a:r>
-              <a:rPr sz="1600" dirty="0" err="1">
-                <a:solidFill>
-                  <a:schemeClr val="bg1">
-                    <a:lumMod val="95000"/>
-                  </a:schemeClr>
-                </a:solidFill>
-              </a:rPr>
-              <a:t>borrado</a:t>
-            </a:r>
+              <a:t>//         vs fisico (deleteState)</a:t>
+            </a:r>
+          </a:p>
+          <a:p>
+            <a:pPr/>
             <a:r>
               <a:rPr sz="1600" dirty="0">
                 <a:solidFill>
@@ -13616,18 +8732,11 @@
                   </a:schemeClr>
                 </a:solidFill>
               </a:rPr>
-              <a:t> </a:t>
-            </a:r>
-            <a:r>
-              <a:rPr sz="1600" dirty="0" err="1">
-                <a:solidFill>
-                  <a:schemeClr val="bg1">
-                    <a:lumMod val="95000"/>
-                  </a:schemeClr>
-                </a:solidFill>
-              </a:rPr>
-              <a:t>logico</a:t>
-            </a:r>
+              <a:t>async DeactivateProperty(ctx, id) {</a:t>
+            </a:r>
+          </a:p>
+          <a:p>
+            <a:pPr/>
             <a:r>
               <a:rPr sz="1600" dirty="0">
                 <a:solidFill>
@@ -13636,18 +8745,11 @@
                   </a:schemeClr>
                 </a:solidFill>
               </a:rPr>
-              <a:t> (</a:t>
-            </a:r>
-            <a:r>
-              <a:rPr sz="1600" dirty="0" err="1">
-                <a:solidFill>
-                  <a:schemeClr val="bg1">
-                    <a:lumMod val="95000"/>
-                  </a:schemeClr>
-                </a:solidFill>
-              </a:rPr>
-              <a:t>cambiar</a:t>
-            </a:r>
+              <a:t>    const property = await this.ReadProperty(ctx, id);</a:t>
+            </a:r>
+          </a:p>
+          <a:p>
+            <a:pPr/>
             <a:r>
               <a:rPr sz="1600" dirty="0">
                 <a:solidFill>
@@ -13656,18 +8758,11 @@
                   </a:schemeClr>
                 </a:solidFill>
               </a:rPr>
-              <a:t> status) vs </a:t>
-            </a:r>
-            <a:r>
-              <a:rPr sz="1600" dirty="0" err="1">
-                <a:solidFill>
-                  <a:schemeClr val="bg1">
-                    <a:lumMod val="95000"/>
-                  </a:schemeClr>
-                </a:solidFill>
-              </a:rPr>
-              <a:t>fisico</a:t>
-            </a:r>
+              <a:t/>
+            </a:r>
+          </a:p>
+          <a:p>
+            <a:pPr/>
             <a:r>
               <a:rPr sz="1600" dirty="0">
                 <a:solidFill>
@@ -13676,18 +8771,11 @@
                   </a:schemeClr>
                 </a:solidFill>
               </a:rPr>
-              <a:t> (</a:t>
-            </a:r>
-            <a:r>
-              <a:rPr sz="1600" dirty="0" err="1">
-                <a:solidFill>
-                  <a:schemeClr val="bg1">
-                    <a:lumMod val="95000"/>
-                  </a:schemeClr>
-                </a:solidFill>
-              </a:rPr>
-              <a:t>DelState</a:t>
-            </a:r>
+              <a:t>    // borrado logico: mantiene historial</a:t>
+            </a:r>
+          </a:p>
+          <a:p>
+            <a:pPr/>
             <a:r>
               <a:rPr sz="1600" dirty="0">
                 <a:solidFill>
@@ -13696,9 +8784,12 @@
                   </a:schemeClr>
                 </a:solidFill>
               </a:rPr>
-              <a:t>)</a:t>
-            </a:r>
-            <a:br>
+              <a:t>    property.status = 'inactive';</a:t>
+            </a:r>
+          </a:p>
+          <a:p>
+            <a:pPr/>
+            <a:r>
               <a:rPr sz="1600" dirty="0">
                 <a:solidFill>
                   <a:schemeClr val="bg1">
@@ -13706,17 +8797,11 @@
                   </a:schemeClr>
                 </a:solidFill>
               </a:rPr>
-            </a:br>
-            <a:r>
-              <a:rPr sz="1600" dirty="0" err="1">
-                <a:solidFill>
-                  <a:schemeClr val="bg1">
-                    <a:lumMod val="95000"/>
-                  </a:schemeClr>
-                </a:solidFill>
-              </a:rPr>
-              <a:t>func</a:t>
-            </a:r>
+              <a:t/>
+            </a:r>
+          </a:p>
+          <a:p>
+            <a:pPr/>
             <a:r>
               <a:rPr sz="1600" dirty="0">
                 <a:solidFill>
@@ -13725,18 +8810,11 @@
                   </a:schemeClr>
                 </a:solidFill>
               </a:rPr>
-              <a:t> (s *</a:t>
-            </a:r>
-            <a:r>
-              <a:rPr sz="1600" dirty="0" err="1">
-                <a:solidFill>
-                  <a:schemeClr val="bg1">
-                    <a:lumMod val="95000"/>
-                  </a:schemeClr>
-                </a:solidFill>
-              </a:rPr>
-              <a:t>SmartContract</a:t>
-            </a:r>
+              <a:t>    await ctx.stub.putState(id,</a:t>
+            </a:r>
+          </a:p>
+          <a:p>
+            <a:pPr/>
             <a:r>
               <a:rPr sz="1600" dirty="0">
                 <a:solidFill>
@@ -13745,18 +8823,11 @@
                   </a:schemeClr>
                 </a:solidFill>
               </a:rPr>
-              <a:t>) </a:t>
-            </a:r>
-            <a:r>
-              <a:rPr sz="1600" dirty="0" err="1">
-                <a:solidFill>
-                  <a:schemeClr val="bg1">
-                    <a:lumMod val="95000"/>
-                  </a:schemeClr>
-                </a:solidFill>
-              </a:rPr>
-              <a:t>DeactivateProperty</a:t>
-            </a:r>
+              <a:t>        Buffer.from(JSON.stringify(property)));</a:t>
+            </a:r>
+          </a:p>
+          <a:p>
+            <a:pPr/>
             <a:r>
               <a:rPr sz="1600" dirty="0">
                 <a:solidFill>
@@ -13765,465 +8836,8 @@
                   </a:schemeClr>
                 </a:solidFill>
               </a:rPr>
-              <a:t>(</a:t>
-            </a:r>
-            <a:r>
-              <a:rPr sz="1600" dirty="0" err="1">
-                <a:solidFill>
-                  <a:schemeClr val="bg1">
-                    <a:lumMod val="95000"/>
-                  </a:schemeClr>
-                </a:solidFill>
-              </a:rPr>
-              <a:t>ctx</a:t>
-            </a:r>
-            <a:r>
-              <a:rPr sz="1600" dirty="0">
-                <a:solidFill>
-                  <a:schemeClr val="bg1">
-                    <a:lumMod val="95000"/>
-                  </a:schemeClr>
-                </a:solidFill>
-              </a:rPr>
-              <a:t> </a:t>
-            </a:r>
-            <a:r>
-              <a:rPr sz="1600" dirty="0" err="1">
-                <a:solidFill>
-                  <a:schemeClr val="bg1">
-                    <a:lumMod val="95000"/>
-                  </a:schemeClr>
-                </a:solidFill>
-              </a:rPr>
-              <a:t>contractapi.TransactionContextInterface</a:t>
-            </a:r>
-            <a:r>
-              <a:rPr sz="1600" dirty="0">
-                <a:solidFill>
-                  <a:schemeClr val="bg1">
-                    <a:lumMod val="95000"/>
-                  </a:schemeClr>
-                </a:solidFill>
-              </a:rPr>
-              <a:t>,</a:t>
-            </a:r>
-            <a:br>
-              <a:rPr sz="1600" dirty="0">
-                <a:solidFill>
-                  <a:schemeClr val="bg1">
-                    <a:lumMod val="95000"/>
-                  </a:schemeClr>
-                </a:solidFill>
-              </a:rPr>
-            </a:br>
-            <a:r>
-              <a:rPr sz="1600" dirty="0">
-                <a:solidFill>
-                  <a:schemeClr val="bg1">
-                    <a:lumMod val="95000"/>
-                  </a:schemeClr>
-                </a:solidFill>
-              </a:rPr>
-              <a:t>    id string) error {</a:t>
-            </a:r>
-            <a:br>
-              <a:rPr sz="1600" dirty="0">
-                <a:solidFill>
-                  <a:schemeClr val="bg1">
-                    <a:lumMod val="95000"/>
-                  </a:schemeClr>
-                </a:solidFill>
-              </a:rPr>
-            </a:br>
-            <a:r>
-              <a:rPr sz="1600" dirty="0">
-                <a:solidFill>
-                  <a:schemeClr val="bg1">
-                    <a:lumMod val="95000"/>
-                  </a:schemeClr>
-                </a:solidFill>
-              </a:rPr>
-              <a:t>    property, err := </a:t>
-            </a:r>
-            <a:r>
-              <a:rPr sz="1600" dirty="0" err="1">
-                <a:solidFill>
-                  <a:schemeClr val="bg1">
-                    <a:lumMod val="95000"/>
-                  </a:schemeClr>
-                </a:solidFill>
-              </a:rPr>
-              <a:t>s.ReadProperty</a:t>
-            </a:r>
-            <a:r>
-              <a:rPr sz="1600" dirty="0">
-                <a:solidFill>
-                  <a:schemeClr val="bg1">
-                    <a:lumMod val="95000"/>
-                  </a:schemeClr>
-                </a:solidFill>
-              </a:rPr>
-              <a:t>(</a:t>
-            </a:r>
-            <a:r>
-              <a:rPr sz="1600" dirty="0" err="1">
-                <a:solidFill>
-                  <a:schemeClr val="bg1">
-                    <a:lumMod val="95000"/>
-                  </a:schemeClr>
-                </a:solidFill>
-              </a:rPr>
-              <a:t>ctx</a:t>
-            </a:r>
-            <a:r>
-              <a:rPr sz="1600" dirty="0">
-                <a:solidFill>
-                  <a:schemeClr val="bg1">
-                    <a:lumMod val="95000"/>
-                  </a:schemeClr>
-                </a:solidFill>
-              </a:rPr>
-              <a:t>, id)</a:t>
-            </a:r>
-            <a:br>
-              <a:rPr sz="1600" dirty="0">
-                <a:solidFill>
-                  <a:schemeClr val="bg1">
-                    <a:lumMod val="95000"/>
-                  </a:schemeClr>
-                </a:solidFill>
-              </a:rPr>
-            </a:br>
-            <a:r>
-              <a:rPr sz="1600" dirty="0">
-                <a:solidFill>
-                  <a:schemeClr val="bg1">
-                    <a:lumMod val="95000"/>
-                  </a:schemeClr>
-                </a:solidFill>
-              </a:rPr>
-              <a:t>    if err != nil {</a:t>
-            </a:r>
-            <a:br>
-              <a:rPr sz="1600" dirty="0">
-                <a:solidFill>
-                  <a:schemeClr val="bg1">
-                    <a:lumMod val="95000"/>
-                  </a:schemeClr>
-                </a:solidFill>
-              </a:rPr>
-            </a:br>
-            <a:r>
-              <a:rPr sz="1600" dirty="0">
-                <a:solidFill>
-                  <a:schemeClr val="bg1">
-                    <a:lumMod val="95000"/>
-                  </a:schemeClr>
-                </a:solidFill>
-              </a:rPr>
-              <a:t>        return err</a:t>
-            </a:r>
-            <a:br>
-              <a:rPr sz="1600" dirty="0">
-                <a:solidFill>
-                  <a:schemeClr val="bg1">
-                    <a:lumMod val="95000"/>
-                  </a:schemeClr>
-                </a:solidFill>
-              </a:rPr>
-            </a:br>
-            <a:r>
-              <a:rPr sz="1600" dirty="0">
-                <a:solidFill>
-                  <a:schemeClr val="bg1">
-                    <a:lumMod val="95000"/>
-                  </a:schemeClr>
-                </a:solidFill>
-              </a:rPr>
-              <a:t>    }</a:t>
-            </a:r>
-            <a:br>
-              <a:rPr sz="1600" dirty="0">
-                <a:solidFill>
-                  <a:schemeClr val="bg1">
-                    <a:lumMod val="95000"/>
-                  </a:schemeClr>
-                </a:solidFill>
-              </a:rPr>
-            </a:br>
-            <a:r>
-              <a:rPr sz="1600" dirty="0">
-                <a:solidFill>
-                  <a:schemeClr val="bg1">
-                    <a:lumMod val="95000"/>
-                  </a:schemeClr>
-                </a:solidFill>
-              </a:rPr>
-              <a:t>    </a:t>
-            </a:r>
-            <a:r>
-              <a:rPr sz="1600" dirty="0" err="1">
-                <a:solidFill>
-                  <a:schemeClr val="bg1">
-                    <a:lumMod val="95000"/>
-                  </a:schemeClr>
-                </a:solidFill>
-              </a:rPr>
-              <a:t>property.Status</a:t>
-            </a:r>
-            <a:r>
-              <a:rPr sz="1600" dirty="0">
-                <a:solidFill>
-                  <a:schemeClr val="bg1">
-                    <a:lumMod val="95000"/>
-                  </a:schemeClr>
-                </a:solidFill>
-              </a:rPr>
-              <a:t> = "inactive"  // </a:t>
-            </a:r>
-            <a:r>
-              <a:rPr sz="1600" dirty="0" err="1">
-                <a:solidFill>
-                  <a:schemeClr val="bg1">
-                    <a:lumMod val="95000"/>
-                  </a:schemeClr>
-                </a:solidFill>
-              </a:rPr>
-              <a:t>borrado</a:t>
-            </a:r>
-            <a:r>
-              <a:rPr sz="1600" dirty="0">
-                <a:solidFill>
-                  <a:schemeClr val="bg1">
-                    <a:lumMod val="95000"/>
-                  </a:schemeClr>
-                </a:solidFill>
-              </a:rPr>
-              <a:t> </a:t>
-            </a:r>
-            <a:r>
-              <a:rPr sz="1600" dirty="0" err="1">
-                <a:solidFill>
-                  <a:schemeClr val="bg1">
-                    <a:lumMod val="95000"/>
-                  </a:schemeClr>
-                </a:solidFill>
-              </a:rPr>
-              <a:t>logico</a:t>
-            </a:r>
-            <a:r>
-              <a:rPr sz="1600" dirty="0">
-                <a:solidFill>
-                  <a:schemeClr val="bg1">
-                    <a:lumMod val="95000"/>
-                  </a:schemeClr>
-                </a:solidFill>
-              </a:rPr>
-              <a:t>: </a:t>
-            </a:r>
-            <a:r>
-              <a:rPr sz="1600" dirty="0" err="1">
-                <a:solidFill>
-                  <a:schemeClr val="bg1">
-                    <a:lumMod val="95000"/>
-                  </a:schemeClr>
-                </a:solidFill>
-              </a:rPr>
-              <a:t>mantiene</a:t>
-            </a:r>
-            <a:r>
-              <a:rPr sz="1600" dirty="0">
-                <a:solidFill>
-                  <a:schemeClr val="bg1">
-                    <a:lumMod val="95000"/>
-                  </a:schemeClr>
-                </a:solidFill>
-              </a:rPr>
-              <a:t> </a:t>
-            </a:r>
-            <a:r>
-              <a:rPr sz="1600" dirty="0" err="1">
-                <a:solidFill>
-                  <a:schemeClr val="bg1">
-                    <a:lumMod val="95000"/>
-                  </a:schemeClr>
-                </a:solidFill>
-              </a:rPr>
-              <a:t>historial</a:t>
-            </a:r>
-            <a:br>
-              <a:rPr sz="1600" dirty="0">
-                <a:solidFill>
-                  <a:schemeClr val="bg1">
-                    <a:lumMod val="95000"/>
-                  </a:schemeClr>
-                </a:solidFill>
-              </a:rPr>
-            </a:br>
-            <a:r>
-              <a:rPr sz="1600" dirty="0">
-                <a:solidFill>
-                  <a:schemeClr val="bg1">
-                    <a:lumMod val="95000"/>
-                  </a:schemeClr>
-                </a:solidFill>
-              </a:rPr>
-              <a:t>    </a:t>
-            </a:r>
-            <a:r>
-              <a:rPr sz="1600" dirty="0" err="1">
-                <a:solidFill>
-                  <a:schemeClr val="bg1">
-                    <a:lumMod val="95000"/>
-                  </a:schemeClr>
-                </a:solidFill>
-              </a:rPr>
-              <a:t>propertyJSON</a:t>
-            </a:r>
-            <a:r>
-              <a:rPr sz="1600" dirty="0">
-                <a:solidFill>
-                  <a:schemeClr val="bg1">
-                    <a:lumMod val="95000"/>
-                  </a:schemeClr>
-                </a:solidFill>
-              </a:rPr>
-              <a:t>, _ := </a:t>
-            </a:r>
-            <a:r>
-              <a:rPr sz="1600" dirty="0" err="1">
-                <a:solidFill>
-                  <a:schemeClr val="bg1">
-                    <a:lumMod val="95000"/>
-                  </a:schemeClr>
-                </a:solidFill>
-              </a:rPr>
-              <a:t>json.Marshal</a:t>
-            </a:r>
-            <a:r>
-              <a:rPr sz="1600" dirty="0">
-                <a:solidFill>
-                  <a:schemeClr val="bg1">
-                    <a:lumMod val="95000"/>
-                  </a:schemeClr>
-                </a:solidFill>
-              </a:rPr>
-              <a:t>(property)</a:t>
-            </a:r>
-            <a:br>
-              <a:rPr sz="1600" dirty="0">
-                <a:solidFill>
-                  <a:schemeClr val="bg1">
-                    <a:lumMod val="95000"/>
-                  </a:schemeClr>
-                </a:solidFill>
-              </a:rPr>
-            </a:br>
-            <a:r>
-              <a:rPr sz="1600" dirty="0">
-                <a:solidFill>
-                  <a:schemeClr val="bg1">
-                    <a:lumMod val="95000"/>
-                  </a:schemeClr>
-                </a:solidFill>
-              </a:rPr>
-              <a:t>    return </a:t>
-            </a:r>
-            <a:r>
-              <a:rPr sz="1600" dirty="0" err="1">
-                <a:solidFill>
-                  <a:schemeClr val="bg1">
-                    <a:lumMod val="95000"/>
-                  </a:schemeClr>
-                </a:solidFill>
-              </a:rPr>
-              <a:t>ctx.GetStub</a:t>
-            </a:r>
-            <a:r>
-              <a:rPr sz="1600" dirty="0">
-                <a:solidFill>
-                  <a:schemeClr val="bg1">
-                    <a:lumMod val="95000"/>
-                  </a:schemeClr>
-                </a:solidFill>
-              </a:rPr>
-              <a:t>().</a:t>
-            </a:r>
-            <a:r>
-              <a:rPr sz="1600" dirty="0" err="1">
-                <a:solidFill>
-                  <a:schemeClr val="bg1">
-                    <a:lumMod val="95000"/>
-                  </a:schemeClr>
-                </a:solidFill>
-              </a:rPr>
-              <a:t>PutState</a:t>
-            </a:r>
-            <a:r>
-              <a:rPr sz="1600" dirty="0">
-                <a:solidFill>
-                  <a:schemeClr val="bg1">
-                    <a:lumMod val="95000"/>
-                  </a:schemeClr>
-                </a:solidFill>
-              </a:rPr>
-              <a:t>(id, </a:t>
-            </a:r>
-            <a:r>
-              <a:rPr sz="1600" dirty="0" err="1">
-                <a:solidFill>
-                  <a:schemeClr val="bg1">
-                    <a:lumMod val="95000"/>
-                  </a:schemeClr>
-                </a:solidFill>
-              </a:rPr>
-              <a:t>propertyJSON</a:t>
-            </a:r>
-            <a:r>
-              <a:rPr sz="1600" dirty="0">
-                <a:solidFill>
-                  <a:schemeClr val="bg1">
-                    <a:lumMod val="95000"/>
-                  </a:schemeClr>
-                </a:solidFill>
-              </a:rPr>
-              <a:t>)</a:t>
-            </a:r>
-            <a:br>
-              <a:rPr sz="1600" dirty="0">
-                <a:solidFill>
-                  <a:schemeClr val="bg1">
-                    <a:lumMod val="95000"/>
-                  </a:schemeClr>
-                </a:solidFill>
-              </a:rPr>
-            </a:br>
-            <a:r>
-              <a:rPr sz="1600" dirty="0">
-                <a:solidFill>
-                  <a:schemeClr val="bg1">
-                    <a:lumMod val="95000"/>
-                  </a:schemeClr>
-                </a:solidFill>
-              </a:rPr>
               <a:t>}</a:t>
             </a:r>
-            <a:br>
-              <a:rPr sz="1600" dirty="0">
-                <a:solidFill>
-                  <a:schemeClr val="bg1">
-                    <a:lumMod val="95000"/>
-                  </a:schemeClr>
-                </a:solidFill>
-              </a:rPr>
-            </a:br>
-            <a:endParaRPr sz="1600" dirty="0">
-              <a:solidFill>
-                <a:schemeClr val="bg1">
-                  <a:lumMod val="95000"/>
-                </a:schemeClr>
-              </a:solidFill>
-            </a:endParaRPr>
           </a:p>
         </p:txBody>
       </p:sp>
@@ -14255,7 +8869,8 @@
           </a:bodyPr>
           <a:lstStyle/>
           <a:p>
-            <a:br>
+            <a:pPr/>
+            <a:r>
               <a:rPr lang="es-ES" sz="1600" dirty="0">
                 <a:solidFill>
                   <a:schemeClr val="bg1">
@@ -14263,7 +8878,11 @@
                   </a:schemeClr>
                 </a:solidFill>
               </a:rPr>
-            </a:br>
+              <a:t>// GetAll con paginacion</a:t>
+            </a:r>
+          </a:p>
+          <a:p>
+            <a:pPr/>
             <a:r>
               <a:rPr lang="es-ES" sz="1600" dirty="0">
                 <a:solidFill>
@@ -14272,18 +8891,11 @@
                   </a:schemeClr>
                 </a:solidFill>
               </a:rPr>
-              <a:t>// </a:t>
-            </a:r>
-            <a:r>
-              <a:rPr lang="es-ES" sz="1600" dirty="0" err="1">
-                <a:solidFill>
-                  <a:schemeClr val="bg1">
-                    <a:lumMod val="95000"/>
-                  </a:schemeClr>
-                </a:solidFill>
-              </a:rPr>
-              <a:t>GetAll</a:t>
-            </a:r>
+              <a:t>async GetAllProperties(ctx, pageSize, bookmark) {</a:t>
+            </a:r>
+          </a:p>
+          <a:p>
+            <a:pPr/>
             <a:r>
               <a:rPr lang="es-ES" sz="1600" dirty="0">
                 <a:solidFill>
@@ -14292,19 +8904,12 @@
                   </a:schemeClr>
                 </a:solidFill>
               </a:rPr>
-              <a:t> con </a:t>
-            </a:r>
-            <a:r>
-              <a:rPr lang="es-ES" sz="1600" dirty="0" err="1">
-                <a:solidFill>
-                  <a:schemeClr val="bg1">
-                    <a:lumMod val="95000"/>
-                  </a:schemeClr>
-                </a:solidFill>
-              </a:rPr>
-              <a:t>paginacion</a:t>
-            </a:r>
-            <a:br>
+              <a:t>    const { iterator, metadata } = await ctx.stub</a:t>
+            </a:r>
+          </a:p>
+          <a:p>
+            <a:pPr/>
+            <a:r>
               <a:rPr lang="es-ES" sz="1600" dirty="0">
                 <a:solidFill>
                   <a:schemeClr val="bg1">
@@ -14312,17 +8917,11 @@
                   </a:schemeClr>
                 </a:solidFill>
               </a:rPr>
-            </a:br>
-            <a:r>
-              <a:rPr lang="es-ES" sz="1600" dirty="0" err="1">
-                <a:solidFill>
-                  <a:schemeClr val="bg1">
-                    <a:lumMod val="95000"/>
-                  </a:schemeClr>
-                </a:solidFill>
-              </a:rPr>
-              <a:t>func</a:t>
-            </a:r>
+              <a:t>        .getStateByRangeWithPagination('', '',</a:t>
+            </a:r>
+          </a:p>
+          <a:p>
+            <a:pPr/>
             <a:r>
               <a:rPr lang="es-ES" sz="1600" dirty="0">
                 <a:solidFill>
@@ -14331,18 +8930,11 @@
                   </a:schemeClr>
                 </a:solidFill>
               </a:rPr>
-              <a:t> (s *</a:t>
-            </a:r>
-            <a:r>
-              <a:rPr lang="es-ES" sz="1600" dirty="0" err="1">
-                <a:solidFill>
-                  <a:schemeClr val="bg1">
-                    <a:lumMod val="95000"/>
-                  </a:schemeClr>
-                </a:solidFill>
-              </a:rPr>
-              <a:t>SmartContract</a:t>
-            </a:r>
+              <a:t>            parseInt(pageSize), bookmark);</a:t>
+            </a:r>
+          </a:p>
+          <a:p>
+            <a:pPr/>
             <a:r>
               <a:rPr lang="es-ES" sz="1600" dirty="0">
                 <a:solidFill>
@@ -14351,18 +8943,11 @@
                   </a:schemeClr>
                 </a:solidFill>
               </a:rPr>
-              <a:t>) </a:t>
-            </a:r>
-            <a:r>
-              <a:rPr lang="es-ES" sz="1600" dirty="0" err="1">
-                <a:solidFill>
-                  <a:schemeClr val="bg1">
-                    <a:lumMod val="95000"/>
-                  </a:schemeClr>
-                </a:solidFill>
-              </a:rPr>
-              <a:t>GetAllProperties</a:t>
-            </a:r>
+              <a:t>    // ... iterar y construir resultado</a:t>
+            </a:r>
+          </a:p>
+          <a:p>
+            <a:pPr/>
             <a:r>
               <a:rPr lang="es-ES" sz="1600" dirty="0">
                 <a:solidFill>
@@ -14371,18 +8956,11 @@
                   </a:schemeClr>
                 </a:solidFill>
               </a:rPr>
-              <a:t>(</a:t>
-            </a:r>
-            <a:r>
-              <a:rPr lang="es-ES" sz="1600" dirty="0" err="1">
-                <a:solidFill>
-                  <a:schemeClr val="bg1">
-                    <a:lumMod val="95000"/>
-                  </a:schemeClr>
-                </a:solidFill>
-              </a:rPr>
-              <a:t>ctx</a:t>
-            </a:r>
+              <a:t>    //     con metadata.bookmark</a:t>
+            </a:r>
+          </a:p>
+          <a:p>
+            <a:pPr/>
             <a:r>
               <a:rPr lang="es-ES" sz="1600" dirty="0">
                 <a:solidFill>
@@ -14391,589 +8969,8 @@
                   </a:schemeClr>
                 </a:solidFill>
               </a:rPr>
-              <a:t> </a:t>
-            </a:r>
-            <a:r>
-              <a:rPr lang="es-ES" sz="1600" dirty="0" err="1">
-                <a:solidFill>
-                  <a:schemeClr val="bg1">
-                    <a:lumMod val="95000"/>
-                  </a:schemeClr>
-                </a:solidFill>
-              </a:rPr>
-              <a:t>contractapi.TransactionContextInterface</a:t>
-            </a:r>
-            <a:r>
-              <a:rPr lang="es-ES" sz="1600" dirty="0">
-                <a:solidFill>
-                  <a:schemeClr val="bg1">
-                    <a:lumMod val="95000"/>
-                  </a:schemeClr>
-                </a:solidFill>
-              </a:rPr>
-              <a:t>,</a:t>
-            </a:r>
-            <a:br>
-              <a:rPr lang="es-ES" sz="1600" dirty="0">
-                <a:solidFill>
-                  <a:schemeClr val="bg1">
-                    <a:lumMod val="95000"/>
-                  </a:schemeClr>
-                </a:solidFill>
-              </a:rPr>
-            </a:br>
-            <a:r>
-              <a:rPr lang="es-ES" sz="1600" dirty="0">
-                <a:solidFill>
-                  <a:schemeClr val="bg1">
-                    <a:lumMod val="95000"/>
-                  </a:schemeClr>
-                </a:solidFill>
-              </a:rPr>
-              <a:t>    </a:t>
-            </a:r>
-            <a:r>
-              <a:rPr lang="es-ES" sz="1600" dirty="0" err="1">
-                <a:solidFill>
-                  <a:schemeClr val="bg1">
-                    <a:lumMod val="95000"/>
-                  </a:schemeClr>
-                </a:solidFill>
-              </a:rPr>
-              <a:t>pageSize</a:t>
-            </a:r>
-            <a:r>
-              <a:rPr lang="es-ES" sz="1600" dirty="0">
-                <a:solidFill>
-                  <a:schemeClr val="bg1">
-                    <a:lumMod val="95000"/>
-                  </a:schemeClr>
-                </a:solidFill>
-              </a:rPr>
-              <a:t> int32, </a:t>
-            </a:r>
-            <a:r>
-              <a:rPr lang="es-ES" sz="1600" dirty="0" err="1">
-                <a:solidFill>
-                  <a:schemeClr val="bg1">
-                    <a:lumMod val="95000"/>
-                  </a:schemeClr>
-                </a:solidFill>
-              </a:rPr>
-              <a:t>bookmark</a:t>
-            </a:r>
-            <a:r>
-              <a:rPr lang="es-ES" sz="1600" dirty="0">
-                <a:solidFill>
-                  <a:schemeClr val="bg1">
-                    <a:lumMod val="95000"/>
-                  </a:schemeClr>
-                </a:solidFill>
-              </a:rPr>
-              <a:t> </a:t>
-            </a:r>
-            <a:r>
-              <a:rPr lang="es-ES" sz="1600" dirty="0" err="1">
-                <a:solidFill>
-                  <a:schemeClr val="bg1">
-                    <a:lumMod val="95000"/>
-                  </a:schemeClr>
-                </a:solidFill>
-              </a:rPr>
-              <a:t>string</a:t>
-            </a:r>
-            <a:r>
-              <a:rPr lang="es-ES" sz="1600" dirty="0">
-                <a:solidFill>
-                  <a:schemeClr val="bg1">
-                    <a:lumMod val="95000"/>
-                  </a:schemeClr>
-                </a:solidFill>
-              </a:rPr>
-              <a:t>) (*</a:t>
-            </a:r>
-            <a:r>
-              <a:rPr lang="es-ES" sz="1600" dirty="0" err="1">
-                <a:solidFill>
-                  <a:schemeClr val="bg1">
-                    <a:lumMod val="95000"/>
-                  </a:schemeClr>
-                </a:solidFill>
-              </a:rPr>
-              <a:t>PaginatedResult</a:t>
-            </a:r>
-            <a:r>
-              <a:rPr lang="es-ES" sz="1600" dirty="0">
-                <a:solidFill>
-                  <a:schemeClr val="bg1">
-                    <a:lumMod val="95000"/>
-                  </a:schemeClr>
-                </a:solidFill>
-              </a:rPr>
-              <a:t>, error) {</a:t>
-            </a:r>
-            <a:br>
-              <a:rPr lang="es-ES" sz="1600" dirty="0">
-                <a:solidFill>
-                  <a:schemeClr val="bg1">
-                    <a:lumMod val="95000"/>
-                  </a:schemeClr>
-                </a:solidFill>
-              </a:rPr>
-            </a:br>
-            <a:br>
-              <a:rPr lang="es-ES" sz="1600" dirty="0">
-                <a:solidFill>
-                  <a:schemeClr val="bg1">
-                    <a:lumMod val="95000"/>
-                  </a:schemeClr>
-                </a:solidFill>
-              </a:rPr>
-            </a:br>
-            <a:r>
-              <a:rPr lang="es-ES" sz="1600" dirty="0">
-                <a:solidFill>
-                  <a:schemeClr val="bg1">
-                    <a:lumMod val="95000"/>
-                  </a:schemeClr>
-                </a:solidFill>
-              </a:rPr>
-              <a:t>    </a:t>
-            </a:r>
-            <a:r>
-              <a:rPr lang="es-ES" sz="1600" dirty="0" err="1">
-                <a:solidFill>
-                  <a:schemeClr val="bg1">
-                    <a:lumMod val="95000"/>
-                  </a:schemeClr>
-                </a:solidFill>
-              </a:rPr>
-              <a:t>iterator</a:t>
-            </a:r>
-            <a:r>
-              <a:rPr lang="es-ES" sz="1600" dirty="0">
-                <a:solidFill>
-                  <a:schemeClr val="bg1">
-                    <a:lumMod val="95000"/>
-                  </a:schemeClr>
-                </a:solidFill>
-              </a:rPr>
-              <a:t>, </a:t>
-            </a:r>
-            <a:r>
-              <a:rPr lang="es-ES" sz="1600" dirty="0" err="1">
-                <a:solidFill>
-                  <a:schemeClr val="bg1">
-                    <a:lumMod val="95000"/>
-                  </a:schemeClr>
-                </a:solidFill>
-              </a:rPr>
-              <a:t>metadata</a:t>
-            </a:r>
-            <a:r>
-              <a:rPr lang="es-ES" sz="1600" dirty="0">
-                <a:solidFill>
-                  <a:schemeClr val="bg1">
-                    <a:lumMod val="95000"/>
-                  </a:schemeClr>
-                </a:solidFill>
-              </a:rPr>
-              <a:t>, </a:t>
-            </a:r>
-            <a:r>
-              <a:rPr lang="es-ES" sz="1600" dirty="0" err="1">
-                <a:solidFill>
-                  <a:schemeClr val="bg1">
-                    <a:lumMod val="95000"/>
-                  </a:schemeClr>
-                </a:solidFill>
-              </a:rPr>
-              <a:t>err</a:t>
-            </a:r>
-            <a:r>
-              <a:rPr lang="es-ES" sz="1600" dirty="0">
-                <a:solidFill>
-                  <a:schemeClr val="bg1">
-                    <a:lumMod val="95000"/>
-                  </a:schemeClr>
-                </a:solidFill>
-              </a:rPr>
-              <a:t> := </a:t>
-            </a:r>
-            <a:r>
-              <a:rPr lang="es-ES" sz="1600" dirty="0" err="1">
-                <a:solidFill>
-                  <a:schemeClr val="bg1">
-                    <a:lumMod val="95000"/>
-                  </a:schemeClr>
-                </a:solidFill>
-              </a:rPr>
-              <a:t>ctx.GetStub</a:t>
-            </a:r>
-            <a:r>
-              <a:rPr lang="es-ES" sz="1600" dirty="0">
-                <a:solidFill>
-                  <a:schemeClr val="bg1">
-                    <a:lumMod val="95000"/>
-                  </a:schemeClr>
-                </a:solidFill>
-              </a:rPr>
-              <a:t>().</a:t>
-            </a:r>
-            <a:br>
-              <a:rPr lang="es-ES" sz="1600" dirty="0">
-                <a:solidFill>
-                  <a:schemeClr val="bg1">
-                    <a:lumMod val="95000"/>
-                  </a:schemeClr>
-                </a:solidFill>
-              </a:rPr>
-            </a:br>
-            <a:r>
-              <a:rPr lang="es-ES" sz="1600" dirty="0">
-                <a:solidFill>
-                  <a:schemeClr val="bg1">
-                    <a:lumMod val="95000"/>
-                  </a:schemeClr>
-                </a:solidFill>
-              </a:rPr>
-              <a:t>        </a:t>
-            </a:r>
-            <a:r>
-              <a:rPr lang="es-ES" sz="1600" dirty="0" err="1">
-                <a:solidFill>
-                  <a:schemeClr val="bg1">
-                    <a:lumMod val="95000"/>
-                  </a:schemeClr>
-                </a:solidFill>
-              </a:rPr>
-              <a:t>GetStateByRangeWithPagination</a:t>
-            </a:r>
-            <a:r>
-              <a:rPr lang="es-ES" sz="1600" dirty="0">
-                <a:solidFill>
-                  <a:schemeClr val="bg1">
-                    <a:lumMod val="95000"/>
-                  </a:schemeClr>
-                </a:solidFill>
-              </a:rPr>
-              <a:t>("", "", </a:t>
-            </a:r>
-            <a:r>
-              <a:rPr lang="es-ES" sz="1600" dirty="0" err="1">
-                <a:solidFill>
-                  <a:schemeClr val="bg1">
-                    <a:lumMod val="95000"/>
-                  </a:schemeClr>
-                </a:solidFill>
-              </a:rPr>
-              <a:t>pageSize</a:t>
-            </a:r>
-            <a:r>
-              <a:rPr lang="es-ES" sz="1600" dirty="0">
-                <a:solidFill>
-                  <a:schemeClr val="bg1">
-                    <a:lumMod val="95000"/>
-                  </a:schemeClr>
-                </a:solidFill>
-              </a:rPr>
-              <a:t>, </a:t>
-            </a:r>
-            <a:r>
-              <a:rPr lang="es-ES" sz="1600" dirty="0" err="1">
-                <a:solidFill>
-                  <a:schemeClr val="bg1">
-                    <a:lumMod val="95000"/>
-                  </a:schemeClr>
-                </a:solidFill>
-              </a:rPr>
-              <a:t>bookmark</a:t>
-            </a:r>
-            <a:r>
-              <a:rPr lang="es-ES" sz="1600" dirty="0">
-                <a:solidFill>
-                  <a:schemeClr val="bg1">
-                    <a:lumMod val="95000"/>
-                  </a:schemeClr>
-                </a:solidFill>
-              </a:rPr>
-              <a:t>)</a:t>
-            </a:r>
-            <a:br>
-              <a:rPr lang="es-ES" sz="1600" dirty="0">
-                <a:solidFill>
-                  <a:schemeClr val="bg1">
-                    <a:lumMod val="95000"/>
-                  </a:schemeClr>
-                </a:solidFill>
-              </a:rPr>
-            </a:br>
-            <a:r>
-              <a:rPr lang="es-ES" sz="1600" dirty="0">
-                <a:solidFill>
-                  <a:schemeClr val="bg1">
-                    <a:lumMod val="95000"/>
-                  </a:schemeClr>
-                </a:solidFill>
-              </a:rPr>
-              <a:t>    </a:t>
-            </a:r>
-            <a:r>
-              <a:rPr lang="es-ES" sz="1600" dirty="0" err="1">
-                <a:solidFill>
-                  <a:schemeClr val="bg1">
-                    <a:lumMod val="95000"/>
-                  </a:schemeClr>
-                </a:solidFill>
-              </a:rPr>
-              <a:t>if</a:t>
-            </a:r>
-            <a:r>
-              <a:rPr lang="es-ES" sz="1600" dirty="0">
-                <a:solidFill>
-                  <a:schemeClr val="bg1">
-                    <a:lumMod val="95000"/>
-                  </a:schemeClr>
-                </a:solidFill>
-              </a:rPr>
-              <a:t> </a:t>
-            </a:r>
-            <a:r>
-              <a:rPr lang="es-ES" sz="1600" dirty="0" err="1">
-                <a:solidFill>
-                  <a:schemeClr val="bg1">
-                    <a:lumMod val="95000"/>
-                  </a:schemeClr>
-                </a:solidFill>
-              </a:rPr>
-              <a:t>err</a:t>
-            </a:r>
-            <a:r>
-              <a:rPr lang="es-ES" sz="1600" dirty="0">
-                <a:solidFill>
-                  <a:schemeClr val="bg1">
-                    <a:lumMod val="95000"/>
-                  </a:schemeClr>
-                </a:solidFill>
-              </a:rPr>
-              <a:t> != </a:t>
-            </a:r>
-            <a:r>
-              <a:rPr lang="es-ES" sz="1600" dirty="0" err="1">
-                <a:solidFill>
-                  <a:schemeClr val="bg1">
-                    <a:lumMod val="95000"/>
-                  </a:schemeClr>
-                </a:solidFill>
-              </a:rPr>
-              <a:t>nil</a:t>
-            </a:r>
-            <a:r>
-              <a:rPr lang="es-ES" sz="1600" dirty="0">
-                <a:solidFill>
-                  <a:schemeClr val="bg1">
-                    <a:lumMod val="95000"/>
-                  </a:schemeClr>
-                </a:solidFill>
-              </a:rPr>
-              <a:t> {</a:t>
-            </a:r>
-            <a:br>
-              <a:rPr lang="es-ES" sz="1600" dirty="0">
-                <a:solidFill>
-                  <a:schemeClr val="bg1">
-                    <a:lumMod val="95000"/>
-                  </a:schemeClr>
-                </a:solidFill>
-              </a:rPr>
-            </a:br>
-            <a:r>
-              <a:rPr lang="es-ES" sz="1600" dirty="0">
-                <a:solidFill>
-                  <a:schemeClr val="bg1">
-                    <a:lumMod val="95000"/>
-                  </a:schemeClr>
-                </a:solidFill>
-              </a:rPr>
-              <a:t>        </a:t>
-            </a:r>
-            <a:r>
-              <a:rPr lang="es-ES" sz="1600" dirty="0" err="1">
-                <a:solidFill>
-                  <a:schemeClr val="bg1">
-                    <a:lumMod val="95000"/>
-                  </a:schemeClr>
-                </a:solidFill>
-              </a:rPr>
-              <a:t>return</a:t>
-            </a:r>
-            <a:r>
-              <a:rPr lang="es-ES" sz="1600" dirty="0">
-                <a:solidFill>
-                  <a:schemeClr val="bg1">
-                    <a:lumMod val="95000"/>
-                  </a:schemeClr>
-                </a:solidFill>
-              </a:rPr>
-              <a:t> </a:t>
-            </a:r>
-            <a:r>
-              <a:rPr lang="es-ES" sz="1600" dirty="0" err="1">
-                <a:solidFill>
-                  <a:schemeClr val="bg1">
-                    <a:lumMod val="95000"/>
-                  </a:schemeClr>
-                </a:solidFill>
-              </a:rPr>
-              <a:t>nil</a:t>
-            </a:r>
-            <a:r>
-              <a:rPr lang="es-ES" sz="1600" dirty="0">
-                <a:solidFill>
-                  <a:schemeClr val="bg1">
-                    <a:lumMod val="95000"/>
-                  </a:schemeClr>
-                </a:solidFill>
-              </a:rPr>
-              <a:t>, </a:t>
-            </a:r>
-            <a:r>
-              <a:rPr lang="es-ES" sz="1600" dirty="0" err="1">
-                <a:solidFill>
-                  <a:schemeClr val="bg1">
-                    <a:lumMod val="95000"/>
-                  </a:schemeClr>
-                </a:solidFill>
-              </a:rPr>
-              <a:t>err</a:t>
-            </a:r>
-            <a:br>
-              <a:rPr lang="es-ES" sz="1600" dirty="0">
-                <a:solidFill>
-                  <a:schemeClr val="bg1">
-                    <a:lumMod val="95000"/>
-                  </a:schemeClr>
-                </a:solidFill>
-              </a:rPr>
-            </a:br>
-            <a:r>
-              <a:rPr lang="es-ES" sz="1600" dirty="0">
-                <a:solidFill>
-                  <a:schemeClr val="bg1">
-                    <a:lumMod val="95000"/>
-                  </a:schemeClr>
-                </a:solidFill>
-              </a:rPr>
-              <a:t>    }</a:t>
-            </a:r>
-            <a:br>
-              <a:rPr lang="es-ES" sz="1600" dirty="0">
-                <a:solidFill>
-                  <a:schemeClr val="bg1">
-                    <a:lumMod val="95000"/>
-                  </a:schemeClr>
-                </a:solidFill>
-              </a:rPr>
-            </a:br>
-            <a:r>
-              <a:rPr lang="es-ES" sz="1600" dirty="0">
-                <a:solidFill>
-                  <a:schemeClr val="bg1">
-                    <a:lumMod val="95000"/>
-                  </a:schemeClr>
-                </a:solidFill>
-              </a:rPr>
-              <a:t>    </a:t>
-            </a:r>
-            <a:r>
-              <a:rPr lang="es-ES" sz="1600" dirty="0" err="1">
-                <a:solidFill>
-                  <a:schemeClr val="bg1">
-                    <a:lumMod val="95000"/>
-                  </a:schemeClr>
-                </a:solidFill>
-              </a:rPr>
-              <a:t>defer</a:t>
-            </a:r>
-            <a:r>
-              <a:rPr lang="es-ES" sz="1600" dirty="0">
-                <a:solidFill>
-                  <a:schemeClr val="bg1">
-                    <a:lumMod val="95000"/>
-                  </a:schemeClr>
-                </a:solidFill>
-              </a:rPr>
-              <a:t> </a:t>
-            </a:r>
-            <a:r>
-              <a:rPr lang="es-ES" sz="1600" dirty="0" err="1">
-                <a:solidFill>
-                  <a:schemeClr val="bg1">
-                    <a:lumMod val="95000"/>
-                  </a:schemeClr>
-                </a:solidFill>
-              </a:rPr>
-              <a:t>iterator.Close</a:t>
-            </a:r>
-            <a:r>
-              <a:rPr lang="es-ES" sz="1600" dirty="0">
-                <a:solidFill>
-                  <a:schemeClr val="bg1">
-                    <a:lumMod val="95000"/>
-                  </a:schemeClr>
-                </a:solidFill>
-              </a:rPr>
-              <a:t>()</a:t>
-            </a:r>
-            <a:br>
-              <a:rPr lang="es-ES" sz="1600" dirty="0">
-                <a:solidFill>
-                  <a:schemeClr val="bg1">
-                    <a:lumMod val="95000"/>
-                  </a:schemeClr>
-                </a:solidFill>
-              </a:rPr>
-            </a:br>
-            <a:r>
-              <a:rPr lang="es-ES" sz="1600" dirty="0">
-                <a:solidFill>
-                  <a:schemeClr val="bg1">
-                    <a:lumMod val="95000"/>
-                  </a:schemeClr>
-                </a:solidFill>
-              </a:rPr>
-              <a:t>    // ... iterar y construir resultado con </a:t>
-            </a:r>
-            <a:r>
-              <a:rPr lang="es-ES" sz="1600" dirty="0" err="1">
-                <a:solidFill>
-                  <a:schemeClr val="bg1">
-                    <a:lumMod val="95000"/>
-                  </a:schemeClr>
-                </a:solidFill>
-              </a:rPr>
-              <a:t>metadata.Bookmark</a:t>
-            </a:r>
-            <a:br>
-              <a:rPr lang="es-ES" sz="1600" dirty="0">
-                <a:solidFill>
-                  <a:schemeClr val="bg1">
-                    <a:lumMod val="95000"/>
-                  </a:schemeClr>
-                </a:solidFill>
-              </a:rPr>
-            </a:br>
-            <a:r>
-              <a:rPr lang="es-ES" sz="1600" dirty="0">
-                <a:solidFill>
-                  <a:schemeClr val="bg1">
-                    <a:lumMod val="95000"/>
-                  </a:schemeClr>
-                </a:solidFill>
-              </a:rPr>
               <a:t>}</a:t>
             </a:r>
-            <a:endParaRPr lang="es-ES" sz="1600" dirty="0"/>
           </a:p>
         </p:txBody>
       </p:sp>
@@ -20801,7 +14798,7 @@
               </a:defRPr>
             </a:pPr>
             <a:r>
-              <a:t>Anatomia de un chaincode en Go</a:t>
+              <a:t>Anatomia de un chaincode en Node.js</a:t>
             </a:r>
           </a:p>
         </p:txBody>
@@ -20835,7 +14832,7 @@
               </a:defRPr>
             </a:pPr>
             <a:r>
-              <a:t>Estructura basica: struct + Contract API + main()</a:t>
+              <a:t>Estructura basica: clase que extiende Contract</a:t>
             </a:r>
           </a:p>
         </p:txBody>
@@ -20913,7 +14910,7 @@
               </a:defRPr>
             </a:pPr>
             <a:r>
-              <a:t>GO</a:t>
+              <a:t>NODE.JS</a:t>
             </a:r>
           </a:p>
         </p:txBody>
@@ -20982,7 +14979,8 @@
           <a:bodyPr wrap="square"/>
           <a:lstStyle/>
           <a:p>
-            <a:br>
+            <a:pPr/>
+            <a:r>
               <a:rPr sz="1600" dirty="0">
                 <a:solidFill>
                   <a:schemeClr val="bg1">
@@ -20990,7 +14988,11 @@
                   </a:schemeClr>
                 </a:solidFill>
               </a:rPr>
-            </a:br>
+              <a:t>'use strict';</a:t>
+            </a:r>
+          </a:p>
+          <a:p>
+            <a:pPr/>
             <a:r>
               <a:rPr sz="1600" dirty="0">
                 <a:solidFill>
@@ -20999,9 +15001,12 @@
                   </a:schemeClr>
                 </a:solidFill>
               </a:rPr>
-              <a:t>package main</a:t>
-            </a:r>
-            <a:br>
+              <a:t>const { Contract } = require('fabric-contract-api');</a:t>
+            </a:r>
+          </a:p>
+          <a:p>
+            <a:pPr/>
+            <a:r>
               <a:rPr sz="1600" dirty="0">
                 <a:solidFill>
                   <a:schemeClr val="bg1">
@@ -21009,8 +15014,12 @@
                   </a:schemeClr>
                 </a:solidFill>
               </a:rPr>
-            </a:br>
-            <a:br>
+              <a:t/>
+            </a:r>
+          </a:p>
+          <a:p>
+            <a:pPr/>
+            <a:r>
               <a:rPr sz="1600" dirty="0">
                 <a:solidFill>
                   <a:schemeClr val="bg1">
@@ -21018,7 +15027,11 @@
                   </a:schemeClr>
                 </a:solidFill>
               </a:rPr>
-            </a:br>
+              <a:t>// SmartContract proporciona las funciones del chaincode</a:t>
+            </a:r>
+          </a:p>
+          <a:p>
+            <a:pPr/>
             <a:r>
               <a:rPr sz="1600" dirty="0">
                 <a:solidFill>
@@ -21027,9 +15040,12 @@
                   </a:schemeClr>
                 </a:solidFill>
               </a:rPr>
-              <a:t>import (</a:t>
-            </a:r>
-            <a:br>
+              <a:t>class SmartContract extends Contract {</a:t>
+            </a:r>
+          </a:p>
+          <a:p>
+            <a:pPr/>
+            <a:r>
               <a:rPr sz="1600" dirty="0">
                 <a:solidFill>
                   <a:schemeClr val="bg1">
@@ -21037,7 +15053,11 @@
                   </a:schemeClr>
                 </a:solidFill>
               </a:rPr>
-            </a:br>
+              <a:t/>
+            </a:r>
+          </a:p>
+          <a:p>
+            <a:pPr/>
             <a:r>
               <a:rPr sz="1600" dirty="0">
                 <a:solidFill>
@@ -21046,18 +15066,11 @@
                   </a:schemeClr>
                 </a:solidFill>
               </a:rPr>
-              <a:t>    "github.com/</a:t>
-            </a:r>
-            <a:r>
-              <a:rPr sz="1600" dirty="0" err="1">
-                <a:solidFill>
-                  <a:schemeClr val="bg1">
-                    <a:lumMod val="95000"/>
-                  </a:schemeClr>
-                </a:solidFill>
-              </a:rPr>
-              <a:t>hyperledger</a:t>
-            </a:r>
+              <a:t>    // InitLedger inicializa el ledger con datos de ejemplo</a:t>
+            </a:r>
+          </a:p>
+          <a:p>
+            <a:pPr/>
             <a:r>
               <a:rPr sz="1600" dirty="0">
                 <a:solidFill>
@@ -21066,18 +15079,11 @@
                   </a:schemeClr>
                 </a:solidFill>
               </a:rPr>
-              <a:t>/fabric-contract-</a:t>
-            </a:r>
-            <a:r>
-              <a:rPr sz="1600" dirty="0" err="1">
-                <a:solidFill>
-                  <a:schemeClr val="bg1">
-                    <a:lumMod val="95000"/>
-                  </a:schemeClr>
-                </a:solidFill>
-              </a:rPr>
-              <a:t>api</a:t>
-            </a:r>
+              <a:t>    async InitLedger(ctx) {</a:t>
+            </a:r>
+          </a:p>
+          <a:p>
+            <a:pPr/>
             <a:r>
               <a:rPr sz="1600" dirty="0">
                 <a:solidFill>
@@ -21086,18 +15092,11 @@
                   </a:schemeClr>
                 </a:solidFill>
               </a:rPr>
-              <a:t>-go/</a:t>
-            </a:r>
-            <a:r>
-              <a:rPr sz="1600" dirty="0" err="1">
-                <a:solidFill>
-                  <a:schemeClr val="bg1">
-                    <a:lumMod val="95000"/>
-                  </a:schemeClr>
-                </a:solidFill>
-              </a:rPr>
-              <a:t>contractapi</a:t>
-            </a:r>
+              <a:t>        // Logica de inicializacion aqui</a:t>
+            </a:r>
+          </a:p>
+          <a:p>
+            <a:pPr/>
             <a:r>
               <a:rPr sz="1600" dirty="0">
                 <a:solidFill>
@@ -21106,9 +15105,12 @@
                   </a:schemeClr>
                 </a:solidFill>
               </a:rPr>
-              <a:t>"</a:t>
-            </a:r>
-            <a:br>
+              <a:t>    }</a:t>
+            </a:r>
+          </a:p>
+          <a:p>
+            <a:pPr/>
+            <a:r>
               <a:rPr sz="1600" dirty="0">
                 <a:solidFill>
                   <a:schemeClr val="bg1">
@@ -21116,532 +15118,8 @@
                   </a:schemeClr>
                 </a:solidFill>
               </a:rPr>
-            </a:br>
-            <a:r>
-              <a:rPr sz="1600" dirty="0">
-                <a:solidFill>
-                  <a:schemeClr val="bg1">
-                    <a:lumMod val="95000"/>
-                  </a:schemeClr>
-                </a:solidFill>
-              </a:rPr>
-              <a:t>)</a:t>
-            </a:r>
-            <a:br>
-              <a:rPr sz="1600" dirty="0">
-                <a:solidFill>
-                  <a:schemeClr val="bg1">
-                    <a:lumMod val="95000"/>
-                  </a:schemeClr>
-                </a:solidFill>
-              </a:rPr>
-            </a:br>
-            <a:br>
-              <a:rPr sz="1600" dirty="0">
-                <a:solidFill>
-                  <a:schemeClr val="bg1">
-                    <a:lumMod val="95000"/>
-                  </a:schemeClr>
-                </a:solidFill>
-              </a:rPr>
-            </a:br>
-            <a:r>
-              <a:rPr sz="1600" dirty="0">
-                <a:solidFill>
-                  <a:schemeClr val="bg1">
-                    <a:lumMod val="95000"/>
-                  </a:schemeClr>
-                </a:solidFill>
-              </a:rPr>
-              <a:t>// </a:t>
-            </a:r>
-            <a:r>
-              <a:rPr sz="1600" dirty="0" err="1">
-                <a:solidFill>
-                  <a:schemeClr val="bg1">
-                    <a:lumMod val="95000"/>
-                  </a:schemeClr>
-                </a:solidFill>
-              </a:rPr>
-              <a:t>SmartContract</a:t>
-            </a:r>
-            <a:r>
-              <a:rPr sz="1600" dirty="0">
-                <a:solidFill>
-                  <a:schemeClr val="bg1">
-                    <a:lumMod val="95000"/>
-                  </a:schemeClr>
-                </a:solidFill>
-              </a:rPr>
-              <a:t> </a:t>
-            </a:r>
-            <a:r>
-              <a:rPr sz="1600" dirty="0" err="1">
-                <a:solidFill>
-                  <a:schemeClr val="bg1">
-                    <a:lumMod val="95000"/>
-                  </a:schemeClr>
-                </a:solidFill>
-              </a:rPr>
-              <a:t>proporciona</a:t>
-            </a:r>
-            <a:r>
-              <a:rPr sz="1600" dirty="0">
-                <a:solidFill>
-                  <a:schemeClr val="bg1">
-                    <a:lumMod val="95000"/>
-                  </a:schemeClr>
-                </a:solidFill>
-              </a:rPr>
-              <a:t> las </a:t>
-            </a:r>
-            <a:r>
-              <a:rPr sz="1600" dirty="0" err="1">
-                <a:solidFill>
-                  <a:schemeClr val="bg1">
-                    <a:lumMod val="95000"/>
-                  </a:schemeClr>
-                </a:solidFill>
-              </a:rPr>
-              <a:t>funciones</a:t>
-            </a:r>
-            <a:r>
-              <a:rPr sz="1600" dirty="0">
-                <a:solidFill>
-                  <a:schemeClr val="bg1">
-                    <a:lumMod val="95000"/>
-                  </a:schemeClr>
-                </a:solidFill>
-              </a:rPr>
-              <a:t> del </a:t>
-            </a:r>
-            <a:r>
-              <a:rPr sz="1600" dirty="0" err="1">
-                <a:solidFill>
-                  <a:schemeClr val="bg1">
-                    <a:lumMod val="95000"/>
-                  </a:schemeClr>
-                </a:solidFill>
-              </a:rPr>
-              <a:t>chaincode</a:t>
-            </a:r>
-            <a:br>
-              <a:rPr sz="1600" dirty="0">
-                <a:solidFill>
-                  <a:schemeClr val="bg1">
-                    <a:lumMod val="95000"/>
-                  </a:schemeClr>
-                </a:solidFill>
-              </a:rPr>
-            </a:br>
-            <a:r>
-              <a:rPr sz="1600" dirty="0">
-                <a:solidFill>
-                  <a:schemeClr val="bg1">
-                    <a:lumMod val="95000"/>
-                  </a:schemeClr>
-                </a:solidFill>
-              </a:rPr>
-              <a:t>type </a:t>
-            </a:r>
-            <a:r>
-              <a:rPr sz="1600" dirty="0" err="1">
-                <a:solidFill>
-                  <a:schemeClr val="bg1">
-                    <a:lumMod val="95000"/>
-                  </a:schemeClr>
-                </a:solidFill>
-              </a:rPr>
-              <a:t>SmartContract</a:t>
-            </a:r>
-            <a:r>
-              <a:rPr sz="1600" dirty="0">
-                <a:solidFill>
-                  <a:schemeClr val="bg1">
-                    <a:lumMod val="95000"/>
-                  </a:schemeClr>
-                </a:solidFill>
-              </a:rPr>
-              <a:t> struct {</a:t>
-            </a:r>
-            <a:br>
-              <a:rPr sz="1600" dirty="0">
-                <a:solidFill>
-                  <a:schemeClr val="bg1">
-                    <a:lumMod val="95000"/>
-                  </a:schemeClr>
-                </a:solidFill>
-              </a:rPr>
-            </a:br>
-            <a:r>
-              <a:rPr sz="1600" dirty="0">
-                <a:solidFill>
-                  <a:schemeClr val="bg1">
-                    <a:lumMod val="95000"/>
-                  </a:schemeClr>
-                </a:solidFill>
-              </a:rPr>
-              <a:t>    </a:t>
-            </a:r>
-            <a:r>
-              <a:rPr sz="1600" dirty="0" err="1">
-                <a:solidFill>
-                  <a:schemeClr val="bg1">
-                    <a:lumMod val="95000"/>
-                  </a:schemeClr>
-                </a:solidFill>
-              </a:rPr>
-              <a:t>contractapi.Contract</a:t>
-            </a:r>
-            <a:br>
-              <a:rPr sz="1600" dirty="0">
-                <a:solidFill>
-                  <a:schemeClr val="bg1">
-                    <a:lumMod val="95000"/>
-                  </a:schemeClr>
-                </a:solidFill>
-              </a:rPr>
-            </a:br>
-            <a:r>
-              <a:rPr sz="1600" dirty="0">
-                <a:solidFill>
-                  <a:schemeClr val="bg1">
-                    <a:lumMod val="95000"/>
-                  </a:schemeClr>
-                </a:solidFill>
-              </a:rPr>
               <a:t>}</a:t>
             </a:r>
-            <a:br>
-              <a:rPr sz="1600" dirty="0">
-                <a:solidFill>
-                  <a:schemeClr val="bg1">
-                    <a:lumMod val="95000"/>
-                  </a:schemeClr>
-                </a:solidFill>
-              </a:rPr>
-            </a:br>
-            <a:br>
-              <a:rPr sz="1600" dirty="0">
-                <a:solidFill>
-                  <a:schemeClr val="bg1">
-                    <a:lumMod val="95000"/>
-                  </a:schemeClr>
-                </a:solidFill>
-              </a:rPr>
-            </a:br>
-            <a:r>
-              <a:rPr sz="1600" dirty="0">
-                <a:solidFill>
-                  <a:schemeClr val="bg1">
-                    <a:lumMod val="95000"/>
-                  </a:schemeClr>
-                </a:solidFill>
-              </a:rPr>
-              <a:t>// </a:t>
-            </a:r>
-            <a:r>
-              <a:rPr sz="1600" dirty="0" err="1">
-                <a:solidFill>
-                  <a:schemeClr val="bg1">
-                    <a:lumMod val="95000"/>
-                  </a:schemeClr>
-                </a:solidFill>
-              </a:rPr>
-              <a:t>InitLedger</a:t>
-            </a:r>
-            <a:r>
-              <a:rPr sz="1600" dirty="0">
-                <a:solidFill>
-                  <a:schemeClr val="bg1">
-                    <a:lumMod val="95000"/>
-                  </a:schemeClr>
-                </a:solidFill>
-              </a:rPr>
-              <a:t> </a:t>
-            </a:r>
-            <a:r>
-              <a:rPr sz="1600" dirty="0" err="1">
-                <a:solidFill>
-                  <a:schemeClr val="bg1">
-                    <a:lumMod val="95000"/>
-                  </a:schemeClr>
-                </a:solidFill>
-              </a:rPr>
-              <a:t>inicializa</a:t>
-            </a:r>
-            <a:r>
-              <a:rPr sz="1600" dirty="0">
-                <a:solidFill>
-                  <a:schemeClr val="bg1">
-                    <a:lumMod val="95000"/>
-                  </a:schemeClr>
-                </a:solidFill>
-              </a:rPr>
-              <a:t> </a:t>
-            </a:r>
-            <a:r>
-              <a:rPr sz="1600" dirty="0" err="1">
-                <a:solidFill>
-                  <a:schemeClr val="bg1">
-                    <a:lumMod val="95000"/>
-                  </a:schemeClr>
-                </a:solidFill>
-              </a:rPr>
-              <a:t>el</a:t>
-            </a:r>
-            <a:r>
-              <a:rPr sz="1600" dirty="0">
-                <a:solidFill>
-                  <a:schemeClr val="bg1">
-                    <a:lumMod val="95000"/>
-                  </a:schemeClr>
-                </a:solidFill>
-              </a:rPr>
-              <a:t> ledger con </a:t>
-            </a:r>
-            <a:r>
-              <a:rPr sz="1600" dirty="0" err="1">
-                <a:solidFill>
-                  <a:schemeClr val="bg1">
-                    <a:lumMod val="95000"/>
-                  </a:schemeClr>
-                </a:solidFill>
-              </a:rPr>
-              <a:t>datos</a:t>
-            </a:r>
-            <a:r>
-              <a:rPr sz="1600" dirty="0">
-                <a:solidFill>
-                  <a:schemeClr val="bg1">
-                    <a:lumMod val="95000"/>
-                  </a:schemeClr>
-                </a:solidFill>
-              </a:rPr>
-              <a:t> de </a:t>
-            </a:r>
-            <a:r>
-              <a:rPr sz="1600" dirty="0" err="1">
-                <a:solidFill>
-                  <a:schemeClr val="bg1">
-                    <a:lumMod val="95000"/>
-                  </a:schemeClr>
-                </a:solidFill>
-              </a:rPr>
-              <a:t>ejemplo</a:t>
-            </a:r>
-            <a:br>
-              <a:rPr sz="1600" dirty="0">
-                <a:solidFill>
-                  <a:schemeClr val="bg1">
-                    <a:lumMod val="95000"/>
-                  </a:schemeClr>
-                </a:solidFill>
-              </a:rPr>
-            </a:br>
-            <a:r>
-              <a:rPr sz="1600" dirty="0" err="1">
-                <a:solidFill>
-                  <a:schemeClr val="bg1">
-                    <a:lumMod val="95000"/>
-                  </a:schemeClr>
-                </a:solidFill>
-              </a:rPr>
-              <a:t>func</a:t>
-            </a:r>
-            <a:r>
-              <a:rPr sz="1600" dirty="0">
-                <a:solidFill>
-                  <a:schemeClr val="bg1">
-                    <a:lumMod val="95000"/>
-                  </a:schemeClr>
-                </a:solidFill>
-              </a:rPr>
-              <a:t> (s *</a:t>
-            </a:r>
-            <a:r>
-              <a:rPr sz="1600" dirty="0" err="1">
-                <a:solidFill>
-                  <a:schemeClr val="bg1">
-                    <a:lumMod val="95000"/>
-                  </a:schemeClr>
-                </a:solidFill>
-              </a:rPr>
-              <a:t>SmartContract</a:t>
-            </a:r>
-            <a:r>
-              <a:rPr sz="1600" dirty="0">
-                <a:solidFill>
-                  <a:schemeClr val="bg1">
-                    <a:lumMod val="95000"/>
-                  </a:schemeClr>
-                </a:solidFill>
-              </a:rPr>
-              <a:t>) </a:t>
-            </a:r>
-            <a:r>
-              <a:rPr sz="1600" dirty="0" err="1">
-                <a:solidFill>
-                  <a:schemeClr val="bg1">
-                    <a:lumMod val="95000"/>
-                  </a:schemeClr>
-                </a:solidFill>
-              </a:rPr>
-              <a:t>InitLedger</a:t>
-            </a:r>
-            <a:r>
-              <a:rPr sz="1600" dirty="0">
-                <a:solidFill>
-                  <a:schemeClr val="bg1">
-                    <a:lumMod val="95000"/>
-                  </a:schemeClr>
-                </a:solidFill>
-              </a:rPr>
-              <a:t>(</a:t>
-            </a:r>
-            <a:r>
-              <a:rPr sz="1600" dirty="0" err="1">
-                <a:solidFill>
-                  <a:schemeClr val="bg1">
-                    <a:lumMod val="95000"/>
-                  </a:schemeClr>
-                </a:solidFill>
-              </a:rPr>
-              <a:t>ctx</a:t>
-            </a:r>
-            <a:r>
-              <a:rPr sz="1600" dirty="0">
-                <a:solidFill>
-                  <a:schemeClr val="bg1">
-                    <a:lumMod val="95000"/>
-                  </a:schemeClr>
-                </a:solidFill>
-              </a:rPr>
-              <a:t> </a:t>
-            </a:r>
-            <a:r>
-              <a:rPr sz="1600" dirty="0" err="1">
-                <a:solidFill>
-                  <a:schemeClr val="bg1">
-                    <a:lumMod val="95000"/>
-                  </a:schemeClr>
-                </a:solidFill>
-              </a:rPr>
-              <a:t>contractapi.TransactionContextInterface</a:t>
-            </a:r>
-            <a:r>
-              <a:rPr sz="1600" dirty="0">
-                <a:solidFill>
-                  <a:schemeClr val="bg1">
-                    <a:lumMod val="95000"/>
-                  </a:schemeClr>
-                </a:solidFill>
-              </a:rPr>
-              <a:t>) error {</a:t>
-            </a:r>
-            <a:br>
-              <a:rPr sz="1600" dirty="0">
-                <a:solidFill>
-                  <a:schemeClr val="bg1">
-                    <a:lumMod val="95000"/>
-                  </a:schemeClr>
-                </a:solidFill>
-              </a:rPr>
-            </a:br>
-            <a:r>
-              <a:rPr sz="1600" dirty="0">
-                <a:solidFill>
-                  <a:schemeClr val="bg1">
-                    <a:lumMod val="95000"/>
-                  </a:schemeClr>
-                </a:solidFill>
-              </a:rPr>
-              <a:t>    // Logica de </a:t>
-            </a:r>
-            <a:r>
-              <a:rPr sz="1600" dirty="0" err="1">
-                <a:solidFill>
-                  <a:schemeClr val="bg1">
-                    <a:lumMod val="95000"/>
-                  </a:schemeClr>
-                </a:solidFill>
-              </a:rPr>
-              <a:t>inicializacion</a:t>
-            </a:r>
-            <a:r>
-              <a:rPr sz="1600" dirty="0">
-                <a:solidFill>
-                  <a:schemeClr val="bg1">
-                    <a:lumMod val="95000"/>
-                  </a:schemeClr>
-                </a:solidFill>
-              </a:rPr>
-              <a:t> </a:t>
-            </a:r>
-            <a:r>
-              <a:rPr sz="1600" dirty="0" err="1">
-                <a:solidFill>
-                  <a:schemeClr val="bg1">
-                    <a:lumMod val="95000"/>
-                  </a:schemeClr>
-                </a:solidFill>
-              </a:rPr>
-              <a:t>aqui</a:t>
-            </a:r>
-            <a:br>
-              <a:rPr sz="1600" dirty="0">
-                <a:solidFill>
-                  <a:schemeClr val="bg1">
-                    <a:lumMod val="95000"/>
-                  </a:schemeClr>
-                </a:solidFill>
-              </a:rPr>
-            </a:br>
-            <a:r>
-              <a:rPr sz="1600" dirty="0">
-                <a:solidFill>
-                  <a:schemeClr val="bg1">
-                    <a:lumMod val="95000"/>
-                  </a:schemeClr>
-                </a:solidFill>
-              </a:rPr>
-              <a:t>    return nil</a:t>
-            </a:r>
-            <a:br>
-              <a:rPr sz="1600" dirty="0">
-                <a:solidFill>
-                  <a:schemeClr val="bg1">
-                    <a:lumMod val="95000"/>
-                  </a:schemeClr>
-                </a:solidFill>
-              </a:rPr>
-            </a:br>
-            <a:r>
-              <a:rPr sz="1600" dirty="0">
-                <a:solidFill>
-                  <a:schemeClr val="bg1">
-                    <a:lumMod val="95000"/>
-                  </a:schemeClr>
-                </a:solidFill>
-              </a:rPr>
-              <a:t>}</a:t>
-            </a:r>
-            <a:br>
-              <a:rPr sz="1600" dirty="0">
-                <a:solidFill>
-                  <a:schemeClr val="bg1">
-                    <a:lumMod val="95000"/>
-                  </a:schemeClr>
-                </a:solidFill>
-              </a:rPr>
-            </a:br>
-            <a:endParaRPr sz="1600" dirty="0">
-              <a:solidFill>
-                <a:schemeClr val="bg1">
-                  <a:lumMod val="95000"/>
-                </a:schemeClr>
-              </a:solidFill>
-            </a:endParaRPr>
           </a:p>
         </p:txBody>
       </p:sp>
@@ -21673,15 +15151,7 @@
           </a:bodyPr>
           <a:lstStyle/>
           <a:p>
-            <a:br>
-              <a:rPr lang="es-ES" sz="1600" dirty="0">
-                <a:solidFill>
-                  <a:schemeClr val="bg1">
-                    <a:lumMod val="95000"/>
-                  </a:schemeClr>
-                </a:solidFill>
-              </a:rPr>
-            </a:br>
+            <a:pPr/>
             <a:r>
               <a:rPr lang="es-ES" sz="1600" dirty="0" err="1">
                 <a:solidFill>
@@ -21690,18 +15160,11 @@
                   </a:schemeClr>
                 </a:solidFill>
               </a:rPr>
-              <a:t>func</a:t>
-            </a:r>
-            <a:r>
-              <a:rPr lang="es-ES" sz="1600" dirty="0">
-                <a:solidFill>
-                  <a:schemeClr val="bg1">
-                    <a:lumMod val="95000"/>
-                  </a:schemeClr>
-                </a:solidFill>
-              </a:rPr>
-              <a:t> </a:t>
-            </a:r>
+              <a:t>// Exportar para que Fabric cargue el chaincode</a:t>
+            </a:r>
+          </a:p>
+          <a:p>
+            <a:pPr/>
             <a:r>
               <a:rPr lang="es-ES" sz="1600" dirty="0" err="1">
                 <a:solidFill>
@@ -21710,37 +15173,11 @@
                   </a:schemeClr>
                 </a:solidFill>
               </a:rPr>
-              <a:t>main</a:t>
-            </a:r>
-            <a:r>
-              <a:rPr lang="es-ES" sz="1600" dirty="0">
-                <a:solidFill>
-                  <a:schemeClr val="bg1">
-                    <a:lumMod val="95000"/>
-                  </a:schemeClr>
-                </a:solidFill>
-              </a:rPr>
-              <a:t>() {</a:t>
-            </a:r>
-            <a:br>
-              <a:rPr lang="es-ES" sz="1600" dirty="0">
-                <a:solidFill>
-                  <a:schemeClr val="bg1">
-                    <a:lumMod val="95000"/>
-                  </a:schemeClr>
-                </a:solidFill>
-              </a:rPr>
-            </a:br>
-            <a:r>
-              <a:rPr lang="es-ES" sz="1600" dirty="0">
-                <a:solidFill>
-                  <a:schemeClr val="bg1">
-                    <a:lumMod val="95000"/>
-                  </a:schemeClr>
-                </a:solidFill>
-              </a:rPr>
-              <a:t>    </a:t>
-            </a:r>
+              <a:t>module.exports = SmartContract;</a:t>
+            </a:r>
+          </a:p>
+          <a:p>
+            <a:pPr/>
             <a:r>
               <a:rPr lang="es-ES" sz="1600" dirty="0" err="1">
                 <a:solidFill>
@@ -21749,18 +15186,11 @@
                   </a:schemeClr>
                 </a:solidFill>
               </a:rPr>
-              <a:t>chaincode</a:t>
-            </a:r>
-            <a:r>
-              <a:rPr lang="es-ES" sz="1600" dirty="0">
-                <a:solidFill>
-                  <a:schemeClr val="bg1">
-                    <a:lumMod val="95000"/>
-                  </a:schemeClr>
-                </a:solidFill>
-              </a:rPr>
-              <a:t>, </a:t>
-            </a:r>
+              <a:t/>
+            </a:r>
+          </a:p>
+          <a:p>
+            <a:pPr/>
             <a:r>
               <a:rPr lang="es-ES" sz="1600" dirty="0" err="1">
                 <a:solidFill>
@@ -21769,18 +15199,11 @@
                   </a:schemeClr>
                 </a:solidFill>
               </a:rPr>
-              <a:t>err</a:t>
-            </a:r>
-            <a:r>
-              <a:rPr lang="es-ES" sz="1600" dirty="0">
-                <a:solidFill>
-                  <a:schemeClr val="bg1">
-                    <a:lumMod val="95000"/>
-                  </a:schemeClr>
-                </a:solidFill>
-              </a:rPr>
-              <a:t> := </a:t>
-            </a:r>
+              <a:t>// package.json:</a:t>
+            </a:r>
+          </a:p>
+          <a:p>
+            <a:pPr/>
             <a:r>
               <a:rPr lang="es-ES" sz="1600" dirty="0" err="1">
                 <a:solidFill>
@@ -21789,18 +15212,11 @@
                   </a:schemeClr>
                 </a:solidFill>
               </a:rPr>
-              <a:t>contractapi.NewChaincode</a:t>
-            </a:r>
-            <a:r>
-              <a:rPr lang="es-ES" sz="1600" dirty="0">
-                <a:solidFill>
-                  <a:schemeClr val="bg1">
-                    <a:lumMod val="95000"/>
-                  </a:schemeClr>
-                </a:solidFill>
-              </a:rPr>
-              <a:t>(&amp;</a:t>
-            </a:r>
+              <a:t>// {</a:t>
+            </a:r>
+          </a:p>
+          <a:p>
+            <a:pPr/>
             <a:r>
               <a:rPr lang="es-ES" sz="1600" dirty="0" err="1">
                 <a:solidFill>
@@ -21809,37 +15225,11 @@
                   </a:schemeClr>
                 </a:solidFill>
               </a:rPr>
-              <a:t>SmartContract</a:t>
-            </a:r>
-            <a:r>
-              <a:rPr lang="es-ES" sz="1600" dirty="0">
-                <a:solidFill>
-                  <a:schemeClr val="bg1">
-                    <a:lumMod val="95000"/>
-                  </a:schemeClr>
-                </a:solidFill>
-              </a:rPr>
-              <a:t>{})</a:t>
-            </a:r>
-            <a:br>
-              <a:rPr lang="es-ES" sz="1600" dirty="0">
-                <a:solidFill>
-                  <a:schemeClr val="bg1">
-                    <a:lumMod val="95000"/>
-                  </a:schemeClr>
-                </a:solidFill>
-              </a:rPr>
-            </a:br>
-            <a:r>
-              <a:rPr lang="es-ES" sz="1600" dirty="0">
-                <a:solidFill>
-                  <a:schemeClr val="bg1">
-                    <a:lumMod val="95000"/>
-                  </a:schemeClr>
-                </a:solidFill>
-              </a:rPr>
-              <a:t>    </a:t>
-            </a:r>
+              <a:t>//   "main": "index.js",</a:t>
+            </a:r>
+          </a:p>
+          <a:p>
+            <a:pPr/>
             <a:r>
               <a:rPr lang="es-ES" sz="1600" dirty="0" err="1">
                 <a:solidFill>
@@ -21848,18 +15238,11 @@
                   </a:schemeClr>
                 </a:solidFill>
               </a:rPr>
-              <a:t>if</a:t>
-            </a:r>
-            <a:r>
-              <a:rPr lang="es-ES" sz="1600" dirty="0">
-                <a:solidFill>
-                  <a:schemeClr val="bg1">
-                    <a:lumMod val="95000"/>
-                  </a:schemeClr>
-                </a:solidFill>
-              </a:rPr>
-              <a:t> </a:t>
-            </a:r>
+              <a:t>//   "dependencies": {</a:t>
+            </a:r>
+          </a:p>
+          <a:p>
+            <a:pPr/>
             <a:r>
               <a:rPr lang="es-ES" sz="1600" dirty="0" err="1">
                 <a:solidFill>
@@ -21868,18 +15251,11 @@
                   </a:schemeClr>
                 </a:solidFill>
               </a:rPr>
-              <a:t>err</a:t>
-            </a:r>
-            <a:r>
-              <a:rPr lang="es-ES" sz="1600" dirty="0">
-                <a:solidFill>
-                  <a:schemeClr val="bg1">
-                    <a:lumMod val="95000"/>
-                  </a:schemeClr>
-                </a:solidFill>
-              </a:rPr>
-              <a:t> != </a:t>
-            </a:r>
+              <a:t>//     "fabric-contract-api": "^2.2"</a:t>
+            </a:r>
+          </a:p>
+          <a:p>
+            <a:pPr/>
             <a:r>
               <a:rPr lang="es-ES" sz="1600" dirty="0" err="1">
                 <a:solidFill>
@@ -21888,37 +15264,11 @@
                   </a:schemeClr>
                 </a:solidFill>
               </a:rPr>
-              <a:t>nil</a:t>
-            </a:r>
-            <a:r>
-              <a:rPr lang="es-ES" sz="1600" dirty="0">
-                <a:solidFill>
-                  <a:schemeClr val="bg1">
-                    <a:lumMod val="95000"/>
-                  </a:schemeClr>
-                </a:solidFill>
-              </a:rPr>
-              <a:t> {</a:t>
-            </a:r>
-            <a:br>
-              <a:rPr lang="es-ES" sz="1600" dirty="0">
-                <a:solidFill>
-                  <a:schemeClr val="bg1">
-                    <a:lumMod val="95000"/>
-                  </a:schemeClr>
-                </a:solidFill>
-              </a:rPr>
-            </a:br>
-            <a:r>
-              <a:rPr lang="es-ES" sz="1600" dirty="0">
-                <a:solidFill>
-                  <a:schemeClr val="bg1">
-                    <a:lumMod val="95000"/>
-                  </a:schemeClr>
-                </a:solidFill>
-              </a:rPr>
-              <a:t>        </a:t>
-            </a:r>
+              <a:t>//   }</a:t>
+            </a:r>
+          </a:p>
+          <a:p>
+            <a:pPr/>
             <a:r>
               <a:rPr lang="es-ES" sz="1600" dirty="0" err="1">
                 <a:solidFill>
@@ -21927,274 +15277,8 @@
                   </a:schemeClr>
                 </a:solidFill>
               </a:rPr>
-              <a:t>panic</a:t>
-            </a:r>
-            <a:r>
-              <a:rPr lang="es-ES" sz="1600" dirty="0">
-                <a:solidFill>
-                  <a:schemeClr val="bg1">
-                    <a:lumMod val="95000"/>
-                  </a:schemeClr>
-                </a:solidFill>
-              </a:rPr>
-              <a:t>(</a:t>
-            </a:r>
-            <a:r>
-              <a:rPr lang="es-ES" sz="1600" dirty="0" err="1">
-                <a:solidFill>
-                  <a:schemeClr val="bg1">
-                    <a:lumMod val="95000"/>
-                  </a:schemeClr>
-                </a:solidFill>
-              </a:rPr>
-              <a:t>err</a:t>
-            </a:r>
-            <a:r>
-              <a:rPr lang="es-ES" sz="1600" dirty="0">
-                <a:solidFill>
-                  <a:schemeClr val="bg1">
-                    <a:lumMod val="95000"/>
-                  </a:schemeClr>
-                </a:solidFill>
-              </a:rPr>
-              <a:t>)</a:t>
-            </a:r>
-            <a:br>
-              <a:rPr lang="es-ES" sz="1600" dirty="0">
-                <a:solidFill>
-                  <a:schemeClr val="bg1">
-                    <a:lumMod val="95000"/>
-                  </a:schemeClr>
-                </a:solidFill>
-              </a:rPr>
-            </a:br>
-            <a:r>
-              <a:rPr lang="es-ES" sz="1600" dirty="0">
-                <a:solidFill>
-                  <a:schemeClr val="bg1">
-                    <a:lumMod val="95000"/>
-                  </a:schemeClr>
-                </a:solidFill>
-              </a:rPr>
-              <a:t>    }</a:t>
-            </a:r>
-            <a:br>
-              <a:rPr lang="es-ES" sz="1600" dirty="0">
-                <a:solidFill>
-                  <a:schemeClr val="bg1">
-                    <a:lumMod val="95000"/>
-                  </a:schemeClr>
-                </a:solidFill>
-              </a:rPr>
-            </a:br>
-            <a:r>
-              <a:rPr lang="es-ES" sz="1600" dirty="0">
-                <a:solidFill>
-                  <a:schemeClr val="bg1">
-                    <a:lumMod val="95000"/>
-                  </a:schemeClr>
-                </a:solidFill>
-              </a:rPr>
-              <a:t>    </a:t>
-            </a:r>
-            <a:r>
-              <a:rPr lang="es-ES" sz="1600" dirty="0" err="1">
-                <a:solidFill>
-                  <a:schemeClr val="bg1">
-                    <a:lumMod val="95000"/>
-                  </a:schemeClr>
-                </a:solidFill>
-              </a:rPr>
-              <a:t>if</a:t>
-            </a:r>
-            <a:r>
-              <a:rPr lang="es-ES" sz="1600" dirty="0">
-                <a:solidFill>
-                  <a:schemeClr val="bg1">
-                    <a:lumMod val="95000"/>
-                  </a:schemeClr>
-                </a:solidFill>
-              </a:rPr>
-              <a:t> </a:t>
-            </a:r>
-            <a:r>
-              <a:rPr lang="es-ES" sz="1600" dirty="0" err="1">
-                <a:solidFill>
-                  <a:schemeClr val="bg1">
-                    <a:lumMod val="95000"/>
-                  </a:schemeClr>
-                </a:solidFill>
-              </a:rPr>
-              <a:t>err</a:t>
-            </a:r>
-            <a:r>
-              <a:rPr lang="es-ES" sz="1600" dirty="0">
-                <a:solidFill>
-                  <a:schemeClr val="bg1">
-                    <a:lumMod val="95000"/>
-                  </a:schemeClr>
-                </a:solidFill>
-              </a:rPr>
-              <a:t> := </a:t>
-            </a:r>
-            <a:r>
-              <a:rPr lang="es-ES" sz="1600" dirty="0" err="1">
-                <a:solidFill>
-                  <a:schemeClr val="bg1">
-                    <a:lumMod val="95000"/>
-                  </a:schemeClr>
-                </a:solidFill>
-              </a:rPr>
-              <a:t>chaincode.Start</a:t>
-            </a:r>
-            <a:r>
-              <a:rPr lang="es-ES" sz="1600" dirty="0">
-                <a:solidFill>
-                  <a:schemeClr val="bg1">
-                    <a:lumMod val="95000"/>
-                  </a:schemeClr>
-                </a:solidFill>
-              </a:rPr>
-              <a:t>(); </a:t>
-            </a:r>
-            <a:r>
-              <a:rPr lang="es-ES" sz="1600" dirty="0" err="1">
-                <a:solidFill>
-                  <a:schemeClr val="bg1">
-                    <a:lumMod val="95000"/>
-                  </a:schemeClr>
-                </a:solidFill>
-              </a:rPr>
-              <a:t>err</a:t>
-            </a:r>
-            <a:r>
-              <a:rPr lang="es-ES" sz="1600" dirty="0">
-                <a:solidFill>
-                  <a:schemeClr val="bg1">
-                    <a:lumMod val="95000"/>
-                  </a:schemeClr>
-                </a:solidFill>
-              </a:rPr>
-              <a:t> != </a:t>
-            </a:r>
-            <a:r>
-              <a:rPr lang="es-ES" sz="1600" dirty="0" err="1">
-                <a:solidFill>
-                  <a:schemeClr val="bg1">
-                    <a:lumMod val="95000"/>
-                  </a:schemeClr>
-                </a:solidFill>
-              </a:rPr>
-              <a:t>nil</a:t>
-            </a:r>
-            <a:r>
-              <a:rPr lang="es-ES" sz="1600" dirty="0">
-                <a:solidFill>
-                  <a:schemeClr val="bg1">
-                    <a:lumMod val="95000"/>
-                  </a:schemeClr>
-                </a:solidFill>
-              </a:rPr>
-              <a:t> {</a:t>
-            </a:r>
-            <a:br>
-              <a:rPr lang="es-ES" sz="1600" dirty="0">
-                <a:solidFill>
-                  <a:schemeClr val="bg1">
-                    <a:lumMod val="95000"/>
-                  </a:schemeClr>
-                </a:solidFill>
-              </a:rPr>
-            </a:br>
-            <a:r>
-              <a:rPr lang="es-ES" sz="1600" dirty="0">
-                <a:solidFill>
-                  <a:schemeClr val="bg1">
-                    <a:lumMod val="95000"/>
-                  </a:schemeClr>
-                </a:solidFill>
-              </a:rPr>
-              <a:t>        </a:t>
-            </a:r>
-            <a:r>
-              <a:rPr lang="es-ES" sz="1600" dirty="0" err="1">
-                <a:solidFill>
-                  <a:schemeClr val="bg1">
-                    <a:lumMod val="95000"/>
-                  </a:schemeClr>
-                </a:solidFill>
-              </a:rPr>
-              <a:t>panic</a:t>
-            </a:r>
-            <a:r>
-              <a:rPr lang="es-ES" sz="1600" dirty="0">
-                <a:solidFill>
-                  <a:schemeClr val="bg1">
-                    <a:lumMod val="95000"/>
-                  </a:schemeClr>
-                </a:solidFill>
-              </a:rPr>
-              <a:t>(</a:t>
-            </a:r>
-            <a:r>
-              <a:rPr lang="es-ES" sz="1600" dirty="0" err="1">
-                <a:solidFill>
-                  <a:schemeClr val="bg1">
-                    <a:lumMod val="95000"/>
-                  </a:schemeClr>
-                </a:solidFill>
-              </a:rPr>
-              <a:t>err</a:t>
-            </a:r>
-            <a:r>
-              <a:rPr lang="es-ES" sz="1600" dirty="0">
-                <a:solidFill>
-                  <a:schemeClr val="bg1">
-                    <a:lumMod val="95000"/>
-                  </a:schemeClr>
-                </a:solidFill>
-              </a:rPr>
-              <a:t>)</a:t>
-            </a:r>
-            <a:br>
-              <a:rPr lang="es-ES" sz="1600" dirty="0">
-                <a:solidFill>
-                  <a:schemeClr val="bg1">
-                    <a:lumMod val="95000"/>
-                  </a:schemeClr>
-                </a:solidFill>
-              </a:rPr>
-            </a:br>
-            <a:r>
-              <a:rPr lang="es-ES" sz="1600" dirty="0">
-                <a:solidFill>
-                  <a:schemeClr val="bg1">
-                    <a:lumMod val="95000"/>
-                  </a:schemeClr>
-                </a:solidFill>
-              </a:rPr>
-              <a:t>    }</a:t>
-            </a:r>
-            <a:br>
-              <a:rPr lang="es-ES" sz="1600" dirty="0">
-                <a:solidFill>
-                  <a:schemeClr val="bg1">
-                    <a:lumMod val="95000"/>
-                  </a:schemeClr>
-                </a:solidFill>
-              </a:rPr>
-            </a:br>
-            <a:r>
-              <a:rPr lang="es-ES" sz="1600" dirty="0">
-                <a:solidFill>
-                  <a:schemeClr val="bg1">
-                    <a:lumMod val="95000"/>
-                  </a:schemeClr>
-                </a:solidFill>
-              </a:rPr>
-              <a:t>}</a:t>
-            </a:r>
-            <a:endParaRPr lang="es-ES" sz="1600" dirty="0"/>
+              <a:t>// }</a:t>
+            </a:r>
           </a:p>
         </p:txBody>
       </p:sp>
